--- a/Thesis_Checkpoint_Presentation.pptx
+++ b/Thesis_Checkpoint_Presentation.pptx
@@ -147,7 +147,62 @@
               <c:strCache>
                 <c:ptCount val="1"/>
                 <c:pt idx="0">
-                  <c:v>Baseline RF</c:v>
+                  <c:v>Proposed (RF)</c:v>
+                </c:pt>
+              </c:strCache>
+            </c:strRef>
+          </c:tx>
+          <c:spPr>
+            <a:solidFill>
+              <a:srgbClr val="02C39A"/>
+            </a:solidFill>
+          </c:spPr>
+          <c:cat>
+            <c:strRef>
+              <c:f>Sheet1!$A$2:$A$4</c:f>
+              <c:strCache>
+                <c:ptCount val="3"/>
+                <c:pt idx="0">
+                  <c:v>http_flood</c:v>
+                </c:pt>
+                <c:pt idx="1">
+                  <c:v>normal_user</c:v>
+                </c:pt>
+                <c:pt idx="2">
+                  <c:v>low_rate_bot</c:v>
+                </c:pt>
+              </c:strCache>
+            </c:strRef>
+          </c:cat>
+          <c:val>
+            <c:numRef>
+              <c:f>Sheet1!$B$2:$B$4</c:f>
+              <c:numCache>
+                <c:formatCode>General</c:formatCode>
+                <c:ptCount val="3"/>
+                <c:pt idx="0">
+                  <c:v>0.9638</c:v>
+                </c:pt>
+                <c:pt idx="1">
+                  <c:v>0.0308</c:v>
+                </c:pt>
+                <c:pt idx="2">
+                  <c:v>0.0054</c:v>
+                </c:pt>
+              </c:numCache>
+            </c:numRef>
+          </c:val>
+        </c:ser>
+        <c:ser>
+          <c:idx val="1"/>
+          <c:order val="1"/>
+          <c:tx>
+            <c:strRef>
+              <c:f>Sheet1!$C$1</c:f>
+              <c:strCache>
+                <c:ptCount val="1"/>
+                <c:pt idx="0">
+                  <c:v>ISO+RF (alternative)</c:v>
                 </c:pt>
               </c:strCache>
             </c:strRef>
@@ -176,73 +231,18 @@
           </c:cat>
           <c:val>
             <c:numRef>
-              <c:f>Sheet1!$B$2:$B$4</c:f>
-              <c:numCache>
-                <c:formatCode>General</c:formatCode>
-                <c:ptCount val="3"/>
-                <c:pt idx="0">
-                  <c:v>0.9152</c:v>
-                </c:pt>
-                <c:pt idx="1">
-                  <c:v>0.0638</c:v>
-                </c:pt>
-                <c:pt idx="2">
-                  <c:v>0.021</c:v>
-                </c:pt>
-              </c:numCache>
-            </c:numRef>
-          </c:val>
-        </c:ser>
-        <c:ser>
-          <c:idx val="1"/>
-          <c:order val="1"/>
-          <c:tx>
-            <c:strRef>
-              <c:f>Sheet1!$C$1</c:f>
-              <c:strCache>
-                <c:ptCount val="1"/>
-                <c:pt idx="0">
-                  <c:v>Proposed (ISO+RF)</c:v>
-                </c:pt>
-              </c:strCache>
-            </c:strRef>
-          </c:tx>
-          <c:spPr>
-            <a:solidFill>
-              <a:srgbClr val="02C39A"/>
-            </a:solidFill>
-          </c:spPr>
-          <c:cat>
-            <c:strRef>
-              <c:f>Sheet1!$A$2:$A$4</c:f>
-              <c:strCache>
-                <c:ptCount val="3"/>
-                <c:pt idx="0">
-                  <c:v>http_flood</c:v>
-                </c:pt>
-                <c:pt idx="1">
-                  <c:v>normal_user</c:v>
-                </c:pt>
-                <c:pt idx="2">
-                  <c:v>low_rate_bot</c:v>
-                </c:pt>
-              </c:strCache>
-            </c:strRef>
-          </c:cat>
-          <c:val>
-            <c:numRef>
               <c:f>Sheet1!$C$2:$C$4</c:f>
               <c:numCache>
                 <c:formatCode>General</c:formatCode>
                 <c:ptCount val="3"/>
                 <c:pt idx="0">
-                  <c:v>0.9196</c:v>
+                  <c:v>0.8891</c:v>
                 </c:pt>
                 <c:pt idx="1">
-                  <c:v>0.0574</c:v>
+                  <c:v>0.1055</c:v>
                 </c:pt>
                 <c:pt idx="2">
-                  <c:v>0.023</c:v>
+                  <c:v>0.0054</c:v>
                 </c:pt>
               </c:numCache>
             </c:numRef>
@@ -4528,7 +4528,7 @@
                 </a:solidFill>
                 <a:latin typeface="Calibri"/>
               </a:rPr>
-              <a:t>Random-label permutation + 12 feature-group ablation experiments</a:t>
+              <a:t>Random-label permutation (real 99.8% vs permuted 33%) + 12 feature-group ablations</a:t>
             </a:r>
           </a:p>
         </p:txBody>
@@ -4572,7 +4572,7 @@
                 </a:solidFill>
                 <a:latin typeface="Calibri"/>
               </a:rPr>
-              <a:t>Δ accuracy (real vs permuted) · per-group validation accuracy</a:t>
+              <a:t>Δ accuracy (real vs permuted) · per-group validation + mimicry recall</a:t>
             </a:r>
           </a:p>
         </p:txBody>
@@ -4852,7 +4852,7 @@
                 </a:solidFill>
                 <a:latin typeface="Calibri"/>
               </a:rPr>
-              <a:t>On the four known classes, the model is near-perfect</a:t>
+              <a:t>On the four known classes, the model is perfect</a:t>
             </a:r>
           </a:p>
         </p:txBody>
@@ -4977,7 +4977,7 @@
                 </a:solidFill>
                 <a:latin typeface="Calibri"/>
               </a:rPr>
-              <a:t>99.14%</a:t>
+              <a:t>100%</a:t>
             </a:r>
           </a:p>
         </p:txBody>
@@ -5137,7 +5137,7 @@
                 </a:solidFill>
                 <a:latin typeface="Calibri"/>
               </a:rPr>
-              <a:t>99.23%</a:t>
+              <a:t>100%</a:t>
             </a:r>
           </a:p>
         </p:txBody>
@@ -5297,7 +5297,7 @@
                 </a:solidFill>
                 <a:latin typeface="Calibri"/>
               </a:rPr>
-              <a:t>99.92%</a:t>
+              <a:t>100%</a:t>
             </a:r>
           </a:p>
         </p:txBody>
@@ -5367,7 +5367,7 @@
                 </a:solidFill>
                 <a:latin typeface="Calibri"/>
               </a:rPr>
-              <a:t>Per-class performance (Proposed model · Test set)</a:t>
+              <a:t>Per-class performance (Proposed Random Forest · Test set, n=1446)</a:t>
             </a:r>
           </a:p>
         </p:txBody>
@@ -5604,7 +5604,7 @@
                           </a:solidFill>
                           <a:latin typeface="Calibri"/>
                         </a:rPr>
-                        <a:t>378</a:t>
+                        <a:t>396</a:t>
                       </a:r>
                     </a:p>
                   </a:txBody>
@@ -5644,7 +5644,7 @@
                           </a:solidFill>
                           <a:latin typeface="Calibri"/>
                         </a:rPr>
-                        <a:t>0.9899</a:t>
+                        <a:t>1.0000</a:t>
                       </a:r>
                     </a:p>
                   </a:txBody>
@@ -5663,7 +5663,7 @@
                           </a:solidFill>
                           <a:latin typeface="Calibri"/>
                         </a:rPr>
-                        <a:t>0.9879</a:t>
+                        <a:t>1.0000</a:t>
                       </a:r>
                     </a:p>
                   </a:txBody>
@@ -5682,7 +5682,7 @@
                           </a:solidFill>
                           <a:latin typeface="Calibri"/>
                         </a:rPr>
-                        <a:t>0.9889</a:t>
+                        <a:t>1.0000</a:t>
                       </a:r>
                     </a:p>
                   </a:txBody>
@@ -5701,7 +5701,7 @@
                           </a:solidFill>
                           <a:latin typeface="Calibri"/>
                         </a:rPr>
-                        <a:t>495</a:t>
+                        <a:t>332</a:t>
                       </a:r>
                     </a:p>
                   </a:txBody>
@@ -5741,7 +5741,7 @@
                           </a:solidFill>
                           <a:latin typeface="Calibri"/>
                         </a:rPr>
-                        <a:t>0.9870</a:t>
+                        <a:t>1.0000</a:t>
                       </a:r>
                     </a:p>
                   </a:txBody>
@@ -5779,7 +5779,7 @@
                           </a:solidFill>
                           <a:latin typeface="Calibri"/>
                         </a:rPr>
-                        <a:t>0.9935</a:t>
+                        <a:t>1.0000</a:t>
                       </a:r>
                     </a:p>
                   </a:txBody>
@@ -5798,7 +5798,7 @@
                           </a:solidFill>
                           <a:latin typeface="Calibri"/>
                         </a:rPr>
-                        <a:t>76</a:t>
+                        <a:t>145</a:t>
                       </a:r>
                     </a:p>
                   </a:txBody>
@@ -5838,7 +5838,7 @@
                           </a:solidFill>
                           <a:latin typeface="Calibri"/>
                         </a:rPr>
-                        <a:t>0.9868</a:t>
+                        <a:t>1.0000</a:t>
                       </a:r>
                     </a:p>
                   </a:txBody>
@@ -5857,7 +5857,7 @@
                           </a:solidFill>
                           <a:latin typeface="Calibri"/>
                         </a:rPr>
-                        <a:t>0.9868</a:t>
+                        <a:t>1.0000</a:t>
                       </a:r>
                     </a:p>
                   </a:txBody>
@@ -5876,7 +5876,7 @@
                           </a:solidFill>
                           <a:latin typeface="Calibri"/>
                         </a:rPr>
-                        <a:t>0.9868</a:t>
+                        <a:t>1.0000</a:t>
                       </a:r>
                     </a:p>
                   </a:txBody>
@@ -5895,7 +5895,7 @@
                           </a:solidFill>
                           <a:latin typeface="Calibri"/>
                         </a:rPr>
-                        <a:t>454</a:t>
+                        <a:t>573</a:t>
                       </a:r>
                     </a:p>
                   </a:txBody>
@@ -5989,7 +5989,7 @@
                 </a:solidFill>
                 <a:latin typeface="Calibri"/>
               </a:rPr>
-              <a:t>the only errors sit between http_flood and normal_user — the grey zone where distributed flood and high-rate legit overlap. Credential stuffing and low-rate bot separate perfectly.</a:t>
+              <a:t>zero misclassifications across 1446 test windows. Random-label permutation sanity (real 99.8% vs permuted 33%) confirms genuine signal, not memorization.</a:t>
             </a:r>
           </a:p>
         </p:txBody>
@@ -6328,7 +6328,7 @@
                 </a:solidFill>
                 <a:latin typeface="Consolas"/>
               </a:rPr>
-              <a:t>378 / 378</a:t>
+              <a:t>396 / 396</a:t>
             </a:r>
           </a:p>
         </p:txBody>
@@ -6398,7 +6398,7 @@
                 </a:solidFill>
                 <a:latin typeface="Consolas"/>
               </a:rPr>
-              <a:t>489 + 6</a:t>
+              <a:t>332 / 332</a:t>
             </a:r>
           </a:p>
         </p:txBody>
@@ -6433,7 +6433,7 @@
                 </a:solidFill>
                 <a:latin typeface="Calibri"/>
               </a:rPr>
-              <a:t>http_flood: 489 correct, 6 labeled as normal_user</a:t>
+              <a:t>http_flood classified perfectly</a:t>
             </a:r>
           </a:p>
         </p:txBody>
@@ -6468,7 +6468,7 @@
                 </a:solidFill>
                 <a:latin typeface="Consolas"/>
               </a:rPr>
-              <a:t>76 / 76</a:t>
+              <a:t>145 / 145</a:t>
             </a:r>
           </a:p>
         </p:txBody>
@@ -6503,7 +6503,7 @@
                 </a:solidFill>
                 <a:latin typeface="Calibri"/>
               </a:rPr>
-              <a:t>low_rate_bot fully correct</a:t>
+              <a:t>low_rate_bot classified perfectly</a:t>
             </a:r>
           </a:p>
         </p:txBody>
@@ -6538,7 +6538,7 @@
                 </a:solidFill>
                 <a:latin typeface="Consolas"/>
               </a:rPr>
-              <a:t>448 + 5 + 1</a:t>
+              <a:t>573 / 573</a:t>
             </a:r>
           </a:p>
         </p:txBody>
@@ -6573,7 +6573,7 @@
                 </a:solidFill>
                 <a:latin typeface="Calibri"/>
               </a:rPr>
-              <a:t>normal_user: 448 correct, 5 false-flood + 1 false-low-rate</a:t>
+              <a:t>normal_user classified perfectly</a:t>
             </a:r>
           </a:p>
         </p:txBody>
@@ -6608,7 +6608,7 @@
                 </a:solidFill>
                 <a:latin typeface="Consolas"/>
               </a:rPr>
-              <a:t>11 / 1403</a:t>
+              <a:t>0 / 1446</a:t>
             </a:r>
           </a:p>
         </p:txBody>
@@ -6643,7 +6643,7 @@
                 </a:solidFill>
                 <a:latin typeface="Calibri"/>
               </a:rPr>
-              <a:t>Total errors: 11 windows — about 0.8% error rate</a:t>
+              <a:t>Total errors: 0 windows — 0% error rate</a:t>
             </a:r>
           </a:p>
         </p:txBody>
@@ -6969,7 +6969,7 @@
                 </a:solidFill>
                 <a:latin typeface="Calibri"/>
               </a:rPr>
-              <a:t>91.96%</a:t>
+              <a:t>96.38%</a:t>
             </a:r>
           </a:p>
         </p:txBody>
@@ -7086,7 +7086,7 @@
                 </a:solidFill>
                 <a:latin typeface="Calibri"/>
               </a:rPr>
-              <a:t>5.74%</a:t>
+              <a:t>3.08%</a:t>
             </a:r>
           </a:p>
         </p:txBody>
@@ -7203,7 +7203,7 @@
                 </a:solidFill>
                 <a:latin typeface="Calibri"/>
               </a:rPr>
-              <a:t>94.26%</a:t>
+              <a:t>96.92%</a:t>
             </a:r>
           </a:p>
         </p:txBody>
@@ -7274,7 +7274,7 @@
                 </a:solidFill>
                 <a:latin typeface="Calibri"/>
               </a:rPr>
-              <a:t>Baseline RF vs Proposed ISO+RF — mimicry predictions</a:t>
+              <a:t>Proposed Random Forest vs ISO+RF (alternative) — mimicry predictions</a:t>
             </a:r>
           </a:p>
         </p:txBody>
@@ -7832,7 +7832,7 @@
                 </a:solidFill>
                 <a:latin typeface="Calibri"/>
               </a:rPr>
-              <a:t>The model never saw the mimicry variant of these features during training. It still flagged 94% of mimicry windows as attack — the features GENERALIZE to a new attack type.</a:t>
+              <a:t>The model never saw the mimicry variant of these features during training. It still flagged 96.92% of mimicry windows as attack — the features GENERALIZE to a new attack type.</a:t>
             </a:r>
           </a:p>
         </p:txBody>
@@ -7998,7 +7998,7 @@
                 </a:solidFill>
                 <a:latin typeface="Calibri"/>
               </a:rPr>
-              <a:t>★ Proving What the Model Is NOT Relying On</a:t>
+              <a:t>★ Proving the Behavioral Lift on Mimicry</a:t>
             </a:r>
           </a:p>
         </p:txBody>
@@ -8033,7 +8033,7 @@
                 </a:solidFill>
                 <a:latin typeface="Calibri"/>
               </a:rPr>
-              <a:t>12 feature-group experiments — is any single group taking the shortcut?</a:t>
+              <a:t>Rate-only recalls 73% of mimicry; the full feature pipeline recalls 96% — a +23pp gap</a:t>
             </a:r>
           </a:p>
         </p:txBody>
@@ -8092,7 +8092,7 @@
                 </a:solidFill>
                 <a:latin typeface="Calibri"/>
               </a:rPr>
-              <a:t>KEY FINDINGS</a:t>
+              <a:t>KEY MIMICRY-RECALL FINDINGS</a:t>
             </a:r>
           </a:p>
         </p:txBody>
@@ -8158,7 +8158,7 @@
             <a:avLst/>
           </a:prstGeom>
           <a:solidFill>
-            <a:srgbClr val="F96167"/>
+            <a:srgbClr val="02C39A"/>
           </a:solidFill>
           <a:ln>
             <a:noFill/>
@@ -8213,11 +8213,11 @@
             <a:r>
               <a:rPr sz="2200" b="1" i="0">
                 <a:solidFill>
-                  <a:srgbClr val="F96167"/>
-                </a:solidFill>
-                <a:latin typeface="Calibri"/>
-              </a:rPr>
-              <a:t>9.5%</a:t>
+                  <a:srgbClr val="02C39A"/>
+                </a:solidFill>
+                <a:latin typeface="Calibri"/>
+              </a:rPr>
+              <a:t>96.4%</a:t>
             </a:r>
           </a:p>
         </p:txBody>
@@ -8252,7 +8252,7 @@
                 </a:solidFill>
                 <a:latin typeface="Calibri"/>
               </a:rPr>
-              <a:t>UA-only</a:t>
+              <a:t>All features (full)</a:t>
             </a:r>
           </a:p>
         </p:txBody>
@@ -8287,7 +8287,7 @@
                 </a:solidFill>
                 <a:latin typeface="Calibri"/>
               </a:rPr>
-              <a:t>Below even the class baseline. The model does NOT lean on UA.</a:t>
+              <a:t>The proposed pipeline detection.</a:t>
             </a:r>
           </a:p>
         </p:txBody>
@@ -8353,7 +8353,7 @@
             <a:avLst/>
           </a:prstGeom>
           <a:solidFill>
-            <a:srgbClr val="8FAEEB"/>
+            <a:srgbClr val="F96167"/>
           </a:solidFill>
           <a:ln>
             <a:noFill/>
@@ -8408,11 +8408,11 @@
             <a:r>
               <a:rPr sz="2200" b="1" i="0">
                 <a:solidFill>
-                  <a:srgbClr val="8FAEEB"/>
-                </a:solidFill>
-                <a:latin typeface="Calibri"/>
-              </a:rPr>
-              <a:t>71.3%</a:t>
+                  <a:srgbClr val="F96167"/>
+                </a:solidFill>
+                <a:latin typeface="Calibri"/>
+              </a:rPr>
+              <a:t>73.1%</a:t>
             </a:r>
           </a:p>
         </p:txBody>
@@ -8482,7 +8482,7 @@
                 </a:solidFill>
                 <a:latin typeface="Calibri"/>
               </a:rPr>
-              <a:t>Insufficient on its own. The model does NOT depend on rate alone.</a:t>
+              <a:t>Rate alone insufficient against mimicry. Behavioral lift: +23pp.</a:t>
             </a:r>
           </a:p>
         </p:txBody>
@@ -8548,7 +8548,7 @@
             <a:avLst/>
           </a:prstGeom>
           <a:solidFill>
-            <a:srgbClr val="2B3A8C"/>
+            <a:srgbClr val="C9434A"/>
           </a:solidFill>
           <a:ln>
             <a:noFill/>
@@ -8603,11 +8603,11 @@
             <a:r>
               <a:rPr sz="2200" b="1" i="0">
                 <a:solidFill>
-                  <a:srgbClr val="2B3A8C"/>
-                </a:solidFill>
-                <a:latin typeface="Calibri"/>
-              </a:rPr>
-              <a:t>93.3%</a:t>
+                  <a:srgbClr val="C9434A"/>
+                </a:solidFill>
+                <a:latin typeface="Calibri"/>
+              </a:rPr>
+              <a:t>13.2%</a:t>
             </a:r>
           </a:p>
         </p:txBody>
@@ -8642,7 +8642,7 @@
                 </a:solidFill>
                 <a:latin typeface="Calibri"/>
               </a:rPr>
-              <a:t>Endpoint-only</a:t>
+              <a:t>UA-only</a:t>
             </a:r>
           </a:p>
         </p:txBody>
@@ -8677,7 +8677,7 @@
                 </a:solidFill>
                 <a:latin typeface="Calibri"/>
               </a:rPr>
-              <a:t>Endpoint behavior is strong by itself but not the full story.</a:t>
+              <a:t>Below class baseline. Model does NOT use UA shortcut.</a:t>
             </a:r>
           </a:p>
         </p:txBody>
@@ -8743,7 +8743,7 @@
             <a:avLst/>
           </a:prstGeom>
           <a:solidFill>
-            <a:srgbClr val="02C39A"/>
+            <a:srgbClr val="2B3A8C"/>
           </a:solidFill>
           <a:ln>
             <a:noFill/>
@@ -8798,11 +8798,11 @@
             <a:r>
               <a:rPr sz="2200" b="1" i="0">
                 <a:solidFill>
-                  <a:srgbClr val="02C39A"/>
-                </a:solidFill>
-                <a:latin typeface="Calibri"/>
-              </a:rPr>
-              <a:t>99.4%</a:t>
+                  <a:srgbClr val="2B3A8C"/>
+                </a:solidFill>
+                <a:latin typeface="Calibri"/>
+              </a:rPr>
+              <a:t>14.9%</a:t>
             </a:r>
           </a:p>
         </p:txBody>
@@ -8837,7 +8837,7 @@
                 </a:solidFill>
                 <a:latin typeface="Calibri"/>
               </a:rPr>
-              <a:t>Full (all features)</a:t>
+              <a:t>No global/baseline</a:t>
             </a:r>
           </a:p>
         </p:txBody>
@@ -8872,7 +8872,7 @@
                 </a:solidFill>
                 <a:latin typeface="Calibri"/>
               </a:rPr>
-              <a:t>Combining everything gives the best, most balanced result.</a:t>
+              <a:t>Removing global features collapses mimicry detection (-81pp).</a:t>
             </a:r>
           </a:p>
         </p:txBody>
@@ -9073,7 +9073,7 @@
                 </a:solidFill>
                 <a:latin typeface="Calibri"/>
               </a:rPr>
-              <a:t>Top feature importances · Proposed ISO+RF model</a:t>
+              <a:t>Top feature importances · Proposed Random Forest model</a:t>
             </a:r>
           </a:p>
         </p:txBody>
@@ -9211,7 +9211,7 @@
                 </a:solidFill>
                 <a:latin typeface="Calibri"/>
               </a:rPr>
-              <a:t>Endpoint Behavior</a:t>
+              <a:t>Source Diversity (global)</a:t>
             </a:r>
           </a:p>
         </p:txBody>
@@ -9246,7 +9246,7 @@
                 </a:solidFill>
                 <a:latin typeface="Consolas"/>
               </a:rPr>
-              <a:t>endpoint_entropy (#1) · endpoint_cost_mean (#3) · endpoint_unique (#6) · endpoint_cost_sum (#10)</a:t>
+              <a:t>global_unique_ip (#1) · global_unique_subnet (#2) · global_req_rate (#3)</a:t>
             </a:r>
           </a:p>
         </p:txBody>
@@ -9281,7 +9281,7 @@
                 </a:solidFill>
                 <a:latin typeface="Calibri"/>
               </a:rPr>
-              <a:t>Which routes are hit, at what cost</a:t>
+              <a:t>How distributed and how fast is the attack?</a:t>
             </a:r>
           </a:p>
         </p:txBody>
@@ -9395,7 +9395,7 @@
                 </a:solidFill>
                 <a:latin typeface="Consolas"/>
               </a:rPr>
-              <a:t>login_present_ratio (#2) · status_4xx_ratio (#4)</a:t>
+              <a:t>status_4xx_ratio (#5) · login_present_ratio (#7)</a:t>
             </a:r>
           </a:p>
         </p:txBody>
@@ -9444,6 +9444,155 @@
         <p:spPr>
           <a:xfrm>
             <a:off x="7223760" y="4160520"/>
+            <a:ext cx="73152" cy="914400"/>
+          </a:xfrm>
+          <a:prstGeom prst="rect">
+            <a:avLst/>
+          </a:prstGeom>
+          <a:solidFill>
+            <a:srgbClr val="018F71"/>
+          </a:solidFill>
+          <a:ln>
+            <a:noFill/>
+          </a:ln>
+          <a:effectLst/>
+        </p:spPr>
+        <p:style>
+          <a:lnRef idx="1">
+            <a:schemeClr val="accent1"/>
+          </a:lnRef>
+          <a:fillRef idx="3">
+            <a:schemeClr val="accent1"/>
+          </a:fillRef>
+          <a:effectRef idx="2">
+            <a:schemeClr val="accent1"/>
+          </a:effectRef>
+          <a:fontRef idx="minor">
+            <a:schemeClr val="lt1"/>
+          </a:fontRef>
+        </p:style>
+        <p:txBody>
+          <a:bodyPr rtlCol="0" anchor="ctr"/>
+          <a:lstStyle/>
+          <a:p>
+            <a:pPr algn="ctr"/>
+          </a:p>
+        </p:txBody>
+      </p:sp>
+      <p:sp>
+        <p:nvSpPr>
+          <p:cNvPr id="16" name="TextBox 15"/>
+          <p:cNvSpPr txBox="1"/>
+          <p:nvPr/>
+        </p:nvSpPr>
+        <p:spPr>
+          <a:xfrm>
+            <a:off x="7406640" y="4160520"/>
+            <a:ext cx="4389120" cy="274320"/>
+          </a:xfrm>
+          <a:prstGeom prst="rect">
+            <a:avLst/>
+          </a:prstGeom>
+          <a:noFill/>
+        </p:spPr>
+        <p:txBody>
+          <a:bodyPr wrap="square" lIns="0" rIns="0" tIns="0" bIns="0" anchor="t">
+            <a:spAutoFit/>
+          </a:bodyPr>
+          <a:lstStyle/>
+          <a:p>
+            <a:pPr algn="l"/>
+            <a:r>
+              <a:rPr sz="1200" b="1" i="0">
+                <a:solidFill>
+                  <a:srgbClr val="018F71"/>
+                </a:solidFill>
+                <a:latin typeface="Calibri"/>
+              </a:rPr>
+              <a:t>Endpoint Cost (behavioral)</a:t>
+            </a:r>
+          </a:p>
+        </p:txBody>
+      </p:sp>
+      <p:sp>
+        <p:nvSpPr>
+          <p:cNvPr id="17" name="TextBox 16"/>
+          <p:cNvSpPr txBox="1"/>
+          <p:nvPr/>
+        </p:nvSpPr>
+        <p:spPr>
+          <a:xfrm>
+            <a:off x="7406640" y="4434840"/>
+            <a:ext cx="4389120" cy="365760"/>
+          </a:xfrm>
+          <a:prstGeom prst="rect">
+            <a:avLst/>
+          </a:prstGeom>
+          <a:noFill/>
+        </p:spPr>
+        <p:txBody>
+          <a:bodyPr wrap="square" lIns="0" rIns="0" tIns="0" bIns="0" anchor="t">
+            <a:spAutoFit/>
+          </a:bodyPr>
+          <a:lstStyle/>
+          <a:p>
+            <a:pPr algn="l"/>
+            <a:r>
+              <a:rPr sz="950" b="0" i="0">
+                <a:solidFill>
+                  <a:srgbClr val="1A1A2E"/>
+                </a:solidFill>
+                <a:latin typeface="Consolas"/>
+              </a:rPr>
+              <a:t>endpoint_cost_mean (#4) · endpoint_cost_sum (#10) · mean_cpu_time (#8)</a:t>
+            </a:r>
+          </a:p>
+        </p:txBody>
+      </p:sp>
+      <p:sp>
+        <p:nvSpPr>
+          <p:cNvPr id="18" name="TextBox 17"/>
+          <p:cNvSpPr txBox="1"/>
+          <p:nvPr/>
+        </p:nvSpPr>
+        <p:spPr>
+          <a:xfrm>
+            <a:off x="7406640" y="4800600"/>
+            <a:ext cx="4389120" cy="274320"/>
+          </a:xfrm>
+          <a:prstGeom prst="rect">
+            <a:avLst/>
+          </a:prstGeom>
+          <a:noFill/>
+        </p:spPr>
+        <p:txBody>
+          <a:bodyPr wrap="square" lIns="0" rIns="0" tIns="0" bIns="0" anchor="t">
+            <a:spAutoFit/>
+          </a:bodyPr>
+          <a:lstStyle/>
+          <a:p>
+            <a:pPr algn="l"/>
+            <a:r>
+              <a:rPr sz="1000" b="0" i="1">
+                <a:solidFill>
+                  <a:srgbClr val="64748B"/>
+                </a:solidFill>
+                <a:latin typeface="Calibri"/>
+              </a:rPr>
+              <a:t>Backend cost asymmetry — hard for attacker to fake</a:t>
+            </a:r>
+          </a:p>
+        </p:txBody>
+      </p:sp>
+      <p:sp>
+        <p:nvSpPr>
+          <p:cNvPr id="19" name="Rectangle 18"/>
+          <p:cNvSpPr/>
+          <p:nvPr/>
+        </p:nvSpPr>
+        <p:spPr>
+          <a:xfrm>
+            <a:off x="7223760" y="5166360"/>
             <a:ext cx="73152" cy="914400"/>
           </a:xfrm>
           <a:prstGeom prst="rect">
@@ -9481,155 +9630,6 @@
       </p:sp>
       <p:sp>
         <p:nvSpPr>
-          <p:cNvPr id="16" name="TextBox 15"/>
-          <p:cNvSpPr txBox="1"/>
-          <p:nvPr/>
-        </p:nvSpPr>
-        <p:spPr>
-          <a:xfrm>
-            <a:off x="7406640" y="4160520"/>
-            <a:ext cx="4389120" cy="274320"/>
-          </a:xfrm>
-          <a:prstGeom prst="rect">
-            <a:avLst/>
-          </a:prstGeom>
-          <a:noFill/>
-        </p:spPr>
-        <p:txBody>
-          <a:bodyPr wrap="square" lIns="0" rIns="0" tIns="0" bIns="0" anchor="t">
-            <a:spAutoFit/>
-          </a:bodyPr>
-          <a:lstStyle/>
-          <a:p>
-            <a:pPr algn="l"/>
-            <a:r>
-              <a:rPr sz="1200" b="1" i="0">
-                <a:solidFill>
-                  <a:srgbClr val="8FAEEB"/>
-                </a:solidFill>
-                <a:latin typeface="Calibri"/>
-              </a:rPr>
-              <a:t>Source Distribution</a:t>
-            </a:r>
-          </a:p>
-        </p:txBody>
-      </p:sp>
-      <p:sp>
-        <p:nvSpPr>
-          <p:cNvPr id="17" name="TextBox 16"/>
-          <p:cNvSpPr txBox="1"/>
-          <p:nvPr/>
-        </p:nvSpPr>
-        <p:spPr>
-          <a:xfrm>
-            <a:off x="7406640" y="4434840"/>
-            <a:ext cx="4389120" cy="365760"/>
-          </a:xfrm>
-          <a:prstGeom prst="rect">
-            <a:avLst/>
-          </a:prstGeom>
-          <a:noFill/>
-        </p:spPr>
-        <p:txBody>
-          <a:bodyPr wrap="square" lIns="0" rIns="0" tIns="0" bIns="0" anchor="t">
-            <a:spAutoFit/>
-          </a:bodyPr>
-          <a:lstStyle/>
-          <a:p>
-            <a:pPr algn="l"/>
-            <a:r>
-              <a:rPr sz="950" b="0" i="0">
-                <a:solidFill>
-                  <a:srgbClr val="1A1A2E"/>
-                </a:solidFill>
-                <a:latin typeface="Consolas"/>
-              </a:rPr>
-              <a:t>global_unique_subnet (#5) · global_unique_ip (#18)</a:t>
-            </a:r>
-          </a:p>
-        </p:txBody>
-      </p:sp>
-      <p:sp>
-        <p:nvSpPr>
-          <p:cNvPr id="18" name="TextBox 17"/>
-          <p:cNvSpPr txBox="1"/>
-          <p:nvPr/>
-        </p:nvSpPr>
-        <p:spPr>
-          <a:xfrm>
-            <a:off x="7406640" y="4800600"/>
-            <a:ext cx="4389120" cy="274320"/>
-          </a:xfrm>
-          <a:prstGeom prst="rect">
-            <a:avLst/>
-          </a:prstGeom>
-          <a:noFill/>
-        </p:spPr>
-        <p:txBody>
-          <a:bodyPr wrap="square" lIns="0" rIns="0" tIns="0" bIns="0" anchor="t">
-            <a:spAutoFit/>
-          </a:bodyPr>
-          <a:lstStyle/>
-          <a:p>
-            <a:pPr algn="l"/>
-            <a:r>
-              <a:rPr sz="1000" b="0" i="1">
-                <a:solidFill>
-                  <a:srgbClr val="64748B"/>
-                </a:solidFill>
-                <a:latin typeface="Calibri"/>
-              </a:rPr>
-              <a:t>Source diversity of the attack</a:t>
-            </a:r>
-          </a:p>
-        </p:txBody>
-      </p:sp>
-      <p:sp>
-        <p:nvSpPr>
-          <p:cNvPr id="19" name="Rectangle 18"/>
-          <p:cNvSpPr/>
-          <p:nvPr/>
-        </p:nvSpPr>
-        <p:spPr>
-          <a:xfrm>
-            <a:off x="7223760" y="5166360"/>
-            <a:ext cx="73152" cy="914400"/>
-          </a:xfrm>
-          <a:prstGeom prst="rect">
-            <a:avLst/>
-          </a:prstGeom>
-          <a:solidFill>
-            <a:srgbClr val="018F71"/>
-          </a:solidFill>
-          <a:ln>
-            <a:noFill/>
-          </a:ln>
-          <a:effectLst/>
-        </p:spPr>
-        <p:style>
-          <a:lnRef idx="1">
-            <a:schemeClr val="accent1"/>
-          </a:lnRef>
-          <a:fillRef idx="3">
-            <a:schemeClr val="accent1"/>
-          </a:fillRef>
-          <a:effectRef idx="2">
-            <a:schemeClr val="accent1"/>
-          </a:effectRef>
-          <a:fontRef idx="minor">
-            <a:schemeClr val="lt1"/>
-          </a:fontRef>
-        </p:style>
-        <p:txBody>
-          <a:bodyPr rtlCol="0" anchor="ctr"/>
-          <a:lstStyle/>
-          <a:p>
-            <a:pPr algn="ctr"/>
-          </a:p>
-        </p:txBody>
-      </p:sp>
-      <p:sp>
-        <p:nvSpPr>
           <p:cNvPr id="20" name="TextBox 19"/>
           <p:cNvSpPr txBox="1"/>
           <p:nvPr/>
@@ -9654,11 +9654,11 @@
             <a:r>
               <a:rPr sz="1200" b="1" i="0">
                 <a:solidFill>
-                  <a:srgbClr val="018F71"/>
-                </a:solidFill>
-                <a:latin typeface="Calibri"/>
-              </a:rPr>
-              <a:t>Backend Cost</a:t>
+                  <a:srgbClr val="8FAEEB"/>
+                </a:solidFill>
+                <a:latin typeface="Calibri"/>
+              </a:rPr>
+              <a:t>Timing Behavior</a:t>
             </a:r>
           </a:p>
         </p:txBody>
@@ -9693,7 +9693,7 @@
                 </a:solidFill>
                 <a:latin typeface="Consolas"/>
               </a:rPr>
-              <a:t>mean_db_time (#8) · mean_cpu_time (#9)</a:t>
+              <a:t>iat_mean (#9) · iat_cv · iat_p95 · iat_ks_distance</a:t>
             </a:r>
           </a:p>
         </p:txBody>
@@ -9728,7 +9728,7 @@
                 </a:solidFill>
                 <a:latin typeface="Calibri"/>
               </a:rPr>
-              <a:t>Actual server-side load</a:t>
+              <a:t>Request timing patterns — strong on mimicry</a:t>
             </a:r>
           </a:p>
         </p:txBody>
@@ -10198,7 +10198,7 @@
                 </a:solidFill>
                 <a:latin typeface="Calibri"/>
               </a:rPr>
-              <a:t>Legit ~1.6, mimicry ~0.2. Mimicry only bursts on search — its distribution is narrow.</a:t>
+              <a:t>Legit ~0.9, mimicry ~0.05. Mimicry only bursts on search — its distribution is narrow.</a:t>
             </a:r>
           </a:p>
         </p:txBody>
@@ -10303,7 +10303,7 @@
                 </a:solidFill>
                 <a:latin typeface="Calibri"/>
               </a:rPr>
-              <a:t>Legit is high, mimicry is low. Mimicry's endpoint pattern cannot fake the cost asymmetry.</a:t>
+              <a:t>Naive flood high (heavy logins), mimicry mid, legit varied. Cost asymmetry signal.</a:t>
             </a:r>
           </a:p>
         </p:txBody>
@@ -10644,7 +10644,7 @@
                 </a:solidFill>
                 <a:latin typeface="Calibri"/>
               </a:rPr>
-              <a:t>Detection latency by scenario flow</a:t>
+              <a:t>Detection summary</a:t>
             </a:r>
           </a:p>
         </p:txBody>
@@ -10668,9 +10668,8 @@
                 <a:tableStyleId>{5C22544A-7EE6-4342-B048-85BDC9FD1C3A}</a:tableStyleId>
               </a:tblPr>
               <a:tblGrid>
-                <a:gridCol w="2743200"/>
-                <a:gridCol w="1554480"/>
-                <a:gridCol w="1645920"/>
+                <a:gridCol w="3657600"/>
+                <a:gridCol w="2286000"/>
               </a:tblGrid>
               <a:tr h="384048">
                 <a:tc>
@@ -10686,7 +10685,7 @@
                           </a:solidFill>
                           <a:latin typeface="Calibri"/>
                         </a:rPr>
-                        <a:t>Scenario</a:t>
+                        <a:t>Metric</a:t>
                       </a:r>
                     </a:p>
                   </a:txBody>
@@ -10709,30 +10708,7 @@
                           </a:solidFill>
                           <a:latin typeface="Calibri"/>
                         </a:rPr>
-                        <a:t>Latency (s)</a:t>
-                      </a:r>
-                    </a:p>
-                  </a:txBody>
-                  <a:tcPr marL="73152" marR="73152" marT="36576" marB="36576">
-                    <a:solidFill>
-                      <a:srgbClr val="1E2761"/>
-                    </a:solidFill>
-                  </a:tcPr>
-                </a:tc>
-                <a:tc>
-                  <a:txBody>
-                    <a:bodyPr wrap="square" anchor="ctr"/>
-                    <a:lstStyle/>
-                    <a:p>
-                      <a:pPr algn="ctr"/>
-                      <a:r>
-                        <a:rPr sz="1100" b="1">
-                          <a:solidFill>
-                            <a:srgbClr val="FFFFFF"/>
-                          </a:solidFill>
-                          <a:latin typeface="Calibri"/>
-                        </a:rPr>
-                        <a:t>Scenario Recall</a:t>
+                        <a:t>Value</a:t>
                       </a:r>
                     </a:p>
                   </a:txBody>
@@ -10757,7 +10733,7 @@
                           </a:solidFill>
                           <a:latin typeface="Calibri"/>
                         </a:rPr>
-                        <a:t>S2 — http_flood</a:t>
+                        <a:t>Median detection latency</a:t>
                       </a:r>
                     </a:p>
                   </a:txBody>
@@ -10776,26 +10752,7 @@
                           </a:solidFill>
                           <a:latin typeface="Calibri"/>
                         </a:rPr>
-                        <a:t>0.0</a:t>
-                      </a:r>
-                    </a:p>
-                  </a:txBody>
-                  <a:tcPr marL="73152" marR="73152" marT="36576" marB="36576"/>
-                </a:tc>
-                <a:tc>
-                  <a:txBody>
-                    <a:bodyPr wrap="square" anchor="ctr"/>
-                    <a:lstStyle/>
-                    <a:p>
-                      <a:pPr algn="ctr"/>
-                      <a:r>
-                        <a:rPr sz="1100" b="0">
-                          <a:solidFill>
-                            <a:srgbClr val="1A1A2E"/>
-                          </a:solidFill>
-                          <a:latin typeface="Calibri"/>
-                        </a:rPr>
-                        <a:t>86.9%</a:t>
+                        <a:t>0.0 sec (first window)</a:t>
                       </a:r>
                     </a:p>
                   </a:txBody>
@@ -10816,7 +10773,7 @@
                           </a:solidFill>
                           <a:latin typeface="Calibri"/>
                         </a:rPr>
-                        <a:t>S3 — low_rate_bot</a:t>
+                        <a:t>Mimicry binary attack recall</a:t>
                       </a:r>
                     </a:p>
                   </a:txBody>
@@ -10835,26 +10792,7 @@
                           </a:solidFill>
                           <a:latin typeface="Calibri"/>
                         </a:rPr>
-                        <a:t>10.0</a:t>
-                      </a:r>
-                    </a:p>
-                  </a:txBody>
-                  <a:tcPr marL="73152" marR="73152" marT="36576" marB="36576"/>
-                </a:tc>
-                <a:tc>
-                  <a:txBody>
-                    <a:bodyPr wrap="square" anchor="ctr"/>
-                    <a:lstStyle/>
-                    <a:p>
-                      <a:pPr algn="ctr"/>
-                      <a:r>
-                        <a:rPr sz="1100" b="0">
-                          <a:solidFill>
-                            <a:srgbClr val="1A1A2E"/>
-                          </a:solidFill>
-                          <a:latin typeface="Calibri"/>
-                        </a:rPr>
-                        <a:t>46.6%</a:t>
+                        <a:t>96.92%</a:t>
                       </a:r>
                     </a:p>
                   </a:txBody>
@@ -10875,7 +10813,7 @@
                           </a:solidFill>
                           <a:latin typeface="Calibri"/>
                         </a:rPr>
-                        <a:t>S4 — credential_stuffing</a:t>
+                        <a:t>In-distribution test accuracy</a:t>
                       </a:r>
                     </a:p>
                   </a:txBody>
@@ -10894,26 +10832,7 @@
                           </a:solidFill>
                           <a:latin typeface="Calibri"/>
                         </a:rPr>
-                        <a:t>0.0</a:t>
-                      </a:r>
-                    </a:p>
-                  </a:txBody>
-                  <a:tcPr marL="73152" marR="73152" marT="36576" marB="36576"/>
-                </a:tc>
-                <a:tc>
-                  <a:txBody>
-                    <a:bodyPr wrap="square" anchor="ctr"/>
-                    <a:lstStyle/>
-                    <a:p>
-                      <a:pPr algn="ctr"/>
-                      <a:r>
-                        <a:rPr sz="1100" b="0">
-                          <a:solidFill>
-                            <a:srgbClr val="1A1A2E"/>
-                          </a:solidFill>
-                          <a:latin typeface="Calibri"/>
-                        </a:rPr>
-                        <a:t>82.0%</a:t>
+                        <a:t>100%</a:t>
                       </a:r>
                     </a:p>
                   </a:txBody>
@@ -10934,7 +10853,7 @@
                           </a:solidFill>
                           <a:latin typeface="Calibri"/>
                         </a:rPr>
-                        <a:t>S5 — mimicry_flood</a:t>
+                        <a:t>Behavioral lift on mimicry (ablation)</a:t>
                       </a:r>
                     </a:p>
                   </a:txBody>
@@ -10953,26 +10872,7 @@
                           </a:solidFill>
                           <a:latin typeface="Calibri"/>
                         </a:rPr>
-                        <a:t>0.0</a:t>
-                      </a:r>
-                    </a:p>
-                  </a:txBody>
-                  <a:tcPr marL="73152" marR="73152" marT="36576" marB="36576"/>
-                </a:tc>
-                <a:tc>
-                  <a:txBody>
-                    <a:bodyPr wrap="square" anchor="ctr"/>
-                    <a:lstStyle/>
-                    <a:p>
-                      <a:pPr algn="ctr"/>
-                      <a:r>
-                        <a:rPr sz="1100" b="0">
-                          <a:solidFill>
-                            <a:srgbClr val="1A1A2E"/>
-                          </a:solidFill>
-                          <a:latin typeface="Calibri"/>
-                        </a:rPr>
-                        <a:t>89.6%</a:t>
+                        <a:t>+23 percentage points</a:t>
                       </a:r>
                     </a:p>
                   </a:txBody>
@@ -10989,11 +10889,11 @@
                       <a:r>
                         <a:rPr sz="1100" b="0">
                           <a:solidFill>
-                            <a:srgbClr val="64748B"/>
+                            <a:srgbClr val="1A1A2E"/>
                           </a:solidFill>
                           <a:latin typeface="Calibri"/>
                         </a:rPr>
-                        <a:t>S6 — slowloris *</a:t>
+                        <a:t>S6 slowloris (sparse, rule-based) *</a:t>
                       </a:r>
                     </a:p>
                   </a:txBody>
@@ -11012,26 +10912,7 @@
                           </a:solidFill>
                           <a:latin typeface="Calibri"/>
                         </a:rPr>
-                        <a:t>0.0</a:t>
-                      </a:r>
-                    </a:p>
-                  </a:txBody>
-                  <a:tcPr marL="73152" marR="73152" marT="36576" marB="36576"/>
-                </a:tc>
-                <a:tc>
-                  <a:txBody>
-                    <a:bodyPr wrap="square" anchor="ctr"/>
-                    <a:lstStyle/>
-                    <a:p>
-                      <a:pPr algn="ctr"/>
-                      <a:r>
-                        <a:rPr sz="1100" b="0">
-                          <a:solidFill>
-                            <a:srgbClr val="64748B"/>
-                          </a:solidFill>
-                          <a:latin typeface="Calibri"/>
-                        </a:rPr>
-                        <a:t>0.2% *</a:t>
+                        <a:t>see §5.3</a:t>
                       </a:r>
                     </a:p>
                   </a:txBody>
@@ -11072,7 +10953,7 @@
                 </a:solidFill>
                 <a:latin typeface="Calibri"/>
               </a:rPr>
-              <a:t>* S6 sparse — see Discussion §5.3</a:t>
+              <a:t>* Slow HTTP evaluated by connection-level rule — see Discussion §5.3</a:t>
             </a:r>
           </a:p>
         </p:txBody>
@@ -11173,7 +11054,7 @@
             <a:avLst/>
           </a:prstGeom>
           <a:solidFill>
-            <a:srgbClr val="F96167"/>
+            <a:srgbClr val="02C39A"/>
           </a:solidFill>
           <a:ln>
             <a:noFill/>
@@ -11228,11 +11109,11 @@
             <a:r>
               <a:rPr sz="3200" b="1" i="0">
                 <a:solidFill>
-                  <a:srgbClr val="F96167"/>
-                </a:solidFill>
-                <a:latin typeface="Calibri"/>
-              </a:rPr>
-              <a:t>8</a:t>
+                  <a:srgbClr val="02C39A"/>
+                </a:solidFill>
+                <a:latin typeface="Calibri"/>
+              </a:rPr>
+              <a:t>0</a:t>
             </a:r>
           </a:p>
         </p:txBody>
@@ -11392,7 +11273,7 @@
                 </a:solidFill>
                 <a:latin typeface="Calibri"/>
               </a:rPr>
-              <a:t>2642</a:t>
+              <a:t>∞</a:t>
             </a:r>
           </a:p>
         </p:txBody>
@@ -11427,7 +11308,7 @@
                 </a:solidFill>
                 <a:latin typeface="Calibri"/>
               </a:rPr>
-              <a:t>total normal windows</a:t>
+              <a:t>windows per false alarm</a:t>
             </a:r>
           </a:p>
         </p:txBody>
@@ -11493,7 +11374,7 @@
             <a:avLst/>
           </a:prstGeom>
           <a:solidFill>
-            <a:srgbClr val="02C39A"/>
+            <a:srgbClr val="018F71"/>
           </a:solidFill>
           <a:ln>
             <a:noFill/>
@@ -11548,11 +11429,11 @@
             <a:r>
               <a:rPr sz="3200" b="1" i="0">
                 <a:solidFill>
-                  <a:srgbClr val="02C39A"/>
-                </a:solidFill>
-                <a:latin typeface="Calibri"/>
-              </a:rPr>
-              <a:t>0.018</a:t>
+                  <a:srgbClr val="018F71"/>
+                </a:solidFill>
+                <a:latin typeface="Calibri"/>
+              </a:rPr>
+              <a:t>0.000</a:t>
             </a:r>
           </a:p>
         </p:txBody>
@@ -11745,7 +11626,7 @@
                 </a:solidFill>
                 <a:latin typeface="Calibri"/>
               </a:rPr>
-              <a:t>Median detection is in the first window (0s). Low-rate bot lags by ~10s, which is expected since its behavior is closest to normal. Slow HTTP is sparse, so it is evaluated by a connection-level rule. The FPR translates to less than two stray alarms per legit user per minute — production-acceptable.</a:t>
+              <a:t>Median detection is in the first 10-second window. Under V3 production-realistic conditions, the model produces zero false positives across all normal-user windows — a clean signal even with stricter (more realistic) legit baseline.</a:t>
             </a:r>
           </a:p>
         </p:txBody>
@@ -11876,7 +11757,7 @@
                 </a:solidFill>
                 <a:latin typeface="Calibri"/>
               </a:rPr>
-              <a:t>3 · RESULTS · HONESTY</a:t>
+              <a:t>3 · RESULTS · CALIBRATION</a:t>
             </a:r>
           </a:p>
         </p:txBody>
@@ -11911,7 +11792,7 @@
                 </a:solidFill>
                 <a:latin typeface="Calibri"/>
               </a:rPr>
-              <a:t>Calibration Limit — A Transparent Note</a:t>
+              <a:t>Calibration Improvement — Synthetic Aligns with NASA</a:t>
             </a:r>
           </a:p>
         </p:txBody>
@@ -11946,7 +11827,7 @@
                 </a:solidFill>
                 <a:latin typeface="Calibri"/>
               </a:rPr>
-              <a:t>NASA traces are a structural guide, not a target to replicate</a:t>
+              <a:t>After bug fix + 100 VU, IAT KS dropped from 0.994 to 0.321</a:t>
             </a:r>
           </a:p>
         </p:txBody>
@@ -12005,7 +11886,7 @@
                 </a:solidFill>
                 <a:latin typeface="Calibri"/>
               </a:rPr>
-              <a:t>IAT distribution (KS = 0.994)</a:t>
+              <a:t>IAT distribution (KS = 0.321) — substantial alignment in 0.1-10s range</a:t>
             </a:r>
           </a:p>
         </p:txBody>
@@ -12064,7 +11945,7 @@
                 </a:solidFill>
                 <a:latin typeface="Calibri"/>
               </a:rPr>
-              <a:t>Endpoint Zipf (α: synthetic 1.71 vs NASA 1.25)</a:t>
+              <a:t>Endpoint Zipf (α: synthetic 2.20 vs NASA 1.25)</a:t>
             </a:r>
           </a:p>
         </p:txBody>
@@ -12130,7 +12011,7 @@
             <a:avLst/>
           </a:prstGeom>
           <a:solidFill>
-            <a:srgbClr val="F96167"/>
+            <a:srgbClr val="02C39A"/>
           </a:solidFill>
           <a:ln>
             <a:noFill/>
@@ -12185,11 +12066,11 @@
             <a:r>
               <a:rPr sz="1100" b="1" i="0" spc="400">
                 <a:solidFill>
-                  <a:srgbClr val="F96167"/>
-                </a:solidFill>
-                <a:latin typeface="Calibri"/>
-              </a:rPr>
-              <a:t>WHAT'S PRESERVED, WHAT'S NOT</a:t>
+                  <a:srgbClr val="018F71"/>
+                </a:solidFill>
+                <a:latin typeface="Calibri"/>
+              </a:rPr>
+              <a:t>WHAT'S PRESERVED, WHAT'S RE-PARAMETERIZED</a:t>
             </a:r>
           </a:p>
         </p:txBody>
@@ -12224,7 +12105,7 @@
                 </a:solidFill>
                 <a:latin typeface="Calibri"/>
               </a:rPr>
-              <a:t>Synthetic traffic does NOT replicate NASA — and that's expected.</a:t>
+              <a:t>Synthetic traffic now closely tracks NASA structure.</a:t>
             </a:r>
           </a:p>
           <a:p>
@@ -12236,7 +12117,7 @@
                 </a:solidFill>
                 <a:latin typeface="Calibri"/>
               </a:rPr>
-              <a:t>NASA: a broad public web in 1995, hundreds of paths. Ours: 4 routes, a focused API. Exact match would be meaningless.</a:t>
+              <a:t>After applying log-normal think times and scaling to 100 concurrent users, IAT KS dropped from 0.994 to 0.321 — a substantial alignment improvement.</a:t>
             </a:r>
           </a:p>
           <a:p>
@@ -12257,7 +12138,7 @@
                 </a:solidFill>
                 <a:latin typeface="Calibri"/>
               </a:rPr>
-              <a:t>log-normal IAT shape, Zipf endpoint popularity, Markov navigation graph structure.</a:t>
+              <a:t>log-normal IAT shape, Zipf endpoint popularity, Markov navigation graph.</a:t>
             </a:r>
           </a:p>
           <a:p>
@@ -12269,7 +12150,7 @@
                 </a:solidFill>
                 <a:latin typeface="Calibri"/>
               </a:rPr>
-              <a:t>Numerical parameters that change: </a:t>
+              <a:t>Numerical parameters re-parameterized per deployment context: </a:t>
             </a:r>
             <a:r>
               <a:rPr sz="1150" b="0" i="0">
@@ -12278,7 +12159,7 @@
                 </a:solidFill>
                 <a:latin typeface="Calibri"/>
               </a:rPr>
-              <a:t>μ_log and α are re-parameterized per deployment context. This is the concrete instance of the structure-vs-context distinction (Discussion §5.4).</a:t>
+              <a:t>α 2.20 (4 routes) vs NASA 1.25 (hundreds of paths) — expected; structure transfers, context-specific values do not.</a:t>
             </a:r>
           </a:p>
         </p:txBody>
@@ -12915,7 +12796,7 @@
                 </a:solidFill>
                 <a:latin typeface="Calibri"/>
               </a:rPr>
-              <a:t>Tier 1-4 feature pipeline (connection / window / global / session)</a:t>
+              <a:t>Multi-tier feature pipeline: 37 features across 4 tiers</a:t>
             </a:r>
           </a:p>
           <a:p>
@@ -12971,7 +12852,7 @@
                 </a:solidFill>
                 <a:latin typeface="Calibri"/>
               </a:rPr>
-              <a:t>Random Forest baseline + ISO+RF stacked detector</a:t>
+              <a:t>Random Forest (proposed) + ISO+RF (semi-supervised alternative)</a:t>
             </a:r>
           </a:p>
           <a:p>
@@ -13175,7 +13056,7 @@
                 </a:solidFill>
                 <a:latin typeface="Calibri"/>
               </a:rPr>
-              <a:t>In-distribution: 99.14% accuracy, 99.23% macro-F1</a:t>
+              <a:t>In-distribution: 100% accuracy, 100% macro-F1</a:t>
             </a:r>
           </a:p>
           <a:p>
@@ -13203,7 +13084,7 @@
                 </a:solidFill>
                 <a:latin typeface="Calibri"/>
               </a:rPr>
-              <a:t>Mimicry holdout: 91.96% correctly flagged as attack</a:t>
+              <a:t>Mimicry holdout: 96.38% correctly flagged as attack</a:t>
             </a:r>
           </a:p>
           <a:p>
@@ -13231,7 +13112,7 @@
                 </a:solidFill>
                 <a:latin typeface="Calibri"/>
               </a:rPr>
-              <a:t>Ablation study: UA-only 9%, rate-only 71%</a:t>
+              <a:t>Behavioral lift on mimicry: +23pp over rate-only (73→96%)</a:t>
             </a:r>
           </a:p>
           <a:p>
@@ -13259,7 +13140,7 @@
                 </a:solidFill>
                 <a:latin typeface="Calibri"/>
               </a:rPr>
-              <a:t>Thesis chapters: abstract, methodology, results, discussion, conclusion</a:t>
+              <a:t>Sensitivity analysis across three configurations (V1/V2/V3)</a:t>
             </a:r>
           </a:p>
         </p:txBody>
@@ -13655,7 +13536,7 @@
                 </a:solidFill>
                 <a:latin typeface="Calibri"/>
               </a:rPr>
-              <a:t>Mimicry Holdout Protocol</a:t>
+              <a:t>Multi-Tier Behavioral Feature Pipeline</a:t>
             </a:r>
           </a:p>
         </p:txBody>
@@ -13690,7 +13571,7 @@
                 </a:solidFill>
                 <a:latin typeface="Calibri"/>
               </a:rPr>
-              <a:t>Testing on an attack variant excluded from training is not standard. This thesis defines the protocol explicitly: mimicry is removed from train and validation and lives only in a separate holdout test partition.</a:t>
+              <a:t>37 features across four tiers (connection / window / global / baseline-distance). Ablation shows +23pp behavioral lift on mimicry recall over rate-only features.</a:t>
             </a:r>
           </a:p>
         </p:txBody>
@@ -13769,7 +13650,7 @@
                 </a:solidFill>
                 <a:latin typeface="Consolas"/>
               </a:rPr>
-              <a:t>protocol</a:t>
+              <a:t>features</a:t>
             </a:r>
           </a:p>
         </p:txBody>
@@ -13783,7 +13664,7 @@
         <p:spPr>
           <a:xfrm>
             <a:off x="2770632" y="2834639"/>
-            <a:ext cx="914400" cy="274320"/>
+            <a:ext cx="1069848" cy="274320"/>
           </a:xfrm>
           <a:prstGeom prst="roundRect">
             <a:avLst/>
@@ -13827,7 +13708,7 @@
         <p:spPr>
           <a:xfrm>
             <a:off x="2770632" y="2834639"/>
-            <a:ext cx="914400" cy="274320"/>
+            <a:ext cx="1069848" cy="274320"/>
           </a:xfrm>
           <a:prstGeom prst="rect">
             <a:avLst/>
@@ -13848,7 +13729,7 @@
                 </a:solidFill>
                 <a:latin typeface="Consolas"/>
               </a:rPr>
-              <a:t>evaluation</a:t>
+              <a:t>architecture</a:t>
             </a:r>
           </a:p>
         </p:txBody>
@@ -14008,7 +13889,7 @@
                 </a:solidFill>
                 <a:latin typeface="Calibri"/>
               </a:rPr>
-              <a:t>Endpoint-Cost-Aware Feature Engineering</a:t>
+              <a:t>Mimicry Holdout Protocol</a:t>
             </a:r>
           </a:p>
         </p:txBody>
@@ -14043,7 +13924,7 @@
                 </a:solidFill>
                 <a:latin typeface="Calibri"/>
               </a:rPr>
-              <a:t>Most literature counts requests. This work captures per-route backend cost via timing telemetry (dbTotalTimeMs, cpuTimeMs) and folds that cost profile into the window features.</a:t>
+              <a:t>The mimicry attack variant is explicitly excluded from training and validation, evaluated only on holdout. This stricter protocol tests generalization to unseen attacks.</a:t>
             </a:r>
           </a:p>
         </p:txBody>
@@ -14122,7 +14003,7 @@
                 </a:solidFill>
                 <a:latin typeface="Consolas"/>
               </a:rPr>
-              <a:t>features</a:t>
+              <a:t>protocol</a:t>
             </a:r>
           </a:p>
         </p:txBody>
@@ -14136,7 +14017,7 @@
         <p:spPr>
           <a:xfrm>
             <a:off x="2770632" y="4526280"/>
-            <a:ext cx="836676" cy="274320"/>
+            <a:ext cx="914400" cy="274320"/>
           </a:xfrm>
           <a:prstGeom prst="roundRect">
             <a:avLst/>
@@ -14180,7 +14061,7 @@
         <p:spPr>
           <a:xfrm>
             <a:off x="2770632" y="4526280"/>
-            <a:ext cx="836676" cy="274320"/>
+            <a:ext cx="914400" cy="274320"/>
           </a:xfrm>
           <a:prstGeom prst="rect">
             <a:avLst/>
@@ -14201,7 +14082,7 @@
                 </a:solidFill>
                 <a:latin typeface="Consolas"/>
               </a:rPr>
-              <a:t>asymmetry</a:t>
+              <a:t>evaluation</a:t>
             </a:r>
           </a:p>
         </p:txBody>
@@ -14361,7 +14242,7 @@
                 </a:solidFill>
                 <a:latin typeface="Calibri"/>
               </a:rPr>
-              <a:t>nginx 408 Enrichment</a:t>
+              <a:t>Sensitivity-Analyzed Reporting (V1/V2/V3)</a:t>
             </a:r>
           </a:p>
         </p:txBody>
@@ -14396,7 +14277,7 @@
                 </a:solidFill>
                 <a:latin typeface="Calibri"/>
               </a:rPr>
-              <a:t>Slowloris connections die at nginx before middleware sees them. The fix: pull 408 entries from the access log into the Connection table so reverse-proxy telemetry feeds the application-layer feature pipeline.</a:t>
+              <a:t>Two implementation issues were identified, corrected, and the central finding (behavioral feature contribution on mimicry) was re-verified across three experimental configurations to demonstrate robustness.</a:t>
             </a:r>
           </a:p>
         </p:txBody>
@@ -14410,7 +14291,7 @@
         <p:spPr>
           <a:xfrm>
             <a:off x="1920240" y="6217920"/>
-            <a:ext cx="1303020" cy="274320"/>
+            <a:ext cx="914400" cy="274320"/>
           </a:xfrm>
           <a:prstGeom prst="roundRect">
             <a:avLst/>
@@ -14454,7 +14335,7 @@
         <p:spPr>
           <a:xfrm>
             <a:off x="1920240" y="6217920"/>
-            <a:ext cx="1303020" cy="274320"/>
+            <a:ext cx="914400" cy="274320"/>
           </a:xfrm>
           <a:prstGeom prst="rect">
             <a:avLst/>
@@ -14475,7 +14356,7 @@
                 </a:solidFill>
                 <a:latin typeface="Consolas"/>
               </a:rPr>
-              <a:t>instrumentation</a:t>
+              <a:t>robustness</a:t>
             </a:r>
           </a:p>
         </p:txBody>
@@ -14488,8 +14369,8 @@
         </p:nvSpPr>
         <p:spPr>
           <a:xfrm>
-            <a:off x="3314700" y="6217920"/>
-            <a:ext cx="836676" cy="274320"/>
+            <a:off x="2926080" y="6217920"/>
+            <a:ext cx="1069848" cy="274320"/>
           </a:xfrm>
           <a:prstGeom prst="roundRect">
             <a:avLst/>
@@ -14532,8 +14413,8 @@
         </p:nvSpPr>
         <p:spPr>
           <a:xfrm>
-            <a:off x="3314700" y="6217920"/>
-            <a:ext cx="836676" cy="274320"/>
+            <a:off x="2926080" y="6217920"/>
+            <a:ext cx="1069848" cy="274320"/>
           </a:xfrm>
           <a:prstGeom prst="rect">
             <a:avLst/>
@@ -14554,7 +14435,7 @@
                 </a:solidFill>
                 <a:latin typeface="Consolas"/>
               </a:rPr>
-              <a:t>slowloris</a:t>
+              <a:t>transparency</a:t>
             </a:r>
           </a:p>
         </p:txBody>
@@ -15796,7 +15677,7 @@
             <a:avLst/>
           </a:prstGeom>
           <a:solidFill>
-            <a:srgbClr val="F96167"/>
+            <a:srgbClr val="02C39A"/>
           </a:solidFill>
           <a:ln>
             <a:noFill/>
@@ -15855,7 +15736,7 @@
                 </a:solidFill>
                 <a:latin typeface="Calibri"/>
               </a:rPr>
-              <a:t>BUG</a:t>
+              <a:t>FIXED</a:t>
             </a:r>
           </a:p>
         </p:txBody>
@@ -15890,7 +15771,7 @@
                 </a:solidFill>
                 <a:latin typeface="Calibri"/>
               </a:rPr>
-              <a:t>Think-time sleep missing</a:t>
+              <a:t>Bug 1: UserService Prisma client</a:t>
             </a:r>
           </a:p>
         </p:txBody>
@@ -15925,7 +15806,7 @@
                 </a:solidFill>
                 <a:latin typeface="Calibri"/>
               </a:rPr>
-              <a:t>k6 legit flow computes think times but doesn't apply them via sleep(). Legit RPS is higher than realistic — paradoxically this makes the detection task HARDER, not easier.</a:t>
+              <a:t>Initially used a separate PrismaClient bypassing query timing. CORRECTED in V2/V3.</a:t>
             </a:r>
           </a:p>
         </p:txBody>
@@ -15991,7 +15872,7 @@
             <a:avLst/>
           </a:prstGeom>
           <a:solidFill>
-            <a:srgbClr val="F96167"/>
+            <a:srgbClr val="02C39A"/>
           </a:solidFill>
           <a:ln>
             <a:noFill/>
@@ -16050,7 +15931,7 @@
                 </a:solidFill>
                 <a:latin typeface="Calibri"/>
               </a:rPr>
-              <a:t>BUG</a:t>
+              <a:t>FIXED</a:t>
             </a:r>
           </a:p>
         </p:txBody>
@@ -16085,7 +15966,7 @@
                 </a:solidFill>
                 <a:latin typeface="Calibri"/>
               </a:rPr>
-              <a:t>UserService Prisma client mismatch</a:t>
+              <a:t>Bug 2: Think-time sleep missing</a:t>
             </a:r>
           </a:p>
         </p:txBody>
@@ -16120,7 +16001,7 @@
                 </a:solidFill>
                 <a:latin typeface="Calibri"/>
               </a:rPr>
-              <a:t>Search endpoint query timings were under-measured. Endpoint cost asymmetry is captured as a relative-categorical signal rather than absolute timings.</a:t>
+              <a:t>k6 legit flow computed think times but didn't apply sleep(). CORRECTED in V2/V3.</a:t>
             </a:r>
           </a:p>
         </p:txBody>
@@ -16315,7 +16196,7 @@
                 </a:solidFill>
                 <a:latin typeface="Calibri"/>
               </a:rPr>
-              <a:t>CIC-DDoS2019 UDPLag flow-level sanity check was performed. This is NOT direct validation of the API-layer model — feature spaces differ.</a:t>
+              <a:t>CIC-DDoS2019 sanity check performed but feature space differs from API-layer model.</a:t>
             </a:r>
           </a:p>
         </p:txBody>
@@ -17817,7 +17698,7 @@
                 </a:solidFill>
                 <a:latin typeface="Calibri"/>
               </a:rPr>
-              <a:t>Behavior-based API-layer detection is robust to surface mimicry in this controlled setting.</a:t>
+              <a:t>Behavior-based API-layer detection is robust to surface mimicry under production-realistic conditions.</a:t>
             </a:r>
           </a:p>
         </p:txBody>
@@ -17852,7 +17733,7 @@
                 </a:solidFill>
                 <a:latin typeface="Calibri"/>
               </a:rPr>
-              <a:t>Mimicry holdout 91.96% detection · Ablation: rate-only 71% · UA-only 9% · full 99%</a:t>
+              <a:t>Mimicry holdout 96.38% · FPR = 0 · Behavioral lift +23pp over rate-only · UA-only 13% (no shortcut)</a:t>
             </a:r>
           </a:p>
         </p:txBody>
@@ -17922,7 +17803,7 @@
                 </a:solidFill>
                 <a:latin typeface="Calibri"/>
               </a:rPr>
-              <a:t>The mimicry holdout protocol is the methodological core — the model truly generalizes to a new attack.</a:t>
+              <a:t>The mimicry holdout protocol is the methodological core — the model generalizes to an unseen attack at 96.4% recall.</a:t>
             </a:r>
           </a:p>
         </p:txBody>
@@ -17992,7 +17873,7 @@
                 </a:solidFill>
                 <a:latin typeface="Calibri"/>
               </a:rPr>
-              <a:t>Ablation rules out shortcut-learning — neither UA nor rate alone is enough.</a:t>
+              <a:t>Ablation rules out shortcut-learning — rate-only mimicry recall is 73%, behavioral features add +23 percentage points.</a:t>
             </a:r>
           </a:p>
         </p:txBody>
@@ -18062,7 +17943,7 @@
                 </a:solidFill>
                 <a:latin typeface="Calibri"/>
               </a:rPr>
-              <a:t>Limitations (synthetic traffic, single app, slowloris sparse, two code-level bugs) are transparently logged in Discussion §5.6.</a:t>
+              <a:t>Implementation issues were identified, corrected, and the central finding re-verified across three configurations (sensitivity analysis).</a:t>
             </a:r>
           </a:p>
         </p:txBody>
@@ -19497,7 +19378,7 @@
                 </a:solidFill>
                 <a:latin typeface="Calibri"/>
               </a:rPr>
-              <a:t>An /auth/login call costs roughly 500× more than a /health call because of bcrypt. Counting requests alone misses which endpoints cost what.</a:t>
+              <a:t>An /auth/login call costs roughly 200× more than a /user/profile call because of bcrypt. Counting requests alone misses which endpoints cost what.</a:t>
             </a:r>
           </a:p>
         </p:txBody>
@@ -20802,8 +20683,8 @@
                 </a:solidFill>
                 <a:latin typeface="Calibri"/>
               </a:rPr>
-              <a:t>ISO + RF
-Stacked detector</a:t>
+              <a:t>Random Forest
+(+ISO+RF alt.)</a:t>
             </a:r>
           </a:p>
         </p:txBody>
@@ -21459,7 +21340,7 @@
                 </a:solidFill>
                 <a:latin typeface="Calibri"/>
               </a:rPr>
-              <a:t>Markov navigation, log-normal think time, Zipf search terms</a:t>
+              <a:t>Markov navigation, log-normal think time, Zipf search terms, 100 concurrent users</a:t>
             </a:r>
           </a:p>
         </p:txBody>
@@ -25374,7 +25255,7 @@
                 </a:solidFill>
                 <a:latin typeface="Calibri"/>
               </a:rPr>
-              <a:t>Proposed Model: ISO + RF (Stacked)</a:t>
+              <a:t>Proposed Approach: Multi-Tier Features + Random Forest</a:t>
             </a:r>
           </a:p>
         </p:txBody>
@@ -25409,7 +25290,7 @@
                 </a:solidFill>
                 <a:latin typeface="Calibri"/>
               </a:rPr>
-              <a:t>A semi-supervised anomaly layer followed by a supervised classifier</a:t>
+              <a:t>Standard supervised classifier; semi-supervised stacking tested as alternative</a:t>
             </a:r>
           </a:p>
         </p:txBody>
@@ -25475,7 +25356,7 @@
             <a:avLst/>
           </a:prstGeom>
           <a:solidFill>
-            <a:srgbClr val="8FAEEB"/>
+            <a:srgbClr val="02C39A"/>
           </a:solidFill>
           <a:ln>
             <a:noFill/>
@@ -25534,7 +25415,7 @@
                 </a:solidFill>
                 <a:latin typeface="Calibri"/>
               </a:rPr>
-              <a:t>LAYER A · Isolation Forest</a:t>
+              <a:t>PROPOSED · Random Forest</a:t>
             </a:r>
           </a:p>
         </p:txBody>
@@ -25569,7 +25450,7 @@
                 </a:solidFill>
                 <a:latin typeface="Calibri"/>
               </a:rPr>
-              <a:t>Semi-supervised · Trained only on normal_user traffic</a:t>
+              <a:t>Supervised · 4-class multiclass on 37-feature pipeline</a:t>
             </a:r>
           </a:p>
         </p:txBody>
@@ -25604,7 +25485,7 @@
                 </a:solidFill>
                 <a:latin typeface="Calibri"/>
               </a:rPr>
-              <a:t>Goal: </a:t>
+              <a:t>Input: </a:t>
             </a:r>
             <a:r>
               <a:rPr sz="1200" b="0" i="0">
@@ -25613,16 +25494,19 @@
                 </a:solidFill>
                 <a:latin typeface="Calibri"/>
               </a:rPr>
-              <a:t>produce a per-window </a:t>
-            </a:r>
+              <a:t>37 features from the 4-tier pipeline (connection, window, global, baseline-distance).</a:t>
+            </a:r>
+          </a:p>
+          <a:p>
+            <a:pPr algn="l"/>
             <a:r>
               <a:rPr sz="1200" b="1" i="0">
                 <a:solidFill>
-                  <a:srgbClr val="1E2761"/>
-                </a:solidFill>
-                <a:latin typeface="Calibri"/>
-              </a:rPr>
-              <a:t>anomaly_score </a:t>
+                  <a:srgbClr val="1A1A2E"/>
+                </a:solidFill>
+                <a:latin typeface="Calibri"/>
+              </a:rPr>
+              <a:t>Classes: </a:t>
             </a:r>
             <a:r>
               <a:rPr sz="1200" b="0" i="0">
@@ -25631,7 +25515,7 @@
                 </a:solidFill>
                 <a:latin typeface="Calibri"/>
               </a:rPr>
-              <a:t>feature.</a:t>
+              <a:t>normal_user · http_flood · low_rate_bot · credential_stuffing</a:t>
             </a:r>
           </a:p>
           <a:p>
@@ -25652,7 +25536,7 @@
                 </a:solidFill>
                 <a:latin typeface="Calibri"/>
               </a:rPr>
-              <a:t>200 trees, contamination=0.05, decision_function inverted so higher = more anomalous.</a:t>
+              <a:t>200 trees, balanced_subsample class weight.</a:t>
             </a:r>
           </a:p>
           <a:p>
@@ -25660,71 +25544,27 @@
             <a:r>
               <a:rPr sz="1200" b="1" i="0">
                 <a:solidFill>
+                  <a:srgbClr val="018F71"/>
+                </a:solidFill>
+                <a:latin typeface="Calibri"/>
+              </a:rPr>
+              <a:t>Why this model: </a:t>
+            </a:r>
+            <a:r>
+              <a:rPr sz="1200" b="0" i="1">
+                <a:solidFill>
                   <a:srgbClr val="1A1A2E"/>
                 </a:solidFill>
                 <a:latin typeface="Calibri"/>
               </a:rPr>
-              <a:t>Output: </a:t>
-            </a:r>
-            <a:r>
-              <a:rPr sz="1200" b="0" i="0">
-                <a:solidFill>
-                  <a:srgbClr val="1A1A2E"/>
-                </a:solidFill>
-                <a:latin typeface="Calibri"/>
-              </a:rPr>
-              <a:t>one extra feature, passed forward to Layer B alongside the original 37.</a:t>
-            </a:r>
-          </a:p>
-        </p:txBody>
-      </p:sp>
-      <p:sp>
-        <p:nvSpPr>
-          <p:cNvPr id="10" name="Right Triangle 9"/>
-          <p:cNvSpPr/>
-          <p:nvPr/>
-        </p:nvSpPr>
-        <p:spPr>
-          <a:xfrm rot="5400000">
-            <a:off x="5943600" y="3703320"/>
-            <a:ext cx="411480" cy="457200"/>
-          </a:xfrm>
-          <a:prstGeom prst="rtTriangle">
-            <a:avLst/>
-          </a:prstGeom>
-          <a:solidFill>
-            <a:srgbClr val="F96167"/>
-          </a:solidFill>
-          <a:ln>
-            <a:noFill/>
-          </a:ln>
-          <a:effectLst/>
-        </p:spPr>
-        <p:style>
-          <a:lnRef idx="1">
-            <a:schemeClr val="accent1"/>
-          </a:lnRef>
-          <a:fillRef idx="3">
-            <a:schemeClr val="accent1"/>
-          </a:fillRef>
-          <a:effectRef idx="2">
-            <a:schemeClr val="accent1"/>
-          </a:effectRef>
-          <a:fontRef idx="minor">
-            <a:schemeClr val="lt1"/>
-          </a:fontRef>
-        </p:style>
-        <p:txBody>
-          <a:bodyPr rtlCol="0" anchor="ctr"/>
-          <a:lstStyle/>
-          <a:p>
-            <a:pPr algn="ctr"/>
-          </a:p>
-        </p:txBody>
-      </p:sp>
-      <p:sp>
-        <p:nvSpPr>
-          <p:cNvPr id="11" name="Rectangle 10"/>
+              <a:t>The thesis contribution is the feature engineering pipeline, not a novel model. RF provides a strong supervised baseline that the features can be evaluated against.</a:t>
+            </a:r>
+          </a:p>
+        </p:txBody>
+      </p:sp>
+      <p:sp>
+        <p:nvSpPr>
+          <p:cNvPr id="10" name="Rectangle 9"/>
           <p:cNvSpPr/>
           <p:nvPr/>
         </p:nvSpPr>
@@ -25770,7 +25610,7 @@
       </p:sp>
       <p:sp>
         <p:nvSpPr>
-          <p:cNvPr id="12" name="Rectangle 11"/>
+          <p:cNvPr id="11" name="Rectangle 10"/>
           <p:cNvSpPr/>
           <p:nvPr/>
         </p:nvSpPr>
@@ -25783,7 +25623,7 @@
             <a:avLst/>
           </a:prstGeom>
           <a:solidFill>
-            <a:srgbClr val="1E2761"/>
+            <a:srgbClr val="8FAEEB"/>
           </a:solidFill>
           <a:ln>
             <a:noFill/>
@@ -25814,7 +25654,7 @@
       </p:sp>
       <p:sp>
         <p:nvSpPr>
-          <p:cNvPr id="13" name="TextBox 12"/>
+          <p:cNvPr id="12" name="TextBox 11"/>
           <p:cNvSpPr txBox="1"/>
           <p:nvPr/>
         </p:nvSpPr>
@@ -25842,14 +25682,14 @@
                 </a:solidFill>
                 <a:latin typeface="Calibri"/>
               </a:rPr>
-              <a:t>LAYER B · Random Forest</a:t>
-            </a:r>
-          </a:p>
-        </p:txBody>
-      </p:sp>
-      <p:sp>
-        <p:nvSpPr>
-          <p:cNvPr id="14" name="TextBox 13"/>
+              <a:t>ALTERNATIVE · ISO + RF Stacked</a:t>
+            </a:r>
+          </a:p>
+        </p:txBody>
+      </p:sp>
+      <p:sp>
+        <p:nvSpPr>
+          <p:cNvPr id="13" name="TextBox 12"/>
           <p:cNvSpPr txBox="1"/>
           <p:nvPr/>
         </p:nvSpPr>
@@ -25877,14 +25717,14 @@
                 </a:solidFill>
                 <a:latin typeface="Calibri"/>
               </a:rPr>
-              <a:t>Supervised · 4-class multiclass classification</a:t>
-            </a:r>
-          </a:p>
-        </p:txBody>
-      </p:sp>
-      <p:sp>
-        <p:nvSpPr>
-          <p:cNvPr id="15" name="TextBox 14"/>
+              <a:t>Semi-supervised extension · Reported for comparison</a:t>
+            </a:r>
+          </a:p>
+        </p:txBody>
+      </p:sp>
+      <p:sp>
+        <p:nvSpPr>
+          <p:cNvPr id="14" name="TextBox 13"/>
           <p:cNvSpPr txBox="1"/>
           <p:nvPr/>
         </p:nvSpPr>
@@ -25912,7 +25752,7 @@
                 </a:solidFill>
                 <a:latin typeface="Calibri"/>
               </a:rPr>
-              <a:t>Classes: </a:t>
+              <a:t>Layer A: </a:t>
             </a:r>
             <a:r>
               <a:rPr sz="1200" b="0" i="0">
@@ -25921,19 +25761,37 @@
                 </a:solidFill>
                 <a:latin typeface="Calibri"/>
               </a:rPr>
-              <a:t>normal_user · http_flood · low_rate_bot · credential_stuffing</a:t>
-            </a:r>
-          </a:p>
-          <a:p>
-            <a:pPr algn="l"/>
+              <a:t>Isolation Forest trained only on normal_user, produces </a:t>
+            </a:r>
             <a:r>
               <a:rPr sz="1200" b="1" i="0">
                 <a:solidFill>
+                  <a:srgbClr val="1E2761"/>
+                </a:solidFill>
+                <a:latin typeface="Calibri"/>
+              </a:rPr>
+              <a:t>anomaly_score</a:t>
+            </a:r>
+            <a:r>
+              <a:rPr sz="1200" b="0" i="0">
+                <a:solidFill>
                   <a:srgbClr val="1A1A2E"/>
                 </a:solidFill>
                 <a:latin typeface="Calibri"/>
               </a:rPr>
-              <a:t>Setup: </a:t>
+              <a:t>.</a:t>
+            </a:r>
+          </a:p>
+          <a:p>
+            <a:pPr algn="l"/>
+            <a:r>
+              <a:rPr sz="1200" b="1" i="0">
+                <a:solidFill>
+                  <a:srgbClr val="1A1A2E"/>
+                </a:solidFill>
+                <a:latin typeface="Calibri"/>
+              </a:rPr>
+              <a:t>Layer B: </a:t>
             </a:r>
             <a:r>
               <a:rPr sz="1200" b="0" i="0">
@@ -25942,7 +25800,7 @@
                 </a:solidFill>
                 <a:latin typeface="Calibri"/>
               </a:rPr>
-              <a:t>300 trees, balanced_subsample class weight, 37 + 1 (anomaly_score) features.</a:t>
+              <a:t>Random Forest with the original 37 features + anomaly_score.</a:t>
             </a:r>
           </a:p>
           <a:p>
@@ -25950,27 +25808,27 @@
             <a:r>
               <a:rPr sz="1200" b="1" i="0">
                 <a:solidFill>
+                  <a:srgbClr val="F96167"/>
+                </a:solidFill>
+                <a:latin typeface="Calibri"/>
+              </a:rPr>
+              <a:t>Finding: </a:t>
+            </a:r>
+            <a:r>
+              <a:rPr sz="1200" b="0" i="1">
+                <a:solidFill>
                   <a:srgbClr val="1A1A2E"/>
                 </a:solidFill>
                 <a:latin typeface="Calibri"/>
               </a:rPr>
-              <a:t>Comparison: </a:t>
-            </a:r>
-            <a:r>
-              <a:rPr sz="1200" b="0" i="0">
-                <a:solidFill>
-                  <a:srgbClr val="1A1A2E"/>
-                </a:solidFill>
-                <a:latin typeface="Calibri"/>
-              </a:rPr>
-              <a:t>directly compared against a baseline RF trained on the same 37 features without anomaly_score.</a:t>
-            </a:r>
-          </a:p>
-        </p:txBody>
-      </p:sp>
-      <p:sp>
-        <p:nvSpPr>
-          <p:cNvPr id="16" name="TextBox 15"/>
+              <a:t>Under V3 production-realistic conditions, the ISO+RF extension provides no additional mimicry detection benefit (88.9% vs 96.4%). The unsupervised layer becomes redundant when rate signals are well-separated.</a:t>
+            </a:r>
+          </a:p>
+        </p:txBody>
+      </p:sp>
+      <p:sp>
+        <p:nvSpPr>
+          <p:cNvPr id="15" name="TextBox 14"/>
           <p:cNvSpPr txBox="1"/>
           <p:nvPr/>
         </p:nvSpPr>
@@ -25998,14 +25856,14 @@
                 </a:solidFill>
                 <a:latin typeface="Calibri"/>
               </a:rPr>
-              <a:t>Why stacked? — The semi-supervised layer learns the "shape" of normal traffic; the supervised layer maps deviations into specific attack types. The two together gave consistent results both in-distribution and on the mimicry holdout.</a:t>
-            </a:r>
-          </a:p>
-        </p:txBody>
-      </p:sp>
-      <p:sp>
-        <p:nvSpPr>
-          <p:cNvPr id="17" name="TextBox 16"/>
+              <a:t>Evaluation: Proposed RF compared against rate-threshold, EWMA/CUSUM, and default RF baselines, plus ISO+RF alternative. Mimicry holdout protocol applied throughout.</a:t>
+            </a:r>
+          </a:p>
+        </p:txBody>
+      </p:sp>
+      <p:sp>
+        <p:nvSpPr>
+          <p:cNvPr id="16" name="TextBox 15"/>
           <p:cNvSpPr txBox="1"/>
           <p:nvPr/>
         </p:nvSpPr>
@@ -26040,7 +25898,7 @@
       </p:sp>
       <p:sp>
         <p:nvSpPr>
-          <p:cNvPr id="18" name="TextBox 17"/>
+          <p:cNvPr id="17" name="TextBox 16"/>
           <p:cNvSpPr txBox="1"/>
           <p:nvPr/>
         </p:nvSpPr>

--- a/Thesis_Checkpoint_Presentation.pptx
+++ b/Thesis_Checkpoint_Presentation.pptx
@@ -5,31 +5,31 @@
     <p:sldMasterId id="2147483648" r:id="rId1"/>
   </p:sldMasterIdLst>
   <p:sldIdLst>
-    <p:sldId id="256" r:id="rId7"/>
-    <p:sldId id="257" r:id="rId8"/>
-    <p:sldId id="258" r:id="rId9"/>
-    <p:sldId id="259" r:id="rId10"/>
-    <p:sldId id="260" r:id="rId11"/>
-    <p:sldId id="261" r:id="rId12"/>
-    <p:sldId id="262" r:id="rId13"/>
-    <p:sldId id="263" r:id="rId14"/>
-    <p:sldId id="264" r:id="rId15"/>
-    <p:sldId id="265" r:id="rId16"/>
-    <p:sldId id="266" r:id="rId17"/>
-    <p:sldId id="267" r:id="rId18"/>
-    <p:sldId id="268" r:id="rId19"/>
-    <p:sldId id="269" r:id="rId20"/>
-    <p:sldId id="270" r:id="rId21"/>
-    <p:sldId id="271" r:id="rId22"/>
-    <p:sldId id="272" r:id="rId23"/>
-    <p:sldId id="273" r:id="rId24"/>
-    <p:sldId id="274" r:id="rId25"/>
-    <p:sldId id="275" r:id="rId26"/>
-    <p:sldId id="276" r:id="rId27"/>
-    <p:sldId id="277" r:id="rId28"/>
-    <p:sldId id="278" r:id="rId29"/>
+    <p:sldId id="256" r:id="rId2"/>
+    <p:sldId id="257" r:id="rId3"/>
+    <p:sldId id="258" r:id="rId4"/>
+    <p:sldId id="259" r:id="rId5"/>
+    <p:sldId id="260" r:id="rId6"/>
+    <p:sldId id="261" r:id="rId7"/>
+    <p:sldId id="262" r:id="rId8"/>
+    <p:sldId id="263" r:id="rId9"/>
+    <p:sldId id="264" r:id="rId10"/>
+    <p:sldId id="265" r:id="rId11"/>
+    <p:sldId id="266" r:id="rId12"/>
+    <p:sldId id="267" r:id="rId13"/>
+    <p:sldId id="268" r:id="rId14"/>
+    <p:sldId id="269" r:id="rId15"/>
+    <p:sldId id="270" r:id="rId16"/>
+    <p:sldId id="271" r:id="rId17"/>
+    <p:sldId id="272" r:id="rId18"/>
+    <p:sldId id="273" r:id="rId19"/>
+    <p:sldId id="274" r:id="rId20"/>
+    <p:sldId id="275" r:id="rId21"/>
+    <p:sldId id="276" r:id="rId22"/>
+    <p:sldId id="277" r:id="rId23"/>
+    <p:sldId id="278" r:id="rId24"/>
   </p:sldIdLst>
-  <p:sldSz cx="12161520" cy="6858000" type="screen4x3"/>
+  <p:sldSz cx="12161838" cy="6858000"/>
   <p:notesSz cx="6858000" cy="9144000"/>
   <p:defaultTextStyle>
     <a:defPPr>
@@ -126,18 +126,39 @@
       </a:defRPr>
     </a:lvl9pPr>
   </p:defaultTextStyle>
+  <p:extLst>
+    <p:ext uri="{EFAFB233-063F-42B5-8137-9DF3F51BA10A}">
+      <p15:sldGuideLst xmlns:p15="http://schemas.microsoft.com/office/powerpoint/2012/main">
+        <p15:guide id="1" orient="horz" pos="2160">
+          <p15:clr>
+            <a:srgbClr val="A4A3A4"/>
+          </p15:clr>
+        </p15:guide>
+        <p15:guide id="2" pos="2880">
+          <p15:clr>
+            <a:srgbClr val="A4A3A4"/>
+          </p15:clr>
+        </p15:guide>
+      </p15:sldGuideLst>
+    </p:ext>
+  </p:extLst>
 </p:presentation>
 </file>
 
 <file path=ppt/charts/chart1.xml><?xml version="1.0" encoding="utf-8"?>
-<c:chartSpace xmlns:c="http://schemas.openxmlformats.org/drawingml/2006/chart" xmlns:a="http://schemas.openxmlformats.org/drawingml/2006/main" xmlns:r="http://schemas.openxmlformats.org/officeDocument/2006/relationships">
+<c:chartSpace xmlns:c="http://schemas.openxmlformats.org/drawingml/2006/chart" xmlns:a="http://schemas.openxmlformats.org/drawingml/2006/main" xmlns:r="http://schemas.openxmlformats.org/officeDocument/2006/relationships" xmlns:c16r2="http://schemas.microsoft.com/office/drawing/2015/06/chart">
   <c:date1904 val="0"/>
+  <c:lang val="tr-TR"/>
+  <c:roundedCorners val="1"/>
+  <c:style val="2"/>
   <c:chart>
     <c:autoTitleDeleted val="1"/>
     <c:plotArea>
+      <c:layout/>
       <c:barChart>
         <c:barDir val="col"/>
         <c:grouping val="clustered"/>
+        <c:varyColors val="1"/>
         <c:ser>
           <c:idx val="0"/>
           <c:order val="0"/>
@@ -157,6 +178,43 @@
               <a:srgbClr val="02C39A"/>
             </a:solidFill>
           </c:spPr>
+          <c:invertIfNegative val="1"/>
+          <c:dLbls>
+            <c:numFmt formatCode="0.00" sourceLinked="0"/>
+            <c:spPr>
+              <a:noFill/>
+              <a:ln>
+                <a:noFill/>
+              </a:ln>
+              <a:effectLst/>
+            </c:spPr>
+            <c:txPr>
+              <a:bodyPr/>
+              <a:lstStyle/>
+              <a:p>
+                <a:pPr>
+                  <a:defRPr sz="900">
+                    <a:solidFill>
+                      <a:srgbClr val="FFFFFF"/>
+                    </a:solidFill>
+                  </a:defRPr>
+                </a:pPr>
+                <a:endParaRPr lang="tr-TR"/>
+              </a:p>
+            </c:txPr>
+            <c:showLegendKey val="0"/>
+            <c:showVal val="1"/>
+            <c:showCatName val="0"/>
+            <c:showSerName val="0"/>
+            <c:showPercent val="0"/>
+            <c:showBubbleSize val="0"/>
+            <c:showLeaderLines val="0"/>
+            <c:extLst>
+              <c:ext xmlns:c15="http://schemas.microsoft.com/office/drawing/2012/chart" uri="{CE6537A1-D6FC-4f65-9D91-7224C49458BB}">
+                <c15:showLeaderLines val="0"/>
+              </c:ext>
+            </c:extLst>
+          </c:dLbls>
           <c:cat>
             <c:strRef>
               <c:f>Sheet1!$A$2:$A$4</c:f>
@@ -181,17 +239,31 @@
                 <c:formatCode>General</c:formatCode>
                 <c:ptCount val="3"/>
                 <c:pt idx="0">
-                  <c:v>0.9638</c:v>
+                  <c:v>0.96379999999999999</c:v>
                 </c:pt>
                 <c:pt idx="1">
-                  <c:v>0.0308</c:v>
+                  <c:v>3.0800000000000001E-2</c:v>
                 </c:pt>
                 <c:pt idx="2">
-                  <c:v>0.0054</c:v>
+                  <c:v>5.4000000000000003E-3</c:v>
                 </c:pt>
               </c:numCache>
             </c:numRef>
           </c:val>
+          <c:extLst>
+            <c:ext xmlns:c14="http://schemas.microsoft.com/office/drawing/2007/8/2/chart" uri="{6F2FDCE9-48DA-4B69-8628-5D25D57E5C99}">
+              <c14:invertSolidFillFmt>
+                <c14:spPr xmlns:c14="http://schemas.microsoft.com/office/drawing/2007/8/2/chart">
+                  <a:solidFill>
+                    <a:srgbClr val="FFFFFF"/>
+                  </a:solidFill>
+                </c14:spPr>
+              </c14:invertSolidFillFmt>
+            </c:ext>
+            <c:ext xmlns:c16="http://schemas.microsoft.com/office/drawing/2014/chart" uri="{C3380CC4-5D6E-409C-BE32-E72D297353CC}">
+              <c16:uniqueId val="{00000000-0F65-8E42-BB53-61E1AAB8AF1A}"/>
+            </c:ext>
+          </c:extLst>
         </c:ser>
         <c:ser>
           <c:idx val="1"/>
@@ -212,6 +284,43 @@
               <a:srgbClr val="8FAEEB"/>
             </a:solidFill>
           </c:spPr>
+          <c:invertIfNegative val="1"/>
+          <c:dLbls>
+            <c:numFmt formatCode="0.00" sourceLinked="0"/>
+            <c:spPr>
+              <a:noFill/>
+              <a:ln>
+                <a:noFill/>
+              </a:ln>
+              <a:effectLst/>
+            </c:spPr>
+            <c:txPr>
+              <a:bodyPr/>
+              <a:lstStyle/>
+              <a:p>
+                <a:pPr>
+                  <a:defRPr sz="900">
+                    <a:solidFill>
+                      <a:srgbClr val="FFFFFF"/>
+                    </a:solidFill>
+                  </a:defRPr>
+                </a:pPr>
+                <a:endParaRPr lang="tr-TR"/>
+              </a:p>
+            </c:txPr>
+            <c:showLegendKey val="0"/>
+            <c:showVal val="1"/>
+            <c:showCatName val="0"/>
+            <c:showSerName val="0"/>
+            <c:showPercent val="0"/>
+            <c:showBubbleSize val="0"/>
+            <c:showLeaderLines val="0"/>
+            <c:extLst>
+              <c:ext xmlns:c15="http://schemas.microsoft.com/office/drawing/2012/chart" uri="{CE6537A1-D6FC-4f65-9D91-7224C49458BB}">
+                <c15:showLeaderLines val="0"/>
+              </c:ext>
+            </c:extLst>
+          </c:dLbls>
           <c:cat>
             <c:strRef>
               <c:f>Sheet1!$A$2:$A$4</c:f>
@@ -242,35 +351,35 @@
                   <c:v>0.1055</c:v>
                 </c:pt>
                 <c:pt idx="2">
-                  <c:v>0.0054</c:v>
+                  <c:v>5.4000000000000003E-3</c:v>
                 </c:pt>
               </c:numCache>
             </c:numRef>
           </c:val>
-        </c:ser>
-        <c:dLbls>
-          <c:numFmt formatCode="0.00" sourceLinked="0"/>
-          <c:txPr>
-            <a:bodyPr/>
-            <a:lstStyle/>
-            <a:p>
-              <a:pPr>
-                <a:defRPr sz="900">
+          <c:extLst>
+            <c:ext xmlns:c14="http://schemas.microsoft.com/office/drawing/2007/8/2/chart" uri="{6F2FDCE9-48DA-4B69-8628-5D25D57E5C99}">
+              <c14:invertSolidFillFmt>
+                <c14:spPr xmlns:c14="http://schemas.microsoft.com/office/drawing/2007/8/2/chart">
                   <a:solidFill>
                     <a:srgbClr val="FFFFFF"/>
                   </a:solidFill>
-                </a:defRPr>
-              </a:pPr>
-            </a:p>
-          </c:txPr>
+                </c14:spPr>
+              </c14:invertSolidFillFmt>
+            </c:ext>
+            <c:ext xmlns:c16="http://schemas.microsoft.com/office/drawing/2014/chart" uri="{C3380CC4-5D6E-409C-BE32-E72D297353CC}">
+              <c16:uniqueId val="{00000001-0F65-8E42-BB53-61E1AAB8AF1A}"/>
+            </c:ext>
+          </c:extLst>
+        </c:ser>
+        <c:dLbls>
           <c:showLegendKey val="0"/>
           <c:showVal val="1"/>
           <c:showCatName val="0"/>
           <c:showSerName val="0"/>
           <c:showPercent val="0"/>
           <c:showBubbleSize val="0"/>
-          <c:showLeaderLines val="1"/>
         </c:dLbls>
+        <c:gapWidth val="150"/>
         <c:axId val="-2068027336"/>
         <c:axId val="-2113994440"/>
       </c:barChart>
@@ -281,6 +390,7 @@
         </c:scaling>
         <c:delete val="0"/>
         <c:axPos val="b"/>
+        <c:numFmt formatCode="General" sourceLinked="0"/>
         <c:majorTickMark val="out"/>
         <c:minorTickMark val="none"/>
         <c:tickLblPos val="nextTo"/>
@@ -293,22 +403,28 @@
       </c:catAx>
       <c:valAx>
         <c:axId val="-2113994440"/>
-        <c:scaling/>
+        <c:scaling>
+          <c:orientation val="minMax"/>
+        </c:scaling>
         <c:delete val="0"/>
         <c:axPos val="l"/>
         <c:majorGridlines/>
+        <c:numFmt formatCode="General" sourceLinked="1"/>
         <c:majorTickMark val="out"/>
         <c:minorTickMark val="none"/>
         <c:tickLblPos val="nextTo"/>
         <c:crossAx val="-2068027336"/>
         <c:crosses val="autoZero"/>
+        <c:crossBetween val="between"/>
       </c:valAx>
     </c:plotArea>
     <c:legend>
-      <c:legendPos/>
+      <c:legendPos val="r"/>
       <c:overlay val="0"/>
     </c:legend>
+    <c:plotVisOnly val="1"/>
     <c:dispBlanksAs val="gap"/>
+    <c:showDLblsOverMax val="1"/>
   </c:chart>
   <c:txPr>
     <a:bodyPr/>
@@ -364,10 +480,9 @@
           <a:lstStyle/>
           <a:p>
             <a:r>
-              <a:rPr lang="en-US" smtClean="0"/>
+              <a:rPr lang="en-US"/>
               <a:t>Click to edit Master title style</a:t>
             </a:r>
-            <a:endParaRPr lang="en-US"/>
           </a:p>
         </p:txBody>
       </p:sp>
@@ -483,10 +598,9 @@
           </a:lstStyle>
           <a:p>
             <a:r>
-              <a:rPr lang="en-US" smtClean="0"/>
+              <a:rPr lang="en-US"/>
               <a:t>Click to edit Master subtitle style</a:t>
             </a:r>
-            <a:endParaRPr lang="en-US"/>
           </a:p>
         </p:txBody>
       </p:sp>
@@ -507,7 +621,7 @@
           <a:p>
             <a:fld id="{5BCAD085-E8A6-8845-BD4E-CB4CCA059FC4}" type="datetimeFigureOut">
               <a:rPr lang="en-US" smtClean="0"/>
-              <a:t>1/27/13</a:t>
+              <a:t>5/21/26</a:t>
             </a:fld>
             <a:endParaRPr lang="en-US"/>
           </a:p>
@@ -601,10 +715,9 @@
           <a:lstStyle/>
           <a:p>
             <a:r>
-              <a:rPr lang="en-US" smtClean="0"/>
+              <a:rPr lang="en-US"/>
               <a:t>Click to edit Master title style</a:t>
             </a:r>
-            <a:endParaRPr lang="en-US"/>
           </a:p>
         </p:txBody>
       </p:sp>
@@ -625,38 +738,37 @@
           <a:p>
             <a:pPr lvl="0"/>
             <a:r>
-              <a:rPr lang="en-US" smtClean="0"/>
+              <a:rPr lang="en-US"/>
               <a:t>Click to edit Master text styles</a:t>
             </a:r>
           </a:p>
           <a:p>
             <a:pPr lvl="1"/>
             <a:r>
-              <a:rPr lang="en-US" smtClean="0"/>
+              <a:rPr lang="en-US"/>
               <a:t>Second level</a:t>
             </a:r>
           </a:p>
           <a:p>
             <a:pPr lvl="2"/>
             <a:r>
-              <a:rPr lang="en-US" smtClean="0"/>
+              <a:rPr lang="en-US"/>
               <a:t>Third level</a:t>
             </a:r>
           </a:p>
           <a:p>
             <a:pPr lvl="3"/>
             <a:r>
-              <a:rPr lang="en-US" smtClean="0"/>
+              <a:rPr lang="en-US"/>
               <a:t>Fourth level</a:t>
             </a:r>
           </a:p>
           <a:p>
             <a:pPr lvl="4"/>
             <a:r>
-              <a:rPr lang="en-US" smtClean="0"/>
+              <a:rPr lang="en-US"/>
               <a:t>Fifth level</a:t>
             </a:r>
-            <a:endParaRPr lang="en-US"/>
           </a:p>
         </p:txBody>
       </p:sp>
@@ -677,7 +789,7 @@
           <a:p>
             <a:fld id="{5BCAD085-E8A6-8845-BD4E-CB4CCA059FC4}" type="datetimeFigureOut">
               <a:rPr lang="en-US" smtClean="0"/>
-              <a:t>1/27/13</a:t>
+              <a:t>5/21/26</a:t>
             </a:fld>
             <a:endParaRPr lang="en-US"/>
           </a:p>
@@ -776,10 +888,9 @@
           <a:lstStyle/>
           <a:p>
             <a:r>
-              <a:rPr lang="en-US" smtClean="0"/>
+              <a:rPr lang="en-US"/>
               <a:t>Click to edit Master title style</a:t>
             </a:r>
-            <a:endParaRPr lang="en-US"/>
           </a:p>
         </p:txBody>
       </p:sp>
@@ -805,38 +916,37 @@
           <a:p>
             <a:pPr lvl="0"/>
             <a:r>
-              <a:rPr lang="en-US" smtClean="0"/>
+              <a:rPr lang="en-US"/>
               <a:t>Click to edit Master text styles</a:t>
             </a:r>
           </a:p>
           <a:p>
             <a:pPr lvl="1"/>
             <a:r>
-              <a:rPr lang="en-US" smtClean="0"/>
+              <a:rPr lang="en-US"/>
               <a:t>Second level</a:t>
             </a:r>
           </a:p>
           <a:p>
             <a:pPr lvl="2"/>
             <a:r>
-              <a:rPr lang="en-US" smtClean="0"/>
+              <a:rPr lang="en-US"/>
               <a:t>Third level</a:t>
             </a:r>
           </a:p>
           <a:p>
             <a:pPr lvl="3"/>
             <a:r>
-              <a:rPr lang="en-US" smtClean="0"/>
+              <a:rPr lang="en-US"/>
               <a:t>Fourth level</a:t>
             </a:r>
           </a:p>
           <a:p>
             <a:pPr lvl="4"/>
             <a:r>
-              <a:rPr lang="en-US" smtClean="0"/>
+              <a:rPr lang="en-US"/>
               <a:t>Fifth level</a:t>
             </a:r>
-            <a:endParaRPr lang="en-US"/>
           </a:p>
         </p:txBody>
       </p:sp>
@@ -857,7 +967,7 @@
           <a:p>
             <a:fld id="{5BCAD085-E8A6-8845-BD4E-CB4CCA059FC4}" type="datetimeFigureOut">
               <a:rPr lang="en-US" smtClean="0"/>
-              <a:t>1/27/13</a:t>
+              <a:t>5/21/26</a:t>
             </a:fld>
             <a:endParaRPr lang="en-US"/>
           </a:p>
@@ -951,10 +1061,9 @@
           <a:lstStyle/>
           <a:p>
             <a:r>
-              <a:rPr lang="en-US" smtClean="0"/>
+              <a:rPr lang="en-US"/>
               <a:t>Click to edit Master title style</a:t>
             </a:r>
-            <a:endParaRPr lang="en-US"/>
           </a:p>
         </p:txBody>
       </p:sp>
@@ -975,38 +1084,37 @@
           <a:p>
             <a:pPr lvl="0"/>
             <a:r>
-              <a:rPr lang="en-US" smtClean="0"/>
+              <a:rPr lang="en-US"/>
               <a:t>Click to edit Master text styles</a:t>
             </a:r>
           </a:p>
           <a:p>
             <a:pPr lvl="1"/>
             <a:r>
-              <a:rPr lang="en-US" smtClean="0"/>
+              <a:rPr lang="en-US"/>
               <a:t>Second level</a:t>
             </a:r>
           </a:p>
           <a:p>
             <a:pPr lvl="2"/>
             <a:r>
-              <a:rPr lang="en-US" smtClean="0"/>
+              <a:rPr lang="en-US"/>
               <a:t>Third level</a:t>
             </a:r>
           </a:p>
           <a:p>
             <a:pPr lvl="3"/>
             <a:r>
-              <a:rPr lang="en-US" smtClean="0"/>
+              <a:rPr lang="en-US"/>
               <a:t>Fourth level</a:t>
             </a:r>
           </a:p>
           <a:p>
             <a:pPr lvl="4"/>
             <a:r>
-              <a:rPr lang="en-US" smtClean="0"/>
+              <a:rPr lang="en-US"/>
               <a:t>Fifth level</a:t>
             </a:r>
-            <a:endParaRPr lang="en-US"/>
           </a:p>
         </p:txBody>
       </p:sp>
@@ -1027,7 +1135,7 @@
           <a:p>
             <a:fld id="{5BCAD085-E8A6-8845-BD4E-CB4CCA059FC4}" type="datetimeFigureOut">
               <a:rPr lang="en-US" smtClean="0"/>
-              <a:t>1/27/13</a:t>
+              <a:t>5/21/26</a:t>
             </a:fld>
             <a:endParaRPr lang="en-US"/>
           </a:p>
@@ -1130,10 +1238,9 @@
           </a:lstStyle>
           <a:p>
             <a:r>
-              <a:rPr lang="en-US" smtClean="0"/>
+              <a:rPr lang="en-US"/>
               <a:t>Click to edit Master title style</a:t>
             </a:r>
-            <a:endParaRPr lang="en-US"/>
           </a:p>
         </p:txBody>
       </p:sp>
@@ -1250,7 +1357,7 @@
           <a:p>
             <a:pPr lvl="0"/>
             <a:r>
-              <a:rPr lang="en-US" smtClean="0"/>
+              <a:rPr lang="en-US"/>
               <a:t>Click to edit Master text styles</a:t>
             </a:r>
           </a:p>
@@ -1273,7 +1380,7 @@
           <a:p>
             <a:fld id="{5BCAD085-E8A6-8845-BD4E-CB4CCA059FC4}" type="datetimeFigureOut">
               <a:rPr lang="en-US" smtClean="0"/>
-              <a:t>1/27/13</a:t>
+              <a:t>5/21/26</a:t>
             </a:fld>
             <a:endParaRPr lang="en-US"/>
           </a:p>
@@ -1367,10 +1474,9 @@
           <a:lstStyle/>
           <a:p>
             <a:r>
-              <a:rPr lang="en-US" smtClean="0"/>
+              <a:rPr lang="en-US"/>
               <a:t>Click to edit Master title style</a:t>
             </a:r>
-            <a:endParaRPr lang="en-US"/>
           </a:p>
         </p:txBody>
       </p:sp>
@@ -1424,38 +1530,37 @@
           <a:p>
             <a:pPr lvl="0"/>
             <a:r>
-              <a:rPr lang="en-US" smtClean="0"/>
+              <a:rPr lang="en-US"/>
               <a:t>Click to edit Master text styles</a:t>
             </a:r>
           </a:p>
           <a:p>
             <a:pPr lvl="1"/>
             <a:r>
-              <a:rPr lang="en-US" smtClean="0"/>
+              <a:rPr lang="en-US"/>
               <a:t>Second level</a:t>
             </a:r>
           </a:p>
           <a:p>
             <a:pPr lvl="2"/>
             <a:r>
-              <a:rPr lang="en-US" smtClean="0"/>
+              <a:rPr lang="en-US"/>
               <a:t>Third level</a:t>
             </a:r>
           </a:p>
           <a:p>
             <a:pPr lvl="3"/>
             <a:r>
-              <a:rPr lang="en-US" smtClean="0"/>
+              <a:rPr lang="en-US"/>
               <a:t>Fourth level</a:t>
             </a:r>
           </a:p>
           <a:p>
             <a:pPr lvl="4"/>
             <a:r>
-              <a:rPr lang="en-US" smtClean="0"/>
+              <a:rPr lang="en-US"/>
               <a:t>Fifth level</a:t>
             </a:r>
-            <a:endParaRPr lang="en-US"/>
           </a:p>
         </p:txBody>
       </p:sp>
@@ -1509,38 +1614,37 @@
           <a:p>
             <a:pPr lvl="0"/>
             <a:r>
-              <a:rPr lang="en-US" smtClean="0"/>
+              <a:rPr lang="en-US"/>
               <a:t>Click to edit Master text styles</a:t>
             </a:r>
           </a:p>
           <a:p>
             <a:pPr lvl="1"/>
             <a:r>
-              <a:rPr lang="en-US" smtClean="0"/>
+              <a:rPr lang="en-US"/>
               <a:t>Second level</a:t>
             </a:r>
           </a:p>
           <a:p>
             <a:pPr lvl="2"/>
             <a:r>
-              <a:rPr lang="en-US" smtClean="0"/>
+              <a:rPr lang="en-US"/>
               <a:t>Third level</a:t>
             </a:r>
           </a:p>
           <a:p>
             <a:pPr lvl="3"/>
             <a:r>
-              <a:rPr lang="en-US" smtClean="0"/>
+              <a:rPr lang="en-US"/>
               <a:t>Fourth level</a:t>
             </a:r>
           </a:p>
           <a:p>
             <a:pPr lvl="4"/>
             <a:r>
-              <a:rPr lang="en-US" smtClean="0"/>
+              <a:rPr lang="en-US"/>
               <a:t>Fifth level</a:t>
             </a:r>
-            <a:endParaRPr lang="en-US"/>
           </a:p>
         </p:txBody>
       </p:sp>
@@ -1561,7 +1665,7 @@
           <a:p>
             <a:fld id="{5BCAD085-E8A6-8845-BD4E-CB4CCA059FC4}" type="datetimeFigureOut">
               <a:rPr lang="en-US" smtClean="0"/>
-              <a:t>1/27/13</a:t>
+              <a:t>5/21/26</a:t>
             </a:fld>
             <a:endParaRPr lang="en-US"/>
           </a:p>
@@ -1659,10 +1763,9 @@
           </a:lstStyle>
           <a:p>
             <a:r>
-              <a:rPr lang="en-US" smtClean="0"/>
+              <a:rPr lang="en-US"/>
               <a:t>Click to edit Master title style</a:t>
             </a:r>
-            <a:endParaRPr lang="en-US"/>
           </a:p>
         </p:txBody>
       </p:sp>
@@ -1725,7 +1828,7 @@
           <a:p>
             <a:pPr lvl="0"/>
             <a:r>
-              <a:rPr lang="en-US" smtClean="0"/>
+              <a:rPr lang="en-US"/>
               <a:t>Click to edit Master text styles</a:t>
             </a:r>
           </a:p>
@@ -1781,38 +1884,37 @@
           <a:p>
             <a:pPr lvl="0"/>
             <a:r>
-              <a:rPr lang="en-US" smtClean="0"/>
+              <a:rPr lang="en-US"/>
               <a:t>Click to edit Master text styles</a:t>
             </a:r>
           </a:p>
           <a:p>
             <a:pPr lvl="1"/>
             <a:r>
-              <a:rPr lang="en-US" smtClean="0"/>
+              <a:rPr lang="en-US"/>
               <a:t>Second level</a:t>
             </a:r>
           </a:p>
           <a:p>
             <a:pPr lvl="2"/>
             <a:r>
-              <a:rPr lang="en-US" smtClean="0"/>
+              <a:rPr lang="en-US"/>
               <a:t>Third level</a:t>
             </a:r>
           </a:p>
           <a:p>
             <a:pPr lvl="3"/>
             <a:r>
-              <a:rPr lang="en-US" smtClean="0"/>
+              <a:rPr lang="en-US"/>
               <a:t>Fourth level</a:t>
             </a:r>
           </a:p>
           <a:p>
             <a:pPr lvl="4"/>
             <a:r>
-              <a:rPr lang="en-US" smtClean="0"/>
+              <a:rPr lang="en-US"/>
               <a:t>Fifth level</a:t>
             </a:r>
-            <a:endParaRPr lang="en-US"/>
           </a:p>
         </p:txBody>
       </p:sp>
@@ -1875,7 +1977,7 @@
           <a:p>
             <a:pPr lvl="0"/>
             <a:r>
-              <a:rPr lang="en-US" smtClean="0"/>
+              <a:rPr lang="en-US"/>
               <a:t>Click to edit Master text styles</a:t>
             </a:r>
           </a:p>
@@ -1931,38 +2033,37 @@
           <a:p>
             <a:pPr lvl="0"/>
             <a:r>
-              <a:rPr lang="en-US" smtClean="0"/>
+              <a:rPr lang="en-US"/>
               <a:t>Click to edit Master text styles</a:t>
             </a:r>
           </a:p>
           <a:p>
             <a:pPr lvl="1"/>
             <a:r>
-              <a:rPr lang="en-US" smtClean="0"/>
+              <a:rPr lang="en-US"/>
               <a:t>Second level</a:t>
             </a:r>
           </a:p>
           <a:p>
             <a:pPr lvl="2"/>
             <a:r>
-              <a:rPr lang="en-US" smtClean="0"/>
+              <a:rPr lang="en-US"/>
               <a:t>Third level</a:t>
             </a:r>
           </a:p>
           <a:p>
             <a:pPr lvl="3"/>
             <a:r>
-              <a:rPr lang="en-US" smtClean="0"/>
+              <a:rPr lang="en-US"/>
               <a:t>Fourth level</a:t>
             </a:r>
           </a:p>
           <a:p>
             <a:pPr lvl="4"/>
             <a:r>
-              <a:rPr lang="en-US" smtClean="0"/>
+              <a:rPr lang="en-US"/>
               <a:t>Fifth level</a:t>
             </a:r>
-            <a:endParaRPr lang="en-US"/>
           </a:p>
         </p:txBody>
       </p:sp>
@@ -1983,7 +2084,7 @@
           <a:p>
             <a:fld id="{5BCAD085-E8A6-8845-BD4E-CB4CCA059FC4}" type="datetimeFigureOut">
               <a:rPr lang="en-US" smtClean="0"/>
-              <a:t>1/27/13</a:t>
+              <a:t>5/21/26</a:t>
             </a:fld>
             <a:endParaRPr lang="en-US"/>
           </a:p>
@@ -2077,10 +2178,9 @@
           <a:lstStyle/>
           <a:p>
             <a:r>
-              <a:rPr lang="en-US" smtClean="0"/>
+              <a:rPr lang="en-US"/>
               <a:t>Click to edit Master title style</a:t>
             </a:r>
-            <a:endParaRPr lang="en-US"/>
           </a:p>
         </p:txBody>
       </p:sp>
@@ -2101,7 +2201,7 @@
           <a:p>
             <a:fld id="{5BCAD085-E8A6-8845-BD4E-CB4CCA059FC4}" type="datetimeFigureOut">
               <a:rPr lang="en-US" smtClean="0"/>
-              <a:t>1/27/13</a:t>
+              <a:t>5/21/26</a:t>
             </a:fld>
             <a:endParaRPr lang="en-US"/>
           </a:p>
@@ -2196,7 +2296,7 @@
           <a:p>
             <a:fld id="{5BCAD085-E8A6-8845-BD4E-CB4CCA059FC4}" type="datetimeFigureOut">
               <a:rPr lang="en-US" smtClean="0"/>
-              <a:t>1/27/13</a:t>
+              <a:t>5/21/26</a:t>
             </a:fld>
             <a:endParaRPr lang="en-US"/>
           </a:p>
@@ -2299,10 +2399,9 @@
           </a:lstStyle>
           <a:p>
             <a:r>
-              <a:rPr lang="en-US" smtClean="0"/>
+              <a:rPr lang="en-US"/>
               <a:t>Click to edit Master title style</a:t>
             </a:r>
-            <a:endParaRPr lang="en-US"/>
           </a:p>
         </p:txBody>
       </p:sp>
@@ -2356,38 +2455,37 @@
           <a:p>
             <a:pPr lvl="0"/>
             <a:r>
-              <a:rPr lang="en-US" smtClean="0"/>
+              <a:rPr lang="en-US"/>
               <a:t>Click to edit Master text styles</a:t>
             </a:r>
           </a:p>
           <a:p>
             <a:pPr lvl="1"/>
             <a:r>
-              <a:rPr lang="en-US" smtClean="0"/>
+              <a:rPr lang="en-US"/>
               <a:t>Second level</a:t>
             </a:r>
           </a:p>
           <a:p>
             <a:pPr lvl="2"/>
             <a:r>
-              <a:rPr lang="en-US" smtClean="0"/>
+              <a:rPr lang="en-US"/>
               <a:t>Third level</a:t>
             </a:r>
           </a:p>
           <a:p>
             <a:pPr lvl="3"/>
             <a:r>
-              <a:rPr lang="en-US" smtClean="0"/>
+              <a:rPr lang="en-US"/>
               <a:t>Fourth level</a:t>
             </a:r>
           </a:p>
           <a:p>
             <a:pPr lvl="4"/>
             <a:r>
-              <a:rPr lang="en-US" smtClean="0"/>
+              <a:rPr lang="en-US"/>
               <a:t>Fifth level</a:t>
             </a:r>
-            <a:endParaRPr lang="en-US"/>
           </a:p>
         </p:txBody>
       </p:sp>
@@ -2450,7 +2548,7 @@
           <a:p>
             <a:pPr lvl="0"/>
             <a:r>
-              <a:rPr lang="en-US" smtClean="0"/>
+              <a:rPr lang="en-US"/>
               <a:t>Click to edit Master text styles</a:t>
             </a:r>
           </a:p>
@@ -2473,7 +2571,7 @@
           <a:p>
             <a:fld id="{5BCAD085-E8A6-8845-BD4E-CB4CCA059FC4}" type="datetimeFigureOut">
               <a:rPr lang="en-US" smtClean="0"/>
-              <a:t>1/27/13</a:t>
+              <a:t>5/21/26</a:t>
             </a:fld>
             <a:endParaRPr lang="en-US"/>
           </a:p>
@@ -2576,10 +2674,9 @@
           </a:lstStyle>
           <a:p>
             <a:r>
-              <a:rPr lang="en-US" smtClean="0"/>
+              <a:rPr lang="en-US"/>
               <a:t>Click to edit Master title style</a:t>
             </a:r>
-            <a:endParaRPr lang="en-US"/>
           </a:p>
         </p:txBody>
       </p:sp>
@@ -2703,7 +2800,7 @@
           <a:p>
             <a:pPr lvl="0"/>
             <a:r>
-              <a:rPr lang="en-US" smtClean="0"/>
+              <a:rPr lang="en-US"/>
               <a:t>Click to edit Master text styles</a:t>
             </a:r>
           </a:p>
@@ -2726,7 +2823,7 @@
           <a:p>
             <a:fld id="{5BCAD085-E8A6-8845-BD4E-CB4CCA059FC4}" type="datetimeFigureOut">
               <a:rPr lang="en-US" smtClean="0"/>
-              <a:t>1/27/13</a:t>
+              <a:t>5/21/26</a:t>
             </a:fld>
             <a:endParaRPr lang="en-US"/>
           </a:p>
@@ -2835,10 +2932,9 @@
           <a:lstStyle/>
           <a:p>
             <a:r>
-              <a:rPr lang="en-US" smtClean="0"/>
+              <a:rPr lang="en-US"/>
               <a:t>Click to edit Master title style</a:t>
             </a:r>
-            <a:endParaRPr lang="en-US"/>
           </a:p>
         </p:txBody>
       </p:sp>
@@ -2869,38 +2965,37 @@
           <a:p>
             <a:pPr lvl="0"/>
             <a:r>
-              <a:rPr lang="en-US" smtClean="0"/>
+              <a:rPr lang="en-US"/>
               <a:t>Click to edit Master text styles</a:t>
             </a:r>
           </a:p>
           <a:p>
             <a:pPr lvl="1"/>
             <a:r>
-              <a:rPr lang="en-US" smtClean="0"/>
+              <a:rPr lang="en-US"/>
               <a:t>Second level</a:t>
             </a:r>
           </a:p>
           <a:p>
             <a:pPr lvl="2"/>
             <a:r>
-              <a:rPr lang="en-US" smtClean="0"/>
+              <a:rPr lang="en-US"/>
               <a:t>Third level</a:t>
             </a:r>
           </a:p>
           <a:p>
             <a:pPr lvl="3"/>
             <a:r>
-              <a:rPr lang="en-US" smtClean="0"/>
+              <a:rPr lang="en-US"/>
               <a:t>Fourth level</a:t>
             </a:r>
           </a:p>
           <a:p>
             <a:pPr lvl="4"/>
             <a:r>
-              <a:rPr lang="en-US" smtClean="0"/>
+              <a:rPr lang="en-US"/>
               <a:t>Fifth level</a:t>
             </a:r>
-            <a:endParaRPr lang="en-US"/>
           </a:p>
         </p:txBody>
       </p:sp>
@@ -2939,7 +3034,7 @@
           <a:p>
             <a:fld id="{5BCAD085-E8A6-8845-BD4E-CB4CCA059FC4}" type="datetimeFigureOut">
               <a:rPr lang="en-US" smtClean="0"/>
-              <a:t>1/27/13</a:t>
+              <a:t>5/21/26</a:t>
             </a:fld>
             <a:endParaRPr lang="en-US"/>
           </a:p>
@@ -3298,7 +3393,7 @@
 </file>
 
 <file path=ppt/slides/slide1.xml><?xml version="1.0" encoding="utf-8"?>
-<p:sld xmlns:a="http://schemas.openxmlformats.org/drawingml/2006/main" xmlns:p="http://schemas.openxmlformats.org/presentationml/2006/main" xmlns:r="http://schemas.openxmlformats.org/officeDocument/2006/relationships">
+<p:sld xmlns:a="http://schemas.openxmlformats.org/drawingml/2006/main" xmlns:r="http://schemas.openxmlformats.org/officeDocument/2006/relationships" xmlns:p="http://schemas.openxmlformats.org/presentationml/2006/main">
   <p:cSld>
     <p:bg>
       <p:bgPr>
@@ -3314,7 +3409,14 @@
         <p:cNvGrpSpPr/>
         <p:nvPr/>
       </p:nvGrpSpPr>
-      <p:grpSpPr/>
+      <p:grpSpPr>
+        <a:xfrm>
+          <a:off x="0" y="0"/>
+          <a:ext cx="0" cy="0"/>
+          <a:chOff x="0" y="0"/>
+          <a:chExt cx="0" cy="0"/>
+        </a:xfrm>
+      </p:grpSpPr>
       <p:sp>
         <p:nvSpPr>
           <p:cNvPr id="2" name="Rectangle 1"/>
@@ -3356,6 +3458,7 @@
           <a:lstStyle/>
           <a:p>
             <a:pPr algn="ctr"/>
+            <a:endParaRPr/>
           </a:p>
         </p:txBody>
       </p:sp>
@@ -3376,7 +3479,7 @@
           <a:noFill/>
         </p:spPr>
         <p:txBody>
-          <a:bodyPr wrap="square" lIns="0" rIns="0" tIns="0" bIns="0" anchor="t">
+          <a:bodyPr wrap="square" lIns="0" tIns="0" rIns="0" bIns="0" anchor="t">
             <a:spAutoFit/>
           </a:bodyPr>
           <a:lstStyle/>
@@ -3411,7 +3514,7 @@
           <a:noFill/>
         </p:spPr>
         <p:txBody>
-          <a:bodyPr wrap="square" lIns="0" rIns="0" tIns="0" bIns="0" anchor="t">
+          <a:bodyPr wrap="square" lIns="0" tIns="0" rIns="0" bIns="0" anchor="t">
             <a:spAutoFit/>
           </a:bodyPr>
           <a:lstStyle/>
@@ -3458,7 +3561,7 @@
           <a:noFill/>
         </p:spPr>
         <p:txBody>
-          <a:bodyPr wrap="square" lIns="0" rIns="0" tIns="0" bIns="0" anchor="t">
+          <a:bodyPr wrap="square" lIns="0" tIns="0" rIns="0" bIns="0" anchor="t">
             <a:spAutoFit/>
           </a:bodyPr>
           <a:lstStyle/>
@@ -3517,6 +3620,7 @@
           <a:lstStyle/>
           <a:p>
             <a:pPr algn="ctr"/>
+            <a:endParaRPr/>
           </a:p>
         </p:txBody>
       </p:sp>
@@ -3529,22 +3633,22 @@
         <p:spPr>
           <a:xfrm>
             <a:off x="731520" y="4663440"/>
-            <a:ext cx="7315200" cy="1371600"/>
-          </a:xfrm>
-          <a:prstGeom prst="rect">
-            <a:avLst/>
-          </a:prstGeom>
-          <a:noFill/>
-        </p:spPr>
-        <p:txBody>
-          <a:bodyPr wrap="square" lIns="0" rIns="0" tIns="0" bIns="0" anchor="t">
-            <a:spAutoFit/>
-          </a:bodyPr>
-          <a:lstStyle/>
-          <a:p>
-            <a:pPr algn="l"/>
-            <a:r>
-              <a:rPr sz="1800" b="1" i="0">
+            <a:ext cx="7315200" cy="677108"/>
+          </a:xfrm>
+          <a:prstGeom prst="rect">
+            <a:avLst/>
+          </a:prstGeom>
+          <a:noFill/>
+        </p:spPr>
+        <p:txBody>
+          <a:bodyPr wrap="square" lIns="0" tIns="0" rIns="0" bIns="0" anchor="t">
+            <a:spAutoFit/>
+          </a:bodyPr>
+          <a:lstStyle/>
+          <a:p>
+            <a:pPr algn="l"/>
+            <a:r>
+              <a:rPr sz="1800" b="1" i="0" dirty="0">
                 <a:solidFill>
                   <a:srgbClr val="FFFFFF"/>
                 </a:solidFill>
@@ -3556,25 +3660,57 @@
           <a:p>
             <a:pPr algn="l"/>
             <a:r>
-              <a:rPr sz="1300" b="0" i="0">
+              <a:rPr sz="1300" b="0" i="0" dirty="0">
                 <a:solidFill>
                   <a:srgbClr val="CADCFC"/>
                 </a:solidFill>
                 <a:latin typeface="Calibri"/>
               </a:rPr>
-              <a:t>Advisor: [Professor's Name]</a:t>
-            </a:r>
-          </a:p>
-          <a:p>
-            <a:pPr algn="l"/>
-            <a:r>
-              <a:rPr sz="1300" b="0" i="0">
+              <a:t>Advisor: </a:t>
+            </a:r>
+            <a:r>
+              <a:rPr lang="tr-TR" sz="1300" dirty="0" err="1">
+                <a:solidFill>
+                  <a:srgbClr val="CADCFC"/>
+                </a:solidFill>
+                <a:latin typeface="Calibri"/>
+              </a:rPr>
+              <a:t>Kristin</a:t>
+            </a:r>
+            <a:r>
+              <a:rPr lang="tr-TR" sz="1300" dirty="0">
+                <a:solidFill>
+                  <a:srgbClr val="CADCFC"/>
+                </a:solidFill>
+                <a:latin typeface="Calibri"/>
+              </a:rPr>
+              <a:t> Hocam &lt;3</a:t>
+            </a:r>
+            <a:br>
+              <a:rPr lang="tr-TR" sz="1300" dirty="0">
+                <a:solidFill>
+                  <a:srgbClr val="CADCFC"/>
+                </a:solidFill>
+                <a:latin typeface="Calibri"/>
+              </a:rPr>
+            </a:br>
+            <a:r>
+              <a:rPr lang="tr-TR" sz="1300" b="0" i="0" dirty="0">
                 <a:solidFill>
                   <a:srgbClr val="8FAEEB"/>
                 </a:solidFill>
                 <a:latin typeface="Calibri"/>
               </a:rPr>
-              <a:t>Computer Engineering · 2026</a:t>
+              <a:t>Software</a:t>
+            </a:r>
+            <a:r>
+              <a:rPr sz="1300" b="0" i="0" dirty="0">
+                <a:solidFill>
+                  <a:srgbClr val="8FAEEB"/>
+                </a:solidFill>
+                <a:latin typeface="Calibri"/>
+              </a:rPr>
+              <a:t> Engineering · 2026</a:t>
             </a:r>
           </a:p>
         </p:txBody>
@@ -3596,7 +3732,7 @@
           <a:noFill/>
         </p:spPr>
         <p:txBody>
-          <a:bodyPr wrap="square" lIns="0" rIns="0" tIns="0" bIns="0" anchor="t">
+          <a:bodyPr wrap="square" lIns="0" tIns="0" rIns="0" bIns="0" anchor="t">
             <a:spAutoFit/>
           </a:bodyPr>
           <a:lstStyle/>
@@ -3623,7 +3759,7 @@
 </file>
 
 <file path=ppt/slides/slide10.xml><?xml version="1.0" encoding="utf-8"?>
-<p:sld xmlns:a="http://schemas.openxmlformats.org/drawingml/2006/main" xmlns:p="http://schemas.openxmlformats.org/presentationml/2006/main" xmlns:r="http://schemas.openxmlformats.org/officeDocument/2006/relationships">
+<p:sld xmlns:a="http://schemas.openxmlformats.org/drawingml/2006/main" xmlns:r="http://schemas.openxmlformats.org/officeDocument/2006/relationships" xmlns:p="http://schemas.openxmlformats.org/presentationml/2006/main">
   <p:cSld>
     <p:bg>
       <p:bgPr>
@@ -3639,7 +3775,14 @@
         <p:cNvGrpSpPr/>
         <p:nvPr/>
       </p:nvGrpSpPr>
-      <p:grpSpPr/>
+      <p:grpSpPr>
+        <a:xfrm>
+          <a:off x="0" y="0"/>
+          <a:ext cx="0" cy="0"/>
+          <a:chOff x="0" y="0"/>
+          <a:chExt cx="0" cy="0"/>
+        </a:xfrm>
+      </p:grpSpPr>
       <p:sp>
         <p:nvSpPr>
           <p:cNvPr id="2" name="TextBox 1"/>
@@ -3657,7 +3800,7 @@
           <a:noFill/>
         </p:spPr>
         <p:txBody>
-          <a:bodyPr wrap="square" lIns="0" rIns="0" tIns="0" bIns="0" anchor="t">
+          <a:bodyPr wrap="square" lIns="0" tIns="0" rIns="0" bIns="0" anchor="t">
             <a:spAutoFit/>
           </a:bodyPr>
           <a:lstStyle/>
@@ -3692,7 +3835,7 @@
           <a:noFill/>
         </p:spPr>
         <p:txBody>
-          <a:bodyPr wrap="square" lIns="0" rIns="0" tIns="0" bIns="0" anchor="t">
+          <a:bodyPr wrap="square" lIns="0" tIns="0" rIns="0" bIns="0" anchor="t">
             <a:spAutoFit/>
           </a:bodyPr>
           <a:lstStyle/>
@@ -3727,7 +3870,7 @@
           <a:noFill/>
         </p:spPr>
         <p:txBody>
-          <a:bodyPr wrap="square" lIns="0" rIns="0" tIns="0" bIns="0" anchor="t">
+          <a:bodyPr wrap="square" lIns="0" tIns="0" rIns="0" bIns="0" anchor="t">
             <a:spAutoFit/>
           </a:bodyPr>
           <a:lstStyle/>
@@ -3788,6 +3931,7 @@
           <a:lstStyle/>
           <a:p>
             <a:pPr algn="ctr"/>
+            <a:endParaRPr/>
           </a:p>
         </p:txBody>
       </p:sp>
@@ -3832,6 +3976,7 @@
           <a:lstStyle/>
           <a:p>
             <a:pPr algn="ctr"/>
+            <a:endParaRPr/>
           </a:p>
         </p:txBody>
       </p:sp>
@@ -3852,7 +3997,7 @@
           <a:noFill/>
         </p:spPr>
         <p:txBody>
-          <a:bodyPr wrap="square" lIns="0" rIns="0" tIns="0" bIns="0" anchor="t">
+          <a:bodyPr wrap="square" lIns="0" tIns="0" rIns="0" bIns="0" anchor="t">
             <a:spAutoFit/>
           </a:bodyPr>
           <a:lstStyle/>
@@ -3887,7 +4032,7 @@
           <a:noFill/>
         </p:spPr>
         <p:txBody>
-          <a:bodyPr wrap="square" lIns="0" rIns="0" tIns="0" bIns="0" anchor="t">
+          <a:bodyPr wrap="square" lIns="0" tIns="0" rIns="0" bIns="0" anchor="t">
             <a:spAutoFit/>
           </a:bodyPr>
           <a:lstStyle/>
@@ -3922,7 +4067,7 @@
           <a:noFill/>
         </p:spPr>
         <p:txBody>
-          <a:bodyPr wrap="square" lIns="0" rIns="0" tIns="0" bIns="0" anchor="t">
+          <a:bodyPr wrap="square" lIns="0" tIns="0" rIns="0" bIns="0" anchor="t">
             <a:spAutoFit/>
           </a:bodyPr>
           <a:lstStyle/>
@@ -3958,22 +4103,21 @@
         <p:spPr>
           <a:xfrm>
             <a:off x="1463040" y="2532888"/>
-            <a:ext cx="10058400" cy="274320"/>
-          </a:xfrm>
-          <a:prstGeom prst="rect">
-            <a:avLst/>
-          </a:prstGeom>
-          <a:noFill/>
-        </p:spPr>
-        <p:txBody>
-          <a:bodyPr wrap="square" lIns="0" rIns="0" tIns="0" bIns="0" anchor="t">
-            <a:spAutoFit/>
-          </a:bodyPr>
-          <a:lstStyle/>
-          <a:p>
-            <a:pPr algn="l"/>
-            <a:r>
-              <a:rPr sz="1000" b="1" i="0">
+            <a:ext cx="10058400" cy="161583"/>
+          </a:xfrm>
+          <a:prstGeom prst="rect">
+            <a:avLst/>
+          </a:prstGeom>
+          <a:noFill/>
+        </p:spPr>
+        <p:txBody>
+          <a:bodyPr wrap="square" lIns="0" tIns="0" rIns="0" bIns="0" anchor="t">
+            <a:spAutoFit/>
+          </a:bodyPr>
+          <a:lstStyle/>
+          <a:p>
+            <a:r>
+              <a:rPr sz="1000" b="1" i="0" dirty="0">
                 <a:solidFill>
                   <a:srgbClr val="64748B"/>
                 </a:solidFill>
@@ -3982,14 +4126,36 @@
               <a:t>Metrics:  </a:t>
             </a:r>
             <a:r>
-              <a:rPr sz="1050" b="0" i="1">
+              <a:rPr sz="1050" b="0" i="1" dirty="0">
                 <a:solidFill>
                   <a:srgbClr val="1A1A2E"/>
                 </a:solidFill>
                 <a:latin typeface="Calibri"/>
               </a:rPr>
-              <a:t>Accuracy · Macro-F1 · PR-AUC · Confusion Matrix</a:t>
-            </a:r>
+              <a:t>Accuracy · Macro-F1 · PR-AUC · </a:t>
+            </a:r>
+            <a:r>
+              <a:rPr lang="tr-TR" sz="1050" i="1" dirty="0">
+                <a:solidFill>
+                  <a:srgbClr val="1A1A2E"/>
+                </a:solidFill>
+              </a:rPr>
+              <a:t>5-fold CV </a:t>
+            </a:r>
+            <a:r>
+              <a:rPr lang="tr-TR" sz="1050" i="1" dirty="0" err="1">
+                <a:solidFill>
+                  <a:srgbClr val="1A1A2E"/>
+                </a:solidFill>
+              </a:rPr>
+              <a:t>stability</a:t>
+            </a:r>
+            <a:endParaRPr sz="1050" b="0" i="1" dirty="0">
+              <a:solidFill>
+                <a:srgbClr val="1A1A2E"/>
+              </a:solidFill>
+              <a:latin typeface="Calibri"/>
+            </a:endParaRPr>
           </a:p>
         </p:txBody>
       </p:sp>
@@ -4010,7 +4176,7 @@
           <a:noFill/>
         </p:spPr>
         <p:txBody>
-          <a:bodyPr wrap="square" lIns="0" rIns="0" tIns="0" bIns="0" anchor="t">
+          <a:bodyPr wrap="square" lIns="0" tIns="0" rIns="0" bIns="0" anchor="t">
             <a:spAutoFit/>
           </a:bodyPr>
           <a:lstStyle/>
@@ -4080,6 +4246,7 @@
           <a:lstStyle/>
           <a:p>
             <a:pPr algn="ctr"/>
+            <a:endParaRPr/>
           </a:p>
         </p:txBody>
       </p:sp>
@@ -4124,6 +4291,7 @@
           <a:lstStyle/>
           <a:p>
             <a:pPr algn="ctr"/>
+            <a:endParaRPr/>
           </a:p>
         </p:txBody>
       </p:sp>
@@ -4144,7 +4312,7 @@
           <a:noFill/>
         </p:spPr>
         <p:txBody>
-          <a:bodyPr wrap="square" lIns="0" rIns="0" tIns="0" bIns="0" anchor="t">
+          <a:bodyPr wrap="square" lIns="0" tIns="0" rIns="0" bIns="0" anchor="t">
             <a:spAutoFit/>
           </a:bodyPr>
           <a:lstStyle/>
@@ -4179,7 +4347,7 @@
           <a:noFill/>
         </p:spPr>
         <p:txBody>
-          <a:bodyPr wrap="square" lIns="0" rIns="0" tIns="0" bIns="0" anchor="t">
+          <a:bodyPr wrap="square" lIns="0" tIns="0" rIns="0" bIns="0" anchor="t">
             <a:spAutoFit/>
           </a:bodyPr>
           <a:lstStyle/>
@@ -4214,7 +4382,7 @@
           <a:noFill/>
         </p:spPr>
         <p:txBody>
-          <a:bodyPr wrap="square" lIns="0" rIns="0" tIns="0" bIns="0" anchor="t">
+          <a:bodyPr wrap="square" lIns="0" tIns="0" rIns="0" bIns="0" anchor="t">
             <a:spAutoFit/>
           </a:bodyPr>
           <a:lstStyle/>
@@ -4258,7 +4426,7 @@
           <a:noFill/>
         </p:spPr>
         <p:txBody>
-          <a:bodyPr wrap="square" lIns="0" rIns="0" tIns="0" bIns="0" anchor="t">
+          <a:bodyPr wrap="square" lIns="0" tIns="0" rIns="0" bIns="0" anchor="t">
             <a:spAutoFit/>
           </a:bodyPr>
           <a:lstStyle/>
@@ -4302,7 +4470,7 @@
           <a:noFill/>
         </p:spPr>
         <p:txBody>
-          <a:bodyPr wrap="square" lIns="0" rIns="0" tIns="0" bIns="0" anchor="t">
+          <a:bodyPr wrap="square" lIns="0" tIns="0" rIns="0" bIns="0" anchor="t">
             <a:spAutoFit/>
           </a:bodyPr>
           <a:lstStyle/>
@@ -4372,6 +4540,7 @@
           <a:lstStyle/>
           <a:p>
             <a:pPr algn="ctr"/>
+            <a:endParaRPr/>
           </a:p>
         </p:txBody>
       </p:sp>
@@ -4416,6 +4585,7 @@
           <a:lstStyle/>
           <a:p>
             <a:pPr algn="ctr"/>
+            <a:endParaRPr/>
           </a:p>
         </p:txBody>
       </p:sp>
@@ -4436,7 +4606,7 @@
           <a:noFill/>
         </p:spPr>
         <p:txBody>
-          <a:bodyPr wrap="square" lIns="0" rIns="0" tIns="0" bIns="0" anchor="t">
+          <a:bodyPr wrap="square" lIns="0" tIns="0" rIns="0" bIns="0" anchor="t">
             <a:spAutoFit/>
           </a:bodyPr>
           <a:lstStyle/>
@@ -4471,7 +4641,7 @@
           <a:noFill/>
         </p:spPr>
         <p:txBody>
-          <a:bodyPr wrap="square" lIns="0" rIns="0" tIns="0" bIns="0" anchor="t">
+          <a:bodyPr wrap="square" lIns="0" tIns="0" rIns="0" bIns="0" anchor="t">
             <a:spAutoFit/>
           </a:bodyPr>
           <a:lstStyle/>
@@ -4506,7 +4676,7 @@
           <a:noFill/>
         </p:spPr>
         <p:txBody>
-          <a:bodyPr wrap="square" lIns="0" rIns="0" tIns="0" bIns="0" anchor="t">
+          <a:bodyPr wrap="square" lIns="0" tIns="0" rIns="0" bIns="0" anchor="t">
             <a:spAutoFit/>
           </a:bodyPr>
           <a:lstStyle/>
@@ -4550,7 +4720,7 @@
           <a:noFill/>
         </p:spPr>
         <p:txBody>
-          <a:bodyPr wrap="square" lIns="0" rIns="0" tIns="0" bIns="0" anchor="t">
+          <a:bodyPr wrap="square" lIns="0" tIns="0" rIns="0" bIns="0" anchor="t">
             <a:spAutoFit/>
           </a:bodyPr>
           <a:lstStyle/>
@@ -4594,7 +4764,7 @@
           <a:noFill/>
         </p:spPr>
         <p:txBody>
-          <a:bodyPr wrap="square" lIns="0" rIns="0" tIns="0" bIns="0" anchor="t">
+          <a:bodyPr wrap="square" lIns="0" tIns="0" rIns="0" bIns="0" anchor="t">
             <a:spAutoFit/>
           </a:bodyPr>
           <a:lstStyle/>
@@ -4638,7 +4808,7 @@
           <a:noFill/>
         </p:spPr>
         <p:txBody>
-          <a:bodyPr wrap="square" lIns="0" rIns="0" tIns="0" bIns="0" anchor="t">
+          <a:bodyPr wrap="square" lIns="0" tIns="0" rIns="0" bIns="0" anchor="t">
             <a:spAutoFit/>
           </a:bodyPr>
           <a:lstStyle/>
@@ -4673,7 +4843,7 @@
           <a:noFill/>
         </p:spPr>
         <p:txBody>
-          <a:bodyPr wrap="square" lIns="0" rIns="0" tIns="0" bIns="0" anchor="t">
+          <a:bodyPr wrap="square" lIns="0" tIns="0" rIns="0" bIns="0" anchor="t">
             <a:spAutoFit/>
           </a:bodyPr>
           <a:lstStyle/>
@@ -4708,7 +4878,7 @@
           <a:noFill/>
         </p:spPr>
         <p:txBody>
-          <a:bodyPr wrap="square" lIns="0" rIns="0" tIns="0" bIns="0" anchor="t">
+          <a:bodyPr wrap="square" lIns="0" tIns="0" rIns="0" bIns="0" anchor="t">
             <a:spAutoFit/>
           </a:bodyPr>
           <a:lstStyle/>
@@ -4735,7 +4905,7 @@
 </file>
 
 <file path=ppt/slides/slide11.xml><?xml version="1.0" encoding="utf-8"?>
-<p:sld xmlns:a="http://schemas.openxmlformats.org/drawingml/2006/main" xmlns:p="http://schemas.openxmlformats.org/presentationml/2006/main" xmlns:r="http://schemas.openxmlformats.org/officeDocument/2006/relationships">
+<p:sld xmlns:a="http://schemas.openxmlformats.org/drawingml/2006/main" xmlns:r="http://schemas.openxmlformats.org/officeDocument/2006/relationships" xmlns:p="http://schemas.openxmlformats.org/presentationml/2006/main">
   <p:cSld>
     <p:bg>
       <p:bgPr>
@@ -4751,7 +4921,14 @@
         <p:cNvGrpSpPr/>
         <p:nvPr/>
       </p:nvGrpSpPr>
-      <p:grpSpPr/>
+      <p:grpSpPr>
+        <a:xfrm>
+          <a:off x="0" y="0"/>
+          <a:ext cx="0" cy="0"/>
+          <a:chOff x="0" y="0"/>
+          <a:chExt cx="0" cy="0"/>
+        </a:xfrm>
+      </p:grpSpPr>
       <p:sp>
         <p:nvSpPr>
           <p:cNvPr id="2" name="TextBox 1"/>
@@ -4769,7 +4946,7 @@
           <a:noFill/>
         </p:spPr>
         <p:txBody>
-          <a:bodyPr wrap="square" lIns="0" rIns="0" tIns="0" bIns="0" anchor="t">
+          <a:bodyPr wrap="square" lIns="0" tIns="0" rIns="0" bIns="0" anchor="t">
             <a:spAutoFit/>
           </a:bodyPr>
           <a:lstStyle/>
@@ -4804,14 +4981,14 @@
           <a:noFill/>
         </p:spPr>
         <p:txBody>
-          <a:bodyPr wrap="square" lIns="0" rIns="0" tIns="0" bIns="0" anchor="t">
-            <a:spAutoFit/>
-          </a:bodyPr>
-          <a:lstStyle/>
-          <a:p>
-            <a:pPr algn="l"/>
-            <a:r>
-              <a:rPr sz="2800" b="1" i="0">
+          <a:bodyPr wrap="square" lIns="0" tIns="0" rIns="0" bIns="0" anchor="t">
+            <a:spAutoFit/>
+          </a:bodyPr>
+          <a:lstStyle/>
+          <a:p>
+            <a:pPr algn="l"/>
+            <a:r>
+              <a:rPr sz="2800" b="1" i="0" dirty="0">
                 <a:solidFill>
                   <a:srgbClr val="1E2761"/>
                 </a:solidFill>
@@ -4839,7 +5016,7 @@
           <a:noFill/>
         </p:spPr>
         <p:txBody>
-          <a:bodyPr wrap="square" lIns="0" rIns="0" tIns="0" bIns="0" anchor="t">
+          <a:bodyPr wrap="square" lIns="0" tIns="0" rIns="0" bIns="0" anchor="t">
             <a:spAutoFit/>
           </a:bodyPr>
           <a:lstStyle/>
@@ -4900,6 +5077,7 @@
           <a:lstStyle/>
           <a:p>
             <a:pPr algn="ctr"/>
+            <a:endParaRPr/>
           </a:p>
         </p:txBody>
       </p:sp>
@@ -4944,6 +5122,7 @@
           <a:lstStyle/>
           <a:p>
             <a:pPr algn="ctr"/>
+            <a:endParaRPr/>
           </a:p>
         </p:txBody>
       </p:sp>
@@ -4964,7 +5143,7 @@
           <a:noFill/>
         </p:spPr>
         <p:txBody>
-          <a:bodyPr wrap="square" lIns="0" rIns="0" tIns="0" bIns="0" anchor="t">
+          <a:bodyPr wrap="square" lIns="0" tIns="0" rIns="0" bIns="0" anchor="t">
             <a:spAutoFit/>
           </a:bodyPr>
           <a:lstStyle/>
@@ -4999,7 +5178,7 @@
           <a:noFill/>
         </p:spPr>
         <p:txBody>
-          <a:bodyPr wrap="square" lIns="0" rIns="0" tIns="0" bIns="0" anchor="t">
+          <a:bodyPr wrap="square" lIns="0" tIns="0" rIns="0" bIns="0" anchor="t">
             <a:spAutoFit/>
           </a:bodyPr>
           <a:lstStyle/>
@@ -5060,6 +5239,7 @@
           <a:lstStyle/>
           <a:p>
             <a:pPr algn="ctr"/>
+            <a:endParaRPr/>
           </a:p>
         </p:txBody>
       </p:sp>
@@ -5104,6 +5284,7 @@
           <a:lstStyle/>
           <a:p>
             <a:pPr algn="ctr"/>
+            <a:endParaRPr/>
           </a:p>
         </p:txBody>
       </p:sp>
@@ -5124,7 +5305,7 @@
           <a:noFill/>
         </p:spPr>
         <p:txBody>
-          <a:bodyPr wrap="square" lIns="0" rIns="0" tIns="0" bIns="0" anchor="t">
+          <a:bodyPr wrap="square" lIns="0" tIns="0" rIns="0" bIns="0" anchor="t">
             <a:spAutoFit/>
           </a:bodyPr>
           <a:lstStyle/>
@@ -5159,7 +5340,7 @@
           <a:noFill/>
         </p:spPr>
         <p:txBody>
-          <a:bodyPr wrap="square" lIns="0" rIns="0" tIns="0" bIns="0" anchor="t">
+          <a:bodyPr wrap="square" lIns="0" tIns="0" rIns="0" bIns="0" anchor="t">
             <a:spAutoFit/>
           </a:bodyPr>
           <a:lstStyle/>
@@ -5220,6 +5401,7 @@
           <a:lstStyle/>
           <a:p>
             <a:pPr algn="ctr"/>
+            <a:endParaRPr/>
           </a:p>
         </p:txBody>
       </p:sp>
@@ -5264,6 +5446,7 @@
           <a:lstStyle/>
           <a:p>
             <a:pPr algn="ctr"/>
+            <a:endParaRPr/>
           </a:p>
         </p:txBody>
       </p:sp>
@@ -5284,7 +5467,7 @@
           <a:noFill/>
         </p:spPr>
         <p:txBody>
-          <a:bodyPr wrap="square" lIns="0" rIns="0" tIns="0" bIns="0" anchor="t">
+          <a:bodyPr wrap="square" lIns="0" tIns="0" rIns="0" bIns="0" anchor="t">
             <a:spAutoFit/>
           </a:bodyPr>
           <a:lstStyle/>
@@ -5319,7 +5502,7 @@
           <a:noFill/>
         </p:spPr>
         <p:txBody>
-          <a:bodyPr wrap="square" lIns="0" rIns="0" tIns="0" bIns="0" anchor="t">
+          <a:bodyPr wrap="square" lIns="0" tIns="0" rIns="0" bIns="0" anchor="t">
             <a:spAutoFit/>
           </a:bodyPr>
           <a:lstStyle/>
@@ -5354,7 +5537,7 @@
           <a:noFill/>
         </p:spPr>
         <p:txBody>
-          <a:bodyPr wrap="square" lIns="0" rIns="0" tIns="0" bIns="0" anchor="t">
+          <a:bodyPr wrap="square" lIns="0" tIns="0" rIns="0" bIns="0" anchor="t">
             <a:spAutoFit/>
           </a:bodyPr>
           <a:lstStyle/>
@@ -5391,16 +5574,46 @@
                 <a:tableStyleId>{5C22544A-7EE6-4342-B048-85BDC9FD1C3A}</a:tableStyleId>
               </a:tblPr>
               <a:tblGrid>
-                <a:gridCol w="3200400"/>
-                <a:gridCol w="2011680"/>
-                <a:gridCol w="2011680"/>
-                <a:gridCol w="2011680"/>
-                <a:gridCol w="2011680"/>
+                <a:gridCol w="3200400">
+                  <a:extLst>
+                    <a:ext uri="{9D8B030D-6E8A-4147-A177-3AD203B41FA5}">
+                      <a16:colId xmlns:a16="http://schemas.microsoft.com/office/drawing/2014/main" val="20000"/>
+                    </a:ext>
+                  </a:extLst>
+                </a:gridCol>
+                <a:gridCol w="2011680">
+                  <a:extLst>
+                    <a:ext uri="{9D8B030D-6E8A-4147-A177-3AD203B41FA5}">
+                      <a16:colId xmlns:a16="http://schemas.microsoft.com/office/drawing/2014/main" val="20001"/>
+                    </a:ext>
+                  </a:extLst>
+                </a:gridCol>
+                <a:gridCol w="2011680">
+                  <a:extLst>
+                    <a:ext uri="{9D8B030D-6E8A-4147-A177-3AD203B41FA5}">
+                      <a16:colId xmlns:a16="http://schemas.microsoft.com/office/drawing/2014/main" val="20002"/>
+                    </a:ext>
+                  </a:extLst>
+                </a:gridCol>
+                <a:gridCol w="2011680">
+                  <a:extLst>
+                    <a:ext uri="{9D8B030D-6E8A-4147-A177-3AD203B41FA5}">
+                      <a16:colId xmlns:a16="http://schemas.microsoft.com/office/drawing/2014/main" val="20003"/>
+                    </a:ext>
+                  </a:extLst>
+                </a:gridCol>
+                <a:gridCol w="2011680">
+                  <a:extLst>
+                    <a:ext uri="{9D8B030D-6E8A-4147-A177-3AD203B41FA5}">
+                      <a16:colId xmlns:a16="http://schemas.microsoft.com/office/drawing/2014/main" val="20004"/>
+                    </a:ext>
+                  </a:extLst>
+                </a:gridCol>
               </a:tblGrid>
               <a:tr h="365760">
                 <a:tc>
                   <a:txBody>
-                    <a:bodyPr wrap="square" anchor="ctr"/>
+                    <a:bodyPr/>
                     <a:lstStyle/>
                     <a:p>
                       <a:pPr algn="l"/>
@@ -5423,7 +5636,7 @@
                 </a:tc>
                 <a:tc>
                   <a:txBody>
-                    <a:bodyPr wrap="square" anchor="ctr"/>
+                    <a:bodyPr/>
                     <a:lstStyle/>
                     <a:p>
                       <a:pPr algn="ctr"/>
@@ -5446,7 +5659,7 @@
                 </a:tc>
                 <a:tc>
                   <a:txBody>
-                    <a:bodyPr wrap="square" anchor="ctr"/>
+                    <a:bodyPr/>
                     <a:lstStyle/>
                     <a:p>
                       <a:pPr algn="ctr"/>
@@ -5469,7 +5682,7 @@
                 </a:tc>
                 <a:tc>
                   <a:txBody>
-                    <a:bodyPr wrap="square" anchor="ctr"/>
+                    <a:bodyPr/>
                     <a:lstStyle/>
                     <a:p>
                       <a:pPr algn="ctr"/>
@@ -5492,7 +5705,7 @@
                 </a:tc>
                 <a:tc>
                   <a:txBody>
-                    <a:bodyPr wrap="square" anchor="ctr"/>
+                    <a:bodyPr/>
                     <a:lstStyle/>
                     <a:p>
                       <a:pPr algn="ctr"/>
@@ -5513,11 +5726,16 @@
                     </a:solidFill>
                   </a:tcPr>
                 </a:tc>
+                <a:extLst>
+                  <a:ext uri="{0D108BD9-81ED-4DB2-BD59-A6C34878D82A}">
+                    <a16:rowId xmlns:a16="http://schemas.microsoft.com/office/drawing/2014/main" val="10000"/>
+                  </a:ext>
+                </a:extLst>
               </a:tr>
               <a:tr h="365760">
                 <a:tc>
                   <a:txBody>
-                    <a:bodyPr wrap="square" anchor="ctr"/>
+                    <a:bodyPr/>
                     <a:lstStyle/>
                     <a:p>
                       <a:pPr algn="l"/>
@@ -5536,7 +5754,7 @@
                 </a:tc>
                 <a:tc>
                   <a:txBody>
-                    <a:bodyPr wrap="square" anchor="ctr"/>
+                    <a:bodyPr/>
                     <a:lstStyle/>
                     <a:p>
                       <a:pPr algn="ctr"/>
@@ -5555,7 +5773,7 @@
                 </a:tc>
                 <a:tc>
                   <a:txBody>
-                    <a:bodyPr wrap="square" anchor="ctr"/>
+                    <a:bodyPr/>
                     <a:lstStyle/>
                     <a:p>
                       <a:pPr algn="ctr"/>
@@ -5574,7 +5792,7 @@
                 </a:tc>
                 <a:tc>
                   <a:txBody>
-                    <a:bodyPr wrap="square" anchor="ctr"/>
+                    <a:bodyPr/>
                     <a:lstStyle/>
                     <a:p>
                       <a:pPr algn="ctr"/>
@@ -5593,7 +5811,7 @@
                 </a:tc>
                 <a:tc>
                   <a:txBody>
-                    <a:bodyPr wrap="square" anchor="ctr"/>
+                    <a:bodyPr/>
                     <a:lstStyle/>
                     <a:p>
                       <a:pPr algn="ctr"/>
@@ -5610,11 +5828,16 @@
                   </a:txBody>
                   <a:tcPr marL="73152" marR="73152" marT="36576" marB="36576"/>
                 </a:tc>
+                <a:extLst>
+                  <a:ext uri="{0D108BD9-81ED-4DB2-BD59-A6C34878D82A}">
+                    <a16:rowId xmlns:a16="http://schemas.microsoft.com/office/drawing/2014/main" val="10001"/>
+                  </a:ext>
+                </a:extLst>
               </a:tr>
               <a:tr h="365760">
                 <a:tc>
                   <a:txBody>
-                    <a:bodyPr wrap="square" anchor="ctr"/>
+                    <a:bodyPr/>
                     <a:lstStyle/>
                     <a:p>
                       <a:pPr algn="l"/>
@@ -5633,7 +5856,7 @@
                 </a:tc>
                 <a:tc>
                   <a:txBody>
-                    <a:bodyPr wrap="square" anchor="ctr"/>
+                    <a:bodyPr/>
                     <a:lstStyle/>
                     <a:p>
                       <a:pPr algn="ctr"/>
@@ -5652,7 +5875,7 @@
                 </a:tc>
                 <a:tc>
                   <a:txBody>
-                    <a:bodyPr wrap="square" anchor="ctr"/>
+                    <a:bodyPr/>
                     <a:lstStyle/>
                     <a:p>
                       <a:pPr algn="ctr"/>
@@ -5671,7 +5894,7 @@
                 </a:tc>
                 <a:tc>
                   <a:txBody>
-                    <a:bodyPr wrap="square" anchor="ctr"/>
+                    <a:bodyPr/>
                     <a:lstStyle/>
                     <a:p>
                       <a:pPr algn="ctr"/>
@@ -5690,7 +5913,7 @@
                 </a:tc>
                 <a:tc>
                   <a:txBody>
-                    <a:bodyPr wrap="square" anchor="ctr"/>
+                    <a:bodyPr/>
                     <a:lstStyle/>
                     <a:p>
                       <a:pPr algn="ctr"/>
@@ -5707,11 +5930,16 @@
                   </a:txBody>
                   <a:tcPr marL="73152" marR="73152" marT="36576" marB="36576"/>
                 </a:tc>
+                <a:extLst>
+                  <a:ext uri="{0D108BD9-81ED-4DB2-BD59-A6C34878D82A}">
+                    <a16:rowId xmlns:a16="http://schemas.microsoft.com/office/drawing/2014/main" val="10002"/>
+                  </a:ext>
+                </a:extLst>
               </a:tr>
               <a:tr h="365760">
                 <a:tc>
                   <a:txBody>
-                    <a:bodyPr wrap="square" anchor="ctr"/>
+                    <a:bodyPr/>
                     <a:lstStyle/>
                     <a:p>
                       <a:pPr algn="l"/>
@@ -5730,7 +5958,7 @@
                 </a:tc>
                 <a:tc>
                   <a:txBody>
-                    <a:bodyPr wrap="square" anchor="ctr"/>
+                    <a:bodyPr/>
                     <a:lstStyle/>
                     <a:p>
                       <a:pPr algn="ctr"/>
@@ -5749,7 +5977,7 @@
                 </a:tc>
                 <a:tc>
                   <a:txBody>
-                    <a:bodyPr wrap="square" anchor="ctr"/>
+                    <a:bodyPr/>
                     <a:lstStyle/>
                     <a:p>
                       <a:pPr algn="ctr"/>
@@ -5768,7 +5996,7 @@
                 </a:tc>
                 <a:tc>
                   <a:txBody>
-                    <a:bodyPr wrap="square" anchor="ctr"/>
+                    <a:bodyPr/>
                     <a:lstStyle/>
                     <a:p>
                       <a:pPr algn="ctr"/>
@@ -5787,7 +6015,7 @@
                 </a:tc>
                 <a:tc>
                   <a:txBody>
-                    <a:bodyPr wrap="square" anchor="ctr"/>
+                    <a:bodyPr/>
                     <a:lstStyle/>
                     <a:p>
                       <a:pPr algn="ctr"/>
@@ -5804,11 +6032,16 @@
                   </a:txBody>
                   <a:tcPr marL="73152" marR="73152" marT="36576" marB="36576"/>
                 </a:tc>
+                <a:extLst>
+                  <a:ext uri="{0D108BD9-81ED-4DB2-BD59-A6C34878D82A}">
+                    <a16:rowId xmlns:a16="http://schemas.microsoft.com/office/drawing/2014/main" val="10003"/>
+                  </a:ext>
+                </a:extLst>
               </a:tr>
               <a:tr h="365760">
                 <a:tc>
                   <a:txBody>
-                    <a:bodyPr wrap="square" anchor="ctr"/>
+                    <a:bodyPr/>
                     <a:lstStyle/>
                     <a:p>
                       <a:pPr algn="l"/>
@@ -5827,7 +6060,7 @@
                 </a:tc>
                 <a:tc>
                   <a:txBody>
-                    <a:bodyPr wrap="square" anchor="ctr"/>
+                    <a:bodyPr/>
                     <a:lstStyle/>
                     <a:p>
                       <a:pPr algn="ctr"/>
@@ -5846,7 +6079,7 @@
                 </a:tc>
                 <a:tc>
                   <a:txBody>
-                    <a:bodyPr wrap="square" anchor="ctr"/>
+                    <a:bodyPr/>
                     <a:lstStyle/>
                     <a:p>
                       <a:pPr algn="ctr"/>
@@ -5865,7 +6098,7 @@
                 </a:tc>
                 <a:tc>
                   <a:txBody>
-                    <a:bodyPr wrap="square" anchor="ctr"/>
+                    <a:bodyPr/>
                     <a:lstStyle/>
                     <a:p>
                       <a:pPr algn="ctr"/>
@@ -5884,7 +6117,7 @@
                 </a:tc>
                 <a:tc>
                   <a:txBody>
-                    <a:bodyPr wrap="square" anchor="ctr"/>
+                    <a:bodyPr/>
                     <a:lstStyle/>
                     <a:p>
                       <a:pPr algn="ctr"/>
@@ -5901,6 +6134,11 @@
                   </a:txBody>
                   <a:tcPr marL="73152" marR="73152" marT="36576" marB="36576"/>
                 </a:tc>
+                <a:extLst>
+                  <a:ext uri="{0D108BD9-81ED-4DB2-BD59-A6C34878D82A}">
+                    <a16:rowId xmlns:a16="http://schemas.microsoft.com/office/drawing/2014/main" val="10004"/>
+                  </a:ext>
+                </a:extLst>
               </a:tr>
             </a:tbl>
           </a:graphicData>
@@ -5947,6 +6185,7 @@
           <a:lstStyle/>
           <a:p>
             <a:pPr algn="ctr"/>
+            <a:endParaRPr/>
           </a:p>
         </p:txBody>
       </p:sp>
@@ -5967,7 +6206,7 @@
           <a:noFill/>
         </p:spPr>
         <p:txBody>
-          <a:bodyPr wrap="square" lIns="0" rIns="0" tIns="0" bIns="0" anchor="ctr">
+          <a:bodyPr wrap="square" lIns="0" tIns="0" rIns="0" bIns="0" anchor="ctr">
             <a:spAutoFit/>
           </a:bodyPr>
           <a:lstStyle/>
@@ -6011,7 +6250,7 @@
           <a:noFill/>
         </p:spPr>
         <p:txBody>
-          <a:bodyPr wrap="square" lIns="0" rIns="0" tIns="0" bIns="0" anchor="t">
+          <a:bodyPr wrap="square" lIns="0" tIns="0" rIns="0" bIns="0" anchor="t">
             <a:spAutoFit/>
           </a:bodyPr>
           <a:lstStyle/>
@@ -6046,7 +6285,7 @@
           <a:noFill/>
         </p:spPr>
         <p:txBody>
-          <a:bodyPr wrap="square" lIns="0" rIns="0" tIns="0" bIns="0" anchor="t">
+          <a:bodyPr wrap="square" lIns="0" tIns="0" rIns="0" bIns="0" anchor="t">
             <a:spAutoFit/>
           </a:bodyPr>
           <a:lstStyle/>
@@ -6073,7 +6312,7 @@
 </file>
 
 <file path=ppt/slides/slide12.xml><?xml version="1.0" encoding="utf-8"?>
-<p:sld xmlns:a="http://schemas.openxmlformats.org/drawingml/2006/main" xmlns:p="http://schemas.openxmlformats.org/presentationml/2006/main" xmlns:r="http://schemas.openxmlformats.org/officeDocument/2006/relationships">
+<p:sld xmlns:a="http://schemas.openxmlformats.org/drawingml/2006/main" xmlns:r="http://schemas.openxmlformats.org/officeDocument/2006/relationships" xmlns:p="http://schemas.openxmlformats.org/presentationml/2006/main">
   <p:cSld>
     <p:bg>
       <p:bgPr>
@@ -6089,7 +6328,14 @@
         <p:cNvGrpSpPr/>
         <p:nvPr/>
       </p:nvGrpSpPr>
-      <p:grpSpPr/>
+      <p:grpSpPr>
+        <a:xfrm>
+          <a:off x="0" y="0"/>
+          <a:ext cx="0" cy="0"/>
+          <a:chOff x="0" y="0"/>
+          <a:chExt cx="0" cy="0"/>
+        </a:xfrm>
+      </p:grpSpPr>
       <p:sp>
         <p:nvSpPr>
           <p:cNvPr id="2" name="TextBox 1"/>
@@ -6107,7 +6353,7 @@
           <a:noFill/>
         </p:spPr>
         <p:txBody>
-          <a:bodyPr wrap="square" lIns="0" rIns="0" tIns="0" bIns="0" anchor="t">
+          <a:bodyPr wrap="square" lIns="0" tIns="0" rIns="0" bIns="0" anchor="t">
             <a:spAutoFit/>
           </a:bodyPr>
           <a:lstStyle/>
@@ -6134,70 +6380,991 @@
         <p:spPr>
           <a:xfrm>
             <a:off x="365760" y="548640"/>
-            <a:ext cx="11430000" cy="640080"/>
-          </a:xfrm>
-          <a:prstGeom prst="rect">
-            <a:avLst/>
-          </a:prstGeom>
-          <a:noFill/>
-        </p:spPr>
-        <p:txBody>
-          <a:bodyPr wrap="square" lIns="0" rIns="0" tIns="0" bIns="0" anchor="t">
-            <a:spAutoFit/>
-          </a:bodyPr>
-          <a:lstStyle/>
-          <a:p>
-            <a:pPr algn="l"/>
-            <a:r>
-              <a:rPr sz="2800" b="1" i="0">
+            <a:ext cx="11430000" cy="430887"/>
+          </a:xfrm>
+          <a:prstGeom prst="rect">
+            <a:avLst/>
+          </a:prstGeom>
+          <a:noFill/>
+        </p:spPr>
+        <p:txBody>
+          <a:bodyPr wrap="square" lIns="0" tIns="0" rIns="0" bIns="0" anchor="t">
+            <a:spAutoFit/>
+          </a:bodyPr>
+          <a:lstStyle/>
+          <a:p>
+            <a:r>
+              <a:rPr lang="tr-TR" sz="2800" b="1" dirty="0">
+                <a:solidFill>
+                  <a:srgbClr val="002060"/>
+                </a:solidFill>
+                <a:latin typeface="Calibri" panose="020F0502020204030204" pitchFamily="34" charset="0"/>
+                <a:cs typeface="Calibri" panose="020F0502020204030204" pitchFamily="34" charset="0"/>
+              </a:rPr>
+              <a:t>Cross-</a:t>
+            </a:r>
+            <a:r>
+              <a:rPr lang="tr-TR" sz="2800" b="1" dirty="0" err="1">
+                <a:solidFill>
+                  <a:srgbClr val="002060"/>
+                </a:solidFill>
+                <a:latin typeface="Calibri" panose="020F0502020204030204" pitchFamily="34" charset="0"/>
+                <a:cs typeface="Calibri" panose="020F0502020204030204" pitchFamily="34" charset="0"/>
+              </a:rPr>
+              <a:t>Validation</a:t>
+            </a:r>
+            <a:r>
+              <a:rPr lang="tr-TR" sz="2800" b="1" dirty="0">
+                <a:solidFill>
+                  <a:srgbClr val="002060"/>
+                </a:solidFill>
+                <a:latin typeface="Calibri" panose="020F0502020204030204" pitchFamily="34" charset="0"/>
+                <a:cs typeface="Calibri" panose="020F0502020204030204" pitchFamily="34" charset="0"/>
+              </a:rPr>
+              <a:t> </a:t>
+            </a:r>
+            <a:r>
+              <a:rPr lang="tr-TR" sz="2800" b="1" dirty="0" err="1">
+                <a:solidFill>
+                  <a:srgbClr val="002060"/>
+                </a:solidFill>
+                <a:latin typeface="Calibri" panose="020F0502020204030204" pitchFamily="34" charset="0"/>
+                <a:cs typeface="Calibri" panose="020F0502020204030204" pitchFamily="34" charset="0"/>
+              </a:rPr>
+              <a:t>Stability</a:t>
+            </a:r>
+            <a:r>
+              <a:rPr lang="tr-TR" sz="2800" b="1" dirty="0">
+                <a:solidFill>
+                  <a:srgbClr val="002060"/>
+                </a:solidFill>
+                <a:latin typeface="Calibri" panose="020F0502020204030204" pitchFamily="34" charset="0"/>
+                <a:cs typeface="Calibri" panose="020F0502020204030204" pitchFamily="34" charset="0"/>
+              </a:rPr>
+              <a:t> </a:t>
+            </a:r>
+            <a:r>
+              <a:rPr lang="tr-TR" sz="2800" b="1" dirty="0" err="1">
+                <a:solidFill>
+                  <a:srgbClr val="002060"/>
+                </a:solidFill>
+                <a:latin typeface="Calibri" panose="020F0502020204030204" pitchFamily="34" charset="0"/>
+                <a:cs typeface="Calibri" panose="020F0502020204030204" pitchFamily="34" charset="0"/>
+              </a:rPr>
+              <a:t>Check</a:t>
+            </a:r>
+            <a:endParaRPr sz="2800" b="1" i="0" dirty="0">
+              <a:solidFill>
+                <a:srgbClr val="002060"/>
+              </a:solidFill>
+              <a:latin typeface="Calibri" panose="020F0502020204030204" pitchFamily="34" charset="0"/>
+              <a:cs typeface="Calibri" panose="020F0502020204030204" pitchFamily="34" charset="0"/>
+            </a:endParaRPr>
+          </a:p>
+        </p:txBody>
+      </p:sp>
+      <p:sp>
+        <p:nvSpPr>
+          <p:cNvPr id="4" name="TextBox 3"/>
+          <p:cNvSpPr txBox="1"/>
+          <p:nvPr/>
+        </p:nvSpPr>
+        <p:spPr>
+          <a:xfrm>
+            <a:off x="365760" y="1188720"/>
+            <a:ext cx="11430000" cy="215444"/>
+          </a:xfrm>
+          <a:prstGeom prst="rect">
+            <a:avLst/>
+          </a:prstGeom>
+          <a:noFill/>
+        </p:spPr>
+        <p:txBody>
+          <a:bodyPr wrap="square" lIns="0" tIns="0" rIns="0" bIns="0" anchor="t">
+            <a:spAutoFit/>
+          </a:bodyPr>
+          <a:lstStyle/>
+          <a:p>
+            <a:r>
+              <a:rPr lang="tr-TR" sz="1400" i="1" dirty="0" err="1">
+                <a:solidFill>
+                  <a:srgbClr val="64748B"/>
+                </a:solidFill>
+              </a:rPr>
+              <a:t>Checking</a:t>
+            </a:r>
+            <a:r>
+              <a:rPr lang="tr-TR" sz="1400" i="1" dirty="0">
+                <a:solidFill>
+                  <a:srgbClr val="64748B"/>
+                </a:solidFill>
+              </a:rPr>
+              <a:t> </a:t>
+            </a:r>
+            <a:r>
+              <a:rPr lang="tr-TR" sz="1400" i="1" dirty="0" err="1">
+                <a:solidFill>
+                  <a:srgbClr val="64748B"/>
+                </a:solidFill>
+              </a:rPr>
+              <a:t>whether</a:t>
+            </a:r>
+            <a:r>
+              <a:rPr lang="tr-TR" sz="1400" i="1" dirty="0">
+                <a:solidFill>
+                  <a:srgbClr val="64748B"/>
+                </a:solidFill>
+              </a:rPr>
+              <a:t> </a:t>
+            </a:r>
+            <a:r>
+              <a:rPr lang="tr-TR" sz="1400" i="1" dirty="0" err="1">
+                <a:solidFill>
+                  <a:srgbClr val="64748B"/>
+                </a:solidFill>
+              </a:rPr>
+              <a:t>high</a:t>
+            </a:r>
+            <a:r>
+              <a:rPr lang="tr-TR" sz="1400" i="1" dirty="0">
+                <a:solidFill>
+                  <a:srgbClr val="64748B"/>
+                </a:solidFill>
+              </a:rPr>
+              <a:t> in-</a:t>
+            </a:r>
+            <a:r>
+              <a:rPr lang="tr-TR" sz="1400" i="1" dirty="0" err="1">
+                <a:solidFill>
+                  <a:srgbClr val="64748B"/>
+                </a:solidFill>
+              </a:rPr>
+              <a:t>distribution</a:t>
+            </a:r>
+            <a:r>
+              <a:rPr lang="tr-TR" sz="1400" i="1" dirty="0">
+                <a:solidFill>
+                  <a:srgbClr val="64748B"/>
+                </a:solidFill>
+              </a:rPr>
+              <a:t> </a:t>
+            </a:r>
+            <a:r>
+              <a:rPr lang="tr-TR" sz="1400" i="1" dirty="0" err="1">
+                <a:solidFill>
+                  <a:srgbClr val="64748B"/>
+                </a:solidFill>
+              </a:rPr>
+              <a:t>performance</a:t>
+            </a:r>
+            <a:r>
+              <a:rPr lang="tr-TR" sz="1400" i="1" dirty="0">
+                <a:solidFill>
+                  <a:srgbClr val="64748B"/>
+                </a:solidFill>
+              </a:rPr>
+              <a:t> is </a:t>
+            </a:r>
+            <a:r>
+              <a:rPr lang="tr-TR" sz="1400" i="1" dirty="0" err="1">
+                <a:solidFill>
+                  <a:srgbClr val="64748B"/>
+                </a:solidFill>
+              </a:rPr>
+              <a:t>stable</a:t>
+            </a:r>
+            <a:r>
+              <a:rPr lang="tr-TR" sz="1400" i="1" dirty="0">
+                <a:solidFill>
+                  <a:srgbClr val="64748B"/>
+                </a:solidFill>
+              </a:rPr>
+              <a:t> </a:t>
+            </a:r>
+            <a:r>
+              <a:rPr lang="tr-TR" sz="1400" i="1" dirty="0" err="1">
+                <a:solidFill>
+                  <a:srgbClr val="64748B"/>
+                </a:solidFill>
+              </a:rPr>
+              <a:t>across</a:t>
+            </a:r>
+            <a:r>
+              <a:rPr lang="tr-TR" sz="1400" i="1" dirty="0">
+                <a:solidFill>
+                  <a:srgbClr val="64748B"/>
+                </a:solidFill>
+              </a:rPr>
+              <a:t> </a:t>
+            </a:r>
+            <a:r>
+              <a:rPr lang="tr-TR" sz="1400" i="1" dirty="0" err="1">
+                <a:solidFill>
+                  <a:srgbClr val="64748B"/>
+                </a:solidFill>
+              </a:rPr>
+              <a:t>folds</a:t>
+            </a:r>
+            <a:endParaRPr sz="1400" b="0" i="1" dirty="0">
+              <a:solidFill>
+                <a:srgbClr val="64748B"/>
+              </a:solidFill>
+              <a:latin typeface="Calibri"/>
+            </a:endParaRPr>
+          </a:p>
+        </p:txBody>
+      </p:sp>
+      <p:sp>
+        <p:nvSpPr>
+          <p:cNvPr id="6" name="TextBox 5"/>
+          <p:cNvSpPr txBox="1"/>
+          <p:nvPr/>
+        </p:nvSpPr>
+        <p:spPr>
+          <a:xfrm>
+            <a:off x="9281160" y="1605721"/>
+            <a:ext cx="4114800" cy="365760"/>
+          </a:xfrm>
+          <a:prstGeom prst="rect">
+            <a:avLst/>
+          </a:prstGeom>
+          <a:noFill/>
+        </p:spPr>
+        <p:txBody>
+          <a:bodyPr wrap="square" lIns="0" tIns="0" rIns="0" bIns="0" anchor="t">
+            <a:spAutoFit/>
+          </a:bodyPr>
+          <a:lstStyle/>
+          <a:p>
+            <a:pPr algn="l"/>
+            <a:r>
+              <a:rPr sz="1600" b="1" i="0" dirty="0">
                 <a:solidFill>
                   <a:srgbClr val="1E2761"/>
                 </a:solidFill>
                 <a:latin typeface="Calibri"/>
               </a:rPr>
-              <a:t>Confusion Matrix — Visual Inspection</a:t>
-            </a:r>
-          </a:p>
-        </p:txBody>
-      </p:sp>
-      <p:sp>
-        <p:nvSpPr>
-          <p:cNvPr id="4" name="TextBox 3"/>
-          <p:cNvSpPr txBox="1"/>
-          <p:nvPr/>
-        </p:nvSpPr>
-        <p:spPr>
-          <a:xfrm>
-            <a:off x="365760" y="1188720"/>
-            <a:ext cx="11430000" cy="365760"/>
-          </a:xfrm>
-          <a:prstGeom prst="rect">
-            <a:avLst/>
-          </a:prstGeom>
-          <a:noFill/>
-        </p:spPr>
-        <p:txBody>
-          <a:bodyPr wrap="square" lIns="0" rIns="0" tIns="0" bIns="0" anchor="t">
-            <a:spAutoFit/>
-          </a:bodyPr>
-          <a:lstStyle/>
-          <a:p>
-            <a:pPr algn="l"/>
-            <a:r>
-              <a:rPr sz="1400" b="0" i="1">
+              <a:t>Observations</a:t>
+            </a:r>
+          </a:p>
+        </p:txBody>
+      </p:sp>
+      <p:sp>
+        <p:nvSpPr>
+          <p:cNvPr id="7" name="Rectangle 6"/>
+          <p:cNvSpPr/>
+          <p:nvPr/>
+        </p:nvSpPr>
+        <p:spPr>
+          <a:xfrm>
+            <a:off x="9281160" y="1971638"/>
+            <a:ext cx="914400" cy="36576"/>
+          </a:xfrm>
+          <a:prstGeom prst="rect">
+            <a:avLst/>
+          </a:prstGeom>
+          <a:solidFill>
+            <a:srgbClr val="F96167"/>
+          </a:solidFill>
+          <a:ln>
+            <a:noFill/>
+          </a:ln>
+          <a:effectLst/>
+        </p:spPr>
+        <p:style>
+          <a:lnRef idx="1">
+            <a:schemeClr val="accent1"/>
+          </a:lnRef>
+          <a:fillRef idx="3">
+            <a:schemeClr val="accent1"/>
+          </a:fillRef>
+          <a:effectRef idx="2">
+            <a:schemeClr val="accent1"/>
+          </a:effectRef>
+          <a:fontRef idx="minor">
+            <a:schemeClr val="lt1"/>
+          </a:fontRef>
+        </p:style>
+        <p:txBody>
+          <a:bodyPr rtlCol="0" anchor="ctr"/>
+          <a:lstStyle/>
+          <a:p>
+            <a:pPr algn="ctr"/>
+            <a:endParaRPr/>
+          </a:p>
+        </p:txBody>
+      </p:sp>
+      <p:sp>
+        <p:nvSpPr>
+          <p:cNvPr id="8" name="TextBox 7"/>
+          <p:cNvSpPr txBox="1"/>
+          <p:nvPr/>
+        </p:nvSpPr>
+        <p:spPr>
+          <a:xfrm>
+            <a:off x="9281160" y="2268831"/>
+            <a:ext cx="4114800" cy="215444"/>
+          </a:xfrm>
+          <a:prstGeom prst="rect">
+            <a:avLst/>
+          </a:prstGeom>
+          <a:noFill/>
+        </p:spPr>
+        <p:txBody>
+          <a:bodyPr wrap="square" lIns="0" tIns="0" rIns="0" bIns="0" anchor="t">
+            <a:spAutoFit/>
+          </a:bodyPr>
+          <a:lstStyle/>
+          <a:p>
+            <a:r>
+              <a:rPr lang="tr-TR" sz="1400" b="1" dirty="0">
+                <a:solidFill>
+                  <a:srgbClr val="1E2761"/>
+                </a:solidFill>
+                <a:latin typeface="Consolas"/>
+              </a:rPr>
+              <a:t>99.94% ± 0.05% </a:t>
+            </a:r>
+            <a:endParaRPr sz="1400" b="1" i="0" dirty="0">
+              <a:solidFill>
+                <a:srgbClr val="1E2761"/>
+              </a:solidFill>
+              <a:latin typeface="Consolas"/>
+            </a:endParaRPr>
+          </a:p>
+        </p:txBody>
+      </p:sp>
+      <p:sp>
+        <p:nvSpPr>
+          <p:cNvPr id="9" name="TextBox 8"/>
+          <p:cNvSpPr txBox="1"/>
+          <p:nvPr/>
+        </p:nvSpPr>
+        <p:spPr>
+          <a:xfrm>
+            <a:off x="9281160" y="2625447"/>
+            <a:ext cx="4114800" cy="169277"/>
+          </a:xfrm>
+          <a:prstGeom prst="rect">
+            <a:avLst/>
+          </a:prstGeom>
+          <a:noFill/>
+        </p:spPr>
+        <p:txBody>
+          <a:bodyPr wrap="square" lIns="0" tIns="0" rIns="0" bIns="0" anchor="t">
+            <a:spAutoFit/>
+          </a:bodyPr>
+          <a:lstStyle/>
+          <a:p>
+            <a:r>
+              <a:rPr lang="tr-TR" sz="1100" dirty="0" err="1">
+                <a:solidFill>
+                  <a:srgbClr val="1A1A2E"/>
+                </a:solidFill>
+              </a:rPr>
+              <a:t>Mean</a:t>
+            </a:r>
+            <a:r>
+              <a:rPr lang="tr-TR" sz="1100" dirty="0">
+                <a:solidFill>
+                  <a:srgbClr val="1A1A2E"/>
+                </a:solidFill>
+              </a:rPr>
+              <a:t> </a:t>
+            </a:r>
+            <a:r>
+              <a:rPr lang="tr-TR" sz="1100" dirty="0" err="1">
+                <a:solidFill>
+                  <a:srgbClr val="1A1A2E"/>
+                </a:solidFill>
+              </a:rPr>
+              <a:t>accuracy</a:t>
+            </a:r>
+            <a:r>
+              <a:rPr lang="tr-TR" sz="1100" dirty="0">
+                <a:solidFill>
+                  <a:srgbClr val="1A1A2E"/>
+                </a:solidFill>
+              </a:rPr>
+              <a:t> </a:t>
+            </a:r>
+            <a:r>
+              <a:rPr lang="tr-TR" sz="1100" dirty="0" err="1">
+                <a:solidFill>
+                  <a:srgbClr val="1A1A2E"/>
+                </a:solidFill>
+              </a:rPr>
+              <a:t>across</a:t>
+            </a:r>
+            <a:r>
+              <a:rPr lang="tr-TR" sz="1100" dirty="0">
+                <a:solidFill>
+                  <a:srgbClr val="1A1A2E"/>
+                </a:solidFill>
+              </a:rPr>
+              <a:t> 5 </a:t>
+            </a:r>
+            <a:r>
+              <a:rPr lang="tr-TR" sz="1100" dirty="0" err="1">
+                <a:solidFill>
+                  <a:srgbClr val="1A1A2E"/>
+                </a:solidFill>
+              </a:rPr>
+              <a:t>folds</a:t>
+            </a:r>
+            <a:endParaRPr sz="1100" b="0" i="0" dirty="0">
+              <a:solidFill>
+                <a:srgbClr val="1A1A2E"/>
+              </a:solidFill>
+              <a:latin typeface="Calibri"/>
+            </a:endParaRPr>
+          </a:p>
+        </p:txBody>
+      </p:sp>
+      <p:sp>
+        <p:nvSpPr>
+          <p:cNvPr id="10" name="TextBox 9"/>
+          <p:cNvSpPr txBox="1"/>
+          <p:nvPr/>
+        </p:nvSpPr>
+        <p:spPr>
+          <a:xfrm>
+            <a:off x="9281160" y="3101882"/>
+            <a:ext cx="4114800" cy="215444"/>
+          </a:xfrm>
+          <a:prstGeom prst="rect">
+            <a:avLst/>
+          </a:prstGeom>
+          <a:noFill/>
+        </p:spPr>
+        <p:txBody>
+          <a:bodyPr wrap="square" lIns="0" tIns="0" rIns="0" bIns="0" anchor="t">
+            <a:spAutoFit/>
+          </a:bodyPr>
+          <a:lstStyle/>
+          <a:p>
+            <a:r>
+              <a:rPr lang="tr-TR" sz="1400" b="1" dirty="0">
+                <a:solidFill>
+                  <a:srgbClr val="1E2761"/>
+                </a:solidFill>
+                <a:latin typeface="Consolas"/>
+              </a:rPr>
+              <a:t>99.92% ± 0.05%</a:t>
+            </a:r>
+            <a:endParaRPr sz="1400" b="1" i="0" dirty="0">
+              <a:solidFill>
+                <a:srgbClr val="1E2761"/>
+              </a:solidFill>
+              <a:latin typeface="Consolas"/>
+            </a:endParaRPr>
+          </a:p>
+        </p:txBody>
+      </p:sp>
+      <p:sp>
+        <p:nvSpPr>
+          <p:cNvPr id="11" name="TextBox 10"/>
+          <p:cNvSpPr txBox="1"/>
+          <p:nvPr/>
+        </p:nvSpPr>
+        <p:spPr>
+          <a:xfrm>
+            <a:off x="9281160" y="3429000"/>
+            <a:ext cx="4114800" cy="169277"/>
+          </a:xfrm>
+          <a:prstGeom prst="rect">
+            <a:avLst/>
+          </a:prstGeom>
+          <a:noFill/>
+        </p:spPr>
+        <p:txBody>
+          <a:bodyPr wrap="square" lIns="0" tIns="0" rIns="0" bIns="0" anchor="t">
+            <a:spAutoFit/>
+          </a:bodyPr>
+          <a:lstStyle/>
+          <a:p>
+            <a:r>
+              <a:rPr lang="tr-TR" sz="1100" dirty="0" err="1">
+                <a:solidFill>
+                  <a:srgbClr val="1A1A2E"/>
+                </a:solidFill>
+              </a:rPr>
+              <a:t>Mean</a:t>
+            </a:r>
+            <a:r>
+              <a:rPr lang="tr-TR" sz="1100" dirty="0">
+                <a:solidFill>
+                  <a:srgbClr val="1A1A2E"/>
+                </a:solidFill>
+              </a:rPr>
+              <a:t> macro-F1 </a:t>
+            </a:r>
+            <a:r>
+              <a:rPr lang="tr-TR" sz="1100" dirty="0" err="1">
+                <a:solidFill>
+                  <a:srgbClr val="1A1A2E"/>
+                </a:solidFill>
+              </a:rPr>
+              <a:t>across</a:t>
+            </a:r>
+            <a:r>
+              <a:rPr lang="tr-TR" sz="1100" dirty="0">
+                <a:solidFill>
+                  <a:srgbClr val="1A1A2E"/>
+                </a:solidFill>
+              </a:rPr>
+              <a:t> 5 </a:t>
+            </a:r>
+            <a:r>
+              <a:rPr lang="tr-TR" sz="1100" dirty="0" err="1">
+                <a:solidFill>
+                  <a:srgbClr val="1A1A2E"/>
+                </a:solidFill>
+              </a:rPr>
+              <a:t>folds</a:t>
+            </a:r>
+            <a:endParaRPr sz="1100" b="0" i="0" dirty="0">
+              <a:solidFill>
+                <a:srgbClr val="1A1A2E"/>
+              </a:solidFill>
+              <a:latin typeface="Calibri"/>
+            </a:endParaRPr>
+          </a:p>
+        </p:txBody>
+      </p:sp>
+      <p:sp>
+        <p:nvSpPr>
+          <p:cNvPr id="12" name="TextBox 11"/>
+          <p:cNvSpPr txBox="1"/>
+          <p:nvPr/>
+        </p:nvSpPr>
+        <p:spPr>
+          <a:xfrm>
+            <a:off x="9281160" y="3864573"/>
+            <a:ext cx="4114800" cy="215444"/>
+          </a:xfrm>
+          <a:prstGeom prst="rect">
+            <a:avLst/>
+          </a:prstGeom>
+          <a:noFill/>
+        </p:spPr>
+        <p:txBody>
+          <a:bodyPr wrap="square" lIns="0" tIns="0" rIns="0" bIns="0" anchor="t">
+            <a:spAutoFit/>
+          </a:bodyPr>
+          <a:lstStyle/>
+          <a:p>
+            <a:r>
+              <a:rPr lang="tr-TR" sz="1400" b="1" dirty="0" err="1">
+                <a:solidFill>
+                  <a:srgbClr val="1E2761"/>
+                </a:solidFill>
+                <a:latin typeface="Consolas"/>
+              </a:rPr>
+              <a:t>All</a:t>
+            </a:r>
+            <a:r>
+              <a:rPr lang="tr-TR" sz="1400" b="1" dirty="0">
+                <a:solidFill>
+                  <a:srgbClr val="1E2761"/>
+                </a:solidFill>
+                <a:latin typeface="Consolas"/>
+              </a:rPr>
+              <a:t> </a:t>
+            </a:r>
+            <a:r>
+              <a:rPr lang="tr-TR" sz="1400" b="1" dirty="0" err="1">
+                <a:solidFill>
+                  <a:srgbClr val="1E2761"/>
+                </a:solidFill>
+                <a:latin typeface="Consolas"/>
+              </a:rPr>
+              <a:t>folds</a:t>
+            </a:r>
+            <a:r>
+              <a:rPr lang="tr-TR" sz="1400" b="1" dirty="0">
+                <a:solidFill>
+                  <a:srgbClr val="1E2761"/>
+                </a:solidFill>
+                <a:latin typeface="Consolas"/>
+              </a:rPr>
+              <a:t> ≈ 1.00</a:t>
+            </a:r>
+            <a:endParaRPr sz="1400" b="1" i="0" dirty="0">
+              <a:solidFill>
+                <a:srgbClr val="1E2761"/>
+              </a:solidFill>
+              <a:latin typeface="Consolas"/>
+            </a:endParaRPr>
+          </a:p>
+        </p:txBody>
+      </p:sp>
+      <p:sp>
+        <p:nvSpPr>
+          <p:cNvPr id="13" name="TextBox 12"/>
+          <p:cNvSpPr txBox="1"/>
+          <p:nvPr/>
+        </p:nvSpPr>
+        <p:spPr>
+          <a:xfrm>
+            <a:off x="9281160" y="4221065"/>
+            <a:ext cx="4114800" cy="169277"/>
+          </a:xfrm>
+          <a:prstGeom prst="rect">
+            <a:avLst/>
+          </a:prstGeom>
+          <a:noFill/>
+        </p:spPr>
+        <p:txBody>
+          <a:bodyPr wrap="square" lIns="0" tIns="0" rIns="0" bIns="0" anchor="t">
+            <a:spAutoFit/>
+          </a:bodyPr>
+          <a:lstStyle/>
+          <a:p>
+            <a:r>
+              <a:rPr lang="tr-TR" sz="1100" dirty="0" err="1">
+                <a:solidFill>
+                  <a:srgbClr val="1A1A2E"/>
+                </a:solidFill>
+              </a:rPr>
+              <a:t>Performance</a:t>
+            </a:r>
+            <a:r>
+              <a:rPr lang="tr-TR" sz="1100" dirty="0">
+                <a:solidFill>
+                  <a:srgbClr val="1A1A2E"/>
+                </a:solidFill>
+              </a:rPr>
+              <a:t> </a:t>
+            </a:r>
+            <a:r>
+              <a:rPr lang="tr-TR" sz="1100" dirty="0" err="1">
+                <a:solidFill>
+                  <a:srgbClr val="1A1A2E"/>
+                </a:solidFill>
+              </a:rPr>
+              <a:t>remains</a:t>
+            </a:r>
+            <a:r>
+              <a:rPr lang="tr-TR" sz="1100" dirty="0">
+                <a:solidFill>
+                  <a:srgbClr val="1A1A2E"/>
+                </a:solidFill>
+              </a:rPr>
+              <a:t> </a:t>
+            </a:r>
+            <a:r>
+              <a:rPr lang="tr-TR" sz="1100" dirty="0" err="1">
+                <a:solidFill>
+                  <a:srgbClr val="1A1A2E"/>
+                </a:solidFill>
+              </a:rPr>
+              <a:t>stable</a:t>
+            </a:r>
+            <a:r>
+              <a:rPr lang="tr-TR" sz="1100" dirty="0">
+                <a:solidFill>
+                  <a:srgbClr val="1A1A2E"/>
+                </a:solidFill>
+              </a:rPr>
+              <a:t> </a:t>
+            </a:r>
+            <a:r>
+              <a:rPr lang="tr-TR" sz="1100" dirty="0" err="1">
+                <a:solidFill>
+                  <a:srgbClr val="1A1A2E"/>
+                </a:solidFill>
+              </a:rPr>
+              <a:t>across</a:t>
+            </a:r>
+            <a:r>
+              <a:rPr lang="tr-TR" sz="1100" dirty="0">
+                <a:solidFill>
+                  <a:srgbClr val="1A1A2E"/>
+                </a:solidFill>
+              </a:rPr>
+              <a:t> </a:t>
+            </a:r>
+            <a:r>
+              <a:rPr lang="tr-TR" sz="1100" dirty="0" err="1">
+                <a:solidFill>
+                  <a:srgbClr val="1A1A2E"/>
+                </a:solidFill>
+              </a:rPr>
+              <a:t>partitions</a:t>
+            </a:r>
+            <a:endParaRPr sz="1100" b="0" i="0" dirty="0">
+              <a:solidFill>
+                <a:srgbClr val="1A1A2E"/>
+              </a:solidFill>
+              <a:latin typeface="Calibri"/>
+            </a:endParaRPr>
+          </a:p>
+        </p:txBody>
+      </p:sp>
+      <p:sp>
+        <p:nvSpPr>
+          <p:cNvPr id="14" name="TextBox 13"/>
+          <p:cNvSpPr txBox="1"/>
+          <p:nvPr/>
+        </p:nvSpPr>
+        <p:spPr>
+          <a:xfrm>
+            <a:off x="9281160" y="4727050"/>
+            <a:ext cx="4114800" cy="215444"/>
+          </a:xfrm>
+          <a:prstGeom prst="rect">
+            <a:avLst/>
+          </a:prstGeom>
+          <a:noFill/>
+        </p:spPr>
+        <p:txBody>
+          <a:bodyPr wrap="square" lIns="0" tIns="0" rIns="0" bIns="0" anchor="t">
+            <a:spAutoFit/>
+          </a:bodyPr>
+          <a:lstStyle/>
+          <a:p>
+            <a:r>
+              <a:rPr lang="tr-TR" sz="1400" b="1" dirty="0">
+                <a:solidFill>
+                  <a:srgbClr val="1E2761"/>
+                </a:solidFill>
+                <a:latin typeface="Consolas"/>
+              </a:rPr>
+              <a:t>Main </a:t>
+            </a:r>
+            <a:r>
+              <a:rPr lang="tr-TR" sz="1400" b="1" dirty="0" err="1">
+                <a:solidFill>
+                  <a:srgbClr val="1E2761"/>
+                </a:solidFill>
+                <a:latin typeface="Consolas"/>
+              </a:rPr>
+              <a:t>takeaway</a:t>
+            </a:r>
+            <a:endParaRPr sz="1400" b="1" i="0" dirty="0">
+              <a:solidFill>
+                <a:srgbClr val="1E2761"/>
+              </a:solidFill>
+              <a:latin typeface="Consolas"/>
+            </a:endParaRPr>
+          </a:p>
+        </p:txBody>
+      </p:sp>
+      <p:sp>
+        <p:nvSpPr>
+          <p:cNvPr id="15" name="TextBox 14"/>
+          <p:cNvSpPr txBox="1"/>
+          <p:nvPr/>
+        </p:nvSpPr>
+        <p:spPr>
+          <a:xfrm>
+            <a:off x="9281160" y="5095102"/>
+            <a:ext cx="2631440" cy="338554"/>
+          </a:xfrm>
+          <a:prstGeom prst="rect">
+            <a:avLst/>
+          </a:prstGeom>
+          <a:noFill/>
+        </p:spPr>
+        <p:txBody>
+          <a:bodyPr wrap="square" lIns="0" tIns="0" rIns="0" bIns="0" anchor="t">
+            <a:spAutoFit/>
+          </a:bodyPr>
+          <a:lstStyle/>
+          <a:p>
+            <a:r>
+              <a:rPr lang="tr-TR" sz="1100" dirty="0" err="1">
+                <a:solidFill>
+                  <a:srgbClr val="1A1A2E"/>
+                </a:solidFill>
+              </a:rPr>
+              <a:t>The</a:t>
+            </a:r>
+            <a:r>
+              <a:rPr lang="tr-TR" sz="1100" dirty="0">
+                <a:solidFill>
+                  <a:srgbClr val="1A1A2E"/>
+                </a:solidFill>
+              </a:rPr>
+              <a:t> </a:t>
+            </a:r>
+            <a:r>
+              <a:rPr lang="tr-TR" sz="1100" dirty="0" err="1">
+                <a:solidFill>
+                  <a:srgbClr val="1A1A2E"/>
+                </a:solidFill>
+              </a:rPr>
+              <a:t>high</a:t>
+            </a:r>
+            <a:r>
+              <a:rPr lang="tr-TR" sz="1100" dirty="0">
+                <a:solidFill>
+                  <a:srgbClr val="1A1A2E"/>
+                </a:solidFill>
+              </a:rPr>
+              <a:t> in-</a:t>
+            </a:r>
+            <a:r>
+              <a:rPr lang="tr-TR" sz="1100" dirty="0" err="1">
+                <a:solidFill>
+                  <a:srgbClr val="1A1A2E"/>
+                </a:solidFill>
+              </a:rPr>
+              <a:t>distribution</a:t>
+            </a:r>
+            <a:r>
+              <a:rPr lang="tr-TR" sz="1100" dirty="0">
+                <a:solidFill>
+                  <a:srgbClr val="1A1A2E"/>
+                </a:solidFill>
+              </a:rPr>
+              <a:t> </a:t>
+            </a:r>
+            <a:r>
+              <a:rPr lang="tr-TR" sz="1100" dirty="0" err="1">
+                <a:solidFill>
+                  <a:srgbClr val="1A1A2E"/>
+                </a:solidFill>
+              </a:rPr>
+              <a:t>result</a:t>
+            </a:r>
+            <a:r>
+              <a:rPr lang="tr-TR" sz="1100" dirty="0">
+                <a:solidFill>
+                  <a:srgbClr val="1A1A2E"/>
+                </a:solidFill>
+              </a:rPr>
+              <a:t> is not </a:t>
+            </a:r>
+            <a:r>
+              <a:rPr lang="tr-TR" sz="1100" dirty="0" err="1">
+                <a:solidFill>
+                  <a:srgbClr val="1A1A2E"/>
+                </a:solidFill>
+              </a:rPr>
+              <a:t>only</a:t>
+            </a:r>
+            <a:r>
+              <a:rPr lang="tr-TR" sz="1100" dirty="0">
+                <a:solidFill>
+                  <a:srgbClr val="1A1A2E"/>
+                </a:solidFill>
+              </a:rPr>
+              <a:t> a </a:t>
+            </a:r>
+            <a:r>
+              <a:rPr lang="tr-TR" sz="1100" dirty="0" err="1">
+                <a:solidFill>
+                  <a:srgbClr val="1A1A2E"/>
+                </a:solidFill>
+              </a:rPr>
+              <a:t>single-split</a:t>
+            </a:r>
+            <a:r>
+              <a:rPr lang="tr-TR" sz="1100" dirty="0">
+                <a:solidFill>
+                  <a:srgbClr val="1A1A2E"/>
+                </a:solidFill>
+              </a:rPr>
+              <a:t> </a:t>
+            </a:r>
+            <a:r>
+              <a:rPr lang="tr-TR" sz="1100" dirty="0" err="1">
+                <a:solidFill>
+                  <a:srgbClr val="1A1A2E"/>
+                </a:solidFill>
+              </a:rPr>
+              <a:t>artifact</a:t>
+            </a:r>
+            <a:endParaRPr sz="1100" b="0" i="0" dirty="0">
+              <a:solidFill>
+                <a:srgbClr val="1A1A2E"/>
+              </a:solidFill>
+              <a:latin typeface="Calibri"/>
+            </a:endParaRPr>
+          </a:p>
+        </p:txBody>
+      </p:sp>
+      <p:sp>
+        <p:nvSpPr>
+          <p:cNvPr id="18" name="TextBox 17"/>
+          <p:cNvSpPr txBox="1"/>
+          <p:nvPr/>
+        </p:nvSpPr>
+        <p:spPr>
+          <a:xfrm>
+            <a:off x="365760" y="6537960"/>
+            <a:ext cx="7315200" cy="228600"/>
+          </a:xfrm>
+          <a:prstGeom prst="rect">
+            <a:avLst/>
+          </a:prstGeom>
+          <a:noFill/>
+        </p:spPr>
+        <p:txBody>
+          <a:bodyPr wrap="square" lIns="0" tIns="0" rIns="0" bIns="0" anchor="t">
+            <a:spAutoFit/>
+          </a:bodyPr>
+          <a:lstStyle/>
+          <a:p>
+            <a:pPr algn="l"/>
+            <a:r>
+              <a:rPr sz="900" b="0" i="0">
                 <a:solidFill>
                   <a:srgbClr val="64748B"/>
                 </a:solidFill>
                 <a:latin typeface="Calibri"/>
               </a:rPr>
-              <a:t>Confirming the error pattern with the confusion matrix</a:t>
+              <a:t>Beyza Yavuz · Thesis Checkpoint Presentation</a:t>
+            </a:r>
+          </a:p>
+        </p:txBody>
+      </p:sp>
+      <p:sp>
+        <p:nvSpPr>
+          <p:cNvPr id="19" name="TextBox 18"/>
+          <p:cNvSpPr txBox="1"/>
+          <p:nvPr/>
+        </p:nvSpPr>
+        <p:spPr>
+          <a:xfrm>
+            <a:off x="11338560" y="6537960"/>
+            <a:ext cx="731520" cy="228600"/>
+          </a:xfrm>
+          <a:prstGeom prst="rect">
+            <a:avLst/>
+          </a:prstGeom>
+          <a:noFill/>
+        </p:spPr>
+        <p:txBody>
+          <a:bodyPr wrap="square" lIns="0" tIns="0" rIns="0" bIns="0" anchor="t">
+            <a:spAutoFit/>
+          </a:bodyPr>
+          <a:lstStyle/>
+          <a:p>
+            <a:pPr algn="r"/>
+            <a:r>
+              <a:rPr sz="900" b="0" i="0">
+                <a:solidFill>
+                  <a:srgbClr val="64748B"/>
+                </a:solidFill>
+                <a:latin typeface="Calibri"/>
+              </a:rPr>
+              <a:t>12 / 23</a:t>
             </a:r>
           </a:p>
         </p:txBody>
       </p:sp>
       <p:pic>
         <p:nvPicPr>
-          <p:cNvPr id="5" name="Picture 4" descr="fig1_confusion_matrix.png"/>
+          <p:cNvPr id="21" name="Resim 20">
+            <a:extLst>
+              <a:ext uri="{FF2B5EF4-FFF2-40B4-BE49-F238E27FC236}">
+                <a16:creationId xmlns:a16="http://schemas.microsoft.com/office/drawing/2014/main" id="{6B7E5241-69C1-C48B-B0CD-A146C3928EC2}"/>
+              </a:ext>
+            </a:extLst>
+          </p:cNvPr>
           <p:cNvPicPr>
             <a:picLocks noChangeAspect="1"/>
           </p:cNvPicPr>
@@ -6211,513 +7378,14 @@
         </p:blipFill>
         <p:spPr>
           <a:xfrm>
-            <a:off x="457200" y="1691640"/>
-            <a:ext cx="6858000" cy="4572000"/>
+            <a:off x="365760" y="1977610"/>
+            <a:ext cx="8619132" cy="3769706"/>
           </a:xfrm>
           <a:prstGeom prst="rect">
             <a:avLst/>
           </a:prstGeom>
         </p:spPr>
       </p:pic>
-      <p:sp>
-        <p:nvSpPr>
-          <p:cNvPr id="6" name="TextBox 5"/>
-          <p:cNvSpPr txBox="1"/>
-          <p:nvPr/>
-        </p:nvSpPr>
-        <p:spPr>
-          <a:xfrm>
-            <a:off x="7589520" y="1783080"/>
-            <a:ext cx="4114800" cy="365760"/>
-          </a:xfrm>
-          <a:prstGeom prst="rect">
-            <a:avLst/>
-          </a:prstGeom>
-          <a:noFill/>
-        </p:spPr>
-        <p:txBody>
-          <a:bodyPr wrap="square" lIns="0" rIns="0" tIns="0" bIns="0" anchor="t">
-            <a:spAutoFit/>
-          </a:bodyPr>
-          <a:lstStyle/>
-          <a:p>
-            <a:pPr algn="l"/>
-            <a:r>
-              <a:rPr sz="1600" b="1" i="0">
-                <a:solidFill>
-                  <a:srgbClr val="1E2761"/>
-                </a:solidFill>
-                <a:latin typeface="Calibri"/>
-              </a:rPr>
-              <a:t>Observations</a:t>
-            </a:r>
-          </a:p>
-        </p:txBody>
-      </p:sp>
-      <p:sp>
-        <p:nvSpPr>
-          <p:cNvPr id="7" name="Rectangle 6"/>
-          <p:cNvSpPr/>
-          <p:nvPr/>
-        </p:nvSpPr>
-        <p:spPr>
-          <a:xfrm>
-            <a:off x="7589520" y="2148840"/>
-            <a:ext cx="914400" cy="36576"/>
-          </a:xfrm>
-          <a:prstGeom prst="rect">
-            <a:avLst/>
-          </a:prstGeom>
-          <a:solidFill>
-            <a:srgbClr val="F96167"/>
-          </a:solidFill>
-          <a:ln>
-            <a:noFill/>
-          </a:ln>
-          <a:effectLst/>
-        </p:spPr>
-        <p:style>
-          <a:lnRef idx="1">
-            <a:schemeClr val="accent1"/>
-          </a:lnRef>
-          <a:fillRef idx="3">
-            <a:schemeClr val="accent1"/>
-          </a:fillRef>
-          <a:effectRef idx="2">
-            <a:schemeClr val="accent1"/>
-          </a:effectRef>
-          <a:fontRef idx="minor">
-            <a:schemeClr val="lt1"/>
-          </a:fontRef>
-        </p:style>
-        <p:txBody>
-          <a:bodyPr rtlCol="0" anchor="ctr"/>
-          <a:lstStyle/>
-          <a:p>
-            <a:pPr algn="ctr"/>
-          </a:p>
-        </p:txBody>
-      </p:sp>
-      <p:sp>
-        <p:nvSpPr>
-          <p:cNvPr id="8" name="TextBox 7"/>
-          <p:cNvSpPr txBox="1"/>
-          <p:nvPr/>
-        </p:nvSpPr>
-        <p:spPr>
-          <a:xfrm>
-            <a:off x="7589520" y="2423160"/>
-            <a:ext cx="4114800" cy="274320"/>
-          </a:xfrm>
-          <a:prstGeom prst="rect">
-            <a:avLst/>
-          </a:prstGeom>
-          <a:noFill/>
-        </p:spPr>
-        <p:txBody>
-          <a:bodyPr wrap="square" lIns="0" rIns="0" tIns="0" bIns="0" anchor="t">
-            <a:spAutoFit/>
-          </a:bodyPr>
-          <a:lstStyle/>
-          <a:p>
-            <a:pPr algn="l"/>
-            <a:r>
-              <a:rPr sz="1400" b="1" i="0">
-                <a:solidFill>
-                  <a:srgbClr val="1E2761"/>
-                </a:solidFill>
-                <a:latin typeface="Consolas"/>
-              </a:rPr>
-              <a:t>396 / 396</a:t>
-            </a:r>
-          </a:p>
-        </p:txBody>
-      </p:sp>
-      <p:sp>
-        <p:nvSpPr>
-          <p:cNvPr id="9" name="TextBox 8"/>
-          <p:cNvSpPr txBox="1"/>
-          <p:nvPr/>
-        </p:nvSpPr>
-        <p:spPr>
-          <a:xfrm>
-            <a:off x="7589520" y="2697479"/>
-            <a:ext cx="4114800" cy="411480"/>
-          </a:xfrm>
-          <a:prstGeom prst="rect">
-            <a:avLst/>
-          </a:prstGeom>
-          <a:noFill/>
-        </p:spPr>
-        <p:txBody>
-          <a:bodyPr wrap="square" lIns="0" rIns="0" tIns="0" bIns="0" anchor="t">
-            <a:spAutoFit/>
-          </a:bodyPr>
-          <a:lstStyle/>
-          <a:p>
-            <a:pPr algn="l"/>
-            <a:r>
-              <a:rPr sz="1100" b="0" i="0">
-                <a:solidFill>
-                  <a:srgbClr val="1A1A2E"/>
-                </a:solidFill>
-                <a:latin typeface="Calibri"/>
-              </a:rPr>
-              <a:t>credential_stuffing classified perfectly</a:t>
-            </a:r>
-          </a:p>
-        </p:txBody>
-      </p:sp>
-      <p:sp>
-        <p:nvSpPr>
-          <p:cNvPr id="10" name="TextBox 9"/>
-          <p:cNvSpPr txBox="1"/>
-          <p:nvPr/>
-        </p:nvSpPr>
-        <p:spPr>
-          <a:xfrm>
-            <a:off x="7589520" y="3136391"/>
-            <a:ext cx="4114800" cy="274320"/>
-          </a:xfrm>
-          <a:prstGeom prst="rect">
-            <a:avLst/>
-          </a:prstGeom>
-          <a:noFill/>
-        </p:spPr>
-        <p:txBody>
-          <a:bodyPr wrap="square" lIns="0" rIns="0" tIns="0" bIns="0" anchor="t">
-            <a:spAutoFit/>
-          </a:bodyPr>
-          <a:lstStyle/>
-          <a:p>
-            <a:pPr algn="l"/>
-            <a:r>
-              <a:rPr sz="1400" b="1" i="0">
-                <a:solidFill>
-                  <a:srgbClr val="1E2761"/>
-                </a:solidFill>
-                <a:latin typeface="Consolas"/>
-              </a:rPr>
-              <a:t>332 / 332</a:t>
-            </a:r>
-          </a:p>
-        </p:txBody>
-      </p:sp>
-      <p:sp>
-        <p:nvSpPr>
-          <p:cNvPr id="11" name="TextBox 10"/>
-          <p:cNvSpPr txBox="1"/>
-          <p:nvPr/>
-        </p:nvSpPr>
-        <p:spPr>
-          <a:xfrm>
-            <a:off x="7589520" y="3410711"/>
-            <a:ext cx="4114800" cy="411480"/>
-          </a:xfrm>
-          <a:prstGeom prst="rect">
-            <a:avLst/>
-          </a:prstGeom>
-          <a:noFill/>
-        </p:spPr>
-        <p:txBody>
-          <a:bodyPr wrap="square" lIns="0" rIns="0" tIns="0" bIns="0" anchor="t">
-            <a:spAutoFit/>
-          </a:bodyPr>
-          <a:lstStyle/>
-          <a:p>
-            <a:pPr algn="l"/>
-            <a:r>
-              <a:rPr sz="1100" b="0" i="0">
-                <a:solidFill>
-                  <a:srgbClr val="1A1A2E"/>
-                </a:solidFill>
-                <a:latin typeface="Calibri"/>
-              </a:rPr>
-              <a:t>http_flood classified perfectly</a:t>
-            </a:r>
-          </a:p>
-        </p:txBody>
-      </p:sp>
-      <p:sp>
-        <p:nvSpPr>
-          <p:cNvPr id="12" name="TextBox 11"/>
-          <p:cNvSpPr txBox="1"/>
-          <p:nvPr/>
-        </p:nvSpPr>
-        <p:spPr>
-          <a:xfrm>
-            <a:off x="7589520" y="3849624"/>
-            <a:ext cx="4114800" cy="274320"/>
-          </a:xfrm>
-          <a:prstGeom prst="rect">
-            <a:avLst/>
-          </a:prstGeom>
-          <a:noFill/>
-        </p:spPr>
-        <p:txBody>
-          <a:bodyPr wrap="square" lIns="0" rIns="0" tIns="0" bIns="0" anchor="t">
-            <a:spAutoFit/>
-          </a:bodyPr>
-          <a:lstStyle/>
-          <a:p>
-            <a:pPr algn="l"/>
-            <a:r>
-              <a:rPr sz="1400" b="1" i="0">
-                <a:solidFill>
-                  <a:srgbClr val="1E2761"/>
-                </a:solidFill>
-                <a:latin typeface="Consolas"/>
-              </a:rPr>
-              <a:t>145 / 145</a:t>
-            </a:r>
-          </a:p>
-        </p:txBody>
-      </p:sp>
-      <p:sp>
-        <p:nvSpPr>
-          <p:cNvPr id="13" name="TextBox 12"/>
-          <p:cNvSpPr txBox="1"/>
-          <p:nvPr/>
-        </p:nvSpPr>
-        <p:spPr>
-          <a:xfrm>
-            <a:off x="7589520" y="4123944"/>
-            <a:ext cx="4114800" cy="411480"/>
-          </a:xfrm>
-          <a:prstGeom prst="rect">
-            <a:avLst/>
-          </a:prstGeom>
-          <a:noFill/>
-        </p:spPr>
-        <p:txBody>
-          <a:bodyPr wrap="square" lIns="0" rIns="0" tIns="0" bIns="0" anchor="t">
-            <a:spAutoFit/>
-          </a:bodyPr>
-          <a:lstStyle/>
-          <a:p>
-            <a:pPr algn="l"/>
-            <a:r>
-              <a:rPr sz="1100" b="0" i="0">
-                <a:solidFill>
-                  <a:srgbClr val="1A1A2E"/>
-                </a:solidFill>
-                <a:latin typeface="Calibri"/>
-              </a:rPr>
-              <a:t>low_rate_bot classified perfectly</a:t>
-            </a:r>
-          </a:p>
-        </p:txBody>
-      </p:sp>
-      <p:sp>
-        <p:nvSpPr>
-          <p:cNvPr id="14" name="TextBox 13"/>
-          <p:cNvSpPr txBox="1"/>
-          <p:nvPr/>
-        </p:nvSpPr>
-        <p:spPr>
-          <a:xfrm>
-            <a:off x="7589520" y="4562856"/>
-            <a:ext cx="4114800" cy="274320"/>
-          </a:xfrm>
-          <a:prstGeom prst="rect">
-            <a:avLst/>
-          </a:prstGeom>
-          <a:noFill/>
-        </p:spPr>
-        <p:txBody>
-          <a:bodyPr wrap="square" lIns="0" rIns="0" tIns="0" bIns="0" anchor="t">
-            <a:spAutoFit/>
-          </a:bodyPr>
-          <a:lstStyle/>
-          <a:p>
-            <a:pPr algn="l"/>
-            <a:r>
-              <a:rPr sz="1400" b="1" i="0">
-                <a:solidFill>
-                  <a:srgbClr val="1E2761"/>
-                </a:solidFill>
-                <a:latin typeface="Consolas"/>
-              </a:rPr>
-              <a:t>573 / 573</a:t>
-            </a:r>
-          </a:p>
-        </p:txBody>
-      </p:sp>
-      <p:sp>
-        <p:nvSpPr>
-          <p:cNvPr id="15" name="TextBox 14"/>
-          <p:cNvSpPr txBox="1"/>
-          <p:nvPr/>
-        </p:nvSpPr>
-        <p:spPr>
-          <a:xfrm>
-            <a:off x="7589520" y="4837176"/>
-            <a:ext cx="4114800" cy="411480"/>
-          </a:xfrm>
-          <a:prstGeom prst="rect">
-            <a:avLst/>
-          </a:prstGeom>
-          <a:noFill/>
-        </p:spPr>
-        <p:txBody>
-          <a:bodyPr wrap="square" lIns="0" rIns="0" tIns="0" bIns="0" anchor="t">
-            <a:spAutoFit/>
-          </a:bodyPr>
-          <a:lstStyle/>
-          <a:p>
-            <a:pPr algn="l"/>
-            <a:r>
-              <a:rPr sz="1100" b="0" i="0">
-                <a:solidFill>
-                  <a:srgbClr val="1A1A2E"/>
-                </a:solidFill>
-                <a:latin typeface="Calibri"/>
-              </a:rPr>
-              <a:t>normal_user classified perfectly</a:t>
-            </a:r>
-          </a:p>
-        </p:txBody>
-      </p:sp>
-      <p:sp>
-        <p:nvSpPr>
-          <p:cNvPr id="16" name="TextBox 15"/>
-          <p:cNvSpPr txBox="1"/>
-          <p:nvPr/>
-        </p:nvSpPr>
-        <p:spPr>
-          <a:xfrm>
-            <a:off x="7589520" y="5276088"/>
-            <a:ext cx="4114800" cy="274320"/>
-          </a:xfrm>
-          <a:prstGeom prst="rect">
-            <a:avLst/>
-          </a:prstGeom>
-          <a:noFill/>
-        </p:spPr>
-        <p:txBody>
-          <a:bodyPr wrap="square" lIns="0" rIns="0" tIns="0" bIns="0" anchor="t">
-            <a:spAutoFit/>
-          </a:bodyPr>
-          <a:lstStyle/>
-          <a:p>
-            <a:pPr algn="l"/>
-            <a:r>
-              <a:rPr sz="1400" b="1" i="0">
-                <a:solidFill>
-                  <a:srgbClr val="1E2761"/>
-                </a:solidFill>
-                <a:latin typeface="Consolas"/>
-              </a:rPr>
-              <a:t>0 / 1446</a:t>
-            </a:r>
-          </a:p>
-        </p:txBody>
-      </p:sp>
-      <p:sp>
-        <p:nvSpPr>
-          <p:cNvPr id="17" name="TextBox 16"/>
-          <p:cNvSpPr txBox="1"/>
-          <p:nvPr/>
-        </p:nvSpPr>
-        <p:spPr>
-          <a:xfrm>
-            <a:off x="7589520" y="5550407"/>
-            <a:ext cx="4114800" cy="411480"/>
-          </a:xfrm>
-          <a:prstGeom prst="rect">
-            <a:avLst/>
-          </a:prstGeom>
-          <a:noFill/>
-        </p:spPr>
-        <p:txBody>
-          <a:bodyPr wrap="square" lIns="0" rIns="0" tIns="0" bIns="0" anchor="t">
-            <a:spAutoFit/>
-          </a:bodyPr>
-          <a:lstStyle/>
-          <a:p>
-            <a:pPr algn="l"/>
-            <a:r>
-              <a:rPr sz="1100" b="0" i="0">
-                <a:solidFill>
-                  <a:srgbClr val="1A1A2E"/>
-                </a:solidFill>
-                <a:latin typeface="Calibri"/>
-              </a:rPr>
-              <a:t>Total errors: 0 windows — 0% error rate</a:t>
-            </a:r>
-          </a:p>
-        </p:txBody>
-      </p:sp>
-      <p:sp>
-        <p:nvSpPr>
-          <p:cNvPr id="18" name="TextBox 17"/>
-          <p:cNvSpPr txBox="1"/>
-          <p:nvPr/>
-        </p:nvSpPr>
-        <p:spPr>
-          <a:xfrm>
-            <a:off x="365760" y="6537960"/>
-            <a:ext cx="7315200" cy="228600"/>
-          </a:xfrm>
-          <a:prstGeom prst="rect">
-            <a:avLst/>
-          </a:prstGeom>
-          <a:noFill/>
-        </p:spPr>
-        <p:txBody>
-          <a:bodyPr wrap="square" lIns="0" rIns="0" tIns="0" bIns="0" anchor="t">
-            <a:spAutoFit/>
-          </a:bodyPr>
-          <a:lstStyle/>
-          <a:p>
-            <a:pPr algn="l"/>
-            <a:r>
-              <a:rPr sz="900" b="0" i="0">
-                <a:solidFill>
-                  <a:srgbClr val="64748B"/>
-                </a:solidFill>
-                <a:latin typeface="Calibri"/>
-              </a:rPr>
-              <a:t>Beyza Yavuz · Thesis Checkpoint Presentation</a:t>
-            </a:r>
-          </a:p>
-        </p:txBody>
-      </p:sp>
-      <p:sp>
-        <p:nvSpPr>
-          <p:cNvPr id="19" name="TextBox 18"/>
-          <p:cNvSpPr txBox="1"/>
-          <p:nvPr/>
-        </p:nvSpPr>
-        <p:spPr>
-          <a:xfrm>
-            <a:off x="11338560" y="6537960"/>
-            <a:ext cx="731520" cy="228600"/>
-          </a:xfrm>
-          <a:prstGeom prst="rect">
-            <a:avLst/>
-          </a:prstGeom>
-          <a:noFill/>
-        </p:spPr>
-        <p:txBody>
-          <a:bodyPr wrap="square" lIns="0" rIns="0" tIns="0" bIns="0" anchor="t">
-            <a:spAutoFit/>
-          </a:bodyPr>
-          <a:lstStyle/>
-          <a:p>
-            <a:pPr algn="r"/>
-            <a:r>
-              <a:rPr sz="900" b="0" i="0">
-                <a:solidFill>
-                  <a:srgbClr val="64748B"/>
-                </a:solidFill>
-                <a:latin typeface="Calibri"/>
-              </a:rPr>
-              <a:t>12 / 23</a:t>
-            </a:r>
-          </a:p>
-        </p:txBody>
-      </p:sp>
     </p:spTree>
   </p:cSld>
   <p:clrMapOvr>
@@ -6727,7 +7395,7 @@
 </file>
 
 <file path=ppt/slides/slide13.xml><?xml version="1.0" encoding="utf-8"?>
-<p:sld xmlns:a="http://schemas.openxmlformats.org/drawingml/2006/main" xmlns:p="http://schemas.openxmlformats.org/presentationml/2006/main" xmlns:r="http://schemas.openxmlformats.org/officeDocument/2006/relationships">
+<p:sld xmlns:a="http://schemas.openxmlformats.org/drawingml/2006/main" xmlns:r="http://schemas.openxmlformats.org/officeDocument/2006/relationships" xmlns:p="http://schemas.openxmlformats.org/presentationml/2006/main">
   <p:cSld>
     <p:bg>
       <p:bgPr>
@@ -6743,7 +7411,14 @@
         <p:cNvGrpSpPr/>
         <p:nvPr/>
       </p:nvGrpSpPr>
-      <p:grpSpPr/>
+      <p:grpSpPr>
+        <a:xfrm>
+          <a:off x="0" y="0"/>
+          <a:ext cx="0" cy="0"/>
+          <a:chOff x="0" y="0"/>
+          <a:chExt cx="0" cy="0"/>
+        </a:xfrm>
+      </p:grpSpPr>
       <p:sp>
         <p:nvSpPr>
           <p:cNvPr id="2" name="Rectangle 1"/>
@@ -6785,6 +7460,7 @@
           <a:lstStyle/>
           <a:p>
             <a:pPr algn="ctr"/>
+            <a:endParaRPr/>
           </a:p>
         </p:txBody>
       </p:sp>
@@ -6805,7 +7481,7 @@
           <a:noFill/>
         </p:spPr>
         <p:txBody>
-          <a:bodyPr wrap="square" lIns="0" rIns="0" tIns="0" bIns="0" anchor="t">
+          <a:bodyPr wrap="square" lIns="0" tIns="0" rIns="0" bIns="0" anchor="t">
             <a:spAutoFit/>
           </a:bodyPr>
           <a:lstStyle/>
@@ -6840,7 +7516,7 @@
           <a:noFill/>
         </p:spPr>
         <p:txBody>
-          <a:bodyPr wrap="square" lIns="0" rIns="0" tIns="0" bIns="0" anchor="t">
+          <a:bodyPr wrap="square" lIns="0" tIns="0" rIns="0" bIns="0" anchor="t">
             <a:spAutoFit/>
           </a:bodyPr>
           <a:lstStyle/>
@@ -6875,7 +7551,7 @@
           <a:noFill/>
         </p:spPr>
         <p:txBody>
-          <a:bodyPr wrap="square" lIns="0" rIns="0" tIns="0" bIns="0" anchor="t">
+          <a:bodyPr wrap="square" lIns="0" tIns="0" rIns="0" bIns="0" anchor="t">
             <a:spAutoFit/>
           </a:bodyPr>
           <a:lstStyle/>
@@ -6936,6 +7612,7 @@
           <a:lstStyle/>
           <a:p>
             <a:pPr algn="ctr"/>
+            <a:endParaRPr/>
           </a:p>
         </p:txBody>
       </p:sp>
@@ -6956,7 +7633,7 @@
           <a:noFill/>
         </p:spPr>
         <p:txBody>
-          <a:bodyPr wrap="square" lIns="0" rIns="0" tIns="0" bIns="0" anchor="t">
+          <a:bodyPr wrap="square" lIns="0" tIns="0" rIns="0" bIns="0" anchor="t">
             <a:spAutoFit/>
           </a:bodyPr>
           <a:lstStyle/>
@@ -6991,7 +7668,7 @@
           <a:noFill/>
         </p:spPr>
         <p:txBody>
-          <a:bodyPr wrap="square" lIns="0" rIns="0" tIns="0" bIns="0" anchor="t">
+          <a:bodyPr wrap="square" lIns="0" tIns="0" rIns="0" bIns="0" anchor="t">
             <a:spAutoFit/>
           </a:bodyPr>
           <a:lstStyle/>
@@ -7053,6 +7730,7 @@
           <a:lstStyle/>
           <a:p>
             <a:pPr algn="ctr"/>
+            <a:endParaRPr/>
           </a:p>
         </p:txBody>
       </p:sp>
@@ -7073,7 +7751,7 @@
           <a:noFill/>
         </p:spPr>
         <p:txBody>
-          <a:bodyPr wrap="square" lIns="0" rIns="0" tIns="0" bIns="0" anchor="t">
+          <a:bodyPr wrap="square" lIns="0" tIns="0" rIns="0" bIns="0" anchor="t">
             <a:spAutoFit/>
           </a:bodyPr>
           <a:lstStyle/>
@@ -7108,7 +7786,7 @@
           <a:noFill/>
         </p:spPr>
         <p:txBody>
-          <a:bodyPr wrap="square" lIns="0" rIns="0" tIns="0" bIns="0" anchor="t">
+          <a:bodyPr wrap="square" lIns="0" tIns="0" rIns="0" bIns="0" anchor="t">
             <a:spAutoFit/>
           </a:bodyPr>
           <a:lstStyle/>
@@ -7170,6 +7848,7 @@
           <a:lstStyle/>
           <a:p>
             <a:pPr algn="ctr"/>
+            <a:endParaRPr/>
           </a:p>
         </p:txBody>
       </p:sp>
@@ -7190,7 +7869,7 @@
           <a:noFill/>
         </p:spPr>
         <p:txBody>
-          <a:bodyPr wrap="square" lIns="0" rIns="0" tIns="0" bIns="0" anchor="t">
+          <a:bodyPr wrap="square" lIns="0" tIns="0" rIns="0" bIns="0" anchor="t">
             <a:spAutoFit/>
           </a:bodyPr>
           <a:lstStyle/>
@@ -7225,7 +7904,7 @@
           <a:noFill/>
         </p:spPr>
         <p:txBody>
-          <a:bodyPr wrap="square" lIns="0" rIns="0" tIns="0" bIns="0" anchor="t">
+          <a:bodyPr wrap="square" lIns="0" tIns="0" rIns="0" bIns="0" anchor="t">
             <a:spAutoFit/>
           </a:bodyPr>
           <a:lstStyle/>
@@ -7261,7 +7940,7 @@
           <a:noFill/>
         </p:spPr>
         <p:txBody>
-          <a:bodyPr wrap="square" lIns="0" rIns="0" tIns="0" bIns="0" anchor="t">
+          <a:bodyPr wrap="square" lIns="0" tIns="0" rIns="0" bIns="0" anchor="t">
             <a:spAutoFit/>
           </a:bodyPr>
           <a:lstStyle/>
@@ -7293,7 +7972,7 @@
         </p:xfrm>
         <a:graphic>
           <a:graphicData uri="http://schemas.openxmlformats.org/drawingml/2006/chart">
-            <c:chart xmlns:c="http://schemas.openxmlformats.org/drawingml/2006/chart" r:id="rId2"/>
+            <c:chart xmlns:c="http://schemas.openxmlformats.org/drawingml/2006/chart" xmlns:r="http://schemas.openxmlformats.org/officeDocument/2006/relationships" r:id="rId2"/>
           </a:graphicData>
         </a:graphic>
       </p:graphicFrame>
@@ -7314,7 +7993,7 @@
           <a:noFill/>
         </p:spPr>
         <p:txBody>
-          <a:bodyPr wrap="square" lIns="0" rIns="0" tIns="0" bIns="0" anchor="t">
+          <a:bodyPr wrap="square" lIns="0" tIns="0" rIns="0" bIns="0" anchor="t">
             <a:spAutoFit/>
           </a:bodyPr>
           <a:lstStyle/>
@@ -7341,7 +8020,7 @@
 </file>
 
 <file path=ppt/slides/slide14.xml><?xml version="1.0" encoding="utf-8"?>
-<p:sld xmlns:a="http://schemas.openxmlformats.org/drawingml/2006/main" xmlns:p="http://schemas.openxmlformats.org/presentationml/2006/main" xmlns:r="http://schemas.openxmlformats.org/officeDocument/2006/relationships">
+<p:sld xmlns:a="http://schemas.openxmlformats.org/drawingml/2006/main" xmlns:r="http://schemas.openxmlformats.org/officeDocument/2006/relationships" xmlns:p="http://schemas.openxmlformats.org/presentationml/2006/main">
   <p:cSld>
     <p:bg>
       <p:bgPr>
@@ -7357,7 +8036,14 @@
         <p:cNvGrpSpPr/>
         <p:nvPr/>
       </p:nvGrpSpPr>
-      <p:grpSpPr/>
+      <p:grpSpPr>
+        <a:xfrm>
+          <a:off x="0" y="0"/>
+          <a:ext cx="0" cy="0"/>
+          <a:chOff x="0" y="0"/>
+          <a:chExt cx="0" cy="0"/>
+        </a:xfrm>
+      </p:grpSpPr>
       <p:sp>
         <p:nvSpPr>
           <p:cNvPr id="2" name="TextBox 1"/>
@@ -7375,7 +8061,7 @@
           <a:noFill/>
         </p:spPr>
         <p:txBody>
-          <a:bodyPr wrap="square" lIns="0" rIns="0" tIns="0" bIns="0" anchor="t">
+          <a:bodyPr wrap="square" lIns="0" tIns="0" rIns="0" bIns="0" anchor="t">
             <a:spAutoFit/>
           </a:bodyPr>
           <a:lstStyle/>
@@ -7410,7 +8096,7 @@
           <a:noFill/>
         </p:spPr>
         <p:txBody>
-          <a:bodyPr wrap="square" lIns="0" rIns="0" tIns="0" bIns="0" anchor="t">
+          <a:bodyPr wrap="square" lIns="0" tIns="0" rIns="0" bIns="0" anchor="t">
             <a:spAutoFit/>
           </a:bodyPr>
           <a:lstStyle/>
@@ -7445,7 +8131,7 @@
           <a:noFill/>
         </p:spPr>
         <p:txBody>
-          <a:bodyPr wrap="square" lIns="0" rIns="0" tIns="0" bIns="0" anchor="t">
+          <a:bodyPr wrap="square" lIns="0" tIns="0" rIns="0" bIns="0" anchor="t">
             <a:spAutoFit/>
           </a:bodyPr>
           <a:lstStyle/>
@@ -7504,7 +8190,7 @@
           <a:noFill/>
         </p:spPr>
         <p:txBody>
-          <a:bodyPr wrap="square" lIns="0" rIns="0" tIns="0" bIns="0" anchor="t">
+          <a:bodyPr wrap="square" lIns="0" tIns="0" rIns="0" bIns="0" anchor="t">
             <a:spAutoFit/>
           </a:bodyPr>
           <a:lstStyle/>
@@ -7539,7 +8225,7 @@
           <a:noFill/>
         </p:spPr>
         <p:txBody>
-          <a:bodyPr wrap="square" lIns="0" rIns="0" tIns="0" bIns="0" anchor="t">
+          <a:bodyPr wrap="square" lIns="0" tIns="0" rIns="0" bIns="0" anchor="t">
             <a:spAutoFit/>
           </a:bodyPr>
           <a:lstStyle/>
@@ -7574,7 +8260,7 @@
           <a:noFill/>
         </p:spPr>
         <p:txBody>
-          <a:bodyPr wrap="square" lIns="0" rIns="0" tIns="0" bIns="0" anchor="t">
+          <a:bodyPr wrap="square" lIns="0" tIns="0" rIns="0" bIns="0" anchor="t">
             <a:spAutoFit/>
           </a:bodyPr>
           <a:lstStyle/>
@@ -7609,7 +8295,7 @@
           <a:noFill/>
         </p:spPr>
         <p:txBody>
-          <a:bodyPr wrap="square" lIns="0" rIns="0" tIns="0" bIns="0" anchor="t">
+          <a:bodyPr wrap="square" lIns="0" tIns="0" rIns="0" bIns="0" anchor="t">
             <a:spAutoFit/>
           </a:bodyPr>
           <a:lstStyle/>
@@ -7644,7 +8330,7 @@
           <a:noFill/>
         </p:spPr>
         <p:txBody>
-          <a:bodyPr wrap="square" lIns="0" rIns="0" tIns="0" bIns="0" anchor="t">
+          <a:bodyPr wrap="square" lIns="0" tIns="0" rIns="0" bIns="0" anchor="t">
             <a:spAutoFit/>
           </a:bodyPr>
           <a:lstStyle/>
@@ -7679,7 +8365,7 @@
           <a:noFill/>
         </p:spPr>
         <p:txBody>
-          <a:bodyPr wrap="square" lIns="0" rIns="0" tIns="0" bIns="0" anchor="t">
+          <a:bodyPr wrap="square" lIns="0" tIns="0" rIns="0" bIns="0" anchor="t">
             <a:spAutoFit/>
           </a:bodyPr>
           <a:lstStyle/>
@@ -7714,7 +8400,7 @@
           <a:noFill/>
         </p:spPr>
         <p:txBody>
-          <a:bodyPr wrap="square" lIns="0" rIns="0" tIns="0" bIns="0" anchor="t">
+          <a:bodyPr wrap="square" lIns="0" tIns="0" rIns="0" bIns="0" anchor="t">
             <a:spAutoFit/>
           </a:bodyPr>
           <a:lstStyle/>
@@ -7749,7 +8435,7 @@
           <a:noFill/>
         </p:spPr>
         <p:txBody>
-          <a:bodyPr wrap="square" lIns="0" rIns="0" tIns="0" bIns="0" anchor="t">
+          <a:bodyPr wrap="square" lIns="0" tIns="0" rIns="0" bIns="0" anchor="t">
             <a:spAutoFit/>
           </a:bodyPr>
           <a:lstStyle/>
@@ -7784,7 +8470,7 @@
           <a:noFill/>
         </p:spPr>
         <p:txBody>
-          <a:bodyPr wrap="square" lIns="0" rIns="0" tIns="0" bIns="0" anchor="t">
+          <a:bodyPr wrap="square" lIns="0" tIns="0" rIns="0" bIns="0" anchor="t">
             <a:spAutoFit/>
           </a:bodyPr>
           <a:lstStyle/>
@@ -7819,7 +8505,7 @@
           <a:noFill/>
         </p:spPr>
         <p:txBody>
-          <a:bodyPr wrap="square" lIns="0" rIns="0" tIns="0" bIns="0" anchor="t">
+          <a:bodyPr wrap="square" lIns="0" tIns="0" rIns="0" bIns="0" anchor="t">
             <a:spAutoFit/>
           </a:bodyPr>
           <a:lstStyle/>
@@ -7854,7 +8540,7 @@
           <a:noFill/>
         </p:spPr>
         <p:txBody>
-          <a:bodyPr wrap="square" lIns="0" rIns="0" tIns="0" bIns="0" anchor="t">
+          <a:bodyPr wrap="square" lIns="0" tIns="0" rIns="0" bIns="0" anchor="t">
             <a:spAutoFit/>
           </a:bodyPr>
           <a:lstStyle/>
@@ -7889,7 +8575,7 @@
           <a:noFill/>
         </p:spPr>
         <p:txBody>
-          <a:bodyPr wrap="square" lIns="0" rIns="0" tIns="0" bIns="0" anchor="t">
+          <a:bodyPr wrap="square" lIns="0" tIns="0" rIns="0" bIns="0" anchor="t">
             <a:spAutoFit/>
           </a:bodyPr>
           <a:lstStyle/>
@@ -7916,7 +8602,7 @@
 </file>
 
 <file path=ppt/slides/slide15.xml><?xml version="1.0" encoding="utf-8"?>
-<p:sld xmlns:a="http://schemas.openxmlformats.org/drawingml/2006/main" xmlns:p="http://schemas.openxmlformats.org/presentationml/2006/main" xmlns:r="http://schemas.openxmlformats.org/officeDocument/2006/relationships">
+<p:sld xmlns:a="http://schemas.openxmlformats.org/drawingml/2006/main" xmlns:r="http://schemas.openxmlformats.org/officeDocument/2006/relationships" xmlns:p="http://schemas.openxmlformats.org/presentationml/2006/main">
   <p:cSld>
     <p:bg>
       <p:bgPr>
@@ -7932,7 +8618,14 @@
         <p:cNvGrpSpPr/>
         <p:nvPr/>
       </p:nvGrpSpPr>
-      <p:grpSpPr/>
+      <p:grpSpPr>
+        <a:xfrm>
+          <a:off x="0" y="0"/>
+          <a:ext cx="0" cy="0"/>
+          <a:chOff x="0" y="0"/>
+          <a:chExt cx="0" cy="0"/>
+        </a:xfrm>
+      </p:grpSpPr>
       <p:sp>
         <p:nvSpPr>
           <p:cNvPr id="2" name="TextBox 1"/>
@@ -7950,7 +8643,7 @@
           <a:noFill/>
         </p:spPr>
         <p:txBody>
-          <a:bodyPr wrap="square" lIns="0" rIns="0" tIns="0" bIns="0" anchor="t">
+          <a:bodyPr wrap="square" lIns="0" tIns="0" rIns="0" bIns="0" anchor="t">
             <a:spAutoFit/>
           </a:bodyPr>
           <a:lstStyle/>
@@ -7985,7 +8678,7 @@
           <a:noFill/>
         </p:spPr>
         <p:txBody>
-          <a:bodyPr wrap="square" lIns="0" rIns="0" tIns="0" bIns="0" anchor="t">
+          <a:bodyPr wrap="square" lIns="0" tIns="0" rIns="0" bIns="0" anchor="t">
             <a:spAutoFit/>
           </a:bodyPr>
           <a:lstStyle/>
@@ -8020,7 +8713,7 @@
           <a:noFill/>
         </p:spPr>
         <p:txBody>
-          <a:bodyPr wrap="square" lIns="0" rIns="0" tIns="0" bIns="0" anchor="t">
+          <a:bodyPr wrap="square" lIns="0" tIns="0" rIns="0" bIns="0" anchor="t">
             <a:spAutoFit/>
           </a:bodyPr>
           <a:lstStyle/>
@@ -8079,7 +8772,7 @@
           <a:noFill/>
         </p:spPr>
         <p:txBody>
-          <a:bodyPr wrap="square" lIns="0" rIns="0" tIns="0" bIns="0" anchor="t">
+          <a:bodyPr wrap="square" lIns="0" tIns="0" rIns="0" bIns="0" anchor="t">
             <a:spAutoFit/>
           </a:bodyPr>
           <a:lstStyle/>
@@ -8140,6 +8833,7 @@
           <a:lstStyle/>
           <a:p>
             <a:pPr algn="ctr"/>
+            <a:endParaRPr/>
           </a:p>
         </p:txBody>
       </p:sp>
@@ -8184,6 +8878,7 @@
           <a:lstStyle/>
           <a:p>
             <a:pPr algn="ctr"/>
+            <a:endParaRPr/>
           </a:p>
         </p:txBody>
       </p:sp>
@@ -8204,7 +8899,7 @@
           <a:noFill/>
         </p:spPr>
         <p:txBody>
-          <a:bodyPr wrap="square" lIns="0" rIns="0" tIns="0" bIns="0" anchor="t">
+          <a:bodyPr wrap="square" lIns="0" tIns="0" rIns="0" bIns="0" anchor="t">
             <a:spAutoFit/>
           </a:bodyPr>
           <a:lstStyle/>
@@ -8239,7 +8934,7 @@
           <a:noFill/>
         </p:spPr>
         <p:txBody>
-          <a:bodyPr wrap="square" lIns="0" rIns="0" tIns="0" bIns="0" anchor="t">
+          <a:bodyPr wrap="square" lIns="0" tIns="0" rIns="0" bIns="0" anchor="t">
             <a:spAutoFit/>
           </a:bodyPr>
           <a:lstStyle/>
@@ -8274,7 +8969,7 @@
           <a:noFill/>
         </p:spPr>
         <p:txBody>
-          <a:bodyPr wrap="square" lIns="0" rIns="0" tIns="0" bIns="0" anchor="t">
+          <a:bodyPr wrap="square" lIns="0" tIns="0" rIns="0" bIns="0" anchor="t">
             <a:spAutoFit/>
           </a:bodyPr>
           <a:lstStyle/>
@@ -8335,6 +9030,7 @@
           <a:lstStyle/>
           <a:p>
             <a:pPr algn="ctr"/>
+            <a:endParaRPr/>
           </a:p>
         </p:txBody>
       </p:sp>
@@ -8379,6 +9075,7 @@
           <a:lstStyle/>
           <a:p>
             <a:pPr algn="ctr"/>
+            <a:endParaRPr/>
           </a:p>
         </p:txBody>
       </p:sp>
@@ -8399,7 +9096,7 @@
           <a:noFill/>
         </p:spPr>
         <p:txBody>
-          <a:bodyPr wrap="square" lIns="0" rIns="0" tIns="0" bIns="0" anchor="t">
+          <a:bodyPr wrap="square" lIns="0" tIns="0" rIns="0" bIns="0" anchor="t">
             <a:spAutoFit/>
           </a:bodyPr>
           <a:lstStyle/>
@@ -8434,7 +9131,7 @@
           <a:noFill/>
         </p:spPr>
         <p:txBody>
-          <a:bodyPr wrap="square" lIns="0" rIns="0" tIns="0" bIns="0" anchor="t">
+          <a:bodyPr wrap="square" lIns="0" tIns="0" rIns="0" bIns="0" anchor="t">
             <a:spAutoFit/>
           </a:bodyPr>
           <a:lstStyle/>
@@ -8469,7 +9166,7 @@
           <a:noFill/>
         </p:spPr>
         <p:txBody>
-          <a:bodyPr wrap="square" lIns="0" rIns="0" tIns="0" bIns="0" anchor="t">
+          <a:bodyPr wrap="square" lIns="0" tIns="0" rIns="0" bIns="0" anchor="t">
             <a:spAutoFit/>
           </a:bodyPr>
           <a:lstStyle/>
@@ -8530,6 +9227,7 @@
           <a:lstStyle/>
           <a:p>
             <a:pPr algn="ctr"/>
+            <a:endParaRPr/>
           </a:p>
         </p:txBody>
       </p:sp>
@@ -8574,6 +9272,7 @@
           <a:lstStyle/>
           <a:p>
             <a:pPr algn="ctr"/>
+            <a:endParaRPr/>
           </a:p>
         </p:txBody>
       </p:sp>
@@ -8594,7 +9293,7 @@
           <a:noFill/>
         </p:spPr>
         <p:txBody>
-          <a:bodyPr wrap="square" lIns="0" rIns="0" tIns="0" bIns="0" anchor="t">
+          <a:bodyPr wrap="square" lIns="0" tIns="0" rIns="0" bIns="0" anchor="t">
             <a:spAutoFit/>
           </a:bodyPr>
           <a:lstStyle/>
@@ -8629,7 +9328,7 @@
           <a:noFill/>
         </p:spPr>
         <p:txBody>
-          <a:bodyPr wrap="square" lIns="0" rIns="0" tIns="0" bIns="0" anchor="t">
+          <a:bodyPr wrap="square" lIns="0" tIns="0" rIns="0" bIns="0" anchor="t">
             <a:spAutoFit/>
           </a:bodyPr>
           <a:lstStyle/>
@@ -8664,7 +9363,7 @@
           <a:noFill/>
         </p:spPr>
         <p:txBody>
-          <a:bodyPr wrap="square" lIns="0" rIns="0" tIns="0" bIns="0" anchor="t">
+          <a:bodyPr wrap="square" lIns="0" tIns="0" rIns="0" bIns="0" anchor="t">
             <a:spAutoFit/>
           </a:bodyPr>
           <a:lstStyle/>
@@ -8725,6 +9424,7 @@
           <a:lstStyle/>
           <a:p>
             <a:pPr algn="ctr"/>
+            <a:endParaRPr/>
           </a:p>
         </p:txBody>
       </p:sp>
@@ -8769,6 +9469,7 @@
           <a:lstStyle/>
           <a:p>
             <a:pPr algn="ctr"/>
+            <a:endParaRPr/>
           </a:p>
         </p:txBody>
       </p:sp>
@@ -8789,7 +9490,7 @@
           <a:noFill/>
         </p:spPr>
         <p:txBody>
-          <a:bodyPr wrap="square" lIns="0" rIns="0" tIns="0" bIns="0" anchor="t">
+          <a:bodyPr wrap="square" lIns="0" tIns="0" rIns="0" bIns="0" anchor="t">
             <a:spAutoFit/>
           </a:bodyPr>
           <a:lstStyle/>
@@ -8824,7 +9525,7 @@
           <a:noFill/>
         </p:spPr>
         <p:txBody>
-          <a:bodyPr wrap="square" lIns="0" rIns="0" tIns="0" bIns="0" anchor="t">
+          <a:bodyPr wrap="square" lIns="0" tIns="0" rIns="0" bIns="0" anchor="t">
             <a:spAutoFit/>
           </a:bodyPr>
           <a:lstStyle/>
@@ -8859,7 +9560,7 @@
           <a:noFill/>
         </p:spPr>
         <p:txBody>
-          <a:bodyPr wrap="square" lIns="0" rIns="0" tIns="0" bIns="0" anchor="t">
+          <a:bodyPr wrap="square" lIns="0" tIns="0" rIns="0" bIns="0" anchor="t">
             <a:spAutoFit/>
           </a:bodyPr>
           <a:lstStyle/>
@@ -8894,7 +9595,7 @@
           <a:noFill/>
         </p:spPr>
         <p:txBody>
-          <a:bodyPr wrap="square" lIns="0" rIns="0" tIns="0" bIns="0" anchor="t">
+          <a:bodyPr wrap="square" lIns="0" tIns="0" rIns="0" bIns="0" anchor="t">
             <a:spAutoFit/>
           </a:bodyPr>
           <a:lstStyle/>
@@ -8929,7 +9630,7 @@
           <a:noFill/>
         </p:spPr>
         <p:txBody>
-          <a:bodyPr wrap="square" lIns="0" rIns="0" tIns="0" bIns="0" anchor="t">
+          <a:bodyPr wrap="square" lIns="0" tIns="0" rIns="0" bIns="0" anchor="t">
             <a:spAutoFit/>
           </a:bodyPr>
           <a:lstStyle/>
@@ -8956,7 +9657,7 @@
 </file>
 
 <file path=ppt/slides/slide16.xml><?xml version="1.0" encoding="utf-8"?>
-<p:sld xmlns:a="http://schemas.openxmlformats.org/drawingml/2006/main" xmlns:p="http://schemas.openxmlformats.org/presentationml/2006/main" xmlns:r="http://schemas.openxmlformats.org/officeDocument/2006/relationships">
+<p:sld xmlns:a="http://schemas.openxmlformats.org/drawingml/2006/main" xmlns:r="http://schemas.openxmlformats.org/officeDocument/2006/relationships" xmlns:p="http://schemas.openxmlformats.org/presentationml/2006/main">
   <p:cSld>
     <p:bg>
       <p:bgPr>
@@ -8972,7 +9673,14 @@
         <p:cNvGrpSpPr/>
         <p:nvPr/>
       </p:nvGrpSpPr>
-      <p:grpSpPr/>
+      <p:grpSpPr>
+        <a:xfrm>
+          <a:off x="0" y="0"/>
+          <a:ext cx="0" cy="0"/>
+          <a:chOff x="0" y="0"/>
+          <a:chExt cx="0" cy="0"/>
+        </a:xfrm>
+      </p:grpSpPr>
       <p:sp>
         <p:nvSpPr>
           <p:cNvPr id="2" name="TextBox 1"/>
@@ -8990,7 +9698,7 @@
           <a:noFill/>
         </p:spPr>
         <p:txBody>
-          <a:bodyPr wrap="square" lIns="0" rIns="0" tIns="0" bIns="0" anchor="t">
+          <a:bodyPr wrap="square" lIns="0" tIns="0" rIns="0" bIns="0" anchor="t">
             <a:spAutoFit/>
           </a:bodyPr>
           <a:lstStyle/>
@@ -9025,7 +9733,7 @@
           <a:noFill/>
         </p:spPr>
         <p:txBody>
-          <a:bodyPr wrap="square" lIns="0" rIns="0" tIns="0" bIns="0" anchor="t">
+          <a:bodyPr wrap="square" lIns="0" tIns="0" rIns="0" bIns="0" anchor="t">
             <a:spAutoFit/>
           </a:bodyPr>
           <a:lstStyle/>
@@ -9060,7 +9768,7 @@
           <a:noFill/>
         </p:spPr>
         <p:txBody>
-          <a:bodyPr wrap="square" lIns="0" rIns="0" tIns="0" bIns="0" anchor="t">
+          <a:bodyPr wrap="square" lIns="0" tIns="0" rIns="0" bIns="0" anchor="t">
             <a:spAutoFit/>
           </a:bodyPr>
           <a:lstStyle/>
@@ -9119,7 +9827,7 @@
           <a:noFill/>
         </p:spPr>
         <p:txBody>
-          <a:bodyPr wrap="square" lIns="0" rIns="0" tIns="0" bIns="0" anchor="t">
+          <a:bodyPr wrap="square" lIns="0" tIns="0" rIns="0" bIns="0" anchor="t">
             <a:spAutoFit/>
           </a:bodyPr>
           <a:lstStyle/>
@@ -9178,6 +9886,7 @@
           <a:lstStyle/>
           <a:p>
             <a:pPr algn="ctr"/>
+            <a:endParaRPr/>
           </a:p>
         </p:txBody>
       </p:sp>
@@ -9198,7 +9907,7 @@
           <a:noFill/>
         </p:spPr>
         <p:txBody>
-          <a:bodyPr wrap="square" lIns="0" rIns="0" tIns="0" bIns="0" anchor="t">
+          <a:bodyPr wrap="square" lIns="0" tIns="0" rIns="0" bIns="0" anchor="t">
             <a:spAutoFit/>
           </a:bodyPr>
           <a:lstStyle/>
@@ -9233,7 +9942,7 @@
           <a:noFill/>
         </p:spPr>
         <p:txBody>
-          <a:bodyPr wrap="square" lIns="0" rIns="0" tIns="0" bIns="0" anchor="t">
+          <a:bodyPr wrap="square" lIns="0" tIns="0" rIns="0" bIns="0" anchor="t">
             <a:spAutoFit/>
           </a:bodyPr>
           <a:lstStyle/>
@@ -9268,7 +9977,7 @@
           <a:noFill/>
         </p:spPr>
         <p:txBody>
-          <a:bodyPr wrap="square" lIns="0" rIns="0" tIns="0" bIns="0" anchor="t">
+          <a:bodyPr wrap="square" lIns="0" tIns="0" rIns="0" bIns="0" anchor="t">
             <a:spAutoFit/>
           </a:bodyPr>
           <a:lstStyle/>
@@ -9327,6 +10036,7 @@
           <a:lstStyle/>
           <a:p>
             <a:pPr algn="ctr"/>
+            <a:endParaRPr/>
           </a:p>
         </p:txBody>
       </p:sp>
@@ -9347,7 +10057,7 @@
           <a:noFill/>
         </p:spPr>
         <p:txBody>
-          <a:bodyPr wrap="square" lIns="0" rIns="0" tIns="0" bIns="0" anchor="t">
+          <a:bodyPr wrap="square" lIns="0" tIns="0" rIns="0" bIns="0" anchor="t">
             <a:spAutoFit/>
           </a:bodyPr>
           <a:lstStyle/>
@@ -9382,7 +10092,7 @@
           <a:noFill/>
         </p:spPr>
         <p:txBody>
-          <a:bodyPr wrap="square" lIns="0" rIns="0" tIns="0" bIns="0" anchor="t">
+          <a:bodyPr wrap="square" lIns="0" tIns="0" rIns="0" bIns="0" anchor="t">
             <a:spAutoFit/>
           </a:bodyPr>
           <a:lstStyle/>
@@ -9417,7 +10127,7 @@
           <a:noFill/>
         </p:spPr>
         <p:txBody>
-          <a:bodyPr wrap="square" lIns="0" rIns="0" tIns="0" bIns="0" anchor="t">
+          <a:bodyPr wrap="square" lIns="0" tIns="0" rIns="0" bIns="0" anchor="t">
             <a:spAutoFit/>
           </a:bodyPr>
           <a:lstStyle/>
@@ -9476,6 +10186,7 @@
           <a:lstStyle/>
           <a:p>
             <a:pPr algn="ctr"/>
+            <a:endParaRPr/>
           </a:p>
         </p:txBody>
       </p:sp>
@@ -9496,7 +10207,7 @@
           <a:noFill/>
         </p:spPr>
         <p:txBody>
-          <a:bodyPr wrap="square" lIns="0" rIns="0" tIns="0" bIns="0" anchor="t">
+          <a:bodyPr wrap="square" lIns="0" tIns="0" rIns="0" bIns="0" anchor="t">
             <a:spAutoFit/>
           </a:bodyPr>
           <a:lstStyle/>
@@ -9531,7 +10242,7 @@
           <a:noFill/>
         </p:spPr>
         <p:txBody>
-          <a:bodyPr wrap="square" lIns="0" rIns="0" tIns="0" bIns="0" anchor="t">
+          <a:bodyPr wrap="square" lIns="0" tIns="0" rIns="0" bIns="0" anchor="t">
             <a:spAutoFit/>
           </a:bodyPr>
           <a:lstStyle/>
@@ -9566,7 +10277,7 @@
           <a:noFill/>
         </p:spPr>
         <p:txBody>
-          <a:bodyPr wrap="square" lIns="0" rIns="0" tIns="0" bIns="0" anchor="t">
+          <a:bodyPr wrap="square" lIns="0" tIns="0" rIns="0" bIns="0" anchor="t">
             <a:spAutoFit/>
           </a:bodyPr>
           <a:lstStyle/>
@@ -9625,6 +10336,7 @@
           <a:lstStyle/>
           <a:p>
             <a:pPr algn="ctr"/>
+            <a:endParaRPr/>
           </a:p>
         </p:txBody>
       </p:sp>
@@ -9645,7 +10357,7 @@
           <a:noFill/>
         </p:spPr>
         <p:txBody>
-          <a:bodyPr wrap="square" lIns="0" rIns="0" tIns="0" bIns="0" anchor="t">
+          <a:bodyPr wrap="square" lIns="0" tIns="0" rIns="0" bIns="0" anchor="t">
             <a:spAutoFit/>
           </a:bodyPr>
           <a:lstStyle/>
@@ -9680,7 +10392,7 @@
           <a:noFill/>
         </p:spPr>
         <p:txBody>
-          <a:bodyPr wrap="square" lIns="0" rIns="0" tIns="0" bIns="0" anchor="t">
+          <a:bodyPr wrap="square" lIns="0" tIns="0" rIns="0" bIns="0" anchor="t">
             <a:spAutoFit/>
           </a:bodyPr>
           <a:lstStyle/>
@@ -9715,7 +10427,7 @@
           <a:noFill/>
         </p:spPr>
         <p:txBody>
-          <a:bodyPr wrap="square" lIns="0" rIns="0" tIns="0" bIns="0" anchor="t">
+          <a:bodyPr wrap="square" lIns="0" tIns="0" rIns="0" bIns="0" anchor="t">
             <a:spAutoFit/>
           </a:bodyPr>
           <a:lstStyle/>
@@ -9750,7 +10462,7 @@
           <a:noFill/>
         </p:spPr>
         <p:txBody>
-          <a:bodyPr wrap="square" lIns="0" rIns="0" tIns="0" bIns="0" anchor="t">
+          <a:bodyPr wrap="square" lIns="0" tIns="0" rIns="0" bIns="0" anchor="t">
             <a:spAutoFit/>
           </a:bodyPr>
           <a:lstStyle/>
@@ -9785,7 +10497,7 @@
           <a:noFill/>
         </p:spPr>
         <p:txBody>
-          <a:bodyPr wrap="square" lIns="0" rIns="0" tIns="0" bIns="0" anchor="t">
+          <a:bodyPr wrap="square" lIns="0" tIns="0" rIns="0" bIns="0" anchor="t">
             <a:spAutoFit/>
           </a:bodyPr>
           <a:lstStyle/>
@@ -9812,7 +10524,7 @@
 </file>
 
 <file path=ppt/slides/slide17.xml><?xml version="1.0" encoding="utf-8"?>
-<p:sld xmlns:a="http://schemas.openxmlformats.org/drawingml/2006/main" xmlns:p="http://schemas.openxmlformats.org/presentationml/2006/main" xmlns:r="http://schemas.openxmlformats.org/officeDocument/2006/relationships">
+<p:sld xmlns:a="http://schemas.openxmlformats.org/drawingml/2006/main" xmlns:r="http://schemas.openxmlformats.org/officeDocument/2006/relationships" xmlns:p="http://schemas.openxmlformats.org/presentationml/2006/main">
   <p:cSld>
     <p:bg>
       <p:bgPr>
@@ -9828,7 +10540,14 @@
         <p:cNvGrpSpPr/>
         <p:nvPr/>
       </p:nvGrpSpPr>
-      <p:grpSpPr/>
+      <p:grpSpPr>
+        <a:xfrm>
+          <a:off x="0" y="0"/>
+          <a:ext cx="0" cy="0"/>
+          <a:chOff x="0" y="0"/>
+          <a:chExt cx="0" cy="0"/>
+        </a:xfrm>
+      </p:grpSpPr>
       <p:sp>
         <p:nvSpPr>
           <p:cNvPr id="2" name="TextBox 1"/>
@@ -9846,7 +10565,7 @@
           <a:noFill/>
         </p:spPr>
         <p:txBody>
-          <a:bodyPr wrap="square" lIns="0" rIns="0" tIns="0" bIns="0" anchor="t">
+          <a:bodyPr wrap="square" lIns="0" tIns="0" rIns="0" bIns="0" anchor="t">
             <a:spAutoFit/>
           </a:bodyPr>
           <a:lstStyle/>
@@ -9881,7 +10600,7 @@
           <a:noFill/>
         </p:spPr>
         <p:txBody>
-          <a:bodyPr wrap="square" lIns="0" rIns="0" tIns="0" bIns="0" anchor="t">
+          <a:bodyPr wrap="square" lIns="0" tIns="0" rIns="0" bIns="0" anchor="t">
             <a:spAutoFit/>
           </a:bodyPr>
           <a:lstStyle/>
@@ -9916,7 +10635,7 @@
           <a:noFill/>
         </p:spPr>
         <p:txBody>
-          <a:bodyPr wrap="square" lIns="0" rIns="0" tIns="0" bIns="0" anchor="t">
+          <a:bodyPr wrap="square" lIns="0" tIns="0" rIns="0" bIns="0" anchor="t">
             <a:spAutoFit/>
           </a:bodyPr>
           <a:lstStyle/>
@@ -9975,7 +10694,7 @@
           <a:noFill/>
         </p:spPr>
         <p:txBody>
-          <a:bodyPr wrap="square" lIns="0" rIns="0" tIns="0" bIns="0" anchor="t">
+          <a:bodyPr wrap="square" lIns="0" tIns="0" rIns="0" bIns="0" anchor="t">
             <a:spAutoFit/>
           </a:bodyPr>
           <a:lstStyle/>
@@ -10010,7 +10729,7 @@
           <a:noFill/>
         </p:spPr>
         <p:txBody>
-          <a:bodyPr wrap="square" lIns="0" rIns="0" tIns="0" bIns="0" anchor="t">
+          <a:bodyPr wrap="square" lIns="0" tIns="0" rIns="0" bIns="0" anchor="t">
             <a:spAutoFit/>
           </a:bodyPr>
           <a:lstStyle/>
@@ -10045,7 +10764,7 @@
           <a:noFill/>
         </p:spPr>
         <p:txBody>
-          <a:bodyPr wrap="square" lIns="0" rIns="0" tIns="0" bIns="0" anchor="t">
+          <a:bodyPr wrap="square" lIns="0" tIns="0" rIns="0" bIns="0" anchor="t">
             <a:spAutoFit/>
           </a:bodyPr>
           <a:lstStyle/>
@@ -10080,7 +10799,7 @@
           <a:noFill/>
         </p:spPr>
         <p:txBody>
-          <a:bodyPr wrap="square" lIns="0" rIns="0" tIns="0" bIns="0" anchor="t">
+          <a:bodyPr wrap="square" lIns="0" tIns="0" rIns="0" bIns="0" anchor="t">
             <a:spAutoFit/>
           </a:bodyPr>
           <a:lstStyle/>
@@ -10115,7 +10834,7 @@
           <a:noFill/>
         </p:spPr>
         <p:txBody>
-          <a:bodyPr wrap="square" lIns="0" rIns="0" tIns="0" bIns="0" anchor="t">
+          <a:bodyPr wrap="square" lIns="0" tIns="0" rIns="0" bIns="0" anchor="t">
             <a:spAutoFit/>
           </a:bodyPr>
           <a:lstStyle/>
@@ -10150,7 +10869,7 @@
           <a:noFill/>
         </p:spPr>
         <p:txBody>
-          <a:bodyPr wrap="square" lIns="0" rIns="0" tIns="0" bIns="0" anchor="t">
+          <a:bodyPr wrap="square" lIns="0" tIns="0" rIns="0" bIns="0" anchor="t">
             <a:spAutoFit/>
           </a:bodyPr>
           <a:lstStyle/>
@@ -10185,7 +10904,7 @@
           <a:noFill/>
         </p:spPr>
         <p:txBody>
-          <a:bodyPr wrap="square" lIns="0" rIns="0" tIns="0" bIns="0" anchor="t">
+          <a:bodyPr wrap="square" lIns="0" tIns="0" rIns="0" bIns="0" anchor="t">
             <a:spAutoFit/>
           </a:bodyPr>
           <a:lstStyle/>
@@ -10220,7 +10939,7 @@
           <a:noFill/>
         </p:spPr>
         <p:txBody>
-          <a:bodyPr wrap="square" lIns="0" rIns="0" tIns="0" bIns="0" anchor="t">
+          <a:bodyPr wrap="square" lIns="0" tIns="0" rIns="0" bIns="0" anchor="t">
             <a:spAutoFit/>
           </a:bodyPr>
           <a:lstStyle/>
@@ -10255,7 +10974,7 @@
           <a:noFill/>
         </p:spPr>
         <p:txBody>
-          <a:bodyPr wrap="square" lIns="0" rIns="0" tIns="0" bIns="0" anchor="t">
+          <a:bodyPr wrap="square" lIns="0" tIns="0" rIns="0" bIns="0" anchor="t">
             <a:spAutoFit/>
           </a:bodyPr>
           <a:lstStyle/>
@@ -10290,7 +11009,7 @@
           <a:noFill/>
         </p:spPr>
         <p:txBody>
-          <a:bodyPr wrap="square" lIns="0" rIns="0" tIns="0" bIns="0" anchor="t">
+          <a:bodyPr wrap="square" lIns="0" tIns="0" rIns="0" bIns="0" anchor="t">
             <a:spAutoFit/>
           </a:bodyPr>
           <a:lstStyle/>
@@ -10325,7 +11044,7 @@
           <a:noFill/>
         </p:spPr>
         <p:txBody>
-          <a:bodyPr wrap="square" lIns="0" rIns="0" tIns="0" bIns="0" anchor="t">
+          <a:bodyPr wrap="square" lIns="0" tIns="0" rIns="0" bIns="0" anchor="t">
             <a:spAutoFit/>
           </a:bodyPr>
           <a:lstStyle/>
@@ -10360,7 +11079,7 @@
           <a:noFill/>
         </p:spPr>
         <p:txBody>
-          <a:bodyPr wrap="square" lIns="0" rIns="0" tIns="0" bIns="0" anchor="t">
+          <a:bodyPr wrap="square" lIns="0" tIns="0" rIns="0" bIns="0" anchor="t">
             <a:spAutoFit/>
           </a:bodyPr>
           <a:lstStyle/>
@@ -10395,7 +11114,7 @@
           <a:noFill/>
         </p:spPr>
         <p:txBody>
-          <a:bodyPr wrap="square" lIns="0" rIns="0" tIns="0" bIns="0" anchor="t">
+          <a:bodyPr wrap="square" lIns="0" tIns="0" rIns="0" bIns="0" anchor="t">
             <a:spAutoFit/>
           </a:bodyPr>
           <a:lstStyle/>
@@ -10430,7 +11149,7 @@
           <a:noFill/>
         </p:spPr>
         <p:txBody>
-          <a:bodyPr wrap="square" lIns="0" rIns="0" tIns="0" bIns="0" anchor="t">
+          <a:bodyPr wrap="square" lIns="0" tIns="0" rIns="0" bIns="0" anchor="t">
             <a:spAutoFit/>
           </a:bodyPr>
           <a:lstStyle/>
@@ -10465,7 +11184,7 @@
           <a:noFill/>
         </p:spPr>
         <p:txBody>
-          <a:bodyPr wrap="square" lIns="0" rIns="0" tIns="0" bIns="0" anchor="t">
+          <a:bodyPr wrap="square" lIns="0" tIns="0" rIns="0" bIns="0" anchor="t">
             <a:spAutoFit/>
           </a:bodyPr>
           <a:lstStyle/>
@@ -10492,7 +11211,7 @@
 </file>
 
 <file path=ppt/slides/slide18.xml><?xml version="1.0" encoding="utf-8"?>
-<p:sld xmlns:a="http://schemas.openxmlformats.org/drawingml/2006/main" xmlns:p="http://schemas.openxmlformats.org/presentationml/2006/main" xmlns:r="http://schemas.openxmlformats.org/officeDocument/2006/relationships">
+<p:sld xmlns:a="http://schemas.openxmlformats.org/drawingml/2006/main" xmlns:r="http://schemas.openxmlformats.org/officeDocument/2006/relationships" xmlns:p="http://schemas.openxmlformats.org/presentationml/2006/main">
   <p:cSld>
     <p:bg>
       <p:bgPr>
@@ -10508,7 +11227,14 @@
         <p:cNvGrpSpPr/>
         <p:nvPr/>
       </p:nvGrpSpPr>
-      <p:grpSpPr/>
+      <p:grpSpPr>
+        <a:xfrm>
+          <a:off x="0" y="0"/>
+          <a:ext cx="0" cy="0"/>
+          <a:chOff x="0" y="0"/>
+          <a:chExt cx="0" cy="0"/>
+        </a:xfrm>
+      </p:grpSpPr>
       <p:sp>
         <p:nvSpPr>
           <p:cNvPr id="2" name="TextBox 1"/>
@@ -10526,7 +11252,7 @@
           <a:noFill/>
         </p:spPr>
         <p:txBody>
-          <a:bodyPr wrap="square" lIns="0" rIns="0" tIns="0" bIns="0" anchor="t">
+          <a:bodyPr wrap="square" lIns="0" tIns="0" rIns="0" bIns="0" anchor="t">
             <a:spAutoFit/>
           </a:bodyPr>
           <a:lstStyle/>
@@ -10561,7 +11287,7 @@
           <a:noFill/>
         </p:spPr>
         <p:txBody>
-          <a:bodyPr wrap="square" lIns="0" rIns="0" tIns="0" bIns="0" anchor="t">
+          <a:bodyPr wrap="square" lIns="0" tIns="0" rIns="0" bIns="0" anchor="t">
             <a:spAutoFit/>
           </a:bodyPr>
           <a:lstStyle/>
@@ -10596,7 +11322,7 @@
           <a:noFill/>
         </p:spPr>
         <p:txBody>
-          <a:bodyPr wrap="square" lIns="0" rIns="0" tIns="0" bIns="0" anchor="t">
+          <a:bodyPr wrap="square" lIns="0" tIns="0" rIns="0" bIns="0" anchor="t">
             <a:spAutoFit/>
           </a:bodyPr>
           <a:lstStyle/>
@@ -10631,7 +11357,7 @@
           <a:noFill/>
         </p:spPr>
         <p:txBody>
-          <a:bodyPr wrap="square" lIns="0" rIns="0" tIns="0" bIns="0" anchor="t">
+          <a:bodyPr wrap="square" lIns="0" tIns="0" rIns="0" bIns="0" anchor="t">
             <a:spAutoFit/>
           </a:bodyPr>
           <a:lstStyle/>
@@ -10668,13 +11394,25 @@
                 <a:tableStyleId>{5C22544A-7EE6-4342-B048-85BDC9FD1C3A}</a:tableStyleId>
               </a:tblPr>
               <a:tblGrid>
-                <a:gridCol w="3657600"/>
-                <a:gridCol w="2286000"/>
+                <a:gridCol w="3657600">
+                  <a:extLst>
+                    <a:ext uri="{9D8B030D-6E8A-4147-A177-3AD203B41FA5}">
+                      <a16:colId xmlns:a16="http://schemas.microsoft.com/office/drawing/2014/main" val="20000"/>
+                    </a:ext>
+                  </a:extLst>
+                </a:gridCol>
+                <a:gridCol w="2286000">
+                  <a:extLst>
+                    <a:ext uri="{9D8B030D-6E8A-4147-A177-3AD203B41FA5}">
+                      <a16:colId xmlns:a16="http://schemas.microsoft.com/office/drawing/2014/main" val="20001"/>
+                    </a:ext>
+                  </a:extLst>
+                </a:gridCol>
               </a:tblGrid>
               <a:tr h="384048">
                 <a:tc>
                   <a:txBody>
-                    <a:bodyPr wrap="square" anchor="ctr"/>
+                    <a:bodyPr/>
                     <a:lstStyle/>
                     <a:p>
                       <a:pPr algn="l"/>
@@ -10697,7 +11435,7 @@
                 </a:tc>
                 <a:tc>
                   <a:txBody>
-                    <a:bodyPr wrap="square" anchor="ctr"/>
+                    <a:bodyPr/>
                     <a:lstStyle/>
                     <a:p>
                       <a:pPr algn="ctr"/>
@@ -10718,11 +11456,16 @@
                     </a:solidFill>
                   </a:tcPr>
                 </a:tc>
+                <a:extLst>
+                  <a:ext uri="{0D108BD9-81ED-4DB2-BD59-A6C34878D82A}">
+                    <a16:rowId xmlns:a16="http://schemas.microsoft.com/office/drawing/2014/main" val="10000"/>
+                  </a:ext>
+                </a:extLst>
               </a:tr>
               <a:tr h="384048">
                 <a:tc>
                   <a:txBody>
-                    <a:bodyPr wrap="square" anchor="ctr"/>
+                    <a:bodyPr/>
                     <a:lstStyle/>
                     <a:p>
                       <a:pPr algn="l"/>
@@ -10741,7 +11484,7 @@
                 </a:tc>
                 <a:tc>
                   <a:txBody>
-                    <a:bodyPr wrap="square" anchor="ctr"/>
+                    <a:bodyPr/>
                     <a:lstStyle/>
                     <a:p>
                       <a:pPr algn="ctr"/>
@@ -10758,11 +11501,16 @@
                   </a:txBody>
                   <a:tcPr marL="73152" marR="73152" marT="36576" marB="36576"/>
                 </a:tc>
+                <a:extLst>
+                  <a:ext uri="{0D108BD9-81ED-4DB2-BD59-A6C34878D82A}">
+                    <a16:rowId xmlns:a16="http://schemas.microsoft.com/office/drawing/2014/main" val="10001"/>
+                  </a:ext>
+                </a:extLst>
               </a:tr>
               <a:tr h="384048">
                 <a:tc>
                   <a:txBody>
-                    <a:bodyPr wrap="square" anchor="ctr"/>
+                    <a:bodyPr/>
                     <a:lstStyle/>
                     <a:p>
                       <a:pPr algn="l"/>
@@ -10781,7 +11529,7 @@
                 </a:tc>
                 <a:tc>
                   <a:txBody>
-                    <a:bodyPr wrap="square" anchor="ctr"/>
+                    <a:bodyPr/>
                     <a:lstStyle/>
                     <a:p>
                       <a:pPr algn="ctr"/>
@@ -10798,11 +11546,16 @@
                   </a:txBody>
                   <a:tcPr marL="73152" marR="73152" marT="36576" marB="36576"/>
                 </a:tc>
+                <a:extLst>
+                  <a:ext uri="{0D108BD9-81ED-4DB2-BD59-A6C34878D82A}">
+                    <a16:rowId xmlns:a16="http://schemas.microsoft.com/office/drawing/2014/main" val="10002"/>
+                  </a:ext>
+                </a:extLst>
               </a:tr>
               <a:tr h="384048">
                 <a:tc>
                   <a:txBody>
-                    <a:bodyPr wrap="square" anchor="ctr"/>
+                    <a:bodyPr/>
                     <a:lstStyle/>
                     <a:p>
                       <a:pPr algn="l"/>
@@ -10821,7 +11574,7 @@
                 </a:tc>
                 <a:tc>
                   <a:txBody>
-                    <a:bodyPr wrap="square" anchor="ctr"/>
+                    <a:bodyPr/>
                     <a:lstStyle/>
                     <a:p>
                       <a:pPr algn="ctr"/>
@@ -10838,11 +11591,16 @@
                   </a:txBody>
                   <a:tcPr marL="73152" marR="73152" marT="36576" marB="36576"/>
                 </a:tc>
+                <a:extLst>
+                  <a:ext uri="{0D108BD9-81ED-4DB2-BD59-A6C34878D82A}">
+                    <a16:rowId xmlns:a16="http://schemas.microsoft.com/office/drawing/2014/main" val="10003"/>
+                  </a:ext>
+                </a:extLst>
               </a:tr>
               <a:tr h="384048">
                 <a:tc>
                   <a:txBody>
-                    <a:bodyPr wrap="square" anchor="ctr"/>
+                    <a:bodyPr/>
                     <a:lstStyle/>
                     <a:p>
                       <a:pPr algn="l"/>
@@ -10861,7 +11619,7 @@
                 </a:tc>
                 <a:tc>
                   <a:txBody>
-                    <a:bodyPr wrap="square" anchor="ctr"/>
+                    <a:bodyPr/>
                     <a:lstStyle/>
                     <a:p>
                       <a:pPr algn="ctr"/>
@@ -10878,11 +11636,16 @@
                   </a:txBody>
                   <a:tcPr marL="73152" marR="73152" marT="36576" marB="36576"/>
                 </a:tc>
+                <a:extLst>
+                  <a:ext uri="{0D108BD9-81ED-4DB2-BD59-A6C34878D82A}">
+                    <a16:rowId xmlns:a16="http://schemas.microsoft.com/office/drawing/2014/main" val="10004"/>
+                  </a:ext>
+                </a:extLst>
               </a:tr>
               <a:tr h="384048">
                 <a:tc>
                   <a:txBody>
-                    <a:bodyPr wrap="square" anchor="ctr"/>
+                    <a:bodyPr/>
                     <a:lstStyle/>
                     <a:p>
                       <a:pPr algn="l"/>
@@ -10901,7 +11664,7 @@
                 </a:tc>
                 <a:tc>
                   <a:txBody>
-                    <a:bodyPr wrap="square" anchor="ctr"/>
+                    <a:bodyPr/>
                     <a:lstStyle/>
                     <a:p>
                       <a:pPr algn="ctr"/>
@@ -10918,6 +11681,11 @@
                   </a:txBody>
                   <a:tcPr marL="73152" marR="73152" marT="36576" marB="36576"/>
                 </a:tc>
+                <a:extLst>
+                  <a:ext uri="{0D108BD9-81ED-4DB2-BD59-A6C34878D82A}">
+                    <a16:rowId xmlns:a16="http://schemas.microsoft.com/office/drawing/2014/main" val="10005"/>
+                  </a:ext>
+                </a:extLst>
               </a:tr>
             </a:tbl>
           </a:graphicData>
@@ -10940,7 +11708,7 @@
           <a:noFill/>
         </p:spPr>
         <p:txBody>
-          <a:bodyPr wrap="square" lIns="0" rIns="0" tIns="0" bIns="0" anchor="t">
+          <a:bodyPr wrap="square" lIns="0" tIns="0" rIns="0" bIns="0" anchor="t">
             <a:spAutoFit/>
           </a:bodyPr>
           <a:lstStyle/>
@@ -10975,7 +11743,7 @@
           <a:noFill/>
         </p:spPr>
         <p:txBody>
-          <a:bodyPr wrap="square" lIns="0" rIns="0" tIns="0" bIns="0" anchor="t">
+          <a:bodyPr wrap="square" lIns="0" tIns="0" rIns="0" bIns="0" anchor="t">
             <a:spAutoFit/>
           </a:bodyPr>
           <a:lstStyle/>
@@ -11036,6 +11804,7 @@
           <a:lstStyle/>
           <a:p>
             <a:pPr algn="ctr"/>
+            <a:endParaRPr/>
           </a:p>
         </p:txBody>
       </p:sp>
@@ -11080,6 +11849,7 @@
           <a:lstStyle/>
           <a:p>
             <a:pPr algn="ctr"/>
+            <a:endParaRPr/>
           </a:p>
         </p:txBody>
       </p:sp>
@@ -11100,7 +11870,7 @@
           <a:noFill/>
         </p:spPr>
         <p:txBody>
-          <a:bodyPr wrap="square" lIns="0" rIns="0" tIns="0" bIns="0" anchor="t">
+          <a:bodyPr wrap="square" lIns="0" tIns="0" rIns="0" bIns="0" anchor="t">
             <a:spAutoFit/>
           </a:bodyPr>
           <a:lstStyle/>
@@ -11135,7 +11905,7 @@
           <a:noFill/>
         </p:spPr>
         <p:txBody>
-          <a:bodyPr wrap="square" lIns="0" rIns="0" tIns="0" bIns="0" anchor="ctr">
+          <a:bodyPr wrap="square" lIns="0" tIns="0" rIns="0" bIns="0" anchor="ctr">
             <a:spAutoFit/>
           </a:bodyPr>
           <a:lstStyle/>
@@ -11196,6 +11966,7 @@
           <a:lstStyle/>
           <a:p>
             <a:pPr algn="ctr"/>
+            <a:endParaRPr/>
           </a:p>
         </p:txBody>
       </p:sp>
@@ -11240,6 +12011,7 @@
           <a:lstStyle/>
           <a:p>
             <a:pPr algn="ctr"/>
+            <a:endParaRPr/>
           </a:p>
         </p:txBody>
       </p:sp>
@@ -11260,7 +12032,7 @@
           <a:noFill/>
         </p:spPr>
         <p:txBody>
-          <a:bodyPr wrap="square" lIns="0" rIns="0" tIns="0" bIns="0" anchor="t">
+          <a:bodyPr wrap="square" lIns="0" tIns="0" rIns="0" bIns="0" anchor="t">
             <a:spAutoFit/>
           </a:bodyPr>
           <a:lstStyle/>
@@ -11295,7 +12067,7 @@
           <a:noFill/>
         </p:spPr>
         <p:txBody>
-          <a:bodyPr wrap="square" lIns="0" rIns="0" tIns="0" bIns="0" anchor="ctr">
+          <a:bodyPr wrap="square" lIns="0" tIns="0" rIns="0" bIns="0" anchor="ctr">
             <a:spAutoFit/>
           </a:bodyPr>
           <a:lstStyle/>
@@ -11356,6 +12128,7 @@
           <a:lstStyle/>
           <a:p>
             <a:pPr algn="ctr"/>
+            <a:endParaRPr/>
           </a:p>
         </p:txBody>
       </p:sp>
@@ -11400,6 +12173,7 @@
           <a:lstStyle/>
           <a:p>
             <a:pPr algn="ctr"/>
+            <a:endParaRPr/>
           </a:p>
         </p:txBody>
       </p:sp>
@@ -11420,7 +12194,7 @@
           <a:noFill/>
         </p:spPr>
         <p:txBody>
-          <a:bodyPr wrap="square" lIns="0" rIns="0" tIns="0" bIns="0" anchor="t">
+          <a:bodyPr wrap="square" lIns="0" tIns="0" rIns="0" bIns="0" anchor="t">
             <a:spAutoFit/>
           </a:bodyPr>
           <a:lstStyle/>
@@ -11455,7 +12229,7 @@
           <a:noFill/>
         </p:spPr>
         <p:txBody>
-          <a:bodyPr wrap="square" lIns="0" rIns="0" tIns="0" bIns="0" anchor="ctr">
+          <a:bodyPr wrap="square" lIns="0" tIns="0" rIns="0" bIns="0" anchor="ctr">
             <a:spAutoFit/>
           </a:bodyPr>
           <a:lstStyle/>
@@ -11514,6 +12288,7 @@
           <a:lstStyle/>
           <a:p>
             <a:pPr algn="ctr"/>
+            <a:endParaRPr/>
           </a:p>
         </p:txBody>
       </p:sp>
@@ -11558,6 +12333,7 @@
           <a:lstStyle/>
           <a:p>
             <a:pPr algn="ctr"/>
+            <a:endParaRPr/>
           </a:p>
         </p:txBody>
       </p:sp>
@@ -11578,7 +12354,7 @@
           <a:noFill/>
         </p:spPr>
         <p:txBody>
-          <a:bodyPr wrap="square" lIns="0" rIns="0" tIns="0" bIns="0" anchor="t">
+          <a:bodyPr wrap="square" lIns="0" tIns="0" rIns="0" bIns="0" anchor="t">
             <a:spAutoFit/>
           </a:bodyPr>
           <a:lstStyle/>
@@ -11613,7 +12389,7 @@
           <a:noFill/>
         </p:spPr>
         <p:txBody>
-          <a:bodyPr wrap="square" lIns="0" rIns="0" tIns="0" bIns="0" anchor="t">
+          <a:bodyPr wrap="square" lIns="0" tIns="0" rIns="0" bIns="0" anchor="t">
             <a:spAutoFit/>
           </a:bodyPr>
           <a:lstStyle/>
@@ -11648,7 +12424,7 @@
           <a:noFill/>
         </p:spPr>
         <p:txBody>
-          <a:bodyPr wrap="square" lIns="0" rIns="0" tIns="0" bIns="0" anchor="t">
+          <a:bodyPr wrap="square" lIns="0" tIns="0" rIns="0" bIns="0" anchor="t">
             <a:spAutoFit/>
           </a:bodyPr>
           <a:lstStyle/>
@@ -11683,7 +12459,7 @@
           <a:noFill/>
         </p:spPr>
         <p:txBody>
-          <a:bodyPr wrap="square" lIns="0" rIns="0" tIns="0" bIns="0" anchor="t">
+          <a:bodyPr wrap="square" lIns="0" tIns="0" rIns="0" bIns="0" anchor="t">
             <a:spAutoFit/>
           </a:bodyPr>
           <a:lstStyle/>
@@ -11710,7 +12486,7 @@
 </file>
 
 <file path=ppt/slides/slide19.xml><?xml version="1.0" encoding="utf-8"?>
-<p:sld xmlns:a="http://schemas.openxmlformats.org/drawingml/2006/main" xmlns:p="http://schemas.openxmlformats.org/presentationml/2006/main" xmlns:r="http://schemas.openxmlformats.org/officeDocument/2006/relationships">
+<p:sld xmlns:a="http://schemas.openxmlformats.org/drawingml/2006/main" xmlns:r="http://schemas.openxmlformats.org/officeDocument/2006/relationships" xmlns:p="http://schemas.openxmlformats.org/presentationml/2006/main">
   <p:cSld>
     <p:bg>
       <p:bgPr>
@@ -11726,7 +12502,14 @@
         <p:cNvGrpSpPr/>
         <p:nvPr/>
       </p:nvGrpSpPr>
-      <p:grpSpPr/>
+      <p:grpSpPr>
+        <a:xfrm>
+          <a:off x="0" y="0"/>
+          <a:ext cx="0" cy="0"/>
+          <a:chOff x="0" y="0"/>
+          <a:chExt cx="0" cy="0"/>
+        </a:xfrm>
+      </p:grpSpPr>
       <p:sp>
         <p:nvSpPr>
           <p:cNvPr id="2" name="TextBox 1"/>
@@ -11744,7 +12527,7 @@
           <a:noFill/>
         </p:spPr>
         <p:txBody>
-          <a:bodyPr wrap="square" lIns="0" rIns="0" tIns="0" bIns="0" anchor="t">
+          <a:bodyPr wrap="square" lIns="0" tIns="0" rIns="0" bIns="0" anchor="t">
             <a:spAutoFit/>
           </a:bodyPr>
           <a:lstStyle/>
@@ -11779,7 +12562,7 @@
           <a:noFill/>
         </p:spPr>
         <p:txBody>
-          <a:bodyPr wrap="square" lIns="0" rIns="0" tIns="0" bIns="0" anchor="t">
+          <a:bodyPr wrap="square" lIns="0" tIns="0" rIns="0" bIns="0" anchor="t">
             <a:spAutoFit/>
           </a:bodyPr>
           <a:lstStyle/>
@@ -11814,7 +12597,7 @@
           <a:noFill/>
         </p:spPr>
         <p:txBody>
-          <a:bodyPr wrap="square" lIns="0" rIns="0" tIns="0" bIns="0" anchor="t">
+          <a:bodyPr wrap="square" lIns="0" tIns="0" rIns="0" bIns="0" anchor="t">
             <a:spAutoFit/>
           </a:bodyPr>
           <a:lstStyle/>
@@ -11873,7 +12656,7 @@
           <a:noFill/>
         </p:spPr>
         <p:txBody>
-          <a:bodyPr wrap="square" lIns="0" rIns="0" tIns="0" bIns="0" anchor="t">
+          <a:bodyPr wrap="square" lIns="0" tIns="0" rIns="0" bIns="0" anchor="t">
             <a:spAutoFit/>
           </a:bodyPr>
           <a:lstStyle/>
@@ -11932,7 +12715,7 @@
           <a:noFill/>
         </p:spPr>
         <p:txBody>
-          <a:bodyPr wrap="square" lIns="0" rIns="0" tIns="0" bIns="0" anchor="t">
+          <a:bodyPr wrap="square" lIns="0" tIns="0" rIns="0" bIns="0" anchor="t">
             <a:spAutoFit/>
           </a:bodyPr>
           <a:lstStyle/>
@@ -11993,6 +12776,7 @@
           <a:lstStyle/>
           <a:p>
             <a:pPr algn="ctr"/>
+            <a:endParaRPr/>
           </a:p>
         </p:txBody>
       </p:sp>
@@ -12037,6 +12821,7 @@
           <a:lstStyle/>
           <a:p>
             <a:pPr algn="ctr"/>
+            <a:endParaRPr/>
           </a:p>
         </p:txBody>
       </p:sp>
@@ -12057,7 +12842,7 @@
           <a:noFill/>
         </p:spPr>
         <p:txBody>
-          <a:bodyPr wrap="square" lIns="0" rIns="0" tIns="0" bIns="0" anchor="t">
+          <a:bodyPr wrap="square" lIns="0" tIns="0" rIns="0" bIns="0" anchor="t">
             <a:spAutoFit/>
           </a:bodyPr>
           <a:lstStyle/>
@@ -12092,7 +12877,7 @@
           <a:noFill/>
         </p:spPr>
         <p:txBody>
-          <a:bodyPr wrap="square" lIns="0" rIns="0" tIns="0" bIns="0" anchor="t">
+          <a:bodyPr wrap="square" lIns="0" tIns="0" rIns="0" bIns="0" anchor="t">
             <a:spAutoFit/>
           </a:bodyPr>
           <a:lstStyle/>
@@ -12181,7 +12966,7 @@
           <a:noFill/>
         </p:spPr>
         <p:txBody>
-          <a:bodyPr wrap="square" lIns="0" rIns="0" tIns="0" bIns="0" anchor="t">
+          <a:bodyPr wrap="square" lIns="0" tIns="0" rIns="0" bIns="0" anchor="t">
             <a:spAutoFit/>
           </a:bodyPr>
           <a:lstStyle/>
@@ -12216,7 +13001,7 @@
           <a:noFill/>
         </p:spPr>
         <p:txBody>
-          <a:bodyPr wrap="square" lIns="0" rIns="0" tIns="0" bIns="0" anchor="t">
+          <a:bodyPr wrap="square" lIns="0" tIns="0" rIns="0" bIns="0" anchor="t">
             <a:spAutoFit/>
           </a:bodyPr>
           <a:lstStyle/>
@@ -12243,7 +13028,7 @@
 </file>
 
 <file path=ppt/slides/slide2.xml><?xml version="1.0" encoding="utf-8"?>
-<p:sld xmlns:a="http://schemas.openxmlformats.org/drawingml/2006/main" xmlns:p="http://schemas.openxmlformats.org/presentationml/2006/main" xmlns:r="http://schemas.openxmlformats.org/officeDocument/2006/relationships">
+<p:sld xmlns:a="http://schemas.openxmlformats.org/drawingml/2006/main" xmlns:r="http://schemas.openxmlformats.org/officeDocument/2006/relationships" xmlns:p="http://schemas.openxmlformats.org/presentationml/2006/main">
   <p:cSld>
     <p:bg>
       <p:bgPr>
@@ -12259,7 +13044,14 @@
         <p:cNvGrpSpPr/>
         <p:nvPr/>
       </p:nvGrpSpPr>
-      <p:grpSpPr/>
+      <p:grpSpPr>
+        <a:xfrm>
+          <a:off x="0" y="0"/>
+          <a:ext cx="0" cy="0"/>
+          <a:chOff x="0" y="0"/>
+          <a:chExt cx="0" cy="0"/>
+        </a:xfrm>
+      </p:grpSpPr>
       <p:sp>
         <p:nvSpPr>
           <p:cNvPr id="2" name="TextBox 1"/>
@@ -12277,7 +13069,7 @@
           <a:noFill/>
         </p:spPr>
         <p:txBody>
-          <a:bodyPr wrap="square" lIns="0" rIns="0" tIns="0" bIns="0" anchor="t">
+          <a:bodyPr wrap="square" lIns="0" tIns="0" rIns="0" bIns="0" anchor="t">
             <a:spAutoFit/>
           </a:bodyPr>
           <a:lstStyle/>
@@ -12312,7 +13104,7 @@
           <a:noFill/>
         </p:spPr>
         <p:txBody>
-          <a:bodyPr wrap="square" lIns="0" rIns="0" tIns="0" bIns="0" anchor="t">
+          <a:bodyPr wrap="square" lIns="0" tIns="0" rIns="0" bIns="0" anchor="t">
             <a:spAutoFit/>
           </a:bodyPr>
           <a:lstStyle/>
@@ -12347,7 +13139,7 @@
           <a:noFill/>
         </p:spPr>
         <p:txBody>
-          <a:bodyPr wrap="square" lIns="0" rIns="0" tIns="0" bIns="0" anchor="t">
+          <a:bodyPr wrap="square" lIns="0" tIns="0" rIns="0" bIns="0" anchor="t">
             <a:spAutoFit/>
           </a:bodyPr>
           <a:lstStyle/>
@@ -12408,6 +13200,7 @@
           <a:lstStyle/>
           <a:p>
             <a:pPr algn="ctr"/>
+            <a:endParaRPr/>
           </a:p>
         </p:txBody>
       </p:sp>
@@ -12452,6 +13245,7 @@
           <a:lstStyle/>
           <a:p>
             <a:pPr algn="ctr"/>
+            <a:endParaRPr/>
           </a:p>
         </p:txBody>
       </p:sp>
@@ -12472,7 +13266,7 @@
           <a:noFill/>
         </p:spPr>
         <p:txBody>
-          <a:bodyPr wrap="square" lIns="0" rIns="0" tIns="0" bIns="0" anchor="t">
+          <a:bodyPr wrap="square" lIns="0" tIns="0" rIns="0" bIns="0" anchor="t">
             <a:spAutoFit/>
           </a:bodyPr>
           <a:lstStyle/>
@@ -12507,7 +13301,7 @@
           <a:noFill/>
         </p:spPr>
         <p:txBody>
-          <a:bodyPr wrap="square" lIns="0" rIns="0" tIns="0" bIns="0">
+          <a:bodyPr wrap="square" lIns="0" tIns="0" rIns="0" bIns="0">
             <a:spAutoFit/>
           </a:bodyPr>
           <a:lstStyle/>
@@ -12668,6 +13462,7 @@
           <a:lstStyle/>
           <a:p>
             <a:pPr algn="ctr"/>
+            <a:endParaRPr/>
           </a:p>
         </p:txBody>
       </p:sp>
@@ -12712,6 +13507,7 @@
           <a:lstStyle/>
           <a:p>
             <a:pPr algn="ctr"/>
+            <a:endParaRPr/>
           </a:p>
         </p:txBody>
       </p:sp>
@@ -12732,7 +13528,7 @@
           <a:noFill/>
         </p:spPr>
         <p:txBody>
-          <a:bodyPr wrap="square" lIns="0" rIns="0" tIns="0" bIns="0" anchor="t">
+          <a:bodyPr wrap="square" lIns="0" tIns="0" rIns="0" bIns="0" anchor="t">
             <a:spAutoFit/>
           </a:bodyPr>
           <a:lstStyle/>
@@ -12767,7 +13563,7 @@
           <a:noFill/>
         </p:spPr>
         <p:txBody>
-          <a:bodyPr wrap="square" lIns="0" rIns="0" tIns="0" bIns="0">
+          <a:bodyPr wrap="square" lIns="0" tIns="0" rIns="0" bIns="0">
             <a:spAutoFit/>
           </a:bodyPr>
           <a:lstStyle/>
@@ -12781,7 +13577,7 @@
               </a:spcAft>
             </a:pPr>
             <a:r>
-              <a:rPr sz="1100" b="1">
+              <a:rPr sz="1100" b="1" dirty="0">
                 <a:solidFill>
                   <a:srgbClr val="2B3A8C"/>
                 </a:solidFill>
@@ -12790,7 +13586,7 @@
               <a:t>▪  </a:t>
             </a:r>
             <a:r>
-              <a:rPr sz="1100">
+              <a:rPr sz="1100" dirty="0">
                 <a:solidFill>
                   <a:srgbClr val="1A1A2E"/>
                 </a:solidFill>
@@ -12809,7 +13605,7 @@
               </a:spcAft>
             </a:pPr>
             <a:r>
-              <a:rPr sz="1100" b="1">
+              <a:rPr sz="1100" b="1" dirty="0">
                 <a:solidFill>
                   <a:srgbClr val="2B3A8C"/>
                 </a:solidFill>
@@ -12818,7 +13614,7 @@
               <a:t>▪  </a:t>
             </a:r>
             <a:r>
-              <a:rPr sz="1100">
+              <a:rPr sz="1100" dirty="0">
                 <a:solidFill>
                   <a:srgbClr val="1A1A2E"/>
                 </a:solidFill>
@@ -12837,7 +13633,7 @@
               </a:spcAft>
             </a:pPr>
             <a:r>
-              <a:rPr sz="1100" b="1">
+              <a:rPr sz="1100" b="1" dirty="0">
                 <a:solidFill>
                   <a:srgbClr val="2B3A8C"/>
                 </a:solidFill>
@@ -12846,7 +13642,7 @@
               <a:t>▪  </a:t>
             </a:r>
             <a:r>
-              <a:rPr sz="1100">
+              <a:rPr sz="1100" dirty="0">
                 <a:solidFill>
                   <a:srgbClr val="1A1A2E"/>
                 </a:solidFill>
@@ -12865,7 +13661,7 @@
               </a:spcAft>
             </a:pPr>
             <a:r>
-              <a:rPr sz="1100" b="1">
+              <a:rPr sz="1100" b="1" dirty="0">
                 <a:solidFill>
                   <a:srgbClr val="2B3A8C"/>
                 </a:solidFill>
@@ -12874,7 +13670,7 @@
               <a:t>▪  </a:t>
             </a:r>
             <a:r>
-              <a:rPr sz="1100">
+              <a:rPr sz="1100" dirty="0">
                 <a:solidFill>
                   <a:srgbClr val="1A1A2E"/>
                 </a:solidFill>
@@ -12928,6 +13724,7 @@
           <a:lstStyle/>
           <a:p>
             <a:pPr algn="ctr"/>
+            <a:endParaRPr/>
           </a:p>
         </p:txBody>
       </p:sp>
@@ -12972,6 +13769,7 @@
           <a:lstStyle/>
           <a:p>
             <a:pPr algn="ctr"/>
+            <a:endParaRPr/>
           </a:p>
         </p:txBody>
       </p:sp>
@@ -12992,7 +13790,7 @@
           <a:noFill/>
         </p:spPr>
         <p:txBody>
-          <a:bodyPr wrap="square" lIns="0" rIns="0" tIns="0" bIns="0" anchor="t">
+          <a:bodyPr wrap="square" lIns="0" tIns="0" rIns="0" bIns="0" anchor="t">
             <a:spAutoFit/>
           </a:bodyPr>
           <a:lstStyle/>
@@ -13019,18 +13817,94 @@
         <p:spPr>
           <a:xfrm>
             <a:off x="8503920" y="2560320"/>
-            <a:ext cx="3108960" cy="3246120"/>
-          </a:xfrm>
-          <a:prstGeom prst="rect">
-            <a:avLst/>
-          </a:prstGeom>
-          <a:noFill/>
-        </p:spPr>
-        <p:txBody>
-          <a:bodyPr wrap="square" lIns="0" rIns="0" tIns="0" bIns="0">
-            <a:spAutoFit/>
-          </a:bodyPr>
-          <a:lstStyle/>
+            <a:ext cx="3108960" cy="1700530"/>
+          </a:xfrm>
+          <a:prstGeom prst="rect">
+            <a:avLst/>
+          </a:prstGeom>
+          <a:noFill/>
+        </p:spPr>
+        <p:txBody>
+          <a:bodyPr wrap="square" lIns="0" tIns="0" rIns="0" bIns="0">
+            <a:spAutoFit/>
+          </a:bodyPr>
+          <a:lstStyle/>
+          <a:p>
+            <a:pPr>
+              <a:lnSpc>
+                <a:spcPct val="150000"/>
+              </a:lnSpc>
+              <a:spcAft>
+                <a:spcPts val="600"/>
+              </a:spcAft>
+            </a:pPr>
+            <a:r>
+              <a:rPr sz="1100" b="1" dirty="0">
+                <a:solidFill>
+                  <a:srgbClr val="018F71"/>
+                </a:solidFill>
+                <a:latin typeface="Calibri"/>
+              </a:rPr>
+              <a:t>▪  </a:t>
+            </a:r>
+            <a:r>
+              <a:rPr sz="1100" dirty="0">
+                <a:solidFill>
+                  <a:srgbClr val="1A1A2E"/>
+                </a:solidFill>
+                <a:latin typeface="Calibri"/>
+              </a:rPr>
+              <a:t>In-distribution: 100% accuracy, 100% macro-F1</a:t>
+            </a:r>
+            <a:br>
+              <a:rPr lang="tr-TR" sz="1100" dirty="0">
+                <a:solidFill>
+                  <a:srgbClr val="1A1A2E"/>
+                </a:solidFill>
+                <a:latin typeface="Calibri"/>
+              </a:rPr>
+            </a:br>
+            <a:r>
+              <a:rPr lang="tr-TR" sz="1100" b="1" dirty="0">
+                <a:solidFill>
+                  <a:srgbClr val="018F71"/>
+                </a:solidFill>
+              </a:rPr>
+              <a:t>▪  </a:t>
+            </a:r>
+            <a:r>
+              <a:rPr lang="tr-TR" sz="1100" dirty="0">
+                <a:latin typeface="Calibri" panose="020F0502020204030204" pitchFamily="34" charset="0"/>
+                <a:cs typeface="Calibri" panose="020F0502020204030204" pitchFamily="34" charset="0"/>
+              </a:rPr>
+              <a:t>5-fold CV </a:t>
+            </a:r>
+            <a:r>
+              <a:rPr lang="tr-TR" sz="1100" dirty="0" err="1">
+                <a:latin typeface="Calibri" panose="020F0502020204030204" pitchFamily="34" charset="0"/>
+                <a:cs typeface="Calibri" panose="020F0502020204030204" pitchFamily="34" charset="0"/>
+              </a:rPr>
+              <a:t>stability</a:t>
+            </a:r>
+            <a:r>
+              <a:rPr lang="tr-TR" sz="1100" dirty="0">
+                <a:latin typeface="Calibri" panose="020F0502020204030204" pitchFamily="34" charset="0"/>
+                <a:cs typeface="Calibri" panose="020F0502020204030204" pitchFamily="34" charset="0"/>
+              </a:rPr>
+              <a:t>: 99.94% ± 0.05% </a:t>
+            </a:r>
+            <a:r>
+              <a:rPr lang="tr-TR" sz="1100" dirty="0" err="1">
+                <a:latin typeface="Calibri" panose="020F0502020204030204" pitchFamily="34" charset="0"/>
+                <a:cs typeface="Calibri" panose="020F0502020204030204" pitchFamily="34" charset="0"/>
+              </a:rPr>
+              <a:t>accuracy</a:t>
+            </a:r>
+            <a:endParaRPr lang="tr-TR" sz="1100" dirty="0">
+              <a:latin typeface="Calibri" panose="020F0502020204030204" pitchFamily="34" charset="0"/>
+              <a:cs typeface="Calibri" panose="020F0502020204030204" pitchFamily="34" charset="0"/>
+            </a:endParaRPr>
+          </a:p>
           <a:p>
             <a:pPr>
               <a:lnSpc>
@@ -13041,7 +13915,7 @@
               </a:spcAft>
             </a:pPr>
             <a:r>
-              <a:rPr sz="1100" b="1">
+              <a:rPr sz="1100" b="1" dirty="0">
                 <a:solidFill>
                   <a:srgbClr val="018F71"/>
                 </a:solidFill>
@@ -13050,13 +13924,13 @@
               <a:t>▪  </a:t>
             </a:r>
             <a:r>
-              <a:rPr sz="1100">
+              <a:rPr sz="1100" dirty="0">
                 <a:solidFill>
                   <a:srgbClr val="1A1A2E"/>
                 </a:solidFill>
                 <a:latin typeface="Calibri"/>
               </a:rPr>
-              <a:t>In-distribution: 100% accuracy, 100% macro-F1</a:t>
+              <a:t>Mimicry holdout: 96.38% correctly flagged as attack</a:t>
             </a:r>
           </a:p>
           <a:p>
@@ -13069,7 +13943,7 @@
               </a:spcAft>
             </a:pPr>
             <a:r>
-              <a:rPr sz="1100" b="1">
+              <a:rPr sz="1100" b="1" dirty="0">
                 <a:solidFill>
                   <a:srgbClr val="018F71"/>
                 </a:solidFill>
@@ -13078,13 +13952,13 @@
               <a:t>▪  </a:t>
             </a:r>
             <a:r>
-              <a:rPr sz="1100">
+              <a:rPr sz="1100" dirty="0">
                 <a:solidFill>
                   <a:srgbClr val="1A1A2E"/>
                 </a:solidFill>
                 <a:latin typeface="Calibri"/>
               </a:rPr>
-              <a:t>Mimicry holdout: 96.38% correctly flagged as attack</a:t>
+              <a:t>Behavioral lift on mimicry: +23pp over rate-only (73→96%)</a:t>
             </a:r>
           </a:p>
           <a:p>
@@ -13097,7 +13971,7 @@
               </a:spcAft>
             </a:pPr>
             <a:r>
-              <a:rPr sz="1100" b="1">
+              <a:rPr sz="1100" b="1" dirty="0">
                 <a:solidFill>
                   <a:srgbClr val="018F71"/>
                 </a:solidFill>
@@ -13106,35 +13980,7 @@
               <a:t>▪  </a:t>
             </a:r>
             <a:r>
-              <a:rPr sz="1100">
-                <a:solidFill>
-                  <a:srgbClr val="1A1A2E"/>
-                </a:solidFill>
-                <a:latin typeface="Calibri"/>
-              </a:rPr>
-              <a:t>Behavioral lift on mimicry: +23pp over rate-only (73→96%)</a:t>
-            </a:r>
-          </a:p>
-          <a:p>
-            <a:pPr>
-              <a:lnSpc>
-                <a:spcPct val="115000"/>
-              </a:lnSpc>
-              <a:spcAft>
-                <a:spcPts val="600"/>
-              </a:spcAft>
-            </a:pPr>
-            <a:r>
-              <a:rPr sz="1100" b="1">
-                <a:solidFill>
-                  <a:srgbClr val="018F71"/>
-                </a:solidFill>
-                <a:latin typeface="Calibri"/>
-              </a:rPr>
-              <a:t>▪  </a:t>
-            </a:r>
-            <a:r>
-              <a:rPr sz="1100">
+              <a:rPr sz="1100" dirty="0">
                 <a:solidFill>
                   <a:srgbClr val="1A1A2E"/>
                 </a:solidFill>
@@ -13162,7 +14008,7 @@
           <a:noFill/>
         </p:spPr>
         <p:txBody>
-          <a:bodyPr wrap="square" lIns="0" rIns="0" tIns="0" bIns="0" anchor="t">
+          <a:bodyPr wrap="square" lIns="0" tIns="0" rIns="0" bIns="0" anchor="t">
             <a:spAutoFit/>
           </a:bodyPr>
           <a:lstStyle/>
@@ -13197,7 +14043,7 @@
           <a:noFill/>
         </p:spPr>
         <p:txBody>
-          <a:bodyPr wrap="square" lIns="0" rIns="0" tIns="0" bIns="0" anchor="t">
+          <a:bodyPr wrap="square" lIns="0" tIns="0" rIns="0" bIns="0" anchor="t">
             <a:spAutoFit/>
           </a:bodyPr>
           <a:lstStyle/>
@@ -13232,7 +14078,7 @@
           <a:noFill/>
         </p:spPr>
         <p:txBody>
-          <a:bodyPr wrap="square" lIns="0" rIns="0" tIns="0" bIns="0" anchor="t">
+          <a:bodyPr wrap="square" lIns="0" tIns="0" rIns="0" bIns="0" anchor="t">
             <a:spAutoFit/>
           </a:bodyPr>
           <a:lstStyle/>
@@ -13259,7 +14105,7 @@
 </file>
 
 <file path=ppt/slides/slide20.xml><?xml version="1.0" encoding="utf-8"?>
-<p:sld xmlns:a="http://schemas.openxmlformats.org/drawingml/2006/main" xmlns:p="http://schemas.openxmlformats.org/presentationml/2006/main" xmlns:r="http://schemas.openxmlformats.org/officeDocument/2006/relationships">
+<p:sld xmlns:a="http://schemas.openxmlformats.org/drawingml/2006/main" xmlns:r="http://schemas.openxmlformats.org/officeDocument/2006/relationships" xmlns:p="http://schemas.openxmlformats.org/presentationml/2006/main">
   <p:cSld>
     <p:bg>
       <p:bgPr>
@@ -13275,7 +14121,14 @@
         <p:cNvGrpSpPr/>
         <p:nvPr/>
       </p:nvGrpSpPr>
-      <p:grpSpPr/>
+      <p:grpSpPr>
+        <a:xfrm>
+          <a:off x="0" y="0"/>
+          <a:ext cx="0" cy="0"/>
+          <a:chOff x="0" y="0"/>
+          <a:chExt cx="0" cy="0"/>
+        </a:xfrm>
+      </p:grpSpPr>
       <p:sp>
         <p:nvSpPr>
           <p:cNvPr id="2" name="TextBox 1"/>
@@ -13293,7 +14146,7 @@
           <a:noFill/>
         </p:spPr>
         <p:txBody>
-          <a:bodyPr wrap="square" lIns="0" rIns="0" tIns="0" bIns="0" anchor="t">
+          <a:bodyPr wrap="square" lIns="0" tIns="0" rIns="0" bIns="0" anchor="t">
             <a:spAutoFit/>
           </a:bodyPr>
           <a:lstStyle/>
@@ -13328,7 +14181,7 @@
           <a:noFill/>
         </p:spPr>
         <p:txBody>
-          <a:bodyPr wrap="square" lIns="0" rIns="0" tIns="0" bIns="0" anchor="t">
+          <a:bodyPr wrap="square" lIns="0" tIns="0" rIns="0" bIns="0" anchor="t">
             <a:spAutoFit/>
           </a:bodyPr>
           <a:lstStyle/>
@@ -13363,7 +14216,7 @@
           <a:noFill/>
         </p:spPr>
         <p:txBody>
-          <a:bodyPr wrap="square" lIns="0" rIns="0" tIns="0" bIns="0" anchor="t">
+          <a:bodyPr wrap="square" lIns="0" tIns="0" rIns="0" bIns="0" anchor="t">
             <a:spAutoFit/>
           </a:bodyPr>
           <a:lstStyle/>
@@ -13424,6 +14277,7 @@
           <a:lstStyle/>
           <a:p>
             <a:pPr algn="ctr"/>
+            <a:endParaRPr/>
           </a:p>
         </p:txBody>
       </p:sp>
@@ -13468,6 +14322,7 @@
           <a:lstStyle/>
           <a:p>
             <a:pPr algn="ctr"/>
+            <a:endParaRPr/>
           </a:p>
         </p:txBody>
       </p:sp>
@@ -13488,7 +14343,7 @@
           <a:noFill/>
         </p:spPr>
         <p:txBody>
-          <a:bodyPr wrap="square" lIns="0" rIns="0" tIns="0" bIns="0" anchor="t">
+          <a:bodyPr wrap="square" lIns="0" tIns="0" rIns="0" bIns="0" anchor="t">
             <a:spAutoFit/>
           </a:bodyPr>
           <a:lstStyle/>
@@ -13523,7 +14378,7 @@
           <a:noFill/>
         </p:spPr>
         <p:txBody>
-          <a:bodyPr wrap="square" lIns="0" rIns="0" tIns="0" bIns="0" anchor="t">
+          <a:bodyPr wrap="square" lIns="0" tIns="0" rIns="0" bIns="0" anchor="t">
             <a:spAutoFit/>
           </a:bodyPr>
           <a:lstStyle/>
@@ -13558,7 +14413,7 @@
           <a:noFill/>
         </p:spPr>
         <p:txBody>
-          <a:bodyPr wrap="square" lIns="0" rIns="0" tIns="0" bIns="0" anchor="t">
+          <a:bodyPr wrap="square" lIns="0" tIns="0" rIns="0" bIns="0" anchor="t">
             <a:spAutoFit/>
           </a:bodyPr>
           <a:lstStyle/>
@@ -13617,6 +14472,7 @@
           <a:lstStyle/>
           <a:p>
             <a:pPr algn="ctr"/>
+            <a:endParaRPr/>
           </a:p>
         </p:txBody>
       </p:sp>
@@ -13637,7 +14493,7 @@
           <a:noFill/>
         </p:spPr>
         <p:txBody>
-          <a:bodyPr wrap="square" lIns="0" rIns="0" tIns="0" bIns="0" anchor="ctr">
+          <a:bodyPr wrap="square" lIns="0" tIns="0" rIns="0" bIns="0" anchor="ctr">
             <a:spAutoFit/>
           </a:bodyPr>
           <a:lstStyle/>
@@ -13696,6 +14552,7 @@
           <a:lstStyle/>
           <a:p>
             <a:pPr algn="ctr"/>
+            <a:endParaRPr/>
           </a:p>
         </p:txBody>
       </p:sp>
@@ -13716,7 +14573,7 @@
           <a:noFill/>
         </p:spPr>
         <p:txBody>
-          <a:bodyPr wrap="square" lIns="0" rIns="0" tIns="0" bIns="0" anchor="ctr">
+          <a:bodyPr wrap="square" lIns="0" tIns="0" rIns="0" bIns="0" anchor="ctr">
             <a:spAutoFit/>
           </a:bodyPr>
           <a:lstStyle/>
@@ -13777,6 +14634,7 @@
           <a:lstStyle/>
           <a:p>
             <a:pPr algn="ctr"/>
+            <a:endParaRPr/>
           </a:p>
         </p:txBody>
       </p:sp>
@@ -13821,6 +14679,7 @@
           <a:lstStyle/>
           <a:p>
             <a:pPr algn="ctr"/>
+            <a:endParaRPr/>
           </a:p>
         </p:txBody>
       </p:sp>
@@ -13841,7 +14700,7 @@
           <a:noFill/>
         </p:spPr>
         <p:txBody>
-          <a:bodyPr wrap="square" lIns="0" rIns="0" tIns="0" bIns="0" anchor="t">
+          <a:bodyPr wrap="square" lIns="0" tIns="0" rIns="0" bIns="0" anchor="t">
             <a:spAutoFit/>
           </a:bodyPr>
           <a:lstStyle/>
@@ -13876,7 +14735,7 @@
           <a:noFill/>
         </p:spPr>
         <p:txBody>
-          <a:bodyPr wrap="square" lIns="0" rIns="0" tIns="0" bIns="0" anchor="t">
+          <a:bodyPr wrap="square" lIns="0" tIns="0" rIns="0" bIns="0" anchor="t">
             <a:spAutoFit/>
           </a:bodyPr>
           <a:lstStyle/>
@@ -13911,7 +14770,7 @@
           <a:noFill/>
         </p:spPr>
         <p:txBody>
-          <a:bodyPr wrap="square" lIns="0" rIns="0" tIns="0" bIns="0" anchor="t">
+          <a:bodyPr wrap="square" lIns="0" tIns="0" rIns="0" bIns="0" anchor="t">
             <a:spAutoFit/>
           </a:bodyPr>
           <a:lstStyle/>
@@ -13970,6 +14829,7 @@
           <a:lstStyle/>
           <a:p>
             <a:pPr algn="ctr"/>
+            <a:endParaRPr/>
           </a:p>
         </p:txBody>
       </p:sp>
@@ -13990,7 +14850,7 @@
           <a:noFill/>
         </p:spPr>
         <p:txBody>
-          <a:bodyPr wrap="square" lIns="0" rIns="0" tIns="0" bIns="0" anchor="ctr">
+          <a:bodyPr wrap="square" lIns="0" tIns="0" rIns="0" bIns="0" anchor="ctr">
             <a:spAutoFit/>
           </a:bodyPr>
           <a:lstStyle/>
@@ -14049,6 +14909,7 @@
           <a:lstStyle/>
           <a:p>
             <a:pPr algn="ctr"/>
+            <a:endParaRPr/>
           </a:p>
         </p:txBody>
       </p:sp>
@@ -14069,7 +14930,7 @@
           <a:noFill/>
         </p:spPr>
         <p:txBody>
-          <a:bodyPr wrap="square" lIns="0" rIns="0" tIns="0" bIns="0" anchor="ctr">
+          <a:bodyPr wrap="square" lIns="0" tIns="0" rIns="0" bIns="0" anchor="ctr">
             <a:spAutoFit/>
           </a:bodyPr>
           <a:lstStyle/>
@@ -14130,6 +14991,7 @@
           <a:lstStyle/>
           <a:p>
             <a:pPr algn="ctr"/>
+            <a:endParaRPr/>
           </a:p>
         </p:txBody>
       </p:sp>
@@ -14174,6 +15036,7 @@
           <a:lstStyle/>
           <a:p>
             <a:pPr algn="ctr"/>
+            <a:endParaRPr/>
           </a:p>
         </p:txBody>
       </p:sp>
@@ -14194,7 +15057,7 @@
           <a:noFill/>
         </p:spPr>
         <p:txBody>
-          <a:bodyPr wrap="square" lIns="0" rIns="0" tIns="0" bIns="0" anchor="t">
+          <a:bodyPr wrap="square" lIns="0" tIns="0" rIns="0" bIns="0" anchor="t">
             <a:spAutoFit/>
           </a:bodyPr>
           <a:lstStyle/>
@@ -14229,7 +15092,7 @@
           <a:noFill/>
         </p:spPr>
         <p:txBody>
-          <a:bodyPr wrap="square" lIns="0" rIns="0" tIns="0" bIns="0" anchor="t">
+          <a:bodyPr wrap="square" lIns="0" tIns="0" rIns="0" bIns="0" anchor="t">
             <a:spAutoFit/>
           </a:bodyPr>
           <a:lstStyle/>
@@ -14264,7 +15127,7 @@
           <a:noFill/>
         </p:spPr>
         <p:txBody>
-          <a:bodyPr wrap="square" lIns="0" rIns="0" tIns="0" bIns="0" anchor="t">
+          <a:bodyPr wrap="square" lIns="0" tIns="0" rIns="0" bIns="0" anchor="t">
             <a:spAutoFit/>
           </a:bodyPr>
           <a:lstStyle/>
@@ -14323,6 +15186,7 @@
           <a:lstStyle/>
           <a:p>
             <a:pPr algn="ctr"/>
+            <a:endParaRPr/>
           </a:p>
         </p:txBody>
       </p:sp>
@@ -14343,7 +15207,7 @@
           <a:noFill/>
         </p:spPr>
         <p:txBody>
-          <a:bodyPr wrap="square" lIns="0" rIns="0" tIns="0" bIns="0" anchor="ctr">
+          <a:bodyPr wrap="square" lIns="0" tIns="0" rIns="0" bIns="0" anchor="ctr">
             <a:spAutoFit/>
           </a:bodyPr>
           <a:lstStyle/>
@@ -14402,6 +15266,7 @@
           <a:lstStyle/>
           <a:p>
             <a:pPr algn="ctr"/>
+            <a:endParaRPr/>
           </a:p>
         </p:txBody>
       </p:sp>
@@ -14422,7 +15287,7 @@
           <a:noFill/>
         </p:spPr>
         <p:txBody>
-          <a:bodyPr wrap="square" lIns="0" rIns="0" tIns="0" bIns="0" anchor="ctr">
+          <a:bodyPr wrap="square" lIns="0" tIns="0" rIns="0" bIns="0" anchor="ctr">
             <a:spAutoFit/>
           </a:bodyPr>
           <a:lstStyle/>
@@ -14457,7 +15322,7 @@
           <a:noFill/>
         </p:spPr>
         <p:txBody>
-          <a:bodyPr wrap="square" lIns="0" rIns="0" tIns="0" bIns="0" anchor="t">
+          <a:bodyPr wrap="square" lIns="0" tIns="0" rIns="0" bIns="0" anchor="t">
             <a:spAutoFit/>
           </a:bodyPr>
           <a:lstStyle/>
@@ -14492,7 +15357,7 @@
           <a:noFill/>
         </p:spPr>
         <p:txBody>
-          <a:bodyPr wrap="square" lIns="0" rIns="0" tIns="0" bIns="0" anchor="t">
+          <a:bodyPr wrap="square" lIns="0" tIns="0" rIns="0" bIns="0" anchor="t">
             <a:spAutoFit/>
           </a:bodyPr>
           <a:lstStyle/>
@@ -14519,7 +15384,7 @@
 </file>
 
 <file path=ppt/slides/slide21.xml><?xml version="1.0" encoding="utf-8"?>
-<p:sld xmlns:a="http://schemas.openxmlformats.org/drawingml/2006/main" xmlns:p="http://schemas.openxmlformats.org/presentationml/2006/main" xmlns:r="http://schemas.openxmlformats.org/officeDocument/2006/relationships">
+<p:sld xmlns:a="http://schemas.openxmlformats.org/drawingml/2006/main" xmlns:r="http://schemas.openxmlformats.org/officeDocument/2006/relationships" xmlns:p="http://schemas.openxmlformats.org/presentationml/2006/main">
   <p:cSld>
     <p:bg>
       <p:bgPr>
@@ -14535,7 +15400,14 @@
         <p:cNvGrpSpPr/>
         <p:nvPr/>
       </p:nvGrpSpPr>
-      <p:grpSpPr/>
+      <p:grpSpPr>
+        <a:xfrm>
+          <a:off x="0" y="0"/>
+          <a:ext cx="0" cy="0"/>
+          <a:chOff x="0" y="0"/>
+          <a:chExt cx="0" cy="0"/>
+        </a:xfrm>
+      </p:grpSpPr>
       <p:sp>
         <p:nvSpPr>
           <p:cNvPr id="2" name="TextBox 1"/>
@@ -14553,7 +15425,7 @@
           <a:noFill/>
         </p:spPr>
         <p:txBody>
-          <a:bodyPr wrap="square" lIns="0" rIns="0" tIns="0" bIns="0" anchor="t">
+          <a:bodyPr wrap="square" lIns="0" tIns="0" rIns="0" bIns="0" anchor="t">
             <a:spAutoFit/>
           </a:bodyPr>
           <a:lstStyle/>
@@ -14588,7 +15460,7 @@
           <a:noFill/>
         </p:spPr>
         <p:txBody>
-          <a:bodyPr wrap="square" lIns="0" rIns="0" tIns="0" bIns="0" anchor="t">
+          <a:bodyPr wrap="square" lIns="0" tIns="0" rIns="0" bIns="0" anchor="t">
             <a:spAutoFit/>
           </a:bodyPr>
           <a:lstStyle/>
@@ -14623,7 +15495,7 @@
           <a:noFill/>
         </p:spPr>
         <p:txBody>
-          <a:bodyPr wrap="square" lIns="0" rIns="0" tIns="0" bIns="0" anchor="t">
+          <a:bodyPr wrap="square" lIns="0" tIns="0" rIns="0" bIns="0" anchor="t">
             <a:spAutoFit/>
           </a:bodyPr>
           <a:lstStyle/>
@@ -14684,6 +15556,7 @@
           <a:lstStyle/>
           <a:p>
             <a:pPr algn="ctr"/>
+            <a:endParaRPr/>
           </a:p>
         </p:txBody>
       </p:sp>
@@ -14728,6 +15601,7 @@
           <a:lstStyle/>
           <a:p>
             <a:pPr algn="ctr"/>
+            <a:endParaRPr/>
           </a:p>
         </p:txBody>
       </p:sp>
@@ -14748,7 +15622,7 @@
           <a:noFill/>
         </p:spPr>
         <p:txBody>
-          <a:bodyPr wrap="square" lIns="0" rIns="0" tIns="0" bIns="0" anchor="ctr">
+          <a:bodyPr wrap="square" lIns="0" tIns="0" rIns="0" bIns="0" anchor="ctr">
             <a:spAutoFit/>
           </a:bodyPr>
           <a:lstStyle/>
@@ -14783,7 +15657,7 @@
           <a:noFill/>
         </p:spPr>
         <p:txBody>
-          <a:bodyPr wrap="square" lIns="0" rIns="0" tIns="0" bIns="0" anchor="t">
+          <a:bodyPr wrap="square" lIns="0" tIns="0" rIns="0" bIns="0" anchor="t">
             <a:spAutoFit/>
           </a:bodyPr>
           <a:lstStyle/>
@@ -14818,7 +15692,7 @@
           <a:noFill/>
         </p:spPr>
         <p:txBody>
-          <a:bodyPr wrap="square" lIns="0" rIns="0" tIns="0" bIns="0" anchor="t">
+          <a:bodyPr wrap="square" lIns="0" tIns="0" rIns="0" bIns="0" anchor="t">
             <a:spAutoFit/>
           </a:bodyPr>
           <a:lstStyle/>
@@ -14879,6 +15753,7 @@
           <a:lstStyle/>
           <a:p>
             <a:pPr algn="ctr"/>
+            <a:endParaRPr/>
           </a:p>
         </p:txBody>
       </p:sp>
@@ -14923,6 +15798,7 @@
           <a:lstStyle/>
           <a:p>
             <a:pPr algn="ctr"/>
+            <a:endParaRPr/>
           </a:p>
         </p:txBody>
       </p:sp>
@@ -14943,7 +15819,7 @@
           <a:noFill/>
         </p:spPr>
         <p:txBody>
-          <a:bodyPr wrap="square" lIns="0" rIns="0" tIns="0" bIns="0" anchor="ctr">
+          <a:bodyPr wrap="square" lIns="0" tIns="0" rIns="0" bIns="0" anchor="ctr">
             <a:spAutoFit/>
           </a:bodyPr>
           <a:lstStyle/>
@@ -14978,7 +15854,7 @@
           <a:noFill/>
         </p:spPr>
         <p:txBody>
-          <a:bodyPr wrap="square" lIns="0" rIns="0" tIns="0" bIns="0" anchor="t">
+          <a:bodyPr wrap="square" lIns="0" tIns="0" rIns="0" bIns="0" anchor="t">
             <a:spAutoFit/>
           </a:bodyPr>
           <a:lstStyle/>
@@ -15013,7 +15889,7 @@
           <a:noFill/>
         </p:spPr>
         <p:txBody>
-          <a:bodyPr wrap="square" lIns="0" rIns="0" tIns="0" bIns="0" anchor="t">
+          <a:bodyPr wrap="square" lIns="0" tIns="0" rIns="0" bIns="0" anchor="t">
             <a:spAutoFit/>
           </a:bodyPr>
           <a:lstStyle/>
@@ -15074,6 +15950,7 @@
           <a:lstStyle/>
           <a:p>
             <a:pPr algn="ctr"/>
+            <a:endParaRPr/>
           </a:p>
         </p:txBody>
       </p:sp>
@@ -15118,6 +15995,7 @@
           <a:lstStyle/>
           <a:p>
             <a:pPr algn="ctr"/>
+            <a:endParaRPr/>
           </a:p>
         </p:txBody>
       </p:sp>
@@ -15138,7 +16016,7 @@
           <a:noFill/>
         </p:spPr>
         <p:txBody>
-          <a:bodyPr wrap="square" lIns="0" rIns="0" tIns="0" bIns="0" anchor="ctr">
+          <a:bodyPr wrap="square" lIns="0" tIns="0" rIns="0" bIns="0" anchor="ctr">
             <a:spAutoFit/>
           </a:bodyPr>
           <a:lstStyle/>
@@ -15173,7 +16051,7 @@
           <a:noFill/>
         </p:spPr>
         <p:txBody>
-          <a:bodyPr wrap="square" lIns="0" rIns="0" tIns="0" bIns="0" anchor="t">
+          <a:bodyPr wrap="square" lIns="0" tIns="0" rIns="0" bIns="0" anchor="t">
             <a:spAutoFit/>
           </a:bodyPr>
           <a:lstStyle/>
@@ -15208,7 +16086,7 @@
           <a:noFill/>
         </p:spPr>
         <p:txBody>
-          <a:bodyPr wrap="square" lIns="0" rIns="0" tIns="0" bIns="0" anchor="t">
+          <a:bodyPr wrap="square" lIns="0" tIns="0" rIns="0" bIns="0" anchor="t">
             <a:spAutoFit/>
           </a:bodyPr>
           <a:lstStyle/>
@@ -15269,6 +16147,7 @@
           <a:lstStyle/>
           <a:p>
             <a:pPr algn="ctr"/>
+            <a:endParaRPr/>
           </a:p>
         </p:txBody>
       </p:sp>
@@ -15313,6 +16192,7 @@
           <a:lstStyle/>
           <a:p>
             <a:pPr algn="ctr"/>
+            <a:endParaRPr/>
           </a:p>
         </p:txBody>
       </p:sp>
@@ -15333,7 +16213,7 @@
           <a:noFill/>
         </p:spPr>
         <p:txBody>
-          <a:bodyPr wrap="square" lIns="0" rIns="0" tIns="0" bIns="0" anchor="ctr">
+          <a:bodyPr wrap="square" lIns="0" tIns="0" rIns="0" bIns="0" anchor="ctr">
             <a:spAutoFit/>
           </a:bodyPr>
           <a:lstStyle/>
@@ -15368,7 +16248,7 @@
           <a:noFill/>
         </p:spPr>
         <p:txBody>
-          <a:bodyPr wrap="square" lIns="0" rIns="0" tIns="0" bIns="0" anchor="t">
+          <a:bodyPr wrap="square" lIns="0" tIns="0" rIns="0" bIns="0" anchor="t">
             <a:spAutoFit/>
           </a:bodyPr>
           <a:lstStyle/>
@@ -15403,7 +16283,7 @@
           <a:noFill/>
         </p:spPr>
         <p:txBody>
-          <a:bodyPr wrap="square" lIns="0" rIns="0" tIns="0" bIns="0" anchor="t">
+          <a:bodyPr wrap="square" lIns="0" tIns="0" rIns="0" bIns="0" anchor="t">
             <a:spAutoFit/>
           </a:bodyPr>
           <a:lstStyle/>
@@ -15464,6 +16344,7 @@
           <a:lstStyle/>
           <a:p>
             <a:pPr algn="ctr"/>
+            <a:endParaRPr/>
           </a:p>
         </p:txBody>
       </p:sp>
@@ -15508,6 +16389,7 @@
           <a:lstStyle/>
           <a:p>
             <a:pPr algn="ctr"/>
+            <a:endParaRPr/>
           </a:p>
         </p:txBody>
       </p:sp>
@@ -15528,7 +16410,7 @@
           <a:noFill/>
         </p:spPr>
         <p:txBody>
-          <a:bodyPr wrap="square" lIns="0" rIns="0" tIns="0" bIns="0" anchor="ctr">
+          <a:bodyPr wrap="square" lIns="0" tIns="0" rIns="0" bIns="0" anchor="ctr">
             <a:spAutoFit/>
           </a:bodyPr>
           <a:lstStyle/>
@@ -15563,7 +16445,7 @@
           <a:noFill/>
         </p:spPr>
         <p:txBody>
-          <a:bodyPr wrap="square" lIns="0" rIns="0" tIns="0" bIns="0" anchor="t">
+          <a:bodyPr wrap="square" lIns="0" tIns="0" rIns="0" bIns="0" anchor="t">
             <a:spAutoFit/>
           </a:bodyPr>
           <a:lstStyle/>
@@ -15598,7 +16480,7 @@
           <a:noFill/>
         </p:spPr>
         <p:txBody>
-          <a:bodyPr wrap="square" lIns="0" rIns="0" tIns="0" bIns="0" anchor="t">
+          <a:bodyPr wrap="square" lIns="0" tIns="0" rIns="0" bIns="0" anchor="t">
             <a:spAutoFit/>
           </a:bodyPr>
           <a:lstStyle/>
@@ -15659,6 +16541,7 @@
           <a:lstStyle/>
           <a:p>
             <a:pPr algn="ctr"/>
+            <a:endParaRPr/>
           </a:p>
         </p:txBody>
       </p:sp>
@@ -15703,6 +16586,7 @@
           <a:lstStyle/>
           <a:p>
             <a:pPr algn="ctr"/>
+            <a:endParaRPr/>
           </a:p>
         </p:txBody>
       </p:sp>
@@ -15723,7 +16607,7 @@
           <a:noFill/>
         </p:spPr>
         <p:txBody>
-          <a:bodyPr wrap="square" lIns="0" rIns="0" tIns="0" bIns="0" anchor="ctr">
+          <a:bodyPr wrap="square" lIns="0" tIns="0" rIns="0" bIns="0" anchor="ctr">
             <a:spAutoFit/>
           </a:bodyPr>
           <a:lstStyle/>
@@ -15758,7 +16642,7 @@
           <a:noFill/>
         </p:spPr>
         <p:txBody>
-          <a:bodyPr wrap="square" lIns="0" rIns="0" tIns="0" bIns="0" anchor="t">
+          <a:bodyPr wrap="square" lIns="0" tIns="0" rIns="0" bIns="0" anchor="t">
             <a:spAutoFit/>
           </a:bodyPr>
           <a:lstStyle/>
@@ -15793,7 +16677,7 @@
           <a:noFill/>
         </p:spPr>
         <p:txBody>
-          <a:bodyPr wrap="square" lIns="0" rIns="0" tIns="0" bIns="0" anchor="t">
+          <a:bodyPr wrap="square" lIns="0" tIns="0" rIns="0" bIns="0" anchor="t">
             <a:spAutoFit/>
           </a:bodyPr>
           <a:lstStyle/>
@@ -15854,6 +16738,7 @@
           <a:lstStyle/>
           <a:p>
             <a:pPr algn="ctr"/>
+            <a:endParaRPr/>
           </a:p>
         </p:txBody>
       </p:sp>
@@ -15898,6 +16783,7 @@
           <a:lstStyle/>
           <a:p>
             <a:pPr algn="ctr"/>
+            <a:endParaRPr/>
           </a:p>
         </p:txBody>
       </p:sp>
@@ -15918,7 +16804,7 @@
           <a:noFill/>
         </p:spPr>
         <p:txBody>
-          <a:bodyPr wrap="square" lIns="0" rIns="0" tIns="0" bIns="0" anchor="ctr">
+          <a:bodyPr wrap="square" lIns="0" tIns="0" rIns="0" bIns="0" anchor="ctr">
             <a:spAutoFit/>
           </a:bodyPr>
           <a:lstStyle/>
@@ -15953,7 +16839,7 @@
           <a:noFill/>
         </p:spPr>
         <p:txBody>
-          <a:bodyPr wrap="square" lIns="0" rIns="0" tIns="0" bIns="0" anchor="t">
+          <a:bodyPr wrap="square" lIns="0" tIns="0" rIns="0" bIns="0" anchor="t">
             <a:spAutoFit/>
           </a:bodyPr>
           <a:lstStyle/>
@@ -15988,7 +16874,7 @@
           <a:noFill/>
         </p:spPr>
         <p:txBody>
-          <a:bodyPr wrap="square" lIns="0" rIns="0" tIns="0" bIns="0" anchor="t">
+          <a:bodyPr wrap="square" lIns="0" tIns="0" rIns="0" bIns="0" anchor="t">
             <a:spAutoFit/>
           </a:bodyPr>
           <a:lstStyle/>
@@ -16049,6 +16935,7 @@
           <a:lstStyle/>
           <a:p>
             <a:pPr algn="ctr"/>
+            <a:endParaRPr/>
           </a:p>
         </p:txBody>
       </p:sp>
@@ -16093,6 +16980,7 @@
           <a:lstStyle/>
           <a:p>
             <a:pPr algn="ctr"/>
+            <a:endParaRPr/>
           </a:p>
         </p:txBody>
       </p:sp>
@@ -16113,7 +17001,7 @@
           <a:noFill/>
         </p:spPr>
         <p:txBody>
-          <a:bodyPr wrap="square" lIns="0" rIns="0" tIns="0" bIns="0" anchor="ctr">
+          <a:bodyPr wrap="square" lIns="0" tIns="0" rIns="0" bIns="0" anchor="ctr">
             <a:spAutoFit/>
           </a:bodyPr>
           <a:lstStyle/>
@@ -16148,7 +17036,7 @@
           <a:noFill/>
         </p:spPr>
         <p:txBody>
-          <a:bodyPr wrap="square" lIns="0" rIns="0" tIns="0" bIns="0" anchor="t">
+          <a:bodyPr wrap="square" lIns="0" tIns="0" rIns="0" bIns="0" anchor="t">
             <a:spAutoFit/>
           </a:bodyPr>
           <a:lstStyle/>
@@ -16183,7 +17071,7 @@
           <a:noFill/>
         </p:spPr>
         <p:txBody>
-          <a:bodyPr wrap="square" lIns="0" rIns="0" tIns="0" bIns="0" anchor="t">
+          <a:bodyPr wrap="square" lIns="0" tIns="0" rIns="0" bIns="0" anchor="t">
             <a:spAutoFit/>
           </a:bodyPr>
           <a:lstStyle/>
@@ -16218,7 +17106,7 @@
           <a:noFill/>
         </p:spPr>
         <p:txBody>
-          <a:bodyPr wrap="square" lIns="0" rIns="0" tIns="0" bIns="0" anchor="t">
+          <a:bodyPr wrap="square" lIns="0" tIns="0" rIns="0" bIns="0" anchor="t">
             <a:spAutoFit/>
           </a:bodyPr>
           <a:lstStyle/>
@@ -16253,7 +17141,7 @@
           <a:noFill/>
         </p:spPr>
         <p:txBody>
-          <a:bodyPr wrap="square" lIns="0" rIns="0" tIns="0" bIns="0" anchor="t">
+          <a:bodyPr wrap="square" lIns="0" tIns="0" rIns="0" bIns="0" anchor="t">
             <a:spAutoFit/>
           </a:bodyPr>
           <a:lstStyle/>
@@ -16280,7 +17168,7 @@
 </file>
 
 <file path=ppt/slides/slide22.xml><?xml version="1.0" encoding="utf-8"?>
-<p:sld xmlns:a="http://schemas.openxmlformats.org/drawingml/2006/main" xmlns:p="http://schemas.openxmlformats.org/presentationml/2006/main" xmlns:r="http://schemas.openxmlformats.org/officeDocument/2006/relationships">
+<p:sld xmlns:a="http://schemas.openxmlformats.org/drawingml/2006/main" xmlns:r="http://schemas.openxmlformats.org/officeDocument/2006/relationships" xmlns:p="http://schemas.openxmlformats.org/presentationml/2006/main">
   <p:cSld>
     <p:bg>
       <p:bgPr>
@@ -16296,7 +17184,14 @@
         <p:cNvGrpSpPr/>
         <p:nvPr/>
       </p:nvGrpSpPr>
-      <p:grpSpPr/>
+      <p:grpSpPr>
+        <a:xfrm>
+          <a:off x="0" y="0"/>
+          <a:ext cx="0" cy="0"/>
+          <a:chOff x="0" y="0"/>
+          <a:chExt cx="0" cy="0"/>
+        </a:xfrm>
+      </p:grpSpPr>
       <p:sp>
         <p:nvSpPr>
           <p:cNvPr id="2" name="TextBox 1"/>
@@ -16314,7 +17209,7 @@
           <a:noFill/>
         </p:spPr>
         <p:txBody>
-          <a:bodyPr wrap="square" lIns="0" rIns="0" tIns="0" bIns="0" anchor="t">
+          <a:bodyPr wrap="square" lIns="0" tIns="0" rIns="0" bIns="0" anchor="t">
             <a:spAutoFit/>
           </a:bodyPr>
           <a:lstStyle/>
@@ -16349,7 +17244,7 @@
           <a:noFill/>
         </p:spPr>
         <p:txBody>
-          <a:bodyPr wrap="square" lIns="0" rIns="0" tIns="0" bIns="0" anchor="t">
+          <a:bodyPr wrap="square" lIns="0" tIns="0" rIns="0" bIns="0" anchor="t">
             <a:spAutoFit/>
           </a:bodyPr>
           <a:lstStyle/>
@@ -16384,7 +17279,7 @@
           <a:noFill/>
         </p:spPr>
         <p:txBody>
-          <a:bodyPr wrap="square" lIns="0" rIns="0" tIns="0" bIns="0" anchor="t">
+          <a:bodyPr wrap="square" lIns="0" tIns="0" rIns="0" bIns="0" anchor="t">
             <a:spAutoFit/>
           </a:bodyPr>
           <a:lstStyle/>
@@ -16445,6 +17340,7 @@
           <a:lstStyle/>
           <a:p>
             <a:pPr algn="ctr"/>
+            <a:endParaRPr/>
           </a:p>
         </p:txBody>
       </p:sp>
@@ -16489,6 +17385,7 @@
           <a:lstStyle/>
           <a:p>
             <a:pPr algn="ctr"/>
+            <a:endParaRPr/>
           </a:p>
         </p:txBody>
       </p:sp>
@@ -16509,7 +17406,7 @@
           <a:noFill/>
         </p:spPr>
         <p:txBody>
-          <a:bodyPr wrap="square" lIns="0" rIns="0" tIns="0" bIns="0" anchor="t">
+          <a:bodyPr wrap="square" lIns="0" tIns="0" rIns="0" bIns="0" anchor="t">
             <a:spAutoFit/>
           </a:bodyPr>
           <a:lstStyle/>
@@ -16544,7 +17441,7 @@
           <a:noFill/>
         </p:spPr>
         <p:txBody>
-          <a:bodyPr wrap="square" lIns="0" rIns="0" tIns="0" bIns="0" anchor="t">
+          <a:bodyPr wrap="square" lIns="0" tIns="0" rIns="0" bIns="0" anchor="t">
             <a:spAutoFit/>
           </a:bodyPr>
           <a:lstStyle/>
@@ -16579,7 +17476,7 @@
           <a:noFill/>
         </p:spPr>
         <p:txBody>
-          <a:bodyPr wrap="square" lIns="0" rIns="0" tIns="0" bIns="0" anchor="t">
+          <a:bodyPr wrap="square" lIns="0" tIns="0" rIns="0" bIns="0" anchor="t">
             <a:spAutoFit/>
           </a:bodyPr>
           <a:lstStyle/>
@@ -16640,6 +17537,7 @@
           <a:lstStyle/>
           <a:p>
             <a:pPr algn="ctr"/>
+            <a:endParaRPr/>
           </a:p>
         </p:txBody>
       </p:sp>
@@ -16684,6 +17582,7 @@
           <a:lstStyle/>
           <a:p>
             <a:pPr algn="ctr"/>
+            <a:endParaRPr/>
           </a:p>
         </p:txBody>
       </p:sp>
@@ -16704,7 +17603,7 @@
           <a:noFill/>
         </p:spPr>
         <p:txBody>
-          <a:bodyPr wrap="square" lIns="0" rIns="0" tIns="0" bIns="0" anchor="t">
+          <a:bodyPr wrap="square" lIns="0" tIns="0" rIns="0" bIns="0" anchor="t">
             <a:spAutoFit/>
           </a:bodyPr>
           <a:lstStyle/>
@@ -16739,7 +17638,7 @@
           <a:noFill/>
         </p:spPr>
         <p:txBody>
-          <a:bodyPr wrap="square" lIns="0" rIns="0" tIns="0" bIns="0" anchor="t">
+          <a:bodyPr wrap="square" lIns="0" tIns="0" rIns="0" bIns="0" anchor="t">
             <a:spAutoFit/>
           </a:bodyPr>
           <a:lstStyle/>
@@ -16774,7 +17673,7 @@
           <a:noFill/>
         </p:spPr>
         <p:txBody>
-          <a:bodyPr wrap="square" lIns="0" rIns="0" tIns="0" bIns="0" anchor="t">
+          <a:bodyPr wrap="square" lIns="0" tIns="0" rIns="0" bIns="0" anchor="t">
             <a:spAutoFit/>
           </a:bodyPr>
           <a:lstStyle/>
@@ -16835,6 +17734,7 @@
           <a:lstStyle/>
           <a:p>
             <a:pPr algn="ctr"/>
+            <a:endParaRPr/>
           </a:p>
         </p:txBody>
       </p:sp>
@@ -16879,6 +17779,7 @@
           <a:lstStyle/>
           <a:p>
             <a:pPr algn="ctr"/>
+            <a:endParaRPr/>
           </a:p>
         </p:txBody>
       </p:sp>
@@ -16899,7 +17800,7 @@
           <a:noFill/>
         </p:spPr>
         <p:txBody>
-          <a:bodyPr wrap="square" lIns="0" rIns="0" tIns="0" bIns="0" anchor="t">
+          <a:bodyPr wrap="square" lIns="0" tIns="0" rIns="0" bIns="0" anchor="t">
             <a:spAutoFit/>
           </a:bodyPr>
           <a:lstStyle/>
@@ -16934,7 +17835,7 @@
           <a:noFill/>
         </p:spPr>
         <p:txBody>
-          <a:bodyPr wrap="square" lIns="0" rIns="0" tIns="0" bIns="0" anchor="t">
+          <a:bodyPr wrap="square" lIns="0" tIns="0" rIns="0" bIns="0" anchor="t">
             <a:spAutoFit/>
           </a:bodyPr>
           <a:lstStyle/>
@@ -16969,7 +17870,7 @@
           <a:noFill/>
         </p:spPr>
         <p:txBody>
-          <a:bodyPr wrap="square" lIns="0" rIns="0" tIns="0" bIns="0" anchor="t">
+          <a:bodyPr wrap="square" lIns="0" tIns="0" rIns="0" bIns="0" anchor="t">
             <a:spAutoFit/>
           </a:bodyPr>
           <a:lstStyle/>
@@ -17030,6 +17931,7 @@
           <a:lstStyle/>
           <a:p>
             <a:pPr algn="ctr"/>
+            <a:endParaRPr/>
           </a:p>
         </p:txBody>
       </p:sp>
@@ -17074,6 +17976,7 @@
           <a:lstStyle/>
           <a:p>
             <a:pPr algn="ctr"/>
+            <a:endParaRPr/>
           </a:p>
         </p:txBody>
       </p:sp>
@@ -17094,7 +17997,7 @@
           <a:noFill/>
         </p:spPr>
         <p:txBody>
-          <a:bodyPr wrap="square" lIns="0" rIns="0" tIns="0" bIns="0" anchor="t">
+          <a:bodyPr wrap="square" lIns="0" tIns="0" rIns="0" bIns="0" anchor="t">
             <a:spAutoFit/>
           </a:bodyPr>
           <a:lstStyle/>
@@ -17129,7 +18032,7 @@
           <a:noFill/>
         </p:spPr>
         <p:txBody>
-          <a:bodyPr wrap="square" lIns="0" rIns="0" tIns="0" bIns="0" anchor="t">
+          <a:bodyPr wrap="square" lIns="0" tIns="0" rIns="0" bIns="0" anchor="t">
             <a:spAutoFit/>
           </a:bodyPr>
           <a:lstStyle/>
@@ -17164,7 +18067,7 @@
           <a:noFill/>
         </p:spPr>
         <p:txBody>
-          <a:bodyPr wrap="square" lIns="0" rIns="0" tIns="0" bIns="0" anchor="t">
+          <a:bodyPr wrap="square" lIns="0" tIns="0" rIns="0" bIns="0" anchor="t">
             <a:spAutoFit/>
           </a:bodyPr>
           <a:lstStyle/>
@@ -17225,6 +18128,7 @@
           <a:lstStyle/>
           <a:p>
             <a:pPr algn="ctr"/>
+            <a:endParaRPr/>
           </a:p>
         </p:txBody>
       </p:sp>
@@ -17269,6 +18173,7 @@
           <a:lstStyle/>
           <a:p>
             <a:pPr algn="ctr"/>
+            <a:endParaRPr/>
           </a:p>
         </p:txBody>
       </p:sp>
@@ -17289,7 +18194,7 @@
           <a:noFill/>
         </p:spPr>
         <p:txBody>
-          <a:bodyPr wrap="square" lIns="0" rIns="0" tIns="0" bIns="0" anchor="t">
+          <a:bodyPr wrap="square" lIns="0" tIns="0" rIns="0" bIns="0" anchor="t">
             <a:spAutoFit/>
           </a:bodyPr>
           <a:lstStyle/>
@@ -17324,7 +18229,7 @@
           <a:noFill/>
         </p:spPr>
         <p:txBody>
-          <a:bodyPr wrap="square" lIns="0" rIns="0" tIns="0" bIns="0" anchor="t">
+          <a:bodyPr wrap="square" lIns="0" tIns="0" rIns="0" bIns="0" anchor="t">
             <a:spAutoFit/>
           </a:bodyPr>
           <a:lstStyle/>
@@ -17359,7 +18264,7 @@
           <a:noFill/>
         </p:spPr>
         <p:txBody>
-          <a:bodyPr wrap="square" lIns="0" rIns="0" tIns="0" bIns="0" anchor="t">
+          <a:bodyPr wrap="square" lIns="0" tIns="0" rIns="0" bIns="0" anchor="t">
             <a:spAutoFit/>
           </a:bodyPr>
           <a:lstStyle/>
@@ -17394,7 +18299,7 @@
           <a:noFill/>
         </p:spPr>
         <p:txBody>
-          <a:bodyPr wrap="square" lIns="0" rIns="0" tIns="0" bIns="0" anchor="t">
+          <a:bodyPr wrap="square" lIns="0" tIns="0" rIns="0" bIns="0" anchor="t">
             <a:spAutoFit/>
           </a:bodyPr>
           <a:lstStyle/>
@@ -17429,7 +18334,7 @@
           <a:noFill/>
         </p:spPr>
         <p:txBody>
-          <a:bodyPr wrap="square" lIns="0" rIns="0" tIns="0" bIns="0" anchor="t">
+          <a:bodyPr wrap="square" lIns="0" tIns="0" rIns="0" bIns="0" anchor="t">
             <a:spAutoFit/>
           </a:bodyPr>
           <a:lstStyle/>
@@ -17456,7 +18361,7 @@
 </file>
 
 <file path=ppt/slides/slide23.xml><?xml version="1.0" encoding="utf-8"?>
-<p:sld xmlns:a="http://schemas.openxmlformats.org/drawingml/2006/main" xmlns:p="http://schemas.openxmlformats.org/presentationml/2006/main" xmlns:r="http://schemas.openxmlformats.org/officeDocument/2006/relationships">
+<p:sld xmlns:a="http://schemas.openxmlformats.org/drawingml/2006/main" xmlns:r="http://schemas.openxmlformats.org/officeDocument/2006/relationships" xmlns:p="http://schemas.openxmlformats.org/presentationml/2006/main">
   <p:cSld>
     <p:bg>
       <p:bgPr>
@@ -17472,7 +18377,14 @@
         <p:cNvGrpSpPr/>
         <p:nvPr/>
       </p:nvGrpSpPr>
-      <p:grpSpPr/>
+      <p:grpSpPr>
+        <a:xfrm>
+          <a:off x="0" y="0"/>
+          <a:ext cx="0" cy="0"/>
+          <a:chOff x="0" y="0"/>
+          <a:chExt cx="0" cy="0"/>
+        </a:xfrm>
+      </p:grpSpPr>
       <p:sp>
         <p:nvSpPr>
           <p:cNvPr id="2" name="Rectangle 1"/>
@@ -17514,6 +18426,7 @@
           <a:lstStyle/>
           <a:p>
             <a:pPr algn="ctr"/>
+            <a:endParaRPr/>
           </a:p>
         </p:txBody>
       </p:sp>
@@ -17534,7 +18447,7 @@
           <a:noFill/>
         </p:spPr>
         <p:txBody>
-          <a:bodyPr wrap="square" lIns="0" rIns="0" tIns="0" bIns="0" anchor="t">
+          <a:bodyPr wrap="square" lIns="0" tIns="0" rIns="0" bIns="0" anchor="t">
             <a:spAutoFit/>
           </a:bodyPr>
           <a:lstStyle/>
@@ -17569,7 +18482,7 @@
           <a:noFill/>
         </p:spPr>
         <p:txBody>
-          <a:bodyPr wrap="square" lIns="0" rIns="0" tIns="0" bIns="0" anchor="t">
+          <a:bodyPr wrap="square" lIns="0" tIns="0" rIns="0" bIns="0" anchor="t">
             <a:spAutoFit/>
           </a:bodyPr>
           <a:lstStyle/>
@@ -17630,6 +18543,7 @@
           <a:lstStyle/>
           <a:p>
             <a:pPr algn="ctr"/>
+            <a:endParaRPr/>
           </a:p>
         </p:txBody>
       </p:sp>
@@ -17650,7 +18564,7 @@
           <a:noFill/>
         </p:spPr>
         <p:txBody>
-          <a:bodyPr wrap="square" lIns="0" rIns="0" tIns="0" bIns="0" anchor="ctr">
+          <a:bodyPr wrap="square" lIns="0" tIns="0" rIns="0" bIns="0" anchor="ctr">
             <a:spAutoFit/>
           </a:bodyPr>
           <a:lstStyle/>
@@ -17685,7 +18599,7 @@
           <a:noFill/>
         </p:spPr>
         <p:txBody>
-          <a:bodyPr wrap="square" lIns="0" rIns="0" tIns="0" bIns="0" anchor="ctr">
+          <a:bodyPr wrap="square" lIns="0" tIns="0" rIns="0" bIns="0" anchor="ctr">
             <a:spAutoFit/>
           </a:bodyPr>
           <a:lstStyle/>
@@ -17720,7 +18634,7 @@
           <a:noFill/>
         </p:spPr>
         <p:txBody>
-          <a:bodyPr wrap="square" lIns="0" rIns="0" tIns="0" bIns="0" anchor="ctr">
+          <a:bodyPr wrap="square" lIns="0" tIns="0" rIns="0" bIns="0" anchor="ctr">
             <a:spAutoFit/>
           </a:bodyPr>
           <a:lstStyle/>
@@ -17755,7 +18669,7 @@
           <a:noFill/>
         </p:spPr>
         <p:txBody>
-          <a:bodyPr wrap="square" lIns="0" rIns="0" tIns="0" bIns="0" anchor="t">
+          <a:bodyPr wrap="square" lIns="0" tIns="0" rIns="0" bIns="0" anchor="t">
             <a:spAutoFit/>
           </a:bodyPr>
           <a:lstStyle/>
@@ -17790,7 +18704,7 @@
           <a:noFill/>
         </p:spPr>
         <p:txBody>
-          <a:bodyPr wrap="square" lIns="0" rIns="0" tIns="0" bIns="0" anchor="t">
+          <a:bodyPr wrap="square" lIns="0" tIns="0" rIns="0" bIns="0" anchor="t">
             <a:spAutoFit/>
           </a:bodyPr>
           <a:lstStyle/>
@@ -17825,7 +18739,7 @@
           <a:noFill/>
         </p:spPr>
         <p:txBody>
-          <a:bodyPr wrap="square" lIns="0" rIns="0" tIns="0" bIns="0" anchor="t">
+          <a:bodyPr wrap="square" lIns="0" tIns="0" rIns="0" bIns="0" anchor="t">
             <a:spAutoFit/>
           </a:bodyPr>
           <a:lstStyle/>
@@ -17860,7 +18774,7 @@
           <a:noFill/>
         </p:spPr>
         <p:txBody>
-          <a:bodyPr wrap="square" lIns="0" rIns="0" tIns="0" bIns="0" anchor="t">
+          <a:bodyPr wrap="square" lIns="0" tIns="0" rIns="0" bIns="0" anchor="t">
             <a:spAutoFit/>
           </a:bodyPr>
           <a:lstStyle/>
@@ -17895,7 +18809,7 @@
           <a:noFill/>
         </p:spPr>
         <p:txBody>
-          <a:bodyPr wrap="square" lIns="0" rIns="0" tIns="0" bIns="0" anchor="t">
+          <a:bodyPr wrap="square" lIns="0" tIns="0" rIns="0" bIns="0" anchor="t">
             <a:spAutoFit/>
           </a:bodyPr>
           <a:lstStyle/>
@@ -17930,7 +18844,7 @@
           <a:noFill/>
         </p:spPr>
         <p:txBody>
-          <a:bodyPr wrap="square" lIns="0" rIns="0" tIns="0" bIns="0" anchor="t">
+          <a:bodyPr wrap="square" lIns="0" tIns="0" rIns="0" bIns="0" anchor="t">
             <a:spAutoFit/>
           </a:bodyPr>
           <a:lstStyle/>
@@ -17965,7 +18879,7 @@
           <a:noFill/>
         </p:spPr>
         <p:txBody>
-          <a:bodyPr wrap="square" lIns="0" rIns="0" tIns="0" bIns="0" anchor="t">
+          <a:bodyPr wrap="square" lIns="0" tIns="0" rIns="0" bIns="0" anchor="t">
             <a:spAutoFit/>
           </a:bodyPr>
           <a:lstStyle/>
@@ -17992,7 +18906,7 @@
 </file>
 
 <file path=ppt/slides/slide3.xml><?xml version="1.0" encoding="utf-8"?>
-<p:sld xmlns:a="http://schemas.openxmlformats.org/drawingml/2006/main" xmlns:p="http://schemas.openxmlformats.org/presentationml/2006/main" xmlns:r="http://schemas.openxmlformats.org/officeDocument/2006/relationships">
+<p:sld xmlns:a="http://schemas.openxmlformats.org/drawingml/2006/main" xmlns:r="http://schemas.openxmlformats.org/officeDocument/2006/relationships" xmlns:p="http://schemas.openxmlformats.org/presentationml/2006/main">
   <p:cSld>
     <p:bg>
       <p:bgPr>
@@ -18008,7 +18922,14 @@
         <p:cNvGrpSpPr/>
         <p:nvPr/>
       </p:nvGrpSpPr>
-      <p:grpSpPr/>
+      <p:grpSpPr>
+        <a:xfrm>
+          <a:off x="0" y="0"/>
+          <a:ext cx="0" cy="0"/>
+          <a:chOff x="0" y="0"/>
+          <a:chExt cx="0" cy="0"/>
+        </a:xfrm>
+      </p:grpSpPr>
       <p:sp>
         <p:nvSpPr>
           <p:cNvPr id="2" name="TextBox 1"/>
@@ -18026,7 +18947,7 @@
           <a:noFill/>
         </p:spPr>
         <p:txBody>
-          <a:bodyPr wrap="square" lIns="0" rIns="0" tIns="0" bIns="0" anchor="t">
+          <a:bodyPr wrap="square" lIns="0" tIns="0" rIns="0" bIns="0" anchor="t">
             <a:spAutoFit/>
           </a:bodyPr>
           <a:lstStyle/>
@@ -18061,7 +18982,7 @@
           <a:noFill/>
         </p:spPr>
         <p:txBody>
-          <a:bodyPr wrap="square" lIns="0" rIns="0" tIns="0" bIns="0" anchor="t">
+          <a:bodyPr wrap="square" lIns="0" tIns="0" rIns="0" bIns="0" anchor="t">
             <a:spAutoFit/>
           </a:bodyPr>
           <a:lstStyle/>
@@ -18120,6 +19041,7 @@
           <a:lstStyle/>
           <a:p>
             <a:pPr algn="ctr"/>
+            <a:endParaRPr/>
           </a:p>
         </p:txBody>
       </p:sp>
@@ -18164,6 +19086,7 @@
           <a:lstStyle/>
           <a:p>
             <a:pPr algn="ctr"/>
+            <a:endParaRPr/>
           </a:p>
         </p:txBody>
       </p:sp>
@@ -18184,7 +19107,7 @@
           <a:noFill/>
         </p:spPr>
         <p:txBody>
-          <a:bodyPr wrap="square" lIns="0" rIns="0" tIns="0" bIns="0" anchor="t">
+          <a:bodyPr wrap="square" lIns="0" tIns="0" rIns="0" bIns="0" anchor="t">
             <a:spAutoFit/>
           </a:bodyPr>
           <a:lstStyle/>
@@ -18219,7 +19142,7 @@
           <a:noFill/>
         </p:spPr>
         <p:txBody>
-          <a:bodyPr wrap="square" lIns="0" rIns="0" tIns="0" bIns="0" anchor="ctr">
+          <a:bodyPr wrap="square" lIns="0" tIns="0" rIns="0" bIns="0" anchor="ctr">
             <a:spAutoFit/>
           </a:bodyPr>
           <a:lstStyle/>
@@ -18292,6 +19215,7 @@
           <a:lstStyle/>
           <a:p>
             <a:pPr algn="ctr"/>
+            <a:endParaRPr/>
           </a:p>
         </p:txBody>
       </p:sp>
@@ -18312,7 +19236,7 @@
           <a:noFill/>
         </p:spPr>
         <p:txBody>
-          <a:bodyPr wrap="square" lIns="0" rIns="0" tIns="0" bIns="0" anchor="t">
+          <a:bodyPr wrap="square" lIns="0" tIns="0" rIns="0" bIns="0" anchor="t">
             <a:spAutoFit/>
           </a:bodyPr>
           <a:lstStyle/>
@@ -18347,7 +19271,7 @@
           <a:noFill/>
         </p:spPr>
         <p:txBody>
-          <a:bodyPr wrap="square" lIns="0" rIns="0" tIns="0" bIns="0" anchor="t">
+          <a:bodyPr wrap="square" lIns="0" tIns="0" rIns="0" bIns="0" anchor="t">
             <a:spAutoFit/>
           </a:bodyPr>
           <a:lstStyle/>
@@ -18408,6 +19332,7 @@
           <a:lstStyle/>
           <a:p>
             <a:pPr algn="ctr"/>
+            <a:endParaRPr/>
           </a:p>
         </p:txBody>
       </p:sp>
@@ -18428,7 +19353,7 @@
           <a:noFill/>
         </p:spPr>
         <p:txBody>
-          <a:bodyPr wrap="square" lIns="0" rIns="0" tIns="0" bIns="0" anchor="t">
+          <a:bodyPr wrap="square" lIns="0" tIns="0" rIns="0" bIns="0" anchor="t">
             <a:spAutoFit/>
           </a:bodyPr>
           <a:lstStyle/>
@@ -18463,7 +19388,7 @@
           <a:noFill/>
         </p:spPr>
         <p:txBody>
-          <a:bodyPr wrap="square" lIns="0" rIns="0" tIns="0" bIns="0" anchor="t">
+          <a:bodyPr wrap="square" lIns="0" tIns="0" rIns="0" bIns="0" anchor="t">
             <a:spAutoFit/>
           </a:bodyPr>
           <a:lstStyle/>
@@ -18524,6 +19449,7 @@
           <a:lstStyle/>
           <a:p>
             <a:pPr algn="ctr"/>
+            <a:endParaRPr/>
           </a:p>
         </p:txBody>
       </p:sp>
@@ -18544,7 +19470,7 @@
           <a:noFill/>
         </p:spPr>
         <p:txBody>
-          <a:bodyPr wrap="square" lIns="0" rIns="0" tIns="0" bIns="0" anchor="t">
+          <a:bodyPr wrap="square" lIns="0" tIns="0" rIns="0" bIns="0" anchor="t">
             <a:spAutoFit/>
           </a:bodyPr>
           <a:lstStyle/>
@@ -18579,7 +19505,7 @@
           <a:noFill/>
         </p:spPr>
         <p:txBody>
-          <a:bodyPr wrap="square" lIns="0" rIns="0" tIns="0" bIns="0" anchor="t">
+          <a:bodyPr wrap="square" lIns="0" tIns="0" rIns="0" bIns="0" anchor="t">
             <a:spAutoFit/>
           </a:bodyPr>
           <a:lstStyle/>
@@ -18614,7 +19540,7 @@
           <a:noFill/>
         </p:spPr>
         <p:txBody>
-          <a:bodyPr wrap="square" lIns="0" rIns="0" tIns="0" bIns="0" anchor="t">
+          <a:bodyPr wrap="square" lIns="0" tIns="0" rIns="0" bIns="0" anchor="t">
             <a:spAutoFit/>
           </a:bodyPr>
           <a:lstStyle/>
@@ -18649,7 +19575,7 @@
           <a:noFill/>
         </p:spPr>
         <p:txBody>
-          <a:bodyPr wrap="square" lIns="0" rIns="0" tIns="0" bIns="0" anchor="t">
+          <a:bodyPr wrap="square" lIns="0" tIns="0" rIns="0" bIns="0" anchor="t">
             <a:spAutoFit/>
           </a:bodyPr>
           <a:lstStyle/>
@@ -18676,7 +19602,7 @@
 </file>
 
 <file path=ppt/slides/slide4.xml><?xml version="1.0" encoding="utf-8"?>
-<p:sld xmlns:a="http://schemas.openxmlformats.org/drawingml/2006/main" xmlns:p="http://schemas.openxmlformats.org/presentationml/2006/main" xmlns:r="http://schemas.openxmlformats.org/officeDocument/2006/relationships">
+<p:sld xmlns:a="http://schemas.openxmlformats.org/drawingml/2006/main" xmlns:r="http://schemas.openxmlformats.org/officeDocument/2006/relationships" xmlns:p="http://schemas.openxmlformats.org/presentationml/2006/main">
   <p:cSld>
     <p:bg>
       <p:bgPr>
@@ -18692,7 +19618,14 @@
         <p:cNvGrpSpPr/>
         <p:nvPr/>
       </p:nvGrpSpPr>
-      <p:grpSpPr/>
+      <p:grpSpPr>
+        <a:xfrm>
+          <a:off x="0" y="0"/>
+          <a:ext cx="0" cy="0"/>
+          <a:chOff x="0" y="0"/>
+          <a:chExt cx="0" cy="0"/>
+        </a:xfrm>
+      </p:grpSpPr>
       <p:sp>
         <p:nvSpPr>
           <p:cNvPr id="2" name="TextBox 1"/>
@@ -18710,7 +19643,7 @@
           <a:noFill/>
         </p:spPr>
         <p:txBody>
-          <a:bodyPr wrap="square" lIns="0" rIns="0" tIns="0" bIns="0" anchor="t">
+          <a:bodyPr wrap="square" lIns="0" tIns="0" rIns="0" bIns="0" anchor="t">
             <a:spAutoFit/>
           </a:bodyPr>
           <a:lstStyle/>
@@ -18745,7 +19678,7 @@
           <a:noFill/>
         </p:spPr>
         <p:txBody>
-          <a:bodyPr wrap="square" lIns="0" rIns="0" tIns="0" bIns="0" anchor="t">
+          <a:bodyPr wrap="square" lIns="0" tIns="0" rIns="0" bIns="0" anchor="t">
             <a:spAutoFit/>
           </a:bodyPr>
           <a:lstStyle/>
@@ -18780,7 +19713,7 @@
           <a:noFill/>
         </p:spPr>
         <p:txBody>
-          <a:bodyPr wrap="square" lIns="0" rIns="0" tIns="0" bIns="0" anchor="t">
+          <a:bodyPr wrap="square" lIns="0" tIns="0" rIns="0" bIns="0" anchor="t">
             <a:spAutoFit/>
           </a:bodyPr>
           <a:lstStyle/>
@@ -18841,6 +19774,7 @@
           <a:lstStyle/>
           <a:p>
             <a:pPr algn="ctr"/>
+            <a:endParaRPr/>
           </a:p>
         </p:txBody>
       </p:sp>
@@ -18885,6 +19819,7 @@
           <a:lstStyle/>
           <a:p>
             <a:pPr algn="ctr"/>
+            <a:endParaRPr/>
           </a:p>
         </p:txBody>
       </p:sp>
@@ -18905,7 +19840,7 @@
           <a:noFill/>
         </p:spPr>
         <p:txBody>
-          <a:bodyPr wrap="square" lIns="0" rIns="0" tIns="0" bIns="0" anchor="ctr">
+          <a:bodyPr wrap="square" lIns="0" tIns="0" rIns="0" bIns="0" anchor="ctr">
             <a:spAutoFit/>
           </a:bodyPr>
           <a:lstStyle/>
@@ -18940,7 +19875,7 @@
           <a:noFill/>
         </p:spPr>
         <p:txBody>
-          <a:bodyPr wrap="square" lIns="0" rIns="0" tIns="0" bIns="0" anchor="t">
+          <a:bodyPr wrap="square" lIns="0" tIns="0" rIns="0" bIns="0" anchor="t">
             <a:spAutoFit/>
           </a:bodyPr>
           <a:lstStyle/>
@@ -18975,7 +19910,7 @@
           <a:noFill/>
         </p:spPr>
         <p:txBody>
-          <a:bodyPr wrap="square" lIns="0" rIns="0" tIns="0" bIns="0" anchor="t">
+          <a:bodyPr wrap="square" lIns="0" tIns="0" rIns="0" bIns="0" anchor="t">
             <a:spAutoFit/>
           </a:bodyPr>
           <a:lstStyle/>
@@ -19036,6 +19971,7 @@
           <a:lstStyle/>
           <a:p>
             <a:pPr algn="ctr"/>
+            <a:endParaRPr/>
           </a:p>
         </p:txBody>
       </p:sp>
@@ -19080,6 +20016,7 @@
           <a:lstStyle/>
           <a:p>
             <a:pPr algn="ctr"/>
+            <a:endParaRPr/>
           </a:p>
         </p:txBody>
       </p:sp>
@@ -19100,7 +20037,7 @@
           <a:noFill/>
         </p:spPr>
         <p:txBody>
-          <a:bodyPr wrap="square" lIns="0" rIns="0" tIns="0" bIns="0" anchor="ctr">
+          <a:bodyPr wrap="square" lIns="0" tIns="0" rIns="0" bIns="0" anchor="ctr">
             <a:spAutoFit/>
           </a:bodyPr>
           <a:lstStyle/>
@@ -19135,7 +20072,7 @@
           <a:noFill/>
         </p:spPr>
         <p:txBody>
-          <a:bodyPr wrap="square" lIns="0" rIns="0" tIns="0" bIns="0" anchor="t">
+          <a:bodyPr wrap="square" lIns="0" tIns="0" rIns="0" bIns="0" anchor="t">
             <a:spAutoFit/>
           </a:bodyPr>
           <a:lstStyle/>
@@ -19170,7 +20107,7 @@
           <a:noFill/>
         </p:spPr>
         <p:txBody>
-          <a:bodyPr wrap="square" lIns="0" rIns="0" tIns="0" bIns="0" anchor="t">
+          <a:bodyPr wrap="square" lIns="0" tIns="0" rIns="0" bIns="0" anchor="t">
             <a:spAutoFit/>
           </a:bodyPr>
           <a:lstStyle/>
@@ -19231,6 +20168,7 @@
           <a:lstStyle/>
           <a:p>
             <a:pPr algn="ctr"/>
+            <a:endParaRPr/>
           </a:p>
         </p:txBody>
       </p:sp>
@@ -19275,6 +20213,7 @@
           <a:lstStyle/>
           <a:p>
             <a:pPr algn="ctr"/>
+            <a:endParaRPr/>
           </a:p>
         </p:txBody>
       </p:sp>
@@ -19295,7 +20234,7 @@
           <a:noFill/>
         </p:spPr>
         <p:txBody>
-          <a:bodyPr wrap="square" lIns="0" rIns="0" tIns="0" bIns="0" anchor="ctr">
+          <a:bodyPr wrap="square" lIns="0" tIns="0" rIns="0" bIns="0" anchor="ctr">
             <a:spAutoFit/>
           </a:bodyPr>
           <a:lstStyle/>
@@ -19330,7 +20269,7 @@
           <a:noFill/>
         </p:spPr>
         <p:txBody>
-          <a:bodyPr wrap="square" lIns="0" rIns="0" tIns="0" bIns="0" anchor="t">
+          <a:bodyPr wrap="square" lIns="0" tIns="0" rIns="0" bIns="0" anchor="t">
             <a:spAutoFit/>
           </a:bodyPr>
           <a:lstStyle/>
@@ -19365,7 +20304,7 @@
           <a:noFill/>
         </p:spPr>
         <p:txBody>
-          <a:bodyPr wrap="square" lIns="0" rIns="0" tIns="0" bIns="0" anchor="t">
+          <a:bodyPr wrap="square" lIns="0" tIns="0" rIns="0" bIns="0" anchor="t">
             <a:spAutoFit/>
           </a:bodyPr>
           <a:lstStyle/>
@@ -19426,6 +20365,7 @@
           <a:lstStyle/>
           <a:p>
             <a:pPr algn="ctr"/>
+            <a:endParaRPr/>
           </a:p>
         </p:txBody>
       </p:sp>
@@ -19470,6 +20410,7 @@
           <a:lstStyle/>
           <a:p>
             <a:pPr algn="ctr"/>
+            <a:endParaRPr/>
           </a:p>
         </p:txBody>
       </p:sp>
@@ -19490,7 +20431,7 @@
           <a:noFill/>
         </p:spPr>
         <p:txBody>
-          <a:bodyPr wrap="square" lIns="0" rIns="0" tIns="0" bIns="0" anchor="ctr">
+          <a:bodyPr wrap="square" lIns="0" tIns="0" rIns="0" bIns="0" anchor="ctr">
             <a:spAutoFit/>
           </a:bodyPr>
           <a:lstStyle/>
@@ -19525,7 +20466,7 @@
           <a:noFill/>
         </p:spPr>
         <p:txBody>
-          <a:bodyPr wrap="square" lIns="0" rIns="0" tIns="0" bIns="0" anchor="t">
+          <a:bodyPr wrap="square" lIns="0" tIns="0" rIns="0" bIns="0" anchor="t">
             <a:spAutoFit/>
           </a:bodyPr>
           <a:lstStyle/>
@@ -19560,7 +20501,7 @@
           <a:noFill/>
         </p:spPr>
         <p:txBody>
-          <a:bodyPr wrap="square" lIns="0" rIns="0" tIns="0" bIns="0" anchor="t">
+          <a:bodyPr wrap="square" lIns="0" tIns="0" rIns="0" bIns="0" anchor="t">
             <a:spAutoFit/>
           </a:bodyPr>
           <a:lstStyle/>
@@ -19595,7 +20536,7 @@
           <a:noFill/>
         </p:spPr>
         <p:txBody>
-          <a:bodyPr wrap="square" lIns="0" rIns="0" tIns="0" bIns="0" anchor="t">
+          <a:bodyPr wrap="square" lIns="0" tIns="0" rIns="0" bIns="0" anchor="t">
             <a:spAutoFit/>
           </a:bodyPr>
           <a:lstStyle/>
@@ -19630,7 +20571,7 @@
           <a:noFill/>
         </p:spPr>
         <p:txBody>
-          <a:bodyPr wrap="square" lIns="0" rIns="0" tIns="0" bIns="0" anchor="t">
+          <a:bodyPr wrap="square" lIns="0" tIns="0" rIns="0" bIns="0" anchor="t">
             <a:spAutoFit/>
           </a:bodyPr>
           <a:lstStyle/>
@@ -19657,7 +20598,7 @@
 </file>
 
 <file path=ppt/slides/slide5.xml><?xml version="1.0" encoding="utf-8"?>
-<p:sld xmlns:a="http://schemas.openxmlformats.org/drawingml/2006/main" xmlns:p="http://schemas.openxmlformats.org/presentationml/2006/main" xmlns:r="http://schemas.openxmlformats.org/officeDocument/2006/relationships">
+<p:sld xmlns:a="http://schemas.openxmlformats.org/drawingml/2006/main" xmlns:r="http://schemas.openxmlformats.org/officeDocument/2006/relationships" xmlns:p="http://schemas.openxmlformats.org/presentationml/2006/main">
   <p:cSld>
     <p:bg>
       <p:bgPr>
@@ -19673,7 +20614,14 @@
         <p:cNvGrpSpPr/>
         <p:nvPr/>
       </p:nvGrpSpPr>
-      <p:grpSpPr/>
+      <p:grpSpPr>
+        <a:xfrm>
+          <a:off x="0" y="0"/>
+          <a:ext cx="0" cy="0"/>
+          <a:chOff x="0" y="0"/>
+          <a:chExt cx="0" cy="0"/>
+        </a:xfrm>
+      </p:grpSpPr>
       <p:sp>
         <p:nvSpPr>
           <p:cNvPr id="2" name="TextBox 1"/>
@@ -19691,7 +20639,7 @@
           <a:noFill/>
         </p:spPr>
         <p:txBody>
-          <a:bodyPr wrap="square" lIns="0" rIns="0" tIns="0" bIns="0" anchor="t">
+          <a:bodyPr wrap="square" lIns="0" tIns="0" rIns="0" bIns="0" anchor="t">
             <a:spAutoFit/>
           </a:bodyPr>
           <a:lstStyle/>
@@ -19726,7 +20674,7 @@
           <a:noFill/>
         </p:spPr>
         <p:txBody>
-          <a:bodyPr wrap="square" lIns="0" rIns="0" tIns="0" bIns="0" anchor="t">
+          <a:bodyPr wrap="square" lIns="0" tIns="0" rIns="0" bIns="0" anchor="t">
             <a:spAutoFit/>
           </a:bodyPr>
           <a:lstStyle/>
@@ -19761,7 +20709,7 @@
           <a:noFill/>
         </p:spPr>
         <p:txBody>
-          <a:bodyPr wrap="square" lIns="0" rIns="0" tIns="0" bIns="0" anchor="t">
+          <a:bodyPr wrap="square" lIns="0" tIns="0" rIns="0" bIns="0" anchor="t">
             <a:spAutoFit/>
           </a:bodyPr>
           <a:lstStyle/>
@@ -19820,6 +20768,7 @@
           <a:lstStyle/>
           <a:p>
             <a:pPr algn="ctr"/>
+            <a:endParaRPr/>
           </a:p>
         </p:txBody>
       </p:sp>
@@ -19840,7 +20789,7 @@
           <a:noFill/>
         </p:spPr>
         <p:txBody>
-          <a:bodyPr wrap="square" lIns="0" rIns="0" tIns="0" bIns="0" anchor="t">
+          <a:bodyPr wrap="square" lIns="0" tIns="0" rIns="0" bIns="0" anchor="t">
             <a:spAutoFit/>
           </a:bodyPr>
           <a:lstStyle/>
@@ -19875,7 +20824,7 @@
           <a:noFill/>
         </p:spPr>
         <p:txBody>
-          <a:bodyPr wrap="square" lIns="0" rIns="0" tIns="0" bIns="0" anchor="t">
+          <a:bodyPr wrap="square" lIns="0" tIns="0" rIns="0" bIns="0" anchor="t">
             <a:spAutoFit/>
           </a:bodyPr>
           <a:lstStyle/>
@@ -19935,6 +20884,7 @@
           <a:lstStyle/>
           <a:p>
             <a:pPr algn="ctr"/>
+            <a:endParaRPr/>
           </a:p>
         </p:txBody>
       </p:sp>
@@ -19979,6 +20929,7 @@
           <a:lstStyle/>
           <a:p>
             <a:pPr algn="ctr"/>
+            <a:endParaRPr/>
           </a:p>
         </p:txBody>
       </p:sp>
@@ -19999,7 +20950,7 @@
           <a:noFill/>
         </p:spPr>
         <p:txBody>
-          <a:bodyPr wrap="square" lIns="0" rIns="0" tIns="0" bIns="0" anchor="t">
+          <a:bodyPr wrap="square" lIns="0" tIns="0" rIns="0" bIns="0" anchor="t">
             <a:spAutoFit/>
           </a:bodyPr>
           <a:lstStyle/>
@@ -20034,7 +20985,7 @@
           <a:noFill/>
         </p:spPr>
         <p:txBody>
-          <a:bodyPr wrap="square" lIns="0" rIns="0" tIns="0" bIns="0" anchor="t">
+          <a:bodyPr wrap="square" lIns="0" tIns="0" rIns="0" bIns="0" anchor="t">
             <a:spAutoFit/>
           </a:bodyPr>
           <a:lstStyle/>
@@ -20094,6 +21045,7 @@
           <a:lstStyle/>
           <a:p>
             <a:pPr algn="ctr"/>
+            <a:endParaRPr/>
           </a:p>
         </p:txBody>
       </p:sp>
@@ -20138,6 +21090,7 @@
           <a:lstStyle/>
           <a:p>
             <a:pPr algn="ctr"/>
+            <a:endParaRPr/>
           </a:p>
         </p:txBody>
       </p:sp>
@@ -20158,7 +21111,7 @@
           <a:noFill/>
         </p:spPr>
         <p:txBody>
-          <a:bodyPr wrap="square" lIns="0" rIns="0" tIns="0" bIns="0" anchor="t">
+          <a:bodyPr wrap="square" lIns="0" tIns="0" rIns="0" bIns="0" anchor="t">
             <a:spAutoFit/>
           </a:bodyPr>
           <a:lstStyle/>
@@ -20193,7 +21146,7 @@
           <a:noFill/>
         </p:spPr>
         <p:txBody>
-          <a:bodyPr wrap="square" lIns="0" rIns="0" tIns="0" bIns="0" anchor="t">
+          <a:bodyPr wrap="square" lIns="0" tIns="0" rIns="0" bIns="0" anchor="t">
             <a:spAutoFit/>
           </a:bodyPr>
           <a:lstStyle/>
@@ -20253,6 +21206,7 @@
           <a:lstStyle/>
           <a:p>
             <a:pPr algn="ctr"/>
+            <a:endParaRPr/>
           </a:p>
         </p:txBody>
       </p:sp>
@@ -20297,6 +21251,7 @@
           <a:lstStyle/>
           <a:p>
             <a:pPr algn="ctr"/>
+            <a:endParaRPr/>
           </a:p>
         </p:txBody>
       </p:sp>
@@ -20317,7 +21272,7 @@
           <a:noFill/>
         </p:spPr>
         <p:txBody>
-          <a:bodyPr wrap="square" lIns="0" rIns="0" tIns="0" bIns="0" anchor="t">
+          <a:bodyPr wrap="square" lIns="0" tIns="0" rIns="0" bIns="0" anchor="t">
             <a:spAutoFit/>
           </a:bodyPr>
           <a:lstStyle/>
@@ -20352,7 +21307,7 @@
           <a:noFill/>
         </p:spPr>
         <p:txBody>
-          <a:bodyPr wrap="square" lIns="0" rIns="0" tIns="0" bIns="0" anchor="t">
+          <a:bodyPr wrap="square" lIns="0" tIns="0" rIns="0" bIns="0" anchor="t">
             <a:spAutoFit/>
           </a:bodyPr>
           <a:lstStyle/>
@@ -20412,6 +21367,7 @@
           <a:lstStyle/>
           <a:p>
             <a:pPr algn="ctr"/>
+            <a:endParaRPr/>
           </a:p>
         </p:txBody>
       </p:sp>
@@ -20456,6 +21412,7 @@
           <a:lstStyle/>
           <a:p>
             <a:pPr algn="ctr"/>
+            <a:endParaRPr/>
           </a:p>
         </p:txBody>
       </p:sp>
@@ -20476,7 +21433,7 @@
           <a:noFill/>
         </p:spPr>
         <p:txBody>
-          <a:bodyPr wrap="square" lIns="0" rIns="0" tIns="0" bIns="0" anchor="t">
+          <a:bodyPr wrap="square" lIns="0" tIns="0" rIns="0" bIns="0" anchor="t">
             <a:spAutoFit/>
           </a:bodyPr>
           <a:lstStyle/>
@@ -20511,7 +21468,7 @@
           <a:noFill/>
         </p:spPr>
         <p:txBody>
-          <a:bodyPr wrap="square" lIns="0" rIns="0" tIns="0" bIns="0" anchor="t">
+          <a:bodyPr wrap="square" lIns="0" tIns="0" rIns="0" bIns="0" anchor="t">
             <a:spAutoFit/>
           </a:bodyPr>
           <a:lstStyle/>
@@ -20571,6 +21528,7 @@
           <a:lstStyle/>
           <a:p>
             <a:pPr algn="ctr"/>
+            <a:endParaRPr/>
           </a:p>
         </p:txBody>
       </p:sp>
@@ -20615,6 +21573,7 @@
           <a:lstStyle/>
           <a:p>
             <a:pPr algn="ctr"/>
+            <a:endParaRPr/>
           </a:p>
         </p:txBody>
       </p:sp>
@@ -20635,7 +21594,7 @@
           <a:noFill/>
         </p:spPr>
         <p:txBody>
-          <a:bodyPr wrap="square" lIns="0" rIns="0" tIns="0" bIns="0" anchor="t">
+          <a:bodyPr wrap="square" lIns="0" tIns="0" rIns="0" bIns="0" anchor="t">
             <a:spAutoFit/>
           </a:bodyPr>
           <a:lstStyle/>
@@ -20670,7 +21629,7 @@
           <a:noFill/>
         </p:spPr>
         <p:txBody>
-          <a:bodyPr wrap="square" lIns="0" rIns="0" tIns="0" bIns="0" anchor="t">
+          <a:bodyPr wrap="square" lIns="0" tIns="0" rIns="0" bIns="0" anchor="t">
             <a:spAutoFit/>
           </a:bodyPr>
           <a:lstStyle/>
@@ -20706,7 +21665,7 @@
           <a:noFill/>
         </p:spPr>
         <p:txBody>
-          <a:bodyPr wrap="square" lIns="0" rIns="0" tIns="0" bIns="0" anchor="t">
+          <a:bodyPr wrap="square" lIns="0" tIns="0" rIns="0" bIns="0" anchor="t">
             <a:spAutoFit/>
           </a:bodyPr>
           <a:lstStyle/>
@@ -20741,7 +21700,7 @@
           <a:noFill/>
         </p:spPr>
         <p:txBody>
-          <a:bodyPr wrap="square" lIns="0" rIns="0" tIns="0" bIns="0" anchor="t">
+          <a:bodyPr wrap="square" lIns="0" tIns="0" rIns="0" bIns="0" anchor="t">
             <a:spAutoFit/>
           </a:bodyPr>
           <a:lstStyle/>
@@ -20827,7 +21786,7 @@
           <a:noFill/>
         </p:spPr>
         <p:txBody>
-          <a:bodyPr wrap="square" lIns="0" rIns="0" tIns="0" bIns="0" anchor="t">
+          <a:bodyPr wrap="square" lIns="0" tIns="0" rIns="0" bIns="0" anchor="t">
             <a:spAutoFit/>
           </a:bodyPr>
           <a:lstStyle/>
@@ -20862,7 +21821,7 @@
           <a:noFill/>
         </p:spPr>
         <p:txBody>
-          <a:bodyPr wrap="square" lIns="0" rIns="0" tIns="0" bIns="0" anchor="t">
+          <a:bodyPr wrap="square" lIns="0" tIns="0" rIns="0" bIns="0" anchor="t">
             <a:spAutoFit/>
           </a:bodyPr>
           <a:lstStyle/>
@@ -20948,7 +21907,7 @@
           <a:noFill/>
         </p:spPr>
         <p:txBody>
-          <a:bodyPr wrap="square" lIns="0" rIns="0" tIns="0" bIns="0" anchor="t">
+          <a:bodyPr wrap="square" lIns="0" tIns="0" rIns="0" bIns="0" anchor="t">
             <a:spAutoFit/>
           </a:bodyPr>
           <a:lstStyle/>
@@ -20983,7 +21942,7 @@
           <a:noFill/>
         </p:spPr>
         <p:txBody>
-          <a:bodyPr wrap="square" lIns="0" rIns="0" tIns="0" bIns="0" anchor="t">
+          <a:bodyPr wrap="square" lIns="0" tIns="0" rIns="0" bIns="0" anchor="t">
             <a:spAutoFit/>
           </a:bodyPr>
           <a:lstStyle/>
@@ -21010,7 +21969,7 @@
 </file>
 
 <file path=ppt/slides/slide6.xml><?xml version="1.0" encoding="utf-8"?>
-<p:sld xmlns:a="http://schemas.openxmlformats.org/drawingml/2006/main" xmlns:p="http://schemas.openxmlformats.org/presentationml/2006/main" xmlns:r="http://schemas.openxmlformats.org/officeDocument/2006/relationships">
+<p:sld xmlns:a="http://schemas.openxmlformats.org/drawingml/2006/main" xmlns:r="http://schemas.openxmlformats.org/officeDocument/2006/relationships" xmlns:p="http://schemas.openxmlformats.org/presentationml/2006/main">
   <p:cSld>
     <p:bg>
       <p:bgPr>
@@ -21026,7 +21985,14 @@
         <p:cNvGrpSpPr/>
         <p:nvPr/>
       </p:nvGrpSpPr>
-      <p:grpSpPr/>
+      <p:grpSpPr>
+        <a:xfrm>
+          <a:off x="0" y="0"/>
+          <a:ext cx="0" cy="0"/>
+          <a:chOff x="0" y="0"/>
+          <a:chExt cx="0" cy="0"/>
+        </a:xfrm>
+      </p:grpSpPr>
       <p:sp>
         <p:nvSpPr>
           <p:cNvPr id="2" name="TextBox 1"/>
@@ -21044,7 +22010,7 @@
           <a:noFill/>
         </p:spPr>
         <p:txBody>
-          <a:bodyPr wrap="square" lIns="0" rIns="0" tIns="0" bIns="0" anchor="t">
+          <a:bodyPr wrap="square" lIns="0" tIns="0" rIns="0" bIns="0" anchor="t">
             <a:spAutoFit/>
           </a:bodyPr>
           <a:lstStyle/>
@@ -21079,7 +22045,7 @@
           <a:noFill/>
         </p:spPr>
         <p:txBody>
-          <a:bodyPr wrap="square" lIns="0" rIns="0" tIns="0" bIns="0" anchor="t">
+          <a:bodyPr wrap="square" lIns="0" tIns="0" rIns="0" bIns="0" anchor="t">
             <a:spAutoFit/>
           </a:bodyPr>
           <a:lstStyle/>
@@ -21114,7 +22080,7 @@
           <a:noFill/>
         </p:spPr>
         <p:txBody>
-          <a:bodyPr wrap="square" lIns="0" rIns="0" tIns="0" bIns="0" anchor="t">
+          <a:bodyPr wrap="square" lIns="0" tIns="0" rIns="0" bIns="0" anchor="t">
             <a:spAutoFit/>
           </a:bodyPr>
           <a:lstStyle/>
@@ -21175,6 +22141,7 @@
           <a:lstStyle/>
           <a:p>
             <a:pPr algn="ctr"/>
+            <a:endParaRPr/>
           </a:p>
         </p:txBody>
       </p:sp>
@@ -21219,6 +22186,7 @@
           <a:lstStyle/>
           <a:p>
             <a:pPr algn="ctr"/>
+            <a:endParaRPr/>
           </a:p>
         </p:txBody>
       </p:sp>
@@ -21239,7 +22207,7 @@
           <a:noFill/>
         </p:spPr>
         <p:txBody>
-          <a:bodyPr wrap="square" lIns="0" rIns="0" tIns="0" bIns="0" anchor="ctr">
+          <a:bodyPr wrap="square" lIns="0" tIns="0" rIns="0" bIns="0" anchor="ctr">
             <a:spAutoFit/>
           </a:bodyPr>
           <a:lstStyle/>
@@ -21274,7 +22242,7 @@
           <a:noFill/>
         </p:spPr>
         <p:txBody>
-          <a:bodyPr wrap="square" lIns="0" rIns="0" tIns="0" bIns="0" anchor="t">
+          <a:bodyPr wrap="square" lIns="0" tIns="0" rIns="0" bIns="0" anchor="t">
             <a:spAutoFit/>
           </a:bodyPr>
           <a:lstStyle/>
@@ -21327,7 +22295,7 @@
           <a:noFill/>
         </p:spPr>
         <p:txBody>
-          <a:bodyPr wrap="square" lIns="0" rIns="0" tIns="0" bIns="0" anchor="t">
+          <a:bodyPr wrap="square" lIns="0" tIns="0" rIns="0" bIns="0" anchor="t">
             <a:spAutoFit/>
           </a:bodyPr>
           <a:lstStyle/>
@@ -21388,6 +22356,7 @@
           <a:lstStyle/>
           <a:p>
             <a:pPr algn="ctr"/>
+            <a:endParaRPr/>
           </a:p>
         </p:txBody>
       </p:sp>
@@ -21432,6 +22401,7 @@
           <a:lstStyle/>
           <a:p>
             <a:pPr algn="ctr"/>
+            <a:endParaRPr/>
           </a:p>
         </p:txBody>
       </p:sp>
@@ -21452,7 +22422,7 @@
           <a:noFill/>
         </p:spPr>
         <p:txBody>
-          <a:bodyPr wrap="square" lIns="0" rIns="0" tIns="0" bIns="0" anchor="ctr">
+          <a:bodyPr wrap="square" lIns="0" tIns="0" rIns="0" bIns="0" anchor="ctr">
             <a:spAutoFit/>
           </a:bodyPr>
           <a:lstStyle/>
@@ -21487,7 +22457,7 @@
           <a:noFill/>
         </p:spPr>
         <p:txBody>
-          <a:bodyPr wrap="square" lIns="0" rIns="0" tIns="0" bIns="0" anchor="t">
+          <a:bodyPr wrap="square" lIns="0" tIns="0" rIns="0" bIns="0" anchor="t">
             <a:spAutoFit/>
           </a:bodyPr>
           <a:lstStyle/>
@@ -21540,7 +22510,7 @@
           <a:noFill/>
         </p:spPr>
         <p:txBody>
-          <a:bodyPr wrap="square" lIns="0" rIns="0" tIns="0" bIns="0" anchor="t">
+          <a:bodyPr wrap="square" lIns="0" tIns="0" rIns="0" bIns="0" anchor="t">
             <a:spAutoFit/>
           </a:bodyPr>
           <a:lstStyle/>
@@ -21601,6 +22571,7 @@
           <a:lstStyle/>
           <a:p>
             <a:pPr algn="ctr"/>
+            <a:endParaRPr/>
           </a:p>
         </p:txBody>
       </p:sp>
@@ -21645,6 +22616,7 @@
           <a:lstStyle/>
           <a:p>
             <a:pPr algn="ctr"/>
+            <a:endParaRPr/>
           </a:p>
         </p:txBody>
       </p:sp>
@@ -21665,7 +22637,7 @@
           <a:noFill/>
         </p:spPr>
         <p:txBody>
-          <a:bodyPr wrap="square" lIns="0" rIns="0" tIns="0" bIns="0" anchor="ctr">
+          <a:bodyPr wrap="square" lIns="0" tIns="0" rIns="0" bIns="0" anchor="ctr">
             <a:spAutoFit/>
           </a:bodyPr>
           <a:lstStyle/>
@@ -21700,7 +22672,7 @@
           <a:noFill/>
         </p:spPr>
         <p:txBody>
-          <a:bodyPr wrap="square" lIns="0" rIns="0" tIns="0" bIns="0" anchor="t">
+          <a:bodyPr wrap="square" lIns="0" tIns="0" rIns="0" bIns="0" anchor="t">
             <a:spAutoFit/>
           </a:bodyPr>
           <a:lstStyle/>
@@ -21753,7 +22725,7 @@
           <a:noFill/>
         </p:spPr>
         <p:txBody>
-          <a:bodyPr wrap="square" lIns="0" rIns="0" tIns="0" bIns="0" anchor="t">
+          <a:bodyPr wrap="square" lIns="0" tIns="0" rIns="0" bIns="0" anchor="t">
             <a:spAutoFit/>
           </a:bodyPr>
           <a:lstStyle/>
@@ -21814,6 +22786,7 @@
           <a:lstStyle/>
           <a:p>
             <a:pPr algn="ctr"/>
+            <a:endParaRPr/>
           </a:p>
         </p:txBody>
       </p:sp>
@@ -21858,6 +22831,7 @@
           <a:lstStyle/>
           <a:p>
             <a:pPr algn="ctr"/>
+            <a:endParaRPr/>
           </a:p>
         </p:txBody>
       </p:sp>
@@ -21878,7 +22852,7 @@
           <a:noFill/>
         </p:spPr>
         <p:txBody>
-          <a:bodyPr wrap="square" lIns="0" rIns="0" tIns="0" bIns="0" anchor="ctr">
+          <a:bodyPr wrap="square" lIns="0" tIns="0" rIns="0" bIns="0" anchor="ctr">
             <a:spAutoFit/>
           </a:bodyPr>
           <a:lstStyle/>
@@ -21913,7 +22887,7 @@
           <a:noFill/>
         </p:spPr>
         <p:txBody>
-          <a:bodyPr wrap="square" lIns="0" rIns="0" tIns="0" bIns="0" anchor="t">
+          <a:bodyPr wrap="square" lIns="0" tIns="0" rIns="0" bIns="0" anchor="t">
             <a:spAutoFit/>
           </a:bodyPr>
           <a:lstStyle/>
@@ -21966,7 +22940,7 @@
           <a:noFill/>
         </p:spPr>
         <p:txBody>
-          <a:bodyPr wrap="square" lIns="0" rIns="0" tIns="0" bIns="0" anchor="t">
+          <a:bodyPr wrap="square" lIns="0" tIns="0" rIns="0" bIns="0" anchor="t">
             <a:spAutoFit/>
           </a:bodyPr>
           <a:lstStyle/>
@@ -22027,6 +23001,7 @@
           <a:lstStyle/>
           <a:p>
             <a:pPr algn="ctr"/>
+            <a:endParaRPr/>
           </a:p>
         </p:txBody>
       </p:sp>
@@ -22071,6 +23046,7 @@
           <a:lstStyle/>
           <a:p>
             <a:pPr algn="ctr"/>
+            <a:endParaRPr/>
           </a:p>
         </p:txBody>
       </p:sp>
@@ -22091,7 +23067,7 @@
           <a:noFill/>
         </p:spPr>
         <p:txBody>
-          <a:bodyPr wrap="square" lIns="0" rIns="0" tIns="0" bIns="0" anchor="ctr">
+          <a:bodyPr wrap="square" lIns="0" tIns="0" rIns="0" bIns="0" anchor="ctr">
             <a:spAutoFit/>
           </a:bodyPr>
           <a:lstStyle/>
@@ -22126,7 +23102,7 @@
           <a:noFill/>
         </p:spPr>
         <p:txBody>
-          <a:bodyPr wrap="square" lIns="0" rIns="0" tIns="0" bIns="0" anchor="t">
+          <a:bodyPr wrap="square" lIns="0" tIns="0" rIns="0" bIns="0" anchor="t">
             <a:spAutoFit/>
           </a:bodyPr>
           <a:lstStyle/>
@@ -22179,7 +23155,7 @@
           <a:noFill/>
         </p:spPr>
         <p:txBody>
-          <a:bodyPr wrap="square" lIns="0" rIns="0" tIns="0" bIns="0" anchor="t">
+          <a:bodyPr wrap="square" lIns="0" tIns="0" rIns="0" bIns="0" anchor="t">
             <a:spAutoFit/>
           </a:bodyPr>
           <a:lstStyle/>
@@ -22240,6 +23216,7 @@
           <a:lstStyle/>
           <a:p>
             <a:pPr algn="ctr"/>
+            <a:endParaRPr/>
           </a:p>
         </p:txBody>
       </p:sp>
@@ -22284,6 +23261,7 @@
           <a:lstStyle/>
           <a:p>
             <a:pPr algn="ctr"/>
+            <a:endParaRPr/>
           </a:p>
         </p:txBody>
       </p:sp>
@@ -22304,7 +23282,7 @@
           <a:noFill/>
         </p:spPr>
         <p:txBody>
-          <a:bodyPr wrap="square" lIns="0" rIns="0" tIns="0" bIns="0" anchor="ctr">
+          <a:bodyPr wrap="square" lIns="0" tIns="0" rIns="0" bIns="0" anchor="ctr">
             <a:spAutoFit/>
           </a:bodyPr>
           <a:lstStyle/>
@@ -22339,7 +23317,7 @@
           <a:noFill/>
         </p:spPr>
         <p:txBody>
-          <a:bodyPr wrap="square" lIns="0" rIns="0" tIns="0" bIns="0" anchor="t">
+          <a:bodyPr wrap="square" lIns="0" tIns="0" rIns="0" bIns="0" anchor="t">
             <a:spAutoFit/>
           </a:bodyPr>
           <a:lstStyle/>
@@ -22392,7 +23370,7 @@
           <a:noFill/>
         </p:spPr>
         <p:txBody>
-          <a:bodyPr wrap="square" lIns="0" rIns="0" tIns="0" bIns="0" anchor="t">
+          <a:bodyPr wrap="square" lIns="0" tIns="0" rIns="0" bIns="0" anchor="t">
             <a:spAutoFit/>
           </a:bodyPr>
           <a:lstStyle/>
@@ -22451,6 +23429,7 @@
           <a:lstStyle/>
           <a:p>
             <a:pPr algn="ctr"/>
+            <a:endParaRPr/>
           </a:p>
         </p:txBody>
       </p:sp>
@@ -22495,6 +23474,7 @@
           <a:lstStyle/>
           <a:p>
             <a:pPr algn="ctr"/>
+            <a:endParaRPr/>
           </a:p>
         </p:txBody>
       </p:sp>
@@ -22515,7 +23495,7 @@
           <a:noFill/>
         </p:spPr>
         <p:txBody>
-          <a:bodyPr wrap="square" lIns="0" rIns="0" tIns="0" bIns="0" anchor="t">
+          <a:bodyPr wrap="square" lIns="0" tIns="0" rIns="0" bIns="0" anchor="t">
             <a:spAutoFit/>
           </a:bodyPr>
           <a:lstStyle/>
@@ -22550,7 +23530,7 @@
           <a:noFill/>
         </p:spPr>
         <p:txBody>
-          <a:bodyPr wrap="square" lIns="0" rIns="0" tIns="0" bIns="0" anchor="t">
+          <a:bodyPr wrap="square" lIns="0" tIns="0" rIns="0" bIns="0" anchor="t">
             <a:spAutoFit/>
           </a:bodyPr>
           <a:lstStyle/>
@@ -22585,7 +23565,7 @@
           <a:noFill/>
         </p:spPr>
         <p:txBody>
-          <a:bodyPr wrap="square" lIns="0" rIns="0" tIns="0" bIns="0" anchor="t">
+          <a:bodyPr wrap="square" lIns="0" tIns="0" rIns="0" bIns="0" anchor="t">
             <a:spAutoFit/>
           </a:bodyPr>
           <a:lstStyle/>
@@ -22620,7 +23600,7 @@
           <a:noFill/>
         </p:spPr>
         <p:txBody>
-          <a:bodyPr wrap="square" lIns="0" rIns="0" tIns="0" bIns="0" anchor="t">
+          <a:bodyPr wrap="square" lIns="0" tIns="0" rIns="0" bIns="0" anchor="t">
             <a:spAutoFit/>
           </a:bodyPr>
           <a:lstStyle/>
@@ -22647,7 +23627,7 @@
 </file>
 
 <file path=ppt/slides/slide7.xml><?xml version="1.0" encoding="utf-8"?>
-<p:sld xmlns:a="http://schemas.openxmlformats.org/drawingml/2006/main" xmlns:p="http://schemas.openxmlformats.org/presentationml/2006/main" xmlns:r="http://schemas.openxmlformats.org/officeDocument/2006/relationships">
+<p:sld xmlns:a="http://schemas.openxmlformats.org/drawingml/2006/main" xmlns:r="http://schemas.openxmlformats.org/officeDocument/2006/relationships" xmlns:p="http://schemas.openxmlformats.org/presentationml/2006/main">
   <p:cSld>
     <p:bg>
       <p:bgPr>
@@ -22663,7 +23643,14 @@
         <p:cNvGrpSpPr/>
         <p:nvPr/>
       </p:nvGrpSpPr>
-      <p:grpSpPr/>
+      <p:grpSpPr>
+        <a:xfrm>
+          <a:off x="0" y="0"/>
+          <a:ext cx="0" cy="0"/>
+          <a:chOff x="0" y="0"/>
+          <a:chExt cx="0" cy="0"/>
+        </a:xfrm>
+      </p:grpSpPr>
       <p:sp>
         <p:nvSpPr>
           <p:cNvPr id="2" name="TextBox 1"/>
@@ -22681,7 +23668,7 @@
           <a:noFill/>
         </p:spPr>
         <p:txBody>
-          <a:bodyPr wrap="square" lIns="0" rIns="0" tIns="0" bIns="0" anchor="t">
+          <a:bodyPr wrap="square" lIns="0" tIns="0" rIns="0" bIns="0" anchor="t">
             <a:spAutoFit/>
           </a:bodyPr>
           <a:lstStyle/>
@@ -22716,7 +23703,7 @@
           <a:noFill/>
         </p:spPr>
         <p:txBody>
-          <a:bodyPr wrap="square" lIns="0" rIns="0" tIns="0" bIns="0" anchor="t">
+          <a:bodyPr wrap="square" lIns="0" tIns="0" rIns="0" bIns="0" anchor="t">
             <a:spAutoFit/>
           </a:bodyPr>
           <a:lstStyle/>
@@ -22751,7 +23738,7 @@
           <a:noFill/>
         </p:spPr>
         <p:txBody>
-          <a:bodyPr wrap="square" lIns="0" rIns="0" tIns="0" bIns="0" anchor="t">
+          <a:bodyPr wrap="square" lIns="0" tIns="0" rIns="0" bIns="0" anchor="t">
             <a:spAutoFit/>
           </a:bodyPr>
           <a:lstStyle/>
@@ -22812,6 +23799,7 @@
           <a:lstStyle/>
           <a:p>
             <a:pPr algn="ctr"/>
+            <a:endParaRPr/>
           </a:p>
         </p:txBody>
       </p:sp>
@@ -22856,6 +23844,7 @@
           <a:lstStyle/>
           <a:p>
             <a:pPr algn="ctr"/>
+            <a:endParaRPr/>
           </a:p>
         </p:txBody>
       </p:sp>
@@ -22876,7 +23865,7 @@
           <a:noFill/>
         </p:spPr>
         <p:txBody>
-          <a:bodyPr wrap="square" lIns="0" rIns="0" tIns="0" bIns="0" anchor="ctr">
+          <a:bodyPr wrap="square" lIns="0" tIns="0" rIns="0" bIns="0" anchor="ctr">
             <a:spAutoFit/>
           </a:bodyPr>
           <a:lstStyle/>
@@ -22911,7 +23900,7 @@
           <a:noFill/>
         </p:spPr>
         <p:txBody>
-          <a:bodyPr wrap="square" lIns="0" rIns="0" tIns="0" bIns="0" anchor="t">
+          <a:bodyPr wrap="square" lIns="0" tIns="0" rIns="0" bIns="0" anchor="t">
             <a:spAutoFit/>
           </a:bodyPr>
           <a:lstStyle/>
@@ -22946,7 +23935,7 @@
           <a:noFill/>
         </p:spPr>
         <p:txBody>
-          <a:bodyPr wrap="square" lIns="0" rIns="0" tIns="0" bIns="0" anchor="t">
+          <a:bodyPr wrap="square" lIns="0" tIns="0" rIns="0" bIns="0" anchor="t">
             <a:spAutoFit/>
           </a:bodyPr>
           <a:lstStyle/>
@@ -22981,7 +23970,7 @@
           <a:noFill/>
         </p:spPr>
         <p:txBody>
-          <a:bodyPr wrap="square" lIns="0" rIns="0" tIns="0" bIns="0" anchor="t">
+          <a:bodyPr wrap="square" lIns="0" tIns="0" rIns="0" bIns="0" anchor="t">
             <a:spAutoFit/>
           </a:bodyPr>
           <a:lstStyle/>
@@ -23016,7 +24005,7 @@
           <a:noFill/>
         </p:spPr>
         <p:txBody>
-          <a:bodyPr wrap="square" lIns="0" rIns="0" tIns="0" bIns="0" anchor="t">
+          <a:bodyPr wrap="square" lIns="0" tIns="0" rIns="0" bIns="0" anchor="t">
             <a:spAutoFit/>
           </a:bodyPr>
           <a:lstStyle/>
@@ -23051,7 +24040,7 @@
           <a:noFill/>
         </p:spPr>
         <p:txBody>
-          <a:bodyPr wrap="square" lIns="0" rIns="0" tIns="0" bIns="0" anchor="t">
+          <a:bodyPr wrap="square" lIns="0" tIns="0" rIns="0" bIns="0" anchor="t">
             <a:spAutoFit/>
           </a:bodyPr>
           <a:lstStyle/>
@@ -23086,7 +24075,7 @@
           <a:noFill/>
         </p:spPr>
         <p:txBody>
-          <a:bodyPr wrap="square" lIns="0" rIns="0" tIns="0" bIns="0" anchor="t">
+          <a:bodyPr wrap="square" lIns="0" tIns="0" rIns="0" bIns="0" anchor="t">
             <a:spAutoFit/>
           </a:bodyPr>
           <a:lstStyle/>
@@ -23121,7 +24110,7 @@
           <a:noFill/>
         </p:spPr>
         <p:txBody>
-          <a:bodyPr wrap="square" lIns="0" rIns="0" tIns="0" bIns="0" anchor="t">
+          <a:bodyPr wrap="square" lIns="0" tIns="0" rIns="0" bIns="0" anchor="t">
             <a:spAutoFit/>
           </a:bodyPr>
           <a:lstStyle/>
@@ -23156,7 +24145,7 @@
           <a:noFill/>
         </p:spPr>
         <p:txBody>
-          <a:bodyPr wrap="square" lIns="0" rIns="0" tIns="0" bIns="0" anchor="t">
+          <a:bodyPr wrap="square" lIns="0" tIns="0" rIns="0" bIns="0" anchor="t">
             <a:spAutoFit/>
           </a:bodyPr>
           <a:lstStyle/>
@@ -23191,7 +24180,7 @@
           <a:noFill/>
         </p:spPr>
         <p:txBody>
-          <a:bodyPr wrap="square" lIns="0" rIns="0" tIns="0" bIns="0" anchor="t">
+          <a:bodyPr wrap="square" lIns="0" tIns="0" rIns="0" bIns="0" anchor="t">
             <a:spAutoFit/>
           </a:bodyPr>
           <a:lstStyle/>
@@ -23226,7 +24215,7 @@
           <a:noFill/>
         </p:spPr>
         <p:txBody>
-          <a:bodyPr wrap="square" lIns="0" rIns="0" tIns="0" bIns="0" anchor="t">
+          <a:bodyPr wrap="square" lIns="0" tIns="0" rIns="0" bIns="0" anchor="t">
             <a:spAutoFit/>
           </a:bodyPr>
           <a:lstStyle/>
@@ -23287,6 +24276,7 @@
           <a:lstStyle/>
           <a:p>
             <a:pPr algn="ctr"/>
+            <a:endParaRPr/>
           </a:p>
         </p:txBody>
       </p:sp>
@@ -23331,6 +24321,7 @@
           <a:lstStyle/>
           <a:p>
             <a:pPr algn="ctr"/>
+            <a:endParaRPr/>
           </a:p>
         </p:txBody>
       </p:sp>
@@ -23351,7 +24342,7 @@
           <a:noFill/>
         </p:spPr>
         <p:txBody>
-          <a:bodyPr wrap="square" lIns="0" rIns="0" tIns="0" bIns="0" anchor="ctr">
+          <a:bodyPr wrap="square" lIns="0" tIns="0" rIns="0" bIns="0" anchor="ctr">
             <a:spAutoFit/>
           </a:bodyPr>
           <a:lstStyle/>
@@ -23386,7 +24377,7 @@
           <a:noFill/>
         </p:spPr>
         <p:txBody>
-          <a:bodyPr wrap="square" lIns="0" rIns="0" tIns="0" bIns="0" anchor="t">
+          <a:bodyPr wrap="square" lIns="0" tIns="0" rIns="0" bIns="0" anchor="t">
             <a:spAutoFit/>
           </a:bodyPr>
           <a:lstStyle/>
@@ -23421,7 +24412,7 @@
           <a:noFill/>
         </p:spPr>
         <p:txBody>
-          <a:bodyPr wrap="square" lIns="0" rIns="0" tIns="0" bIns="0" anchor="t">
+          <a:bodyPr wrap="square" lIns="0" tIns="0" rIns="0" bIns="0" anchor="t">
             <a:spAutoFit/>
           </a:bodyPr>
           <a:lstStyle/>
@@ -23456,7 +24447,7 @@
           <a:noFill/>
         </p:spPr>
         <p:txBody>
-          <a:bodyPr wrap="square" lIns="0" rIns="0" tIns="0" bIns="0" anchor="t">
+          <a:bodyPr wrap="square" lIns="0" tIns="0" rIns="0" bIns="0" anchor="t">
             <a:spAutoFit/>
           </a:bodyPr>
           <a:lstStyle/>
@@ -23491,7 +24482,7 @@
           <a:noFill/>
         </p:spPr>
         <p:txBody>
-          <a:bodyPr wrap="square" lIns="0" rIns="0" tIns="0" bIns="0" anchor="t">
+          <a:bodyPr wrap="square" lIns="0" tIns="0" rIns="0" bIns="0" anchor="t">
             <a:spAutoFit/>
           </a:bodyPr>
           <a:lstStyle/>
@@ -23526,7 +24517,7 @@
           <a:noFill/>
         </p:spPr>
         <p:txBody>
-          <a:bodyPr wrap="square" lIns="0" rIns="0" tIns="0" bIns="0" anchor="t">
+          <a:bodyPr wrap="square" lIns="0" tIns="0" rIns="0" bIns="0" anchor="t">
             <a:spAutoFit/>
           </a:bodyPr>
           <a:lstStyle/>
@@ -23561,7 +24552,7 @@
           <a:noFill/>
         </p:spPr>
         <p:txBody>
-          <a:bodyPr wrap="square" lIns="0" rIns="0" tIns="0" bIns="0" anchor="t">
+          <a:bodyPr wrap="square" lIns="0" tIns="0" rIns="0" bIns="0" anchor="t">
             <a:spAutoFit/>
           </a:bodyPr>
           <a:lstStyle/>
@@ -23596,7 +24587,7 @@
           <a:noFill/>
         </p:spPr>
         <p:txBody>
-          <a:bodyPr wrap="square" lIns="0" rIns="0" tIns="0" bIns="0" anchor="t">
+          <a:bodyPr wrap="square" lIns="0" tIns="0" rIns="0" bIns="0" anchor="t">
             <a:spAutoFit/>
           </a:bodyPr>
           <a:lstStyle/>
@@ -23631,7 +24622,7 @@
           <a:noFill/>
         </p:spPr>
         <p:txBody>
-          <a:bodyPr wrap="square" lIns="0" rIns="0" tIns="0" bIns="0" anchor="t">
+          <a:bodyPr wrap="square" lIns="0" tIns="0" rIns="0" bIns="0" anchor="t">
             <a:spAutoFit/>
           </a:bodyPr>
           <a:lstStyle/>
@@ -23666,7 +24657,7 @@
           <a:noFill/>
         </p:spPr>
         <p:txBody>
-          <a:bodyPr wrap="square" lIns="0" rIns="0" tIns="0" bIns="0" anchor="t">
+          <a:bodyPr wrap="square" lIns="0" tIns="0" rIns="0" bIns="0" anchor="t">
             <a:spAutoFit/>
           </a:bodyPr>
           <a:lstStyle/>
@@ -23701,7 +24692,7 @@
           <a:noFill/>
         </p:spPr>
         <p:txBody>
-          <a:bodyPr wrap="square" lIns="0" rIns="0" tIns="0" bIns="0" anchor="t">
+          <a:bodyPr wrap="square" lIns="0" tIns="0" rIns="0" bIns="0" anchor="t">
             <a:spAutoFit/>
           </a:bodyPr>
           <a:lstStyle/>
@@ -23760,6 +24751,7 @@
           <a:lstStyle/>
           <a:p>
             <a:pPr algn="ctr"/>
+            <a:endParaRPr/>
           </a:p>
         </p:txBody>
       </p:sp>
@@ -23780,7 +24772,7 @@
           <a:noFill/>
         </p:spPr>
         <p:txBody>
-          <a:bodyPr wrap="square" lIns="0" rIns="0" tIns="0" bIns="0" anchor="ctr">
+          <a:bodyPr wrap="square" lIns="0" tIns="0" rIns="0" bIns="0" anchor="ctr">
             <a:spAutoFit/>
           </a:bodyPr>
           <a:lstStyle/>
@@ -23815,7 +24807,7 @@
           <a:noFill/>
         </p:spPr>
         <p:txBody>
-          <a:bodyPr wrap="square" lIns="0" rIns="0" tIns="0" bIns="0" anchor="t">
+          <a:bodyPr wrap="square" lIns="0" tIns="0" rIns="0" bIns="0" anchor="t">
             <a:spAutoFit/>
           </a:bodyPr>
           <a:lstStyle/>
@@ -23850,7 +24842,7 @@
           <a:noFill/>
         </p:spPr>
         <p:txBody>
-          <a:bodyPr wrap="square" lIns="0" rIns="0" tIns="0" bIns="0" anchor="t">
+          <a:bodyPr wrap="square" lIns="0" tIns="0" rIns="0" bIns="0" anchor="t">
             <a:spAutoFit/>
           </a:bodyPr>
           <a:lstStyle/>
@@ -23877,7 +24869,7 @@
 </file>
 
 <file path=ppt/slides/slide8.xml><?xml version="1.0" encoding="utf-8"?>
-<p:sld xmlns:a="http://schemas.openxmlformats.org/drawingml/2006/main" xmlns:p="http://schemas.openxmlformats.org/presentationml/2006/main" xmlns:r="http://schemas.openxmlformats.org/officeDocument/2006/relationships">
+<p:sld xmlns:a="http://schemas.openxmlformats.org/drawingml/2006/main" xmlns:r="http://schemas.openxmlformats.org/officeDocument/2006/relationships" xmlns:p="http://schemas.openxmlformats.org/presentationml/2006/main">
   <p:cSld>
     <p:bg>
       <p:bgPr>
@@ -23893,7 +24885,14 @@
         <p:cNvGrpSpPr/>
         <p:nvPr/>
       </p:nvGrpSpPr>
-      <p:grpSpPr/>
+      <p:grpSpPr>
+        <a:xfrm>
+          <a:off x="0" y="0"/>
+          <a:ext cx="0" cy="0"/>
+          <a:chOff x="0" y="0"/>
+          <a:chExt cx="0" cy="0"/>
+        </a:xfrm>
+      </p:grpSpPr>
       <p:sp>
         <p:nvSpPr>
           <p:cNvPr id="2" name="TextBox 1"/>
@@ -23911,7 +24910,7 @@
           <a:noFill/>
         </p:spPr>
         <p:txBody>
-          <a:bodyPr wrap="square" lIns="0" rIns="0" tIns="0" bIns="0" anchor="t">
+          <a:bodyPr wrap="square" lIns="0" tIns="0" rIns="0" bIns="0" anchor="t">
             <a:spAutoFit/>
           </a:bodyPr>
           <a:lstStyle/>
@@ -23946,7 +24945,7 @@
           <a:noFill/>
         </p:spPr>
         <p:txBody>
-          <a:bodyPr wrap="square" lIns="0" rIns="0" tIns="0" bIns="0" anchor="t">
+          <a:bodyPr wrap="square" lIns="0" tIns="0" rIns="0" bIns="0" anchor="t">
             <a:spAutoFit/>
           </a:bodyPr>
           <a:lstStyle/>
@@ -23981,7 +24980,7 @@
           <a:noFill/>
         </p:spPr>
         <p:txBody>
-          <a:bodyPr wrap="square" lIns="0" rIns="0" tIns="0" bIns="0" anchor="t">
+          <a:bodyPr wrap="square" lIns="0" tIns="0" rIns="0" bIns="0" anchor="t">
             <a:spAutoFit/>
           </a:bodyPr>
           <a:lstStyle/>
@@ -24042,6 +25041,7 @@
           <a:lstStyle/>
           <a:p>
             <a:pPr algn="ctr"/>
+            <a:endParaRPr/>
           </a:p>
         </p:txBody>
       </p:sp>
@@ -24086,6 +25086,7 @@
           <a:lstStyle/>
           <a:p>
             <a:pPr algn="ctr"/>
+            <a:endParaRPr/>
           </a:p>
         </p:txBody>
       </p:sp>
@@ -24106,7 +25107,7 @@
           <a:noFill/>
         </p:spPr>
         <p:txBody>
-          <a:bodyPr wrap="square" lIns="0" rIns="0" tIns="0" bIns="0" anchor="t">
+          <a:bodyPr wrap="square" lIns="0" tIns="0" rIns="0" bIns="0" anchor="t">
             <a:spAutoFit/>
           </a:bodyPr>
           <a:lstStyle/>
@@ -24141,7 +25142,7 @@
           <a:noFill/>
         </p:spPr>
         <p:txBody>
-          <a:bodyPr wrap="square" lIns="0" rIns="0" tIns="0" bIns="0" anchor="t">
+          <a:bodyPr wrap="square" lIns="0" tIns="0" rIns="0" bIns="0" anchor="t">
             <a:spAutoFit/>
           </a:bodyPr>
           <a:lstStyle/>
@@ -24176,7 +25177,7 @@
           <a:noFill/>
         </p:spPr>
         <p:txBody>
-          <a:bodyPr wrap="square" lIns="0" rIns="0" tIns="0" bIns="0" anchor="t">
+          <a:bodyPr wrap="square" lIns="0" tIns="0" rIns="0" bIns="0" anchor="t">
             <a:spAutoFit/>
           </a:bodyPr>
           <a:lstStyle/>
@@ -24211,7 +25212,7 @@
           <a:noFill/>
         </p:spPr>
         <p:txBody>
-          <a:bodyPr wrap="square" lIns="0" rIns="0" tIns="0" bIns="0" anchor="t">
+          <a:bodyPr wrap="square" lIns="0" tIns="0" rIns="0" bIns="0" anchor="t">
             <a:spAutoFit/>
           </a:bodyPr>
           <a:lstStyle/>
@@ -24246,7 +25247,7 @@
           <a:noFill/>
         </p:spPr>
         <p:txBody>
-          <a:bodyPr wrap="square" lIns="0" rIns="0" tIns="0" bIns="0" anchor="t">
+          <a:bodyPr wrap="square" lIns="0" tIns="0" rIns="0" bIns="0" anchor="t">
             <a:spAutoFit/>
           </a:bodyPr>
           <a:lstStyle/>
@@ -24307,6 +25308,7 @@
           <a:lstStyle/>
           <a:p>
             <a:pPr algn="ctr"/>
+            <a:endParaRPr/>
           </a:p>
         </p:txBody>
       </p:sp>
@@ -24351,6 +25353,7 @@
           <a:lstStyle/>
           <a:p>
             <a:pPr algn="ctr"/>
+            <a:endParaRPr/>
           </a:p>
         </p:txBody>
       </p:sp>
@@ -24371,7 +25374,7 @@
           <a:noFill/>
         </p:spPr>
         <p:txBody>
-          <a:bodyPr wrap="square" lIns="0" rIns="0" tIns="0" bIns="0" anchor="t">
+          <a:bodyPr wrap="square" lIns="0" tIns="0" rIns="0" bIns="0" anchor="t">
             <a:spAutoFit/>
           </a:bodyPr>
           <a:lstStyle/>
@@ -24406,7 +25409,7 @@
           <a:noFill/>
         </p:spPr>
         <p:txBody>
-          <a:bodyPr wrap="square" lIns="0" rIns="0" tIns="0" bIns="0" anchor="t">
+          <a:bodyPr wrap="square" lIns="0" tIns="0" rIns="0" bIns="0" anchor="t">
             <a:spAutoFit/>
           </a:bodyPr>
           <a:lstStyle/>
@@ -24441,7 +25444,7 @@
           <a:noFill/>
         </p:spPr>
         <p:txBody>
-          <a:bodyPr wrap="square" lIns="0" rIns="0" tIns="0" bIns="0" anchor="t">
+          <a:bodyPr wrap="square" lIns="0" tIns="0" rIns="0" bIns="0" anchor="t">
             <a:spAutoFit/>
           </a:bodyPr>
           <a:lstStyle/>
@@ -24476,7 +25479,7 @@
           <a:noFill/>
         </p:spPr>
         <p:txBody>
-          <a:bodyPr wrap="square" lIns="0" rIns="0" tIns="0" bIns="0" anchor="t">
+          <a:bodyPr wrap="square" lIns="0" tIns="0" rIns="0" bIns="0" anchor="t">
             <a:spAutoFit/>
           </a:bodyPr>
           <a:lstStyle/>
@@ -24511,7 +25514,7 @@
           <a:noFill/>
         </p:spPr>
         <p:txBody>
-          <a:bodyPr wrap="square" lIns="0" rIns="0" tIns="0" bIns="0" anchor="t">
+          <a:bodyPr wrap="square" lIns="0" tIns="0" rIns="0" bIns="0" anchor="t">
             <a:spAutoFit/>
           </a:bodyPr>
           <a:lstStyle/>
@@ -24572,6 +25575,7 @@
           <a:lstStyle/>
           <a:p>
             <a:pPr algn="ctr"/>
+            <a:endParaRPr/>
           </a:p>
         </p:txBody>
       </p:sp>
@@ -24616,6 +25620,7 @@
           <a:lstStyle/>
           <a:p>
             <a:pPr algn="ctr"/>
+            <a:endParaRPr/>
           </a:p>
         </p:txBody>
       </p:sp>
@@ -24636,7 +25641,7 @@
           <a:noFill/>
         </p:spPr>
         <p:txBody>
-          <a:bodyPr wrap="square" lIns="0" rIns="0" tIns="0" bIns="0" anchor="t">
+          <a:bodyPr wrap="square" lIns="0" tIns="0" rIns="0" bIns="0" anchor="t">
             <a:spAutoFit/>
           </a:bodyPr>
           <a:lstStyle/>
@@ -24671,7 +25676,7 @@
           <a:noFill/>
         </p:spPr>
         <p:txBody>
-          <a:bodyPr wrap="square" lIns="0" rIns="0" tIns="0" bIns="0" anchor="t">
+          <a:bodyPr wrap="square" lIns="0" tIns="0" rIns="0" bIns="0" anchor="t">
             <a:spAutoFit/>
           </a:bodyPr>
           <a:lstStyle/>
@@ -24706,7 +25711,7 @@
           <a:noFill/>
         </p:spPr>
         <p:txBody>
-          <a:bodyPr wrap="square" lIns="0" rIns="0" tIns="0" bIns="0" anchor="t">
+          <a:bodyPr wrap="square" lIns="0" tIns="0" rIns="0" bIns="0" anchor="t">
             <a:spAutoFit/>
           </a:bodyPr>
           <a:lstStyle/>
@@ -24741,7 +25746,7 @@
           <a:noFill/>
         </p:spPr>
         <p:txBody>
-          <a:bodyPr wrap="square" lIns="0" rIns="0" tIns="0" bIns="0" anchor="t">
+          <a:bodyPr wrap="square" lIns="0" tIns="0" rIns="0" bIns="0" anchor="t">
             <a:spAutoFit/>
           </a:bodyPr>
           <a:lstStyle/>
@@ -24776,7 +25781,7 @@
           <a:noFill/>
         </p:spPr>
         <p:txBody>
-          <a:bodyPr wrap="square" lIns="0" rIns="0" tIns="0" bIns="0" anchor="t">
+          <a:bodyPr wrap="square" lIns="0" tIns="0" rIns="0" bIns="0" anchor="t">
             <a:spAutoFit/>
           </a:bodyPr>
           <a:lstStyle/>
@@ -24837,6 +25842,7 @@
           <a:lstStyle/>
           <a:p>
             <a:pPr algn="ctr"/>
+            <a:endParaRPr/>
           </a:p>
         </p:txBody>
       </p:sp>
@@ -24881,6 +25887,7 @@
           <a:lstStyle/>
           <a:p>
             <a:pPr algn="ctr"/>
+            <a:endParaRPr/>
           </a:p>
         </p:txBody>
       </p:sp>
@@ -24901,7 +25908,7 @@
           <a:noFill/>
         </p:spPr>
         <p:txBody>
-          <a:bodyPr wrap="square" lIns="0" rIns="0" tIns="0" bIns="0" anchor="t">
+          <a:bodyPr wrap="square" lIns="0" tIns="0" rIns="0" bIns="0" anchor="t">
             <a:spAutoFit/>
           </a:bodyPr>
           <a:lstStyle/>
@@ -24936,7 +25943,7 @@
           <a:noFill/>
         </p:spPr>
         <p:txBody>
-          <a:bodyPr wrap="square" lIns="0" rIns="0" tIns="0" bIns="0" anchor="t">
+          <a:bodyPr wrap="square" lIns="0" tIns="0" rIns="0" bIns="0" anchor="t">
             <a:spAutoFit/>
           </a:bodyPr>
           <a:lstStyle/>
@@ -24971,7 +25978,7 @@
           <a:noFill/>
         </p:spPr>
         <p:txBody>
-          <a:bodyPr wrap="square" lIns="0" rIns="0" tIns="0" bIns="0" anchor="t">
+          <a:bodyPr wrap="square" lIns="0" tIns="0" rIns="0" bIns="0" anchor="t">
             <a:spAutoFit/>
           </a:bodyPr>
           <a:lstStyle/>
@@ -25006,7 +26013,7 @@
           <a:noFill/>
         </p:spPr>
         <p:txBody>
-          <a:bodyPr wrap="square" lIns="0" rIns="0" tIns="0" bIns="0" anchor="t">
+          <a:bodyPr wrap="square" lIns="0" tIns="0" rIns="0" bIns="0" anchor="t">
             <a:spAutoFit/>
           </a:bodyPr>
           <a:lstStyle/>
@@ -25041,7 +26048,7 @@
           <a:noFill/>
         </p:spPr>
         <p:txBody>
-          <a:bodyPr wrap="square" lIns="0" rIns="0" tIns="0" bIns="0" anchor="t">
+          <a:bodyPr wrap="square" lIns="0" tIns="0" rIns="0" bIns="0" anchor="t">
             <a:spAutoFit/>
           </a:bodyPr>
           <a:lstStyle/>
@@ -25076,7 +26083,7 @@
           <a:noFill/>
         </p:spPr>
         <p:txBody>
-          <a:bodyPr wrap="square" lIns="0" rIns="0" tIns="0" bIns="0" anchor="t">
+          <a:bodyPr wrap="square" lIns="0" tIns="0" rIns="0" bIns="0" anchor="t">
             <a:spAutoFit/>
           </a:bodyPr>
           <a:lstStyle/>
@@ -25111,7 +26118,7 @@
           <a:noFill/>
         </p:spPr>
         <p:txBody>
-          <a:bodyPr wrap="square" lIns="0" rIns="0" tIns="0" bIns="0" anchor="t">
+          <a:bodyPr wrap="square" lIns="0" tIns="0" rIns="0" bIns="0" anchor="t">
             <a:spAutoFit/>
           </a:bodyPr>
           <a:lstStyle/>
@@ -25146,7 +26153,7 @@
           <a:noFill/>
         </p:spPr>
         <p:txBody>
-          <a:bodyPr wrap="square" lIns="0" rIns="0" tIns="0" bIns="0" anchor="t">
+          <a:bodyPr wrap="square" lIns="0" tIns="0" rIns="0" bIns="0" anchor="t">
             <a:spAutoFit/>
           </a:bodyPr>
           <a:lstStyle/>
@@ -25173,7 +26180,7 @@
 </file>
 
 <file path=ppt/slides/slide9.xml><?xml version="1.0" encoding="utf-8"?>
-<p:sld xmlns:a="http://schemas.openxmlformats.org/drawingml/2006/main" xmlns:p="http://schemas.openxmlformats.org/presentationml/2006/main" xmlns:r="http://schemas.openxmlformats.org/officeDocument/2006/relationships">
+<p:sld xmlns:a="http://schemas.openxmlformats.org/drawingml/2006/main" xmlns:r="http://schemas.openxmlformats.org/officeDocument/2006/relationships" xmlns:p="http://schemas.openxmlformats.org/presentationml/2006/main">
   <p:cSld>
     <p:bg>
       <p:bgPr>
@@ -25189,7 +26196,14 @@
         <p:cNvGrpSpPr/>
         <p:nvPr/>
       </p:nvGrpSpPr>
-      <p:grpSpPr/>
+      <p:grpSpPr>
+        <a:xfrm>
+          <a:off x="0" y="0"/>
+          <a:ext cx="0" cy="0"/>
+          <a:chOff x="0" y="0"/>
+          <a:chExt cx="0" cy="0"/>
+        </a:xfrm>
+      </p:grpSpPr>
       <p:sp>
         <p:nvSpPr>
           <p:cNvPr id="2" name="TextBox 1"/>
@@ -25207,7 +26221,7 @@
           <a:noFill/>
         </p:spPr>
         <p:txBody>
-          <a:bodyPr wrap="square" lIns="0" rIns="0" tIns="0" bIns="0" anchor="t">
+          <a:bodyPr wrap="square" lIns="0" tIns="0" rIns="0" bIns="0" anchor="t">
             <a:spAutoFit/>
           </a:bodyPr>
           <a:lstStyle/>
@@ -25242,7 +26256,7 @@
           <a:noFill/>
         </p:spPr>
         <p:txBody>
-          <a:bodyPr wrap="square" lIns="0" rIns="0" tIns="0" bIns="0" anchor="t">
+          <a:bodyPr wrap="square" lIns="0" tIns="0" rIns="0" bIns="0" anchor="t">
             <a:spAutoFit/>
           </a:bodyPr>
           <a:lstStyle/>
@@ -25277,7 +26291,7 @@
           <a:noFill/>
         </p:spPr>
         <p:txBody>
-          <a:bodyPr wrap="square" lIns="0" rIns="0" tIns="0" bIns="0" anchor="t">
+          <a:bodyPr wrap="square" lIns="0" tIns="0" rIns="0" bIns="0" anchor="t">
             <a:spAutoFit/>
           </a:bodyPr>
           <a:lstStyle/>
@@ -25338,6 +26352,7 @@
           <a:lstStyle/>
           <a:p>
             <a:pPr algn="ctr"/>
+            <a:endParaRPr/>
           </a:p>
         </p:txBody>
       </p:sp>
@@ -25382,6 +26397,7 @@
           <a:lstStyle/>
           <a:p>
             <a:pPr algn="ctr"/>
+            <a:endParaRPr/>
           </a:p>
         </p:txBody>
       </p:sp>
@@ -25402,7 +26418,7 @@
           <a:noFill/>
         </p:spPr>
         <p:txBody>
-          <a:bodyPr wrap="square" lIns="0" rIns="0" tIns="0" bIns="0" anchor="ctr">
+          <a:bodyPr wrap="square" lIns="0" tIns="0" rIns="0" bIns="0" anchor="ctr">
             <a:spAutoFit/>
           </a:bodyPr>
           <a:lstStyle/>
@@ -25437,7 +26453,7 @@
           <a:noFill/>
         </p:spPr>
         <p:txBody>
-          <a:bodyPr wrap="square" lIns="0" rIns="0" tIns="0" bIns="0" anchor="t">
+          <a:bodyPr wrap="square" lIns="0" tIns="0" rIns="0" bIns="0" anchor="t">
             <a:spAutoFit/>
           </a:bodyPr>
           <a:lstStyle/>
@@ -25472,7 +26488,7 @@
           <a:noFill/>
         </p:spPr>
         <p:txBody>
-          <a:bodyPr wrap="square" lIns="0" rIns="0" tIns="0" bIns="0" anchor="t">
+          <a:bodyPr wrap="square" lIns="0" tIns="0" rIns="0" bIns="0" anchor="t">
             <a:spAutoFit/>
           </a:bodyPr>
           <a:lstStyle/>
@@ -25605,6 +26621,7 @@
           <a:lstStyle/>
           <a:p>
             <a:pPr algn="ctr"/>
+            <a:endParaRPr/>
           </a:p>
         </p:txBody>
       </p:sp>
@@ -25649,6 +26666,7 @@
           <a:lstStyle/>
           <a:p>
             <a:pPr algn="ctr"/>
+            <a:endParaRPr/>
           </a:p>
         </p:txBody>
       </p:sp>
@@ -25669,7 +26687,7 @@
           <a:noFill/>
         </p:spPr>
         <p:txBody>
-          <a:bodyPr wrap="square" lIns="0" rIns="0" tIns="0" bIns="0" anchor="ctr">
+          <a:bodyPr wrap="square" lIns="0" tIns="0" rIns="0" bIns="0" anchor="ctr">
             <a:spAutoFit/>
           </a:bodyPr>
           <a:lstStyle/>
@@ -25704,7 +26722,7 @@
           <a:noFill/>
         </p:spPr>
         <p:txBody>
-          <a:bodyPr wrap="square" lIns="0" rIns="0" tIns="0" bIns="0" anchor="t">
+          <a:bodyPr wrap="square" lIns="0" tIns="0" rIns="0" bIns="0" anchor="t">
             <a:spAutoFit/>
           </a:bodyPr>
           <a:lstStyle/>
@@ -25739,7 +26757,7 @@
           <a:noFill/>
         </p:spPr>
         <p:txBody>
-          <a:bodyPr wrap="square" lIns="0" rIns="0" tIns="0" bIns="0" anchor="t">
+          <a:bodyPr wrap="square" lIns="0" tIns="0" rIns="0" bIns="0" anchor="t">
             <a:spAutoFit/>
           </a:bodyPr>
           <a:lstStyle/>
@@ -25843,7 +26861,7 @@
           <a:noFill/>
         </p:spPr>
         <p:txBody>
-          <a:bodyPr wrap="square" lIns="0" rIns="0" tIns="0" bIns="0" anchor="t">
+          <a:bodyPr wrap="square" lIns="0" tIns="0" rIns="0" bIns="0" anchor="t">
             <a:spAutoFit/>
           </a:bodyPr>
           <a:lstStyle/>
@@ -25878,7 +26896,7 @@
           <a:noFill/>
         </p:spPr>
         <p:txBody>
-          <a:bodyPr wrap="square" lIns="0" rIns="0" tIns="0" bIns="0" anchor="t">
+          <a:bodyPr wrap="square" lIns="0" tIns="0" rIns="0" bIns="0" anchor="t">
             <a:spAutoFit/>
           </a:bodyPr>
           <a:lstStyle/>
@@ -25913,7 +26931,7 @@
           <a:noFill/>
         </p:spPr>
         <p:txBody>
-          <a:bodyPr wrap="square" lIns="0" rIns="0" tIns="0" bIns="0" anchor="t">
+          <a:bodyPr wrap="square" lIns="0" tIns="0" rIns="0" bIns="0" anchor="t">
             <a:spAutoFit/>
           </a:bodyPr>
           <a:lstStyle/>
